--- a/results/meeting_deck_2026-09-24/0924_track1_story.pptx
+++ b/results/meeting_deck_2026-09-24/0924_track1_story.pptx
@@ -20,6 +20,12 @@
     <p:sldId id="265" r:id="rId18"/>
     <p:sldId id="266" r:id="rId8"/>
     <p:sldId id="267" r:id="rId7"/>
+    <p:sldId id="268" r:id="rId6"/>
+    <p:sldId id="269" r:id="rId5"/>
+    <p:sldId id="270" r:id="rId4"/>
+    <p:sldId id="271" r:id="rId3"/>
+    <p:sldId id="272" r:id="rId2"/>
+    <p:sldId id="273" r:id="rId26"/>
   </p:sldIdLst>
   <p:sldSz cx="12192000" cy="6858000"/>
   <p:notesSz cx="6858000" cy="9144000"/>
@@ -601,7 +607,7 @@
           <a:lstStyle/>
           <a:p>
             <a:r>
-              <a:t>This is the piece the written doc calls the sampling argument. It is the bridge from the motivation to the method, and it explains why one extra measurement is both necessary and sufficient in principle.</a:t>
+              <a:t>The file is not wrong; it is blind in a specific way. Our GUP reproduces the vendor's own full-swing waveform - that is how it was built - and the endpoints are all the full swing constrains.</a:t>
             </a:r>
           </a:p>
         </p:txBody>
@@ -671,7 +677,7 @@
           <a:lstStyle/>
           <a:p>
             <a:r>
-              <a:t>Deliberately short. The user's own feedback was that the method needs a proper walkthrough rather than a circuit diagram and a ramp; that is the next piece of work, and docs/track1_recipe.md carries the full procedure meanwhile.</a:t>
+              <a:t>Grey is the full transition. The five coloured curves follow it and peel off at different points. This is the justification for asking the user for one stressed pad run, and for the 50-90 percent depth ladder.</a:t>
             </a:r>
           </a:p>
         </p:txBody>
@@ -697,6 +703,426 @@
 </file>
 
 <file path=ppt/notesSlides/notesSlide12.xml><?xml version="1.0" encoding="utf-8"?>
+<p:notes xmlns:a="http://schemas.openxmlformats.org/drawingml/2006/main" xmlns:p="http://schemas.openxmlformats.org/presentationml/2006/main" xmlns:r="http://schemas.openxmlformats.org/officeDocument/2006/relationships">
+  <p:cSld>
+    <p:spTree>
+      <p:nvGrpSpPr>
+        <p:cNvPr id="1" name=""/>
+        <p:cNvGrpSpPr/>
+        <p:nvPr/>
+      </p:nvGrpSpPr>
+      <p:grpSpPr>
+        <a:xfrm>
+          <a:off x="0" y="0"/>
+          <a:ext cx="0" cy="0"/>
+          <a:chOff x="0" y="0"/>
+          <a:chExt cx="0" cy="0"/>
+        </a:xfrm>
+      </p:grpSpPr>
+      <p:sp>
+        <p:nvSpPr>
+          <p:cNvPr id="2" name="Slide Image Placeholder 1"/>
+          <p:cNvSpPr>
+            <a:spLocks noGrp="1"/>
+          </p:cNvSpPr>
+          <p:nvPr>
+            <p:ph type="sldImg" idx="2"/>
+          </p:nvPr>
+        </p:nvSpPr>
+        <p:spPr/>
+      </p:sp>
+      <p:sp>
+        <p:nvSpPr>
+          <p:cNvPr id="3" name="Notes Placeholder 2"/>
+          <p:cNvSpPr>
+            <a:spLocks noGrp="1"/>
+          </p:cNvSpPr>
+          <p:nvPr>
+            <p:ph type="body" idx="3" sz="quarter"/>
+          </p:nvPr>
+        </p:nvSpPr>
+        <p:spPr/>
+        <p:txBody>
+          <a:bodyPr/>
+          <a:lstStyle/>
+          <a:p>
+            <a:r>
+              <a:t>This rules out RC cascades, delay-plus-RC and superposition - which is what the shipped model is built from. Data: predriver_stages_2026-09-09, whose own module computes the superposition.</a:t>
+            </a:r>
+          </a:p>
+        </p:txBody>
+      </p:sp>
+      <p:sp>
+        <p:nvSpPr>
+          <p:cNvPr id="4" name="Slide Number Placeholder 3"/>
+          <p:cNvSpPr>
+            <a:spLocks noGrp="1"/>
+          </p:cNvSpPr>
+          <p:nvPr>
+            <p:ph type="sldNum" idx="5" sz="quarter"/>
+          </p:nvPr>
+        </p:nvSpPr>
+        <p:spPr/>
+      </p:sp>
+    </p:spTree>
+  </p:cSld>
+  <p:clrMapOvr>
+    <a:masterClrMapping/>
+  </p:clrMapOvr>
+</p:notes>
+</file>
+
+<file path=ppt/notesSlides/notesSlide13.xml><?xml version="1.0" encoding="utf-8"?>
+<p:notes xmlns:a="http://schemas.openxmlformats.org/drawingml/2006/main" xmlns:p="http://schemas.openxmlformats.org/presentationml/2006/main" xmlns:r="http://schemas.openxmlformats.org/officeDocument/2006/relationships">
+  <p:cSld>
+    <p:spTree>
+      <p:nvGrpSpPr>
+        <p:cNvPr id="1" name=""/>
+        <p:cNvGrpSpPr/>
+        <p:nvPr/>
+      </p:nvGrpSpPr>
+      <p:grpSpPr>
+        <a:xfrm>
+          <a:off x="0" y="0"/>
+          <a:ext cx="0" cy="0"/>
+          <a:chOff x="0" y="0"/>
+          <a:chExt cx="0" cy="0"/>
+        </a:xfrm>
+      </p:grpSpPr>
+      <p:sp>
+        <p:nvSpPr>
+          <p:cNvPr id="2" name="Slide Image Placeholder 1"/>
+          <p:cNvSpPr>
+            <a:spLocks noGrp="1"/>
+          </p:cNvSpPr>
+          <p:nvPr>
+            <p:ph type="sldImg" idx="2"/>
+          </p:nvPr>
+        </p:nvSpPr>
+        <p:spPr/>
+      </p:sp>
+      <p:sp>
+        <p:nvSpPr>
+          <p:cNvPr id="3" name="Notes Placeholder 2"/>
+          <p:cNvSpPr>
+            <a:spLocks noGrp="1"/>
+          </p:cNvSpPr>
+          <p:nvPr>
+            <p:ph type="body" idx="3" sz="quarter"/>
+          </p:nvPr>
+        </p:nvSpPr>
+        <p:spPr/>
+        <p:txBody>
+          <a:bodyPr/>
+          <a:lstStyle/>
+          <a:p>
+            <a:r>
+              <a:t>The four are not free knobs: each names something the circuit has. x_lin is pinned at 0.45 on most buffers, inside the 0.37-0.63 the real probed stages fitted. This slide answers 'what are the equations and where do the numbers come from'.</a:t>
+            </a:r>
+          </a:p>
+        </p:txBody>
+      </p:sp>
+      <p:sp>
+        <p:nvSpPr>
+          <p:cNvPr id="4" name="Slide Number Placeholder 3"/>
+          <p:cNvSpPr>
+            <a:spLocks noGrp="1"/>
+          </p:cNvSpPr>
+          <p:nvPr>
+            <p:ph type="sldNum" idx="5" sz="quarter"/>
+          </p:nvPr>
+        </p:nvSpPr>
+        <p:spPr/>
+      </p:sp>
+    </p:spTree>
+  </p:cSld>
+  <p:clrMapOvr>
+    <a:masterClrMapping/>
+  </p:clrMapOvr>
+</p:notes>
+</file>
+
+<file path=ppt/notesSlides/notesSlide14.xml><?xml version="1.0" encoding="utf-8"?>
+<p:notes xmlns:a="http://schemas.openxmlformats.org/drawingml/2006/main" xmlns:p="http://schemas.openxmlformats.org/presentationml/2006/main" xmlns:r="http://schemas.openxmlformats.org/officeDocument/2006/relationships">
+  <p:cSld>
+    <p:spTree>
+      <p:nvGrpSpPr>
+        <p:cNvPr id="1" name=""/>
+        <p:cNvGrpSpPr/>
+        <p:nvPr/>
+      </p:nvGrpSpPr>
+      <p:grpSpPr>
+        <a:xfrm>
+          <a:off x="0" y="0"/>
+          <a:ext cx="0" cy="0"/>
+          <a:chOff x="0" y="0"/>
+          <a:chExt cx="0" cy="0"/>
+        </a:xfrm>
+      </p:grpSpPr>
+      <p:sp>
+        <p:nvSpPr>
+          <p:cNvPr id="2" name="Slide Image Placeholder 1"/>
+          <p:cNvSpPr>
+            <a:spLocks noGrp="1"/>
+          </p:cNvSpPr>
+          <p:nvPr>
+            <p:ph type="sldImg" idx="2"/>
+          </p:nvPr>
+        </p:nvSpPr>
+        <p:spPr/>
+      </p:sp>
+      <p:sp>
+        <p:nvSpPr>
+          <p:cNvPr id="3" name="Notes Placeholder 2"/>
+          <p:cNvSpPr>
+            <a:spLocks noGrp="1"/>
+          </p:cNvSpPr>
+          <p:nvPr>
+            <p:ph type="body" idx="3" sz="quarter"/>
+          </p:nvPr>
+        </p:nvSpPr>
+        <p:spPr/>
+        <p:txBody>
+          <a:bodyPr/>
+          <a:lstStyle/>
+          <a:p>
+            <a:r>
+              <a:t>The map here is the two-parameter MOSFET-shaped curve, not the measured one: track 1 has no probe. Its shape is one of the two things the stressed run selects.</a:t>
+            </a:r>
+          </a:p>
+        </p:txBody>
+      </p:sp>
+      <p:sp>
+        <p:nvSpPr>
+          <p:cNvPr id="4" name="Slide Number Placeholder 3"/>
+          <p:cNvSpPr>
+            <a:spLocks noGrp="1"/>
+          </p:cNvSpPr>
+          <p:nvPr>
+            <p:ph type="sldNum" idx="5" sz="quarter"/>
+          </p:nvPr>
+        </p:nvSpPr>
+        <p:spPr/>
+      </p:sp>
+    </p:spTree>
+  </p:cSld>
+  <p:clrMapOvr>
+    <a:masterClrMapping/>
+  </p:clrMapOvr>
+</p:notes>
+</file>
+
+<file path=ppt/notesSlides/notesSlide15.xml><?xml version="1.0" encoding="utf-8"?>
+<p:notes xmlns:a="http://schemas.openxmlformats.org/drawingml/2006/main" xmlns:p="http://schemas.openxmlformats.org/presentationml/2006/main" xmlns:r="http://schemas.openxmlformats.org/officeDocument/2006/relationships">
+  <p:cSld>
+    <p:spTree>
+      <p:nvGrpSpPr>
+        <p:cNvPr id="1" name=""/>
+        <p:cNvGrpSpPr/>
+        <p:nvPr/>
+      </p:nvGrpSpPr>
+      <p:grpSpPr>
+        <a:xfrm>
+          <a:off x="0" y="0"/>
+          <a:ext cx="0" cy="0"/>
+          <a:chOff x="0" y="0"/>
+          <a:chExt cx="0" cy="0"/>
+        </a:xfrm>
+      </p:grpSpPr>
+      <p:sp>
+        <p:nvSpPr>
+          <p:cNvPr id="2" name="Slide Image Placeholder 1"/>
+          <p:cNvSpPr>
+            <a:spLocks noGrp="1"/>
+          </p:cNvSpPr>
+          <p:nvPr>
+            <p:ph type="sldImg" idx="2"/>
+          </p:nvPr>
+        </p:nvSpPr>
+        <p:spPr/>
+      </p:sp>
+      <p:sp>
+        <p:nvSpPr>
+          <p:cNvPr id="3" name="Notes Placeholder 2"/>
+          <p:cNvSpPr>
+            <a:spLocks noGrp="1"/>
+          </p:cNvSpPr>
+          <p:nvPr>
+            <p:ph type="body" idx="3" sz="quarter"/>
+          </p:nvPr>
+        </p:nvSpPr>
+        <p:spPr/>
+        <p:txBody>
+          <a:bodyPr/>
+          <a:lstStyle/>
+          <a:p>
+            <a:r>
+              <a:t>The peak point is the one that cost a night's work: ranking on the peak selects chains that turn on 155-300 ps late and hit the right height with the wrong pulse under it.</a:t>
+            </a:r>
+          </a:p>
+        </p:txBody>
+      </p:sp>
+      <p:sp>
+        <p:nvSpPr>
+          <p:cNvPr id="4" name="Slide Number Placeholder 3"/>
+          <p:cNvSpPr>
+            <a:spLocks noGrp="1"/>
+          </p:cNvSpPr>
+          <p:nvPr>
+            <p:ph type="sldNum" idx="5" sz="quarter"/>
+          </p:nvPr>
+        </p:nvSpPr>
+        <p:spPr/>
+      </p:sp>
+    </p:spTree>
+  </p:cSld>
+  <p:clrMapOvr>
+    <a:masterClrMapping/>
+  </p:clrMapOvr>
+</p:notes>
+</file>
+
+<file path=ppt/notesSlides/notesSlide16.xml><?xml version="1.0" encoding="utf-8"?>
+<p:notes xmlns:a="http://schemas.openxmlformats.org/drawingml/2006/main" xmlns:p="http://schemas.openxmlformats.org/presentationml/2006/main" xmlns:r="http://schemas.openxmlformats.org/officeDocument/2006/relationships">
+  <p:cSld>
+    <p:spTree>
+      <p:nvGrpSpPr>
+        <p:cNvPr id="1" name=""/>
+        <p:cNvGrpSpPr/>
+        <p:nvPr/>
+      </p:nvGrpSpPr>
+      <p:grpSpPr>
+        <a:xfrm>
+          <a:off x="0" y="0"/>
+          <a:ext cx="0" cy="0"/>
+          <a:chOff x="0" y="0"/>
+          <a:chExt cx="0" cy="0"/>
+        </a:xfrm>
+      </p:grpSpPr>
+      <p:sp>
+        <p:nvSpPr>
+          <p:cNvPr id="2" name="Slide Image Placeholder 1"/>
+          <p:cNvSpPr>
+            <a:spLocks noGrp="1"/>
+          </p:cNvSpPr>
+          <p:nvPr>
+            <p:ph type="sldImg" idx="2"/>
+          </p:nvPr>
+        </p:nvSpPr>
+        <p:spPr/>
+      </p:sp>
+      <p:sp>
+        <p:nvSpPr>
+          <p:cNvPr id="3" name="Notes Placeholder 2"/>
+          <p:cNvSpPr>
+            <a:spLocks noGrp="1"/>
+          </p:cNvSpPr>
+          <p:nvPr>
+            <p:ph type="body" idx="3" sz="quarter"/>
+          </p:nvPr>
+        </p:nvSpPr>
+        <p:spPr/>
+        <p:txBody>
+          <a:bodyPr/>
+          <a:lstStyle/>
+          <a:p>
+            <a:r>
+              <a:t>Grey is the shipped model, blue the build using probed silicon, red the file-only one. Full numbers in docs/track1_recipe.md.</a:t>
+            </a:r>
+          </a:p>
+        </p:txBody>
+      </p:sp>
+      <p:sp>
+        <p:nvSpPr>
+          <p:cNvPr id="4" name="Slide Number Placeholder 3"/>
+          <p:cNvSpPr>
+            <a:spLocks noGrp="1"/>
+          </p:cNvSpPr>
+          <p:nvPr>
+            <p:ph type="sldNum" idx="5" sz="quarter"/>
+          </p:nvPr>
+        </p:nvSpPr>
+        <p:spPr/>
+      </p:sp>
+    </p:spTree>
+  </p:cSld>
+  <p:clrMapOvr>
+    <a:masterClrMapping/>
+  </p:clrMapOvr>
+</p:notes>
+</file>
+
+<file path=ppt/notesSlides/notesSlide17.xml><?xml version="1.0" encoding="utf-8"?>
+<p:notes xmlns:a="http://schemas.openxmlformats.org/drawingml/2006/main" xmlns:p="http://schemas.openxmlformats.org/presentationml/2006/main" xmlns:r="http://schemas.openxmlformats.org/officeDocument/2006/relationships">
+  <p:cSld>
+    <p:spTree>
+      <p:nvGrpSpPr>
+        <p:cNvPr id="1" name=""/>
+        <p:cNvGrpSpPr/>
+        <p:nvPr/>
+      </p:nvGrpSpPr>
+      <p:grpSpPr>
+        <a:xfrm>
+          <a:off x="0" y="0"/>
+          <a:ext cx="0" cy="0"/>
+          <a:chOff x="0" y="0"/>
+          <a:chExt cx="0" cy="0"/>
+        </a:xfrm>
+      </p:grpSpPr>
+      <p:sp>
+        <p:nvSpPr>
+          <p:cNvPr id="2" name="Slide Image Placeholder 1"/>
+          <p:cNvSpPr>
+            <a:spLocks noGrp="1"/>
+          </p:cNvSpPr>
+          <p:nvPr>
+            <p:ph type="sldImg" idx="2"/>
+          </p:nvPr>
+        </p:nvSpPr>
+        <p:spPr/>
+      </p:sp>
+      <p:sp>
+        <p:nvSpPr>
+          <p:cNvPr id="3" name="Notes Placeholder 2"/>
+          <p:cNvSpPr>
+            <a:spLocks noGrp="1"/>
+          </p:cNvSpPr>
+          <p:nvPr>
+            <p:ph type="body" idx="3" sz="quarter"/>
+          </p:nvPr>
+        </p:nvSpPr>
+        <p:spPr/>
+        <p:txBody>
+          <a:bodyPr/>
+          <a:lstStyle/>
+          <a:p>
+            <a:r>
+              <a:t>Better said than asked. The direction gap is the one that would most change the headline number.</a:t>
+            </a:r>
+          </a:p>
+        </p:txBody>
+      </p:sp>
+      <p:sp>
+        <p:nvSpPr>
+          <p:cNvPr id="4" name="Slide Number Placeholder 3"/>
+          <p:cNvSpPr>
+            <a:spLocks noGrp="1"/>
+          </p:cNvSpPr>
+          <p:nvPr>
+            <p:ph type="sldNum" idx="5" sz="quarter"/>
+          </p:nvPr>
+        </p:nvSpPr>
+        <p:spPr/>
+      </p:sp>
+    </p:spTree>
+  </p:cSld>
+  <p:clrMapOvr>
+    <a:masterClrMapping/>
+  </p:clrMapOvr>
+</p:notes>
+</file>
+
+<file path=ppt/notesSlides/notesSlide18.xml><?xml version="1.0" encoding="utf-8"?>
 <p:notes xmlns:a="http://schemas.openxmlformats.org/drawingml/2006/main" xmlns:p="http://schemas.openxmlformats.org/presentationml/2006/main" xmlns:r="http://schemas.openxmlformats.org/officeDocument/2006/relationships">
   <p:cSld>
     <p:spTree>
@@ -3360,7 +3786,7 @@
           <a:lstStyle/>
           <a:p>
             <a:r>
-              <a:t>6 · What the file can and cannot give</a:t>
+              <a:t>6 · What the file gives, and what is missing</a:t>
             </a:r>
           </a:p>
         </p:txBody>
@@ -3378,7 +3804,7 @@
         <p:spPr>
           <a:xfrm>
             <a:off x="411480" y="987552"/>
-            <a:ext cx="11384280" cy="2944368"/>
+            <a:ext cx="11384280" cy="2642616"/>
           </a:xfrm>
         </p:spPr>
         <p:txBody>
@@ -3392,7 +3818,18 @@
             </a:pPr>
             <a:r>
               <a:rPr sz="1800"/>
-              <a:t>The file records Ku(t) on one full transition. Ku(t) is the map applied to the gate — a product of the two things we need separately.</a:t>
+              <a:t>The file records Ku(t) on one full transition — and Ku(t) is the map applied to the gate. One curve, two unknowns.</a:t>
+            </a:r>
+          </a:p>
+          <a:p>
+            <a:pPr>
+              <a:spcAft>
+                <a:spcPts val="400"/>
+              </a:spcAft>
+            </a:pPr>
+            <a:r>
+              <a:rPr sz="1800"/>
+              <a:t>We now know the map is a real, fixed, measurable curve. So the missing factor is the gate's trajectory.</a:t>
             </a:r>
           </a:p>
           <a:p>
@@ -3407,7 +3844,7 @@
                   <a:srgbClr val="2B7A43"/>
                 </a:solidFill>
               </a:rPr>
-              <a:t>A full transition only ever visits the two ends of the gate's travel, so any gate and map that agree at the ends reproduce the whole full-swing waveform. The file cannot separate them.</a:t>
+              <a:t>A full transition only ever visits the two ends of the gate's travel — it starts at rest and finishes at the rail. Any gate that agrees at the ends reproduces the whole full-swing waveform, so the file cannot pick one.</a:t>
             </a:r>
           </a:p>
           <a:p>
@@ -3422,18 +3859,7 @@
                   <a:srgbClr val="2B7A43"/>
                 </a:solidFill>
               </a:rPr>
-              <a:t>A truncated pulse stops the clock partway — it is the only measurement that reaches the interior of the gate's path from outside the chip.</a:t>
-            </a:r>
-          </a:p>
-          <a:p>
-            <a:pPr>
-              <a:spcAft>
-                <a:spcPts val="400"/>
-              </a:spcAft>
-            </a:pPr>
-            <a:r>
-              <a:rPr sz="1800"/>
-              <a:t>That is why track 1 needs exactly one stressed pad run, and why the five stress levels are a sampling grid rather than a robustness sweep.</a:t>
+              <a:t>That is exactly why our GUP passes the full-swing check and fails under stress.</a:t>
             </a:r>
           </a:p>
         </p:txBody>
@@ -3472,7 +3898,7 @@
           <a:lstStyle/>
           <a:p>
             <a:r>
-              <a:t>6 · Status of the file-only recipe</a:t>
+              <a:t>7 · One stressed pulse is the measurement that reaches the gate</a:t>
             </a:r>
           </a:p>
         </p:txBody>
@@ -3490,7 +3916,7 @@
         <p:spPr>
           <a:xfrm>
             <a:off x="411480" y="987552"/>
-            <a:ext cx="11384280" cy="3355848"/>
+            <a:ext cx="11384280" cy="2231136"/>
           </a:xfrm>
         </p:spPr>
         <p:txBody>
@@ -3504,7 +3930,7 @@
             </a:pPr>
             <a:r>
               <a:rPr sz="1800"/>
-              <a:t>Built from the IBIS file plus one stressed pad run: C_comp from the file's own Ku ≤ 1 bound, a chain of current-limited stages fitted to the file's Ku(t), and two choices — the stage count and the map's shape — made by the one stressed run.</a:t>
+              <a:t>Cutting the input short stops the clock partway through the gate's travel. What the pad does next depends on where the gate had got to.</a:t>
             </a:r>
           </a:p>
           <a:p>
@@ -3519,7 +3945,7 @@
                   <a:srgbClr val="2B7A43"/>
                 </a:solidFill>
               </a:rPr>
-              <a:t>12 of 12 buffers within ±10 % on the worst stressed pulse; mean 6.9 %.</a:t>
+              <a:t>Each stressed width is one sample of the interior of the same path — here the five widths stop the gate at 0.76, 0.80, 0.84, 0.88 and 0.94.</a:t>
             </a:r>
           </a:p>
           <a:p>
@@ -3530,37 +3956,35 @@
             </a:pPr>
             <a:r>
               <a:rPr sz="1800"/>
-              <a:t>Cost: the full transition is worse than the shipped model on 10 of 12, and a stressed pulse train is still lost on ex2 and io_buf.</a:t>
-            </a:r>
-          </a:p>
-          <a:p>
-            <a:pPr>
-              <a:spcAft>
-                <a:spcPts val="400"/>
-              </a:spcAft>
-            </a:pPr>
-            <a:r>
-              <a:rPr sz="1800"/>
-              <a:t/>
-            </a:r>
-          </a:p>
-          <a:p>
-            <a:pPr>
-              <a:spcAft>
-                <a:spcPts val="400"/>
-              </a:spcAft>
-            </a:pPr>
-            <a:r>
-              <a:rPr sz="1800" b="1">
-                <a:solidFill>
-                  <a:srgbClr val="2B7A43"/>
-                </a:solidFill>
-              </a:rPr>
-              <a:t>The method half of this deck needs its own pass — the equations, where each parameter comes from, and why that stage law. Flagged, not hidden.</a:t>
-            </a:r>
-          </a:p>
-        </p:txBody>
-      </p:sp>
+              <a:t>So the stress sweep is a sampling grid, not a robustness check — and one pad measurement per buffer, taken from outside the chip, is the extra input track 1 needs.</a:t>
+            </a:r>
+          </a:p>
+        </p:txBody>
+      </p:sp>
+      <p:pic>
+        <p:nvPicPr>
+          <p:cNvPr id="4" name="Picture 3" descr="sampling_grid_ex2.png"/>
+          <p:cNvPicPr>
+            <a:picLocks noChangeAspect="1"/>
+          </p:cNvPicPr>
+          <p:nvPr/>
+        </p:nvPicPr>
+        <p:blipFill>
+          <a:blip r:embed="rId2"/>
+          <a:stretch>
+            <a:fillRect/>
+          </a:stretch>
+        </p:blipFill>
+        <p:spPr>
+          <a:xfrm>
+            <a:off x="1923192" y="3291840"/>
+            <a:ext cx="8360854" cy="3227832"/>
+          </a:xfrm>
+          <a:prstGeom prst="rect">
+            <a:avLst/>
+          </a:prstGeom>
+        </p:spPr>
+      </p:pic>
     </p:spTree>
   </p:cSld>
   <p:clrMapOvr>
@@ -3570,6 +3994,751 @@
 </file>
 
 <file path=ppt/slides/slide12.xml><?xml version="1.0" encoding="utf-8"?>
+<p:sld xmlns:a="http://schemas.openxmlformats.org/drawingml/2006/main" xmlns:p="http://schemas.openxmlformats.org/presentationml/2006/main" xmlns:r="http://schemas.openxmlformats.org/officeDocument/2006/relationships">
+  <p:cSld>
+    <p:spTree>
+      <p:nvGrpSpPr>
+        <p:cNvPr id="1" name=""/>
+        <p:cNvGrpSpPr/>
+        <p:nvPr/>
+      </p:nvGrpSpPr>
+      <p:grpSpPr/>
+      <p:sp>
+        <p:nvSpPr>
+          <p:cNvPr id="2" name="Title 1"/>
+          <p:cNvSpPr>
+            <a:spLocks noGrp="1"/>
+          </p:cNvSpPr>
+          <p:nvPr>
+            <p:ph type="title"/>
+          </p:nvPr>
+        </p:nvSpPr>
+        <p:spPr/>
+        <p:txBody>
+          <a:bodyPr/>
+          <a:lstStyle/>
+          <a:p>
+            <a:r>
+              <a:t>8 · What shape may the gate be?  Measure a stage</a:t>
+            </a:r>
+          </a:p>
+        </p:txBody>
+      </p:sp>
+      <p:sp>
+        <p:nvSpPr>
+          <p:cNvPr id="3" name="Content Placeholder 2"/>
+          <p:cNvSpPr>
+            <a:spLocks noGrp="1"/>
+          </p:cNvSpPr>
+          <p:nvPr>
+            <p:ph idx="10"/>
+          </p:nvPr>
+        </p:nvSpPr>
+        <p:spPr>
+          <a:xfrm>
+            <a:off x="411480" y="987552"/>
+            <a:ext cx="11384280" cy="2231136"/>
+          </a:xfrm>
+        </p:spPr>
+        <p:txBody>
+          <a:bodyPr/>
+          <a:lstStyle/>
+          <a:p>
+            <a:pPr>
+              <a:spcAft>
+                <a:spcPts val="400"/>
+              </a:spcAft>
+            </a:pPr>
+            <a:r>
+              <a:rPr sz="1800"/>
+              <a:t>A sample only helps if we know what gate shapes are possible — five samples cannot pick a curve out of all curves.</a:t>
+            </a:r>
+          </a:p>
+          <a:p>
+            <a:pPr>
+              <a:spcAft>
+                <a:spcPts val="400"/>
+              </a:spcAft>
+            </a:pPr>
+            <a:r>
+              <a:rPr sz="1800"/>
+              <a:t>So probe every stage under a short pulse and compare with what a linear filter would give (its own step response, superposed).</a:t>
+            </a:r>
+          </a:p>
+          <a:p>
+            <a:pPr>
+              <a:spcAft>
+                <a:spcPts val="400"/>
+              </a:spcAft>
+            </a:pPr>
+            <a:r>
+              <a:rPr sz="1800" b="1">
+                <a:solidFill>
+                  <a:srgbClr val="2B7A43"/>
+                </a:solidFill>
+              </a:rPr>
+              <a:t>Every stage under-reaches, and the gap compounds down the chain: at the pad the linear prediction says 1.00 where the transistor does 0.50.</a:t>
+            </a:r>
+          </a:p>
+        </p:txBody>
+      </p:sp>
+      <p:pic>
+        <p:nvPicPr>
+          <p:cNvPr id="4" name="Picture 3" descr="stage_nonlinear_ex2.png"/>
+          <p:cNvPicPr>
+            <a:picLocks noChangeAspect="1"/>
+          </p:cNvPicPr>
+          <p:nvPr/>
+        </p:nvPicPr>
+        <p:blipFill>
+          <a:blip r:embed="rId2"/>
+          <a:stretch>
+            <a:fillRect/>
+          </a:stretch>
+        </p:blipFill>
+        <p:spPr>
+          <a:xfrm>
+            <a:off x="1203658" y="3291840"/>
+            <a:ext cx="9799922" cy="3227832"/>
+          </a:xfrm>
+          <a:prstGeom prst="rect">
+            <a:avLst/>
+          </a:prstGeom>
+        </p:spPr>
+      </p:pic>
+    </p:spTree>
+  </p:cSld>
+  <p:clrMapOvr>
+    <a:masterClrMapping/>
+  </p:clrMapOvr>
+</p:sld>
+</file>
+
+<file path=ppt/slides/slide13.xml><?xml version="1.0" encoding="utf-8"?>
+<p:sld xmlns:a="http://schemas.openxmlformats.org/drawingml/2006/main" xmlns:p="http://schemas.openxmlformats.org/presentationml/2006/main" xmlns:r="http://schemas.openxmlformats.org/officeDocument/2006/relationships">
+  <p:cSld>
+    <p:spTree>
+      <p:nvGrpSpPr>
+        <p:cNvPr id="1" name=""/>
+        <p:cNvGrpSpPr/>
+        <p:nvPr/>
+      </p:nvGrpSpPr>
+      <p:grpSpPr/>
+      <p:sp>
+        <p:nvSpPr>
+          <p:cNvPr id="2" name="Title 1"/>
+          <p:cNvSpPr>
+            <a:spLocks noGrp="1"/>
+          </p:cNvSpPr>
+          <p:nvPr>
+            <p:ph type="title"/>
+          </p:nvPr>
+        </p:nvSpPr>
+        <p:spPr/>
+        <p:txBody>
+          <a:bodyPr/>
+          <a:lstStyle/>
+          <a:p>
+            <a:r>
+              <a:t>9 · The physics that explains it, and the four numbers it forces</a:t>
+            </a:r>
+          </a:p>
+        </p:txBody>
+      </p:sp>
+      <p:sp>
+        <p:nvSpPr>
+          <p:cNvPr id="3" name="Content Placeholder 2"/>
+          <p:cNvSpPr>
+            <a:spLocks noGrp="1"/>
+          </p:cNvSpPr>
+          <p:nvPr>
+            <p:ph idx="10"/>
+          </p:nvPr>
+        </p:nvSpPr>
+        <p:spPr>
+          <a:xfrm>
+            <a:off x="411480" y="987552"/>
+            <a:ext cx="11384280" cy="2532888"/>
+          </a:xfrm>
+        </p:spPr>
+        <p:txBody>
+          <a:bodyPr/>
+          <a:lstStyle/>
+          <a:p>
+            <a:pPr>
+              <a:spcAft>
+                <a:spcPts val="400"/>
+              </a:spcAft>
+            </a:pPr>
+            <a:r>
+              <a:rPr sz="1800"/>
+              <a:t>A CMOS inverter driving a large load is a current source while its input sits at the rail — its device is in saturation — and becomes a resistor only near the destination rail, in triode. A constant current into a gate capacitance is a ramp.</a:t>
+            </a:r>
+          </a:p>
+          <a:p>
+            <a:pPr>
+              <a:spcAft>
+                <a:spcPts val="400"/>
+              </a:spcAft>
+            </a:pPr>
+            <a:r>
+              <a:rPr sz="1800" b="1">
+                <a:solidFill>
+                  <a:srgbClr val="2B7A43"/>
+                </a:solidFill>
+              </a:rPr>
+              <a:t>That picture forces exactly four numbers per stage, and no more — named below. s_dn is the same picture on the way back.</a:t>
+            </a:r>
+          </a:p>
+          <a:p>
+            <a:pPr>
+              <a:spcAft>
+                <a:spcPts val="400"/>
+              </a:spcAft>
+            </a:pPr>
+            <a:r>
+              <a:rPr sz="1800" b="1">
+                <a:solidFill>
+                  <a:srgbClr val="2B7A43"/>
+                </a:solidFill>
+              </a:rPr>
+              <a:t>All four are fitted to the file's own Ku(t), so they cost no measurement. (p, the drive's curvature under a partial input, is assumed: full swing cannot see it.)</a:t>
+            </a:r>
+          </a:p>
+        </p:txBody>
+      </p:sp>
+      <p:pic>
+        <p:nvPicPr>
+          <p:cNvPr id="4" name="Picture 3" descr="stage_law.png"/>
+          <p:cNvPicPr>
+            <a:picLocks noChangeAspect="1"/>
+          </p:cNvPicPr>
+          <p:nvPr/>
+        </p:nvPicPr>
+        <p:blipFill>
+          <a:blip r:embed="rId2"/>
+          <a:stretch>
+            <a:fillRect/>
+          </a:stretch>
+        </p:blipFill>
+        <p:spPr>
+          <a:xfrm>
+            <a:off x="1351194" y="3593592"/>
+            <a:ext cx="9504850" cy="2926080"/>
+          </a:xfrm>
+          <a:prstGeom prst="rect">
+            <a:avLst/>
+          </a:prstGeom>
+        </p:spPr>
+      </p:pic>
+    </p:spTree>
+  </p:cSld>
+  <p:clrMapOvr>
+    <a:masterClrMapping/>
+  </p:clrMapOvr>
+</p:sld>
+</file>
+
+<file path=ppt/slides/slide14.xml><?xml version="1.0" encoding="utf-8"?>
+<p:sld xmlns:a="http://schemas.openxmlformats.org/drawingml/2006/main" xmlns:p="http://schemas.openxmlformats.org/presentationml/2006/main" xmlns:r="http://schemas.openxmlformats.org/officeDocument/2006/relationships">
+  <p:cSld>
+    <p:spTree>
+      <p:nvGrpSpPr>
+        <p:cNvPr id="1" name=""/>
+        <p:cNvGrpSpPr/>
+        <p:nvPr/>
+      </p:nvGrpSpPr>
+      <p:grpSpPr/>
+      <p:sp>
+        <p:nvSpPr>
+          <p:cNvPr id="2" name="Title 1"/>
+          <p:cNvSpPr>
+            <a:spLocks noGrp="1"/>
+          </p:cNvSpPr>
+          <p:nvPr>
+            <p:ph type="title"/>
+          </p:nvPr>
+        </p:nvSpPr>
+        <p:spPr/>
+        <p:txBody>
+          <a:bodyPr/>
+          <a:lstStyle/>
+          <a:p>
+            <a:r>
+              <a:t>10 · What we build</a:t>
+            </a:r>
+          </a:p>
+        </p:txBody>
+      </p:sp>
+      <p:sp>
+        <p:nvSpPr>
+          <p:cNvPr id="3" name="Content Placeholder 2"/>
+          <p:cNvSpPr>
+            <a:spLocks noGrp="1"/>
+          </p:cNvSpPr>
+          <p:nvPr>
+            <p:ph idx="10"/>
+          </p:nvPr>
+        </p:nvSpPr>
+        <p:spPr>
+          <a:xfrm>
+            <a:off x="411480" y="987552"/>
+            <a:ext cx="11384280" cy="3767328"/>
+          </a:xfrm>
+        </p:spPr>
+        <p:txBody>
+          <a:bodyPr/>
+          <a:lstStyle/>
+          <a:p>
+            <a:pPr>
+              <a:spcAft>
+                <a:spcPts val="400"/>
+              </a:spcAft>
+            </a:pPr>
+            <a:r>
+              <a:rPr sz="1700" b="1">
+                <a:solidFill>
+                  <a:srgbClr val="2B7A43"/>
+                </a:solidFill>
+              </a:rPr>
+              <a:t>input  →  K identical current-limited stages  →  gate g  →  the map  →  Ku  →  the file's own I-V tables  →  the pad</a:t>
+            </a:r>
+          </a:p>
+          <a:p>
+            <a:pPr>
+              <a:spcAft>
+                <a:spcPts val="400"/>
+              </a:spcAft>
+            </a:pPr>
+            <a:r>
+              <a:rPr sz="1700"/>
+              <a:t/>
+            </a:r>
+          </a:p>
+          <a:p>
+            <a:pPr>
+              <a:spcAft>
+                <a:spcPts val="400"/>
+              </a:spcAft>
+            </a:pPr>
+            <a:r>
+              <a:rPr sz="1700"/>
+              <a:t>Each stage:   dv/dt = s_up·h(u)·min(1, (1−v)/x_lin)  −  s_dn·h(1−u)·min(1, v/x_lin),   with h(u) = clip((u − vt)/(1 − vt), 0, 1)</a:t>
+            </a:r>
+          </a:p>
+          <a:p>
+            <a:pPr>
+              <a:spcAft>
+                <a:spcPts val="400"/>
+              </a:spcAft>
+            </a:pPr>
+            <a:r>
+              <a:rPr sz="1700"/>
+              <a:t/>
+            </a:r>
+          </a:p>
+          <a:p>
+            <a:pPr>
+              <a:spcAft>
+                <a:spcPts val="400"/>
+              </a:spcAft>
+            </a:pPr>
+            <a:r>
+              <a:rPr sz="1700"/>
+              <a:t>All K stages share one set of the four numbers — a real tapered predriver is approximately that, and letting them differ makes the fit degenerate.</a:t>
+            </a:r>
+          </a:p>
+          <a:p>
+            <a:pPr>
+              <a:spcAft>
+                <a:spcPts val="400"/>
+              </a:spcAft>
+            </a:pPr>
+            <a:r>
+              <a:rPr sz="1700" b="1">
+                <a:solidFill>
+                  <a:srgbClr val="2B7A43"/>
+                </a:solidFill>
+              </a:rPr>
+              <a:t>Two things are still unknown: how many stages, and the shape of the map. Neither can be fitted to the file — that is what the stressed run is spent on.</a:t>
+            </a:r>
+          </a:p>
+        </p:txBody>
+      </p:sp>
+    </p:spTree>
+  </p:cSld>
+  <p:clrMapOvr>
+    <a:masterClrMapping/>
+  </p:clrMapOvr>
+</p:sld>
+</file>
+
+<file path=ppt/slides/slide15.xml><?xml version="1.0" encoding="utf-8"?>
+<p:sld xmlns:a="http://schemas.openxmlformats.org/drawingml/2006/main" xmlns:p="http://schemas.openxmlformats.org/presentationml/2006/main" xmlns:r="http://schemas.openxmlformats.org/officeDocument/2006/relationships">
+  <p:cSld>
+    <p:spTree>
+      <p:nvGrpSpPr>
+        <p:cNvPr id="1" name=""/>
+        <p:cNvGrpSpPr/>
+        <p:nvPr/>
+      </p:nvGrpSpPr>
+      <p:grpSpPr/>
+      <p:sp>
+        <p:nvSpPr>
+          <p:cNvPr id="2" name="Title 1"/>
+          <p:cNvSpPr>
+            <a:spLocks noGrp="1"/>
+          </p:cNvSpPr>
+          <p:nvPr>
+            <p:ph type="title"/>
+          </p:nvPr>
+        </p:nvSpPr>
+        <p:spPr/>
+        <p:txBody>
+          <a:bodyPr/>
+          <a:lstStyle/>
+          <a:p>
+            <a:r>
+              <a:t>11 · Where every number comes from</a:t>
+            </a:r>
+          </a:p>
+        </p:txBody>
+      </p:sp>
+      <p:sp>
+        <p:nvSpPr>
+          <p:cNvPr id="3" name="Content Placeholder 2"/>
+          <p:cNvSpPr>
+            <a:spLocks noGrp="1"/>
+          </p:cNvSpPr>
+          <p:nvPr>
+            <p:ph idx="10"/>
+          </p:nvPr>
+        </p:nvSpPr>
+        <p:spPr>
+          <a:xfrm>
+            <a:off x="411480" y="987552"/>
+            <a:ext cx="11384280" cy="3246120"/>
+          </a:xfrm>
+        </p:spPr>
+        <p:txBody>
+          <a:bodyPr/>
+          <a:lstStyle/>
+          <a:p>
+            <a:pPr>
+              <a:spcAft>
+                <a:spcPts val="400"/>
+              </a:spcAft>
+            </a:pPr>
+            <a:r>
+              <a:rPr sz="1700" b="1">
+                <a:solidFill>
+                  <a:srgbClr val="2B7A43"/>
+                </a:solidFill>
+              </a:rPr>
+              <a:t>From the file alone: C_comp — kept unless the file's own arithmetic rejects it, since Ku cannot exceed 1 and ex2's declared 5.0 pF implies 1.24 — and s_up, s_dn, vt, x_lin, fitted to the file's Ku(t).</a:t>
+            </a:r>
+          </a:p>
+          <a:p>
+            <a:pPr>
+              <a:spcAft>
+                <a:spcPts val="400"/>
+              </a:spcAft>
+            </a:pPr>
+            <a:r>
+              <a:rPr sz="1700" b="1">
+                <a:solidFill>
+                  <a:srgbClr val="2B7A43"/>
+                </a:solidFill>
+              </a:rPr>
+              <a:t>From the one stressed pad run: the stage count K and the map's shape. The file narrows K to a band of about three and cannot choose inside it: at K = 7 and K = 9 it fits to the same four decimal places, while the gate they predict runs from extinguished to almost intact.</a:t>
+            </a:r>
+          </a:p>
+          <a:p>
+            <a:pPr>
+              <a:spcAft>
+                <a:spcPts val="400"/>
+              </a:spcAft>
+            </a:pPr>
+            <a:r>
+              <a:rPr sz="1700" b="1">
+                <a:solidFill>
+                  <a:srgbClr val="2B7A43"/>
+                </a:solidFill>
+              </a:rPr>
+              <a:t>The run is spent twice, in order: first it sets the amplitude by moving vt, then it picks among the nine candidates (3 stage counts × 3 shapes) on the whole pad waveform.</a:t>
+            </a:r>
+          </a:p>
+          <a:p>
+            <a:pPr>
+              <a:spcAft>
+                <a:spcPts val="400"/>
+              </a:spcAft>
+            </a:pPr>
+            <a:r>
+              <a:rPr sz="1700" b="1">
+                <a:solidFill>
+                  <a:srgbClr val="2B7A43"/>
+                </a:solidFill>
+              </a:rPr>
+              <a:t>Not on the peak — the first step has just matched the peak for every candidate, so the peak has no information left to rank them with.</a:t>
+            </a:r>
+          </a:p>
+        </p:txBody>
+      </p:sp>
+    </p:spTree>
+  </p:cSld>
+  <p:clrMapOvr>
+    <a:masterClrMapping/>
+  </p:clrMapOvr>
+</p:sld>
+</file>
+
+<file path=ppt/slides/slide16.xml><?xml version="1.0" encoding="utf-8"?>
+<p:sld xmlns:a="http://schemas.openxmlformats.org/drawingml/2006/main" xmlns:p="http://schemas.openxmlformats.org/presentationml/2006/main" xmlns:r="http://schemas.openxmlformats.org/officeDocument/2006/relationships">
+  <p:cSld>
+    <p:spTree>
+      <p:nvGrpSpPr>
+        <p:cNvPr id="1" name=""/>
+        <p:cNvGrpSpPr/>
+        <p:nvPr/>
+      </p:nvGrpSpPr>
+      <p:grpSpPr/>
+      <p:sp>
+        <p:nvSpPr>
+          <p:cNvPr id="2" name="Title 1"/>
+          <p:cNvSpPr>
+            <a:spLocks noGrp="1"/>
+          </p:cNvSpPr>
+          <p:nvPr>
+            <p:ph type="title"/>
+          </p:nvPr>
+        </p:nvSpPr>
+        <p:spPr/>
+        <p:txBody>
+          <a:bodyPr/>
+          <a:lstStyle/>
+          <a:p>
+            <a:r>
+              <a:t>12 · Where the file-only recipe stands</a:t>
+            </a:r>
+          </a:p>
+        </p:txBody>
+      </p:sp>
+      <p:sp>
+        <p:nvSpPr>
+          <p:cNvPr id="3" name="Content Placeholder 2"/>
+          <p:cNvSpPr>
+            <a:spLocks noGrp="1"/>
+          </p:cNvSpPr>
+          <p:nvPr>
+            <p:ph idx="10"/>
+          </p:nvPr>
+        </p:nvSpPr>
+        <p:spPr>
+          <a:xfrm>
+            <a:off x="411480" y="987552"/>
+            <a:ext cx="11384280" cy="1929384"/>
+          </a:xfrm>
+        </p:spPr>
+        <p:txBody>
+          <a:bodyPr/>
+          <a:lstStyle/>
+          <a:p>
+            <a:pPr>
+              <a:spcAft>
+                <a:spcPts val="400"/>
+              </a:spcAft>
+            </a:pPr>
+            <a:r>
+              <a:rPr sz="1800" b="1">
+                <a:solidFill>
+                  <a:srgbClr val="2B7A43"/>
+                </a:solidFill>
+              </a:rPr>
+              <a:t>12 of 12 buffers within ±10 % on the worst stressed pulse; mean 6.9 %.</a:t>
+            </a:r>
+          </a:p>
+          <a:p>
+            <a:pPr>
+              <a:spcAft>
+                <a:spcPts val="400"/>
+              </a:spcAft>
+            </a:pPr>
+            <a:r>
+              <a:rPr sz="1800"/>
+              <a:t>On inv_chain the file-only build reaches 5.1 %, against 25.8 % for a build that uses the probed silicon — the shape choice matters more than the measurement.</a:t>
+            </a:r>
+          </a:p>
+          <a:p>
+            <a:pPr>
+              <a:spcAft>
+                <a:spcPts val="400"/>
+              </a:spcAft>
+            </a:pPr>
+            <a:r>
+              <a:rPr sz="1800" b="1">
+                <a:solidFill>
+                  <a:srgbClr val="2B7A43"/>
+                </a:solidFill>
+              </a:rPr>
+              <a:t>What it costs: the full transition is worse than the shipped model on 10 of 12 buffers, and a stressed pulse train is still lost on ex2 and io_buf. We buy accuracy in the interior with accuracy at the endpoints.</a:t>
+            </a:r>
+          </a:p>
+        </p:txBody>
+      </p:sp>
+      <p:pic>
+        <p:nvPicPr>
+          <p:cNvPr id="4" name="Picture 3" descr="endtoend.png"/>
+          <p:cNvPicPr>
+            <a:picLocks noChangeAspect="1"/>
+          </p:cNvPicPr>
+          <p:nvPr/>
+        </p:nvPicPr>
+        <p:blipFill>
+          <a:blip r:embed="rId2"/>
+          <a:stretch>
+            <a:fillRect/>
+          </a:stretch>
+        </p:blipFill>
+        <p:spPr>
+          <a:xfrm>
+            <a:off x="1507807" y="2990088"/>
+            <a:ext cx="9191625" cy="3529584"/>
+          </a:xfrm>
+          <a:prstGeom prst="rect">
+            <a:avLst/>
+          </a:prstGeom>
+        </p:spPr>
+      </p:pic>
+    </p:spTree>
+  </p:cSld>
+  <p:clrMapOvr>
+    <a:masterClrMapping/>
+  </p:clrMapOvr>
+</p:sld>
+</file>
+
+<file path=ppt/slides/slide17.xml><?xml version="1.0" encoding="utf-8"?>
+<p:sld xmlns:a="http://schemas.openxmlformats.org/drawingml/2006/main" xmlns:p="http://schemas.openxmlformats.org/presentationml/2006/main" xmlns:r="http://schemas.openxmlformats.org/officeDocument/2006/relationships">
+  <p:cSld>
+    <p:spTree>
+      <p:nvGrpSpPr>
+        <p:cNvPr id="1" name=""/>
+        <p:cNvGrpSpPr/>
+        <p:nvPr/>
+      </p:nvGrpSpPr>
+      <p:grpSpPr/>
+      <p:sp>
+        <p:nvSpPr>
+          <p:cNvPr id="2" name="Title 1"/>
+          <p:cNvSpPr>
+            <a:spLocks noGrp="1"/>
+          </p:cNvSpPr>
+          <p:nvPr>
+            <p:ph type="title"/>
+          </p:nvPr>
+        </p:nvSpPr>
+        <p:spPr/>
+        <p:txBody>
+          <a:bodyPr/>
+          <a:lstStyle/>
+          <a:p>
+            <a:r>
+              <a:t>13 · What this does not cover yet</a:t>
+            </a:r>
+          </a:p>
+        </p:txBody>
+      </p:sp>
+      <p:sp>
+        <p:nvSpPr>
+          <p:cNvPr id="3" name="Content Placeholder 2"/>
+          <p:cNvSpPr>
+            <a:spLocks noGrp="1"/>
+          </p:cNvSpPr>
+          <p:nvPr>
+            <p:ph idx="10"/>
+          </p:nvPr>
+        </p:nvSpPr>
+        <p:spPr>
+          <a:xfrm>
+            <a:off x="411480" y="987552"/>
+            <a:ext cx="11384280" cy="2340864"/>
+          </a:xfrm>
+        </p:spPr>
+        <p:txBody>
+          <a:bodyPr/>
+          <a:lstStyle/>
+          <a:p>
+            <a:pPr>
+              <a:spcAft>
+                <a:spcPts val="400"/>
+              </a:spcAft>
+            </a:pPr>
+            <a:r>
+              <a:rPr sz="1800" b="1">
+                <a:solidFill>
+                  <a:srgbClr val="2B7A43"/>
+                </a:solidFill>
+              </a:rPr>
+              <a:t>Direction. Everything here is a short HIGH pulse. Only io_buf has been run pulling down, where the model is 16–21 points too shallow — its pull-down chain never turns on at all on a short pulse.</a:t>
+            </a:r>
+          </a:p>
+          <a:p>
+            <a:pPr>
+              <a:spcAft>
+                <a:spcPts val="400"/>
+              </a:spcAft>
+            </a:pPr>
+            <a:r>
+              <a:rPr sz="1800" b="1">
+                <a:solidFill>
+                  <a:srgbClr val="2B7A43"/>
+                </a:solidFill>
+              </a:rPr>
+              <a:t>Depth. The ladder samples 50–90 % of the travel. Below 50 % is unsampled.</a:t>
+            </a:r>
+          </a:p>
+          <a:p>
+            <a:pPr>
+              <a:spcAft>
+                <a:spcPts val="400"/>
+              </a:spcAft>
+            </a:pPr>
+            <a:r>
+              <a:rPr sz="1800" b="1">
+                <a:solidFill>
+                  <a:srgbClr val="2B7A43"/>
+                </a:solidFill>
+              </a:rPr>
+              <a:t>Trains. One pulse at a time; a stressed train is still lost on two of three buffers.</a:t>
+            </a:r>
+          </a:p>
+          <a:p>
+            <a:pPr>
+              <a:spcAft>
+                <a:spcPts val="400"/>
+              </a:spcAft>
+            </a:pPr>
+            <a:r>
+              <a:rPr sz="1800" b="1">
+                <a:solidFill>
+                  <a:srgbClr val="2B7A43"/>
+                </a:solidFill>
+              </a:rPr>
+              <a:t>The recipe has seen the answer key. Two of the three candidate map shapes were chosen by looking at results on these same twelve buffers. A thirteenth buffer may need a shape the grid does not contain.</a:t>
+            </a:r>
+          </a:p>
+        </p:txBody>
+      </p:sp>
+    </p:spTree>
+  </p:cSld>
+  <p:clrMapOvr>
+    <a:masterClrMapping/>
+  </p:clrMapOvr>
+</p:sld>
+</file>
+
+<file path=ppt/slides/slide18.xml><?xml version="1.0" encoding="utf-8"?>
 <p:sld xmlns:a="http://schemas.openxmlformats.org/drawingml/2006/main" xmlns:p="http://schemas.openxmlformats.org/presentationml/2006/main" xmlns:r="http://schemas.openxmlformats.org/officeDocument/2006/relationships">
   <p:cSld>
     <p:spTree>

--- a/results/meeting_deck_2026-09-24/0924_track1_story.pptx
+++ b/results/meeting_deck_2026-09-24/0924_track1_story.pptx
@@ -26,6 +26,11 @@
     <p:sldId id="271" r:id="rId3"/>
     <p:sldId id="272" r:id="rId2"/>
     <p:sldId id="273" r:id="rId26"/>
+    <p:sldId id="274" r:id="rId27"/>
+    <p:sldId id="275" r:id="rId28"/>
+    <p:sldId id="276" r:id="rId29"/>
+    <p:sldId id="277" r:id="rId30"/>
+    <p:sldId id="278" r:id="rId31"/>
   </p:sldIdLst>
   <p:sldSz cx="12192000" cy="6858000"/>
   <p:notesSz cx="6858000" cy="9144000"/>
@@ -607,7 +612,7 @@
           <a:lstStyle/>
           <a:p>
             <a:r>
-              <a:t>The file is not wrong; it is blind in a specific way. Our GUP reproduces the vendor's own full-swing waveform - that is how it was built - and the endpoints are all the full swing constrains.</a:t>
+              <a:t>Slide 13 is the measured form of this - at K = 7 and K = 9 the model fits the file to the same four decimal places and predicts stressed gates running from extinguished to almost intact. Same composition, different split.</a:t>
             </a:r>
           </a:p>
         </p:txBody>
@@ -887,7 +892,7 @@
           <a:lstStyle/>
           <a:p>
             <a:r>
-              <a:t>The map here is the two-parameter MOSFET-shaped curve, not the measured one: track 1 has no probe. Its shape is one of the two things the stressed run selects.</a:t>
+              <a:t>Worth saying out loud that the right-hand half is not ours and is not in question. The whole method is about producing a gate.</a:t>
             </a:r>
           </a:p>
         </p:txBody>
@@ -957,7 +962,7 @@
           <a:lstStyle/>
           <a:p>
             <a:r>
-              <a:t>The peak point is the one that cost a night's work: ranking on the peak selects chains that turn on 155-300 ps late and hit the right height with the wrong pulse under it.</a:t>
+              <a:t>The loop measurement is the hysteresis plot from slide 3, used as an instrument - a wrong C_comp opens the loop because dV/dt flips sign between rise and fall. Track 1 cannot use it, because it needs the probed gate.</a:t>
             </a:r>
           </a:p>
         </p:txBody>
@@ -1027,7 +1032,7 @@
           <a:lstStyle/>
           <a:p>
             <a:r>
-              <a:t>Grey is the shipped model, blue the build using probed silicon, red the file-only one. Full numbers in docs/track1_recipe.md.</a:t>
+              <a:t>x_lin is pinned at 0.45 on most buffers rather than fitted, a value inside the 0.37-0.63 the real probed stages gave. p is assumed at 1.</a:t>
             </a:r>
           </a:p>
         </p:txBody>
@@ -1097,7 +1102,7 @@
           <a:lstStyle/>
           <a:p>
             <a:r>
-              <a:t>Better said than asked. The direction gap is the one that would most change the headline number.</a:t>
+              <a:t>The three shapes are (0.50, 0.70), (0.40, 0.60) and (0.40, 0.90). Note on the right that all three already match the PEAK - that is the calibration of the next slide, and it is why the peak cannot be the thing that chooses.</a:t>
             </a:r>
           </a:p>
         </p:txBody>
@@ -1167,7 +1172,77 @@
           <a:lstStyle/>
           <a:p>
             <a:r>
-              <a:t>Carried from the 09-18 deck so the inv_chain numbers on slide 3 are not read as a win. review_2026-09-09 item 12B has the measurement.</a:t>
+              <a:t>The bracket the bisection starts from, printed in the build log: vt = 0 gives +40.1 %, vt = 0.7 gives -97.1 %. Every one of the nine candidates gets this treatment, which is what makes the peak useless for choosing between them.</a:t>
+            </a:r>
+          </a:p>
+        </p:txBody>
+      </p:sp>
+      <p:sp>
+        <p:nvSpPr>
+          <p:cNvPr id="4" name="Slide Number Placeholder 3"/>
+          <p:cNvSpPr>
+            <a:spLocks noGrp="1"/>
+          </p:cNvSpPr>
+          <p:nvPr>
+            <p:ph type="sldNum" idx="5" sz="quarter"/>
+          </p:nvPr>
+        </p:nvSpPr>
+        <p:spPr/>
+      </p:sp>
+    </p:spTree>
+  </p:cSld>
+  <p:clrMapOvr>
+    <a:masterClrMapping/>
+  </p:clrMapOvr>
+</p:notes>
+</file>
+
+<file path=ppt/notesSlides/notesSlide19.xml><?xml version="1.0" encoding="utf-8"?>
+<p:notes xmlns:a="http://schemas.openxmlformats.org/drawingml/2006/main" xmlns:p="http://schemas.openxmlformats.org/presentationml/2006/main" xmlns:r="http://schemas.openxmlformats.org/officeDocument/2006/relationships">
+  <p:cSld>
+    <p:spTree>
+      <p:nvGrpSpPr>
+        <p:cNvPr id="1" name=""/>
+        <p:cNvGrpSpPr/>
+        <p:nvPr/>
+      </p:nvGrpSpPr>
+      <p:grpSpPr>
+        <a:xfrm>
+          <a:off x="0" y="0"/>
+          <a:ext cx="0" cy="0"/>
+          <a:chOff x="0" y="0"/>
+          <a:chExt cx="0" cy="0"/>
+        </a:xfrm>
+      </p:grpSpPr>
+      <p:sp>
+        <p:nvSpPr>
+          <p:cNvPr id="2" name="Slide Image Placeholder 1"/>
+          <p:cNvSpPr>
+            <a:spLocks noGrp="1"/>
+          </p:cNvSpPr>
+          <p:nvPr>
+            <p:ph type="sldImg" idx="2"/>
+          </p:nvPr>
+        </p:nvSpPr>
+        <p:spPr/>
+      </p:sp>
+      <p:sp>
+        <p:nvSpPr>
+          <p:cNvPr id="3" name="Notes Placeholder 2"/>
+          <p:cNvSpPr>
+            <a:spLocks noGrp="1"/>
+          </p:cNvSpPr>
+          <p:nvPr>
+            <p:ph type="body" idx="3" sz="quarter"/>
+          </p:nvPr>
+        </p:nvSpPr>
+        <p:spPr/>
+        <p:txBody>
+          <a:bodyPr/>
+          <a:lstStyle/>
+          <a:p>
+            <a:r>
+              <a:t>The rms numbers are computed in build_0924_deck_figures.calib_select and printed when it runs. On this buffer the rule picks the best of the nine outright.</a:t>
             </a:r>
           </a:p>
         </p:txBody>
@@ -1238,6 +1313,286 @@
           <a:p>
             <a:r>
               <a:t>ex2's predriver is three stages; n4 (orange) is the gate of the output device. Probes ran on predriver_stages_2026-09-09; the same schematics exist for io_buf and inv_chain on the 09-18 deck.</a:t>
+            </a:r>
+          </a:p>
+        </p:txBody>
+      </p:sp>
+      <p:sp>
+        <p:nvSpPr>
+          <p:cNvPr id="4" name="Slide Number Placeholder 3"/>
+          <p:cNvSpPr>
+            <a:spLocks noGrp="1"/>
+          </p:cNvSpPr>
+          <p:nvPr>
+            <p:ph type="sldNum" idx="5" sz="quarter"/>
+          </p:nvPr>
+        </p:nvSpPr>
+        <p:spPr/>
+      </p:sp>
+    </p:spTree>
+  </p:cSld>
+  <p:clrMapOvr>
+    <a:masterClrMapping/>
+  </p:clrMapOvr>
+</p:notes>
+</file>
+
+<file path=ppt/notesSlides/notesSlide20.xml><?xml version="1.0" encoding="utf-8"?>
+<p:notes xmlns:a="http://schemas.openxmlformats.org/drawingml/2006/main" xmlns:p="http://schemas.openxmlformats.org/presentationml/2006/main" xmlns:r="http://schemas.openxmlformats.org/officeDocument/2006/relationships">
+  <p:cSld>
+    <p:spTree>
+      <p:nvGrpSpPr>
+        <p:cNvPr id="1" name=""/>
+        <p:cNvGrpSpPr/>
+        <p:nvPr/>
+      </p:nvGrpSpPr>
+      <p:grpSpPr>
+        <a:xfrm>
+          <a:off x="0" y="0"/>
+          <a:ext cx="0" cy="0"/>
+          <a:chOff x="0" y="0"/>
+          <a:chExt cx="0" cy="0"/>
+        </a:xfrm>
+      </p:grpSpPr>
+      <p:sp>
+        <p:nvSpPr>
+          <p:cNvPr id="2" name="Slide Image Placeholder 1"/>
+          <p:cNvSpPr>
+            <a:spLocks noGrp="1"/>
+          </p:cNvSpPr>
+          <p:nvPr>
+            <p:ph type="sldImg" idx="2"/>
+          </p:nvPr>
+        </p:nvSpPr>
+        <p:spPr/>
+      </p:sp>
+      <p:sp>
+        <p:nvSpPr>
+          <p:cNvPr id="3" name="Notes Placeholder 2"/>
+          <p:cNvSpPr>
+            <a:spLocks noGrp="1"/>
+          </p:cNvSpPr>
+          <p:nvPr>
+            <p:ph type="body" idx="3" sz="quarter"/>
+          </p:nvPr>
+        </p:nvSpPr>
+        <p:spPr/>
+        <p:txBody>
+          <a:bodyPr/>
+          <a:lstStyle/>
+          <a:p>
+            <a:r>
+              <a:t>This is the slide to leave up during questions.</a:t>
+            </a:r>
+          </a:p>
+        </p:txBody>
+      </p:sp>
+      <p:sp>
+        <p:nvSpPr>
+          <p:cNvPr id="4" name="Slide Number Placeholder 3"/>
+          <p:cNvSpPr>
+            <a:spLocks noGrp="1"/>
+          </p:cNvSpPr>
+          <p:nvPr>
+            <p:ph type="sldNum" idx="5" sz="quarter"/>
+          </p:nvPr>
+        </p:nvSpPr>
+        <p:spPr/>
+      </p:sp>
+    </p:spTree>
+  </p:cSld>
+  <p:clrMapOvr>
+    <a:masterClrMapping/>
+  </p:clrMapOvr>
+</p:notes>
+</file>
+
+<file path=ppt/notesSlides/notesSlide21.xml><?xml version="1.0" encoding="utf-8"?>
+<p:notes xmlns:a="http://schemas.openxmlformats.org/drawingml/2006/main" xmlns:p="http://schemas.openxmlformats.org/presentationml/2006/main" xmlns:r="http://schemas.openxmlformats.org/officeDocument/2006/relationships">
+  <p:cSld>
+    <p:spTree>
+      <p:nvGrpSpPr>
+        <p:cNvPr id="1" name=""/>
+        <p:cNvGrpSpPr/>
+        <p:nvPr/>
+      </p:nvGrpSpPr>
+      <p:grpSpPr>
+        <a:xfrm>
+          <a:off x="0" y="0"/>
+          <a:ext cx="0" cy="0"/>
+          <a:chOff x="0" y="0"/>
+          <a:chExt cx="0" cy="0"/>
+        </a:xfrm>
+      </p:grpSpPr>
+      <p:sp>
+        <p:nvSpPr>
+          <p:cNvPr id="2" name="Slide Image Placeholder 1"/>
+          <p:cNvSpPr>
+            <a:spLocks noGrp="1"/>
+          </p:cNvSpPr>
+          <p:nvPr>
+            <p:ph type="sldImg" idx="2"/>
+          </p:nvPr>
+        </p:nvSpPr>
+        <p:spPr/>
+      </p:sp>
+      <p:sp>
+        <p:nvSpPr>
+          <p:cNvPr id="3" name="Notes Placeholder 2"/>
+          <p:cNvSpPr>
+            <a:spLocks noGrp="1"/>
+          </p:cNvSpPr>
+          <p:nvPr>
+            <p:ph type="body" idx="3" sz="quarter"/>
+          </p:nvPr>
+        </p:nvSpPr>
+        <p:spPr/>
+        <p:txBody>
+          <a:bodyPr/>
+          <a:lstStyle/>
+          <a:p>
+            <a:r>
+              <a:t>Grey is the shipped model, blue the build using probed silicon, red the file-only one. Full numbers in docs/track1_recipe.md.</a:t>
+            </a:r>
+          </a:p>
+        </p:txBody>
+      </p:sp>
+      <p:sp>
+        <p:nvSpPr>
+          <p:cNvPr id="4" name="Slide Number Placeholder 3"/>
+          <p:cNvSpPr>
+            <a:spLocks noGrp="1"/>
+          </p:cNvSpPr>
+          <p:nvPr>
+            <p:ph type="sldNum" idx="5" sz="quarter"/>
+          </p:nvPr>
+        </p:nvSpPr>
+        <p:spPr/>
+      </p:sp>
+    </p:spTree>
+  </p:cSld>
+  <p:clrMapOvr>
+    <a:masterClrMapping/>
+  </p:clrMapOvr>
+</p:notes>
+</file>
+
+<file path=ppt/notesSlides/notesSlide22.xml><?xml version="1.0" encoding="utf-8"?>
+<p:notes xmlns:a="http://schemas.openxmlformats.org/drawingml/2006/main" xmlns:p="http://schemas.openxmlformats.org/presentationml/2006/main" xmlns:r="http://schemas.openxmlformats.org/officeDocument/2006/relationships">
+  <p:cSld>
+    <p:spTree>
+      <p:nvGrpSpPr>
+        <p:cNvPr id="1" name=""/>
+        <p:cNvGrpSpPr/>
+        <p:nvPr/>
+      </p:nvGrpSpPr>
+      <p:grpSpPr>
+        <a:xfrm>
+          <a:off x="0" y="0"/>
+          <a:ext cx="0" cy="0"/>
+          <a:chOff x="0" y="0"/>
+          <a:chExt cx="0" cy="0"/>
+        </a:xfrm>
+      </p:grpSpPr>
+      <p:sp>
+        <p:nvSpPr>
+          <p:cNvPr id="2" name="Slide Image Placeholder 1"/>
+          <p:cNvSpPr>
+            <a:spLocks noGrp="1"/>
+          </p:cNvSpPr>
+          <p:nvPr>
+            <p:ph type="sldImg" idx="2"/>
+          </p:nvPr>
+        </p:nvSpPr>
+        <p:spPr/>
+      </p:sp>
+      <p:sp>
+        <p:nvSpPr>
+          <p:cNvPr id="3" name="Notes Placeholder 2"/>
+          <p:cNvSpPr>
+            <a:spLocks noGrp="1"/>
+          </p:cNvSpPr>
+          <p:nvPr>
+            <p:ph type="body" idx="3" sz="quarter"/>
+          </p:nvPr>
+        </p:nvSpPr>
+        <p:spPr/>
+        <p:txBody>
+          <a:bodyPr/>
+          <a:lstStyle/>
+          <a:p>
+            <a:r>
+              <a:t>Better said than asked. The direction gap is the one that would most change the headline number.</a:t>
+            </a:r>
+          </a:p>
+        </p:txBody>
+      </p:sp>
+      <p:sp>
+        <p:nvSpPr>
+          <p:cNvPr id="4" name="Slide Number Placeholder 3"/>
+          <p:cNvSpPr>
+            <a:spLocks noGrp="1"/>
+          </p:cNvSpPr>
+          <p:nvPr>
+            <p:ph type="sldNum" idx="5" sz="quarter"/>
+          </p:nvPr>
+        </p:nvSpPr>
+        <p:spPr/>
+      </p:sp>
+    </p:spTree>
+  </p:cSld>
+  <p:clrMapOvr>
+    <a:masterClrMapping/>
+  </p:clrMapOvr>
+</p:notes>
+</file>
+
+<file path=ppt/notesSlides/notesSlide23.xml><?xml version="1.0" encoding="utf-8"?>
+<p:notes xmlns:a="http://schemas.openxmlformats.org/drawingml/2006/main" xmlns:p="http://schemas.openxmlformats.org/presentationml/2006/main" xmlns:r="http://schemas.openxmlformats.org/officeDocument/2006/relationships">
+  <p:cSld>
+    <p:spTree>
+      <p:nvGrpSpPr>
+        <p:cNvPr id="1" name=""/>
+        <p:cNvGrpSpPr/>
+        <p:nvPr/>
+      </p:nvGrpSpPr>
+      <p:grpSpPr>
+        <a:xfrm>
+          <a:off x="0" y="0"/>
+          <a:ext cx="0" cy="0"/>
+          <a:chOff x="0" y="0"/>
+          <a:chExt cx="0" cy="0"/>
+        </a:xfrm>
+      </p:grpSpPr>
+      <p:sp>
+        <p:nvSpPr>
+          <p:cNvPr id="2" name="Slide Image Placeholder 1"/>
+          <p:cNvSpPr>
+            <a:spLocks noGrp="1"/>
+          </p:cNvSpPr>
+          <p:nvPr>
+            <p:ph type="sldImg" idx="2"/>
+          </p:nvPr>
+        </p:nvSpPr>
+        <p:spPr/>
+      </p:sp>
+      <p:sp>
+        <p:nvSpPr>
+          <p:cNvPr id="3" name="Notes Placeholder 2"/>
+          <p:cNvSpPr>
+            <a:spLocks noGrp="1"/>
+          </p:cNvSpPr>
+          <p:nvPr>
+            <p:ph type="body" idx="3" sz="quarter"/>
+          </p:nvPr>
+        </p:nvSpPr>
+        <p:spPr/>
+        <p:txBody>
+          <a:bodyPr/>
+          <a:lstStyle/>
+          <a:p>
+            <a:r>
+              <a:t>Carried from the 09-18 deck so the inv_chain numbers on slide 3 are not read as a win. review_2026-09-09 item 12B has the measurement.</a:t>
             </a:r>
           </a:p>
         </p:txBody>
@@ -3804,7 +4159,7 @@
         <p:spPr>
           <a:xfrm>
             <a:off x="411480" y="987552"/>
-            <a:ext cx="11384280" cy="2642616"/>
+            <a:ext cx="11384280" cy="3547872"/>
           </a:xfrm>
         </p:spPr>
         <p:txBody>
@@ -3817,8 +4172,8 @@
               </a:spcAft>
             </a:pPr>
             <a:r>
-              <a:rPr sz="1800"/>
-              <a:t>The file records Ku(t) on one full transition — and Ku(t) is the map applied to the gate. One curve, two unknowns.</a:t>
+              <a:rPr sz="1700"/>
+              <a:t>The file records Ku(t) on one full transition. That is a complete waveform — it has shape at every instant, not just at its ends. Shape is not what is missing.</a:t>
             </a:r>
           </a:p>
           <a:p>
@@ -3828,23 +4183,12 @@
               </a:spcAft>
             </a:pPr>
             <a:r>
-              <a:rPr sz="1800"/>
-              <a:t>We now know the map is a real, fixed, measurable curve. So the missing factor is the gate's trajectory.</a:t>
-            </a:r>
-          </a:p>
-          <a:p>
-            <a:pPr>
-              <a:spcAft>
-                <a:spcPts val="400"/>
-              </a:spcAft>
-            </a:pPr>
-            <a:r>
-              <a:rPr sz="1800" b="1">
+              <a:rPr sz="1700" b="1">
                 <a:solidFill>
                   <a:srgbClr val="2B7A43"/>
                 </a:solidFill>
               </a:rPr>
-              <a:t>A full transition only ever visits the two ends of the gate's travel — it starts at rest and finishes at the rail. Any gate that agrees at the ends reproduces the whole full-swing waveform, so the file cannot pick one.</a:t>
+              <a:t>What is missing is the split. Ku(t) = map(gate(t)) fixes the composition and nothing more: pick any gate trajectory you like, and the map is forced to be whatever reproduces Ku(t). Every such pair matches the file exactly.</a:t>
             </a:r>
           </a:p>
           <a:p>
@@ -3854,12 +4198,27 @@
               </a:spcAft>
             </a:pPr>
             <a:r>
-              <a:rPr sz="1800" b="1">
+              <a:rPr sz="1700" b="1">
                 <a:solidFill>
                   <a:srgbClr val="2B7A43"/>
                 </a:solidFill>
               </a:rPr>
-              <a:t>That is exactly why our GUP passes the full-swing check and fails under stress.</a:t>
+              <a:t>A truncated pulse breaks the tie — because the chain then produces a different gate trajectory, and where it turns round depends on how fast the gate was really travelling. A fast gate is near the rail at the reversal, a slow one is only halfway, and the same static map reads different values off them.</a:t>
+            </a:r>
+          </a:p>
+          <a:p>
+            <a:pPr>
+              <a:spcAft>
+                <a:spcPts val="400"/>
+              </a:spcAft>
+            </a:pPr>
+            <a:r>
+              <a:rPr sz="1700" b="1">
+                <a:solidFill>
+                  <a:srgbClr val="2B7A43"/>
+                </a:solidFill>
+              </a:rPr>
+              <a:t>That is why our GUP passes the full-swing check and fails under stress: it is one legal split, and not the right one.</a:t>
             </a:r>
           </a:p>
         </p:txBody>
@@ -4265,7 +4624,7 @@
           <a:lstStyle/>
           <a:p>
             <a:r>
-              <a:t>10 · What we build</a:t>
+              <a:t>The model we build</a:t>
             </a:r>
           </a:p>
         </p:txBody>
@@ -4283,7 +4642,7 @@
         <p:spPr>
           <a:xfrm>
             <a:off x="411480" y="987552"/>
-            <a:ext cx="11384280" cy="3767328"/>
+            <a:ext cx="11384280" cy="1517904"/>
           </a:xfrm>
         </p:spPr>
         <p:txBody>
@@ -4296,75 +4655,51 @@
               </a:spcAft>
             </a:pPr>
             <a:r>
-              <a:rPr sz="1700" b="1">
+              <a:rPr sz="1800"/>
+              <a:t>Everything to the right of the gate is the file's own, untouched: the map turns the gate into Ku, and Ku scales the file's I-V tables. That part we have already shown is right.</a:t>
+            </a:r>
+          </a:p>
+          <a:p>
+            <a:pPr>
+              <a:spcAft>
+                <a:spcPts val="400"/>
+              </a:spcAft>
+            </a:pPr>
+            <a:r>
+              <a:rPr sz="1800" b="1">
                 <a:solidFill>
                   <a:srgbClr val="2B7A43"/>
                 </a:solidFill>
               </a:rPr>
-              <a:t>input  →  K identical current-limited stages  →  gate g  →  the map  →  Ku  →  the file's own I-V tables  →  the pad</a:t>
-            </a:r>
-          </a:p>
-          <a:p>
-            <a:pPr>
-              <a:spcAft>
-                <a:spcPts val="400"/>
-              </a:spcAft>
-            </a:pPr>
-            <a:r>
-              <a:rPr sz="1700"/>
-              <a:t/>
-            </a:r>
-          </a:p>
-          <a:p>
-            <a:pPr>
-              <a:spcAft>
-                <a:spcPts val="400"/>
-              </a:spcAft>
-            </a:pPr>
-            <a:r>
-              <a:rPr sz="1700"/>
-              <a:t>Each stage:   dv/dt = s_up·h(u)·min(1, (1−v)/x_lin)  −  s_dn·h(1−u)·min(1, v/x_lin),   with h(u) = clip((u − vt)/(1 − vt), 0, 1)</a:t>
-            </a:r>
-          </a:p>
-          <a:p>
-            <a:pPr>
-              <a:spcAft>
-                <a:spcPts val="400"/>
-              </a:spcAft>
-            </a:pPr>
-            <a:r>
-              <a:rPr sz="1700"/>
-              <a:t/>
-            </a:r>
-          </a:p>
-          <a:p>
-            <a:pPr>
-              <a:spcAft>
-                <a:spcPts val="400"/>
-              </a:spcAft>
-            </a:pPr>
-            <a:r>
-              <a:rPr sz="1700"/>
-              <a:t>All K stages share one set of the four numbers — a real tapered predriver is approximately that, and letting them differ makes the fit degenerate.</a:t>
-            </a:r>
-          </a:p>
-          <a:p>
-            <a:pPr>
-              <a:spcAft>
-                <a:spcPts val="400"/>
-              </a:spcAft>
-            </a:pPr>
-            <a:r>
-              <a:rPr sz="1700" b="1">
-                <a:solidFill>
-                  <a:srgbClr val="2B7A43"/>
-                </a:solidFill>
-              </a:rPr>
-              <a:t>Two things are still unknown: how many stages, and the shape of the map. Neither can be fitted to the file — that is what the stressed run is spent on.</a:t>
-            </a:r>
-          </a:p>
-        </p:txBody>
-      </p:sp>
+              <a:t>What we are building is the left-hand box — a chain of K identical current-limited stages standing in for the predriver we cannot see.</a:t>
+            </a:r>
+          </a:p>
+        </p:txBody>
+      </p:sp>
+      <p:pic>
+        <p:nvPicPr>
+          <p:cNvPr id="4" name="Picture 3" descr="model_blocks.png"/>
+          <p:cNvPicPr>
+            <a:picLocks noChangeAspect="1"/>
+          </p:cNvPicPr>
+          <p:nvPr/>
+        </p:nvPicPr>
+        <p:blipFill>
+          <a:blip r:embed="rId2"/>
+          <a:stretch>
+            <a:fillRect/>
+          </a:stretch>
+        </p:blipFill>
+        <p:spPr>
+          <a:xfrm>
+            <a:off x="411480" y="2578608"/>
+            <a:ext cx="11384280" cy="3145406"/>
+          </a:xfrm>
+          <a:prstGeom prst="rect">
+            <a:avLst/>
+          </a:prstGeom>
+        </p:spPr>
+      </p:pic>
     </p:spTree>
   </p:cSld>
   <p:clrMapOvr>
@@ -4399,7 +4734,7 @@
           <a:lstStyle/>
           <a:p>
             <a:r>
-              <a:t>11 · Where every number comes from</a:t>
+              <a:t>Step 1 — C_comp, from the file's own arithmetic</a:t>
             </a:r>
           </a:p>
         </p:txBody>
@@ -4417,12 +4752,45 @@
         <p:spPr>
           <a:xfrm>
             <a:off x="411480" y="987552"/>
-            <a:ext cx="11384280" cy="3246120"/>
+            <a:ext cx="11384280" cy="2944368"/>
           </a:xfrm>
         </p:spPr>
         <p:txBody>
           <a:bodyPr/>
           <a:lstStyle/>
+          <a:p>
+            <a:pPr>
+              <a:spcAft>
+                <a:spcPts val="400"/>
+              </a:spcAft>
+            </a:pPr>
+            <a:r>
+              <a:rPr sz="1700"/>
+              <a:t>C_comp is not a model parameter. It is a number in the file that the file's own Ku tables were solved with, so a wrong value inflates the curve everything downstream is fitted to.</a:t>
+            </a:r>
+          </a:p>
+          <a:p>
+            <a:pPr>
+              <a:spcAft>
+                <a:spcPts val="400"/>
+              </a:spcAft>
+            </a:pPr>
+            <a:r>
+              <a:rPr sz="1700"/>
+              <a:t>Ku is a conducting fraction, so it cannot exceed 1. ex2's declared 5.0 pF implies Ku = 1.24 — impossible, so the file rejects its own declared value.</a:t>
+            </a:r>
+          </a:p>
+          <a:p>
+            <a:pPr>
+              <a:spcAft>
+                <a:spcPts val="400"/>
+              </a:spcAft>
+            </a:pPr>
+            <a:r>
+              <a:rPr sz="1700"/>
+              <a:t>Rule: keep what the file declares unless it implies Ku &gt; 1; then take the value at which Ku just reaches 1. On ex2 that reads 2.64 pF, against 1.70 measured by the loop.</a:t>
+            </a:r>
+          </a:p>
           <a:p>
             <a:pPr>
               <a:spcAft>
@@ -4435,52 +4803,7 @@
                   <a:srgbClr val="2B7A43"/>
                 </a:solidFill>
               </a:rPr>
-              <a:t>From the file alone: C_comp — kept unless the file's own arithmetic rejects it, since Ku cannot exceed 1 and ex2's declared 5.0 pF implies 1.24 — and s_up, s_dn, vt, x_lin, fitted to the file's Ku(t).</a:t>
-            </a:r>
-          </a:p>
-          <a:p>
-            <a:pPr>
-              <a:spcAft>
-                <a:spcPts val="400"/>
-              </a:spcAft>
-            </a:pPr>
-            <a:r>
-              <a:rPr sz="1700" b="1">
-                <a:solidFill>
-                  <a:srgbClr val="2B7A43"/>
-                </a:solidFill>
-              </a:rPr>
-              <a:t>From the one stressed pad run: the stage count K and the map's shape. The file narrows K to a band of about three and cannot choose inside it: at K = 7 and K = 9 it fits to the same four decimal places, while the gate they predict runs from extinguished to almost intact.</a:t>
-            </a:r>
-          </a:p>
-          <a:p>
-            <a:pPr>
-              <a:spcAft>
-                <a:spcPts val="400"/>
-              </a:spcAft>
-            </a:pPr>
-            <a:r>
-              <a:rPr sz="1700" b="1">
-                <a:solidFill>
-                  <a:srgbClr val="2B7A43"/>
-                </a:solidFill>
-              </a:rPr>
-              <a:t>The run is spent twice, in order: first it sets the amplitude by moving vt, then it picks among the nine candidates (3 stage counts × 3 shapes) on the whole pad waveform.</a:t>
-            </a:r>
-          </a:p>
-          <a:p>
-            <a:pPr>
-              <a:spcAft>
-                <a:spcPts val="400"/>
-              </a:spcAft>
-            </a:pPr>
-            <a:r>
-              <a:rPr sz="1700" b="1">
-                <a:solidFill>
-                  <a:srgbClr val="2B7A43"/>
-                </a:solidFill>
-              </a:rPr>
-              <a:t>Not on the peak — the first step has just matched the peak for every candidate, so the peak has no information left to rank them with.</a:t>
+              <a:t>55 % off the measured value, and it still works — the stressed peak is not sharp in C_comp once it is in the right range.</a:t>
             </a:r>
           </a:p>
         </p:txBody>
@@ -4519,7 +4842,710 @@
           <a:lstStyle/>
           <a:p>
             <a:r>
-              <a:t>12 · Where the file-only recipe stands</a:t>
+              <a:t>Step 2 — the four numbers, fitted to the file</a:t>
+            </a:r>
+          </a:p>
+        </p:txBody>
+      </p:sp>
+      <p:sp>
+        <p:nvSpPr>
+          <p:cNvPr id="3" name="Content Placeholder 2"/>
+          <p:cNvSpPr>
+            <a:spLocks noGrp="1"/>
+          </p:cNvSpPr>
+          <p:nvPr>
+            <p:ph idx="10"/>
+          </p:nvPr>
+        </p:nvSpPr>
+        <p:spPr>
+          <a:xfrm>
+            <a:off x="411480" y="987552"/>
+            <a:ext cx="11384280" cy="2752344"/>
+          </a:xfrm>
+        </p:spPr>
+        <p:txBody>
+          <a:bodyPr/>
+          <a:lstStyle/>
+          <a:p>
+            <a:pPr>
+              <a:spcAft>
+                <a:spcPts val="400"/>
+              </a:spcAft>
+            </a:pPr>
+            <a:r>
+              <a:rPr sz="1700"/>
+              <a:t>For a given number of stages, the four numbers are fitted so that the chain's output, put through the map, reproduces the file's own full-swing Ku(t).</a:t>
+            </a:r>
+          </a:p>
+          <a:p>
+            <a:pPr>
+              <a:spcAft>
+                <a:spcPts val="400"/>
+              </a:spcAft>
+            </a:pPr>
+            <a:r>
+              <a:rPr sz="1700"/>
+              <a:t>Nelder–Mead, three restarts. No measurement is involved — the target is a curve the file already contains.</a:t>
+            </a:r>
+          </a:p>
+          <a:p>
+            <a:pPr>
+              <a:spcAft>
+                <a:spcPts val="400"/>
+              </a:spcAft>
+            </a:pPr>
+            <a:r>
+              <a:rPr sz="1700" b="1">
+                <a:solidFill>
+                  <a:srgbClr val="2B7A43"/>
+                </a:solidFill>
+              </a:rPr>
+              <a:t>So the stage law costs nothing. What it does not give us is K, or the map's shape.</a:t>
+            </a:r>
+          </a:p>
+          <a:p>
+            <a:pPr>
+              <a:spcAft>
+                <a:spcPts val="400"/>
+              </a:spcAft>
+            </a:pPr>
+            <a:r>
+              <a:rPr sz="1700"/>
+              <a:t/>
+            </a:r>
+          </a:p>
+          <a:p>
+            <a:pPr>
+              <a:spcAft>
+                <a:spcPts val="400"/>
+              </a:spcAft>
+            </a:pPr>
+            <a:r>
+              <a:rPr sz="1700"/>
+              <a:t>Why not? Because a stage count that fits the file worse by a few per cent can behave completely differently under stress — which is the next slide.</a:t>
+            </a:r>
+          </a:p>
+        </p:txBody>
+      </p:sp>
+    </p:spTree>
+  </p:cSld>
+  <p:clrMapOvr>
+    <a:masterClrMapping/>
+  </p:clrMapOvr>
+</p:sld>
+</file>
+
+<file path=ppt/slides/slide17.xml><?xml version="1.0" encoding="utf-8"?>
+<p:sld xmlns:a="http://schemas.openxmlformats.org/drawingml/2006/main" xmlns:p="http://schemas.openxmlformats.org/presentationml/2006/main" xmlns:r="http://schemas.openxmlformats.org/officeDocument/2006/relationships">
+  <p:cSld>
+    <p:spTree>
+      <p:nvGrpSpPr>
+        <p:cNvPr id="1" name=""/>
+        <p:cNvGrpSpPr/>
+        <p:nvPr/>
+      </p:nvGrpSpPr>
+      <p:grpSpPr/>
+      <p:sp>
+        <p:nvSpPr>
+          <p:cNvPr id="2" name="Title 1"/>
+          <p:cNvSpPr>
+            <a:spLocks noGrp="1"/>
+          </p:cNvSpPr>
+          <p:nvPr>
+            <p:ph type="title"/>
+          </p:nvPr>
+        </p:nvSpPr>
+        <p:spPr/>
+        <p:txBody>
+          <a:bodyPr/>
+          <a:lstStyle/>
+          <a:p>
+            <a:r>
+              <a:t>Step 3 — what the file cannot choose</a:t>
+            </a:r>
+          </a:p>
+        </p:txBody>
+      </p:sp>
+      <p:sp>
+        <p:nvSpPr>
+          <p:cNvPr id="3" name="Content Placeholder 2"/>
+          <p:cNvSpPr>
+            <a:spLocks noGrp="1"/>
+          </p:cNvSpPr>
+          <p:nvPr>
+            <p:ph idx="10"/>
+          </p:nvPr>
+        </p:nvSpPr>
+        <p:spPr>
+          <a:xfrm>
+            <a:off x="411480" y="987552"/>
+            <a:ext cx="11384280" cy="2231136"/>
+          </a:xfrm>
+        </p:spPr>
+        <p:txBody>
+          <a:bodyPr/>
+          <a:lstStyle/>
+          <a:p>
+            <a:pPr>
+              <a:spcAft>
+                <a:spcPts val="400"/>
+              </a:spcAft>
+            </a:pPr>
+            <a:r>
+              <a:rPr sz="1800"/>
+              <a:t>Left: the fit error against the file's Ku(t), for every stage count. Past K = 3 it is flat — the file has nothing left to say.</a:t>
+            </a:r>
+          </a:p>
+          <a:p>
+            <a:pPr>
+              <a:spcAft>
+                <a:spcPts val="400"/>
+              </a:spcAft>
+            </a:pPr>
+            <a:r>
+              <a:rPr sz="1800"/>
+              <a:t>Right: the three candidates inside that band, on one 810 ps stressed pulse. Same file, same fit quality, three completely different buffers.</a:t>
+            </a:r>
+          </a:p>
+          <a:p>
+            <a:pPr>
+              <a:spcAft>
+                <a:spcPts val="400"/>
+              </a:spcAft>
+            </a:pPr>
+            <a:r>
+              <a:rPr sz="1800" b="1">
+                <a:solidFill>
+                  <a:srgbClr val="2B7A43"/>
+                </a:solidFill>
+              </a:rPr>
+              <a:t>So the file gives a band of three, and the map's shape is under-determined in exactly the same way. Three stage counts × three map shapes = nine candidates.</a:t>
+            </a:r>
+          </a:p>
+        </p:txBody>
+      </p:sp>
+      <p:pic>
+        <p:nvPicPr>
+          <p:cNvPr id="4" name="Picture 3" descr="k_choice.png"/>
+          <p:cNvPicPr>
+            <a:picLocks noChangeAspect="1"/>
+          </p:cNvPicPr>
+          <p:nvPr/>
+        </p:nvPicPr>
+        <p:blipFill>
+          <a:blip r:embed="rId2"/>
+          <a:stretch>
+            <a:fillRect/>
+          </a:stretch>
+        </p:blipFill>
+        <p:spPr>
+          <a:xfrm>
+            <a:off x="1397800" y="3291840"/>
+            <a:ext cx="9411638" cy="3227832"/>
+          </a:xfrm>
+          <a:prstGeom prst="rect">
+            <a:avLst/>
+          </a:prstGeom>
+        </p:spPr>
+      </p:pic>
+    </p:spTree>
+  </p:cSld>
+  <p:clrMapOvr>
+    <a:masterClrMapping/>
+  </p:clrMapOvr>
+</p:sld>
+</file>
+
+<file path=ppt/slides/slide18.xml><?xml version="1.0" encoding="utf-8"?>
+<p:sld xmlns:a="http://schemas.openxmlformats.org/drawingml/2006/main" xmlns:p="http://schemas.openxmlformats.org/presentationml/2006/main" xmlns:r="http://schemas.openxmlformats.org/officeDocument/2006/relationships">
+  <p:cSld>
+    <p:spTree>
+      <p:nvGrpSpPr>
+        <p:cNvPr id="1" name=""/>
+        <p:cNvGrpSpPr/>
+        <p:nvPr/>
+      </p:nvGrpSpPr>
+      <p:grpSpPr/>
+      <p:sp>
+        <p:nvSpPr>
+          <p:cNvPr id="2" name="Title 1"/>
+          <p:cNvSpPr>
+            <a:spLocks noGrp="1"/>
+          </p:cNvSpPr>
+          <p:nvPr>
+            <p:ph type="title"/>
+          </p:nvPr>
+        </p:nvSpPr>
+        <p:spPr/>
+        <p:txBody>
+          <a:bodyPr/>
+          <a:lstStyle/>
+          <a:p>
+            <a:r>
+              <a:t>Step 4 — the stressed run, first job: set the amplitude</a:t>
+            </a:r>
+          </a:p>
+        </p:txBody>
+      </p:sp>
+      <p:sp>
+        <p:nvSpPr>
+          <p:cNvPr id="3" name="Content Placeholder 2"/>
+          <p:cNvSpPr>
+            <a:spLocks noGrp="1"/>
+          </p:cNvSpPr>
+          <p:nvPr>
+            <p:ph idx="10"/>
+          </p:nvPr>
+        </p:nvSpPr>
+        <p:spPr>
+          <a:xfrm>
+            <a:off x="411480" y="987552"/>
+            <a:ext cx="11384280" cy="2340864"/>
+          </a:xfrm>
+        </p:spPr>
+        <p:txBody>
+          <a:bodyPr/>
+          <a:lstStyle/>
+          <a:p>
+            <a:pPr>
+              <a:spcAft>
+                <a:spcPts val="400"/>
+              </a:spcAft>
+            </a:pPr>
+            <a:r>
+              <a:rPr sz="1700"/>
+              <a:t>Now the one measured waveform enters. Its first job is to fix how hard the chain drives.</a:t>
+            </a:r>
+          </a:p>
+          <a:p>
+            <a:pPr>
+              <a:spcAft>
+                <a:spcPts val="400"/>
+              </a:spcAft>
+            </a:pPr>
+            <a:r>
+              <a:rPr sz="1700" b="1">
+                <a:solidFill>
+                  <a:srgbClr val="2B7A43"/>
+                </a:solidFill>
+              </a:rPr>
+              <a:t>The parameters fitted to the file alone are nowhere near right under stress. On ex2 at K = 3 the fitted threshold vt = 0.700 gives a pad 97 % too low on the 810 ps pulse.</a:t>
+            </a:r>
+          </a:p>
+          <a:p>
+            <a:pPr>
+              <a:spcAft>
+                <a:spcPts val="400"/>
+              </a:spcAft>
+            </a:pPr>
+            <a:r>
+              <a:rPr sz="1700"/>
+              <a:t>So bisect vt until the model's peak matches the measured one — seven ngspice runs, 0.700 → 0.632.</a:t>
+            </a:r>
+          </a:p>
+          <a:p>
+            <a:pPr>
+              <a:spcAft>
+                <a:spcPts val="400"/>
+              </a:spcAft>
+            </a:pPr>
+            <a:r>
+              <a:rPr sz="1700" b="1">
+                <a:solidFill>
+                  <a:srgbClr val="2B7A43"/>
+                </a:solidFill>
+              </a:rPr>
+              <a:t>Why vt and not the drive rates? The rates were fitted to reproduce the full swing, and moving them breaks it. vt changes *when* the chain hands off, not how fast it runs.</a:t>
+            </a:r>
+          </a:p>
+        </p:txBody>
+      </p:sp>
+    </p:spTree>
+  </p:cSld>
+  <p:clrMapOvr>
+    <a:masterClrMapping/>
+  </p:clrMapOvr>
+</p:sld>
+</file>
+
+<file path=ppt/slides/slide19.xml><?xml version="1.0" encoding="utf-8"?>
+<p:sld xmlns:a="http://schemas.openxmlformats.org/drawingml/2006/main" xmlns:p="http://schemas.openxmlformats.org/presentationml/2006/main" xmlns:r="http://schemas.openxmlformats.org/officeDocument/2006/relationships">
+  <p:cSld>
+    <p:spTree>
+      <p:nvGrpSpPr>
+        <p:cNvPr id="1" name=""/>
+        <p:cNvGrpSpPr/>
+        <p:nvPr/>
+      </p:nvGrpSpPr>
+      <p:grpSpPr/>
+      <p:sp>
+        <p:nvSpPr>
+          <p:cNvPr id="2" name="Title 1"/>
+          <p:cNvSpPr>
+            <a:spLocks noGrp="1"/>
+          </p:cNvSpPr>
+          <p:nvPr>
+            <p:ph type="title"/>
+          </p:nvPr>
+        </p:nvSpPr>
+        <p:spPr/>
+        <p:txBody>
+          <a:bodyPr/>
+          <a:lstStyle/>
+          <a:p>
+            <a:r>
+              <a:t>Step 5 — the stressed run, second job: pick one</a:t>
+            </a:r>
+          </a:p>
+        </p:txBody>
+      </p:sp>
+      <p:sp>
+        <p:nvSpPr>
+          <p:cNvPr id="3" name="Content Placeholder 2"/>
+          <p:cNvSpPr>
+            <a:spLocks noGrp="1"/>
+          </p:cNvSpPr>
+          <p:nvPr>
+            <p:ph idx="10"/>
+          </p:nvPr>
+        </p:nvSpPr>
+        <p:spPr>
+          <a:xfrm>
+            <a:off x="411480" y="987552"/>
+            <a:ext cx="11384280" cy="2532888"/>
+          </a:xfrm>
+        </p:spPr>
+        <p:txBody>
+          <a:bodyPr/>
+          <a:lstStyle/>
+          <a:p>
+            <a:pPr>
+              <a:spcAft>
+                <a:spcPts val="400"/>
+              </a:spcAft>
+            </a:pPr>
+            <a:r>
+              <a:rPr sz="1800"/>
+              <a:t>All nine candidates have now been calibrated, so all nine hit the measured peak — the calibration put it there. The peak has no information left in it.</a:t>
+            </a:r>
+          </a:p>
+          <a:p>
+            <a:pPr>
+              <a:spcAft>
+                <a:spcPts val="400"/>
+              </a:spcAft>
+            </a:pPr>
+            <a:r>
+              <a:rPr sz="1800"/>
+              <a:t>They differ everywhere else. Compare the whole measured waveform instead, over the pulse and its return, and one candidate wins: K = 3 with the 0.50/0.70 shape, at 59 mV rms against 84, 140 and worse for the rest.</a:t>
+            </a:r>
+          </a:p>
+          <a:p>
+            <a:pPr>
+              <a:spcAft>
+                <a:spcPts val="400"/>
+              </a:spcAft>
+            </a:pPr>
+            <a:r>
+              <a:rPr sz="1800" b="1">
+                <a:solidFill>
+                  <a:srgbClr val="2B7A43"/>
+                </a:solidFill>
+              </a:rPr>
+              <a:t>Ranking on the peak instead picks a chain that arrives up to 300 ps late with four times the waveform error.</a:t>
+            </a:r>
+          </a:p>
+        </p:txBody>
+      </p:sp>
+      <p:pic>
+        <p:nvPicPr>
+          <p:cNvPr id="4" name="Picture 3" descr="calib_select.png"/>
+          <p:cNvPicPr>
+            <a:picLocks noChangeAspect="1"/>
+          </p:cNvPicPr>
+          <p:nvPr/>
+        </p:nvPicPr>
+        <p:blipFill>
+          <a:blip r:embed="rId2"/>
+          <a:stretch>
+            <a:fillRect/>
+          </a:stretch>
+        </p:blipFill>
+        <p:spPr>
+          <a:xfrm>
+            <a:off x="2227668" y="3593592"/>
+            <a:ext cx="7751902" cy="2926080"/>
+          </a:xfrm>
+          <a:prstGeom prst="rect">
+            <a:avLst/>
+          </a:prstGeom>
+        </p:spPr>
+      </p:pic>
+    </p:spTree>
+  </p:cSld>
+  <p:clrMapOvr>
+    <a:masterClrMapping/>
+  </p:clrMapOvr>
+</p:sld>
+</file>
+
+<file path=ppt/slides/slide2.xml><?xml version="1.0" encoding="utf-8"?>
+<p:sld xmlns:a="http://schemas.openxmlformats.org/drawingml/2006/main" xmlns:p="http://schemas.openxmlformats.org/presentationml/2006/main" xmlns:r="http://schemas.openxmlformats.org/officeDocument/2006/relationships">
+  <p:cSld>
+    <p:spTree>
+      <p:nvGrpSpPr>
+        <p:cNvPr id="1" name=""/>
+        <p:cNvGrpSpPr/>
+        <p:nvPr/>
+      </p:nvGrpSpPr>
+      <p:grpSpPr/>
+      <p:sp>
+        <p:nvSpPr>
+          <p:cNvPr id="2" name="Title 1"/>
+          <p:cNvSpPr>
+            <a:spLocks noGrp="1"/>
+          </p:cNvSpPr>
+          <p:nvPr>
+            <p:ph type="title"/>
+          </p:nvPr>
+        </p:nvSpPr>
+        <p:spPr/>
+        <p:txBody>
+          <a:bodyPr/>
+          <a:lstStyle/>
+          <a:p>
+            <a:r>
+              <a:t>1 · We can look inside our own test chips</a:t>
+            </a:r>
+          </a:p>
+        </p:txBody>
+      </p:sp>
+      <p:sp>
+        <p:nvSpPr>
+          <p:cNvPr id="3" name="Content Placeholder 2"/>
+          <p:cNvSpPr>
+            <a:spLocks noGrp="1"/>
+          </p:cNvSpPr>
+          <p:nvPr>
+            <p:ph idx="10"/>
+          </p:nvPr>
+        </p:nvSpPr>
+        <p:spPr>
+          <a:xfrm>
+            <a:off x="411480" y="987552"/>
+            <a:ext cx="11384280" cy="1819656"/>
+          </a:xfrm>
+        </p:spPr>
+        <p:txBody>
+          <a:bodyPr/>
+          <a:lstStyle/>
+          <a:p>
+            <a:pPr>
+              <a:spcAft>
+                <a:spcPts val="400"/>
+              </a:spcAft>
+            </a:pPr>
+            <a:r>
+              <a:rPr sz="1800"/>
+              <a:t>These are our designs, so the transistor netlist is available and every internal node can be probed. A customer using a vendor's IBIS file cannot do this — which is the whole problem, and the reason to do it once, carefully.</a:t>
+            </a:r>
+          </a:p>
+          <a:p>
+            <a:pPr>
+              <a:spcAft>
+                <a:spcPts val="400"/>
+              </a:spcAft>
+            </a:pPr>
+            <a:r>
+              <a:rPr sz="1800" b="1">
+                <a:solidFill>
+                  <a:srgbClr val="2B7A43"/>
+                </a:solidFill>
+              </a:rPr>
+              <a:t>The node that matters is the output stage's gate — ex2's n4 below. Everything the pad does is decided there.</a:t>
+            </a:r>
+          </a:p>
+        </p:txBody>
+      </p:sp>
+      <p:pic>
+        <p:nvPicPr>
+          <p:cNvPr id="4" name="Picture 3" descr="schematic_ex2.png"/>
+          <p:cNvPicPr>
+            <a:picLocks noChangeAspect="1"/>
+          </p:cNvPicPr>
+          <p:nvPr/>
+        </p:nvPicPr>
+        <p:blipFill>
+          <a:blip r:embed="rId2"/>
+          <a:stretch>
+            <a:fillRect/>
+          </a:stretch>
+        </p:blipFill>
+        <p:spPr>
+          <a:xfrm>
+            <a:off x="1554480" y="2880360"/>
+            <a:ext cx="9098280" cy="3639312"/>
+          </a:xfrm>
+          <a:prstGeom prst="rect">
+            <a:avLst/>
+          </a:prstGeom>
+        </p:spPr>
+      </p:pic>
+    </p:spTree>
+  </p:cSld>
+  <p:clrMapOvr>
+    <a:masterClrMapping/>
+  </p:clrMapOvr>
+</p:sld>
+</file>
+
+<file path=ppt/slides/slide20.xml><?xml version="1.0" encoding="utf-8"?>
+<p:sld xmlns:a="http://schemas.openxmlformats.org/drawingml/2006/main" xmlns:p="http://schemas.openxmlformats.org/presentationml/2006/main" xmlns:r="http://schemas.openxmlformats.org/officeDocument/2006/relationships">
+  <p:cSld>
+    <p:spTree>
+      <p:nvGrpSpPr>
+        <p:cNvPr id="1" name=""/>
+        <p:cNvGrpSpPr/>
+        <p:nvPr/>
+      </p:nvGrpSpPr>
+      <p:grpSpPr/>
+      <p:sp>
+        <p:nvSpPr>
+          <p:cNvPr id="2" name="Title 1"/>
+          <p:cNvSpPr>
+            <a:spLocks noGrp="1"/>
+          </p:cNvSpPr>
+          <p:nvPr>
+            <p:ph type="title"/>
+          </p:nvPr>
+        </p:nvSpPr>
+        <p:spPr/>
+        <p:txBody>
+          <a:bodyPr/>
+          <a:lstStyle/>
+          <a:p>
+            <a:r>
+              <a:t>The recipe, on one slide</a:t>
+            </a:r>
+          </a:p>
+        </p:txBody>
+      </p:sp>
+      <p:sp>
+        <p:nvSpPr>
+          <p:cNvPr id="3" name="Content Placeholder 2"/>
+          <p:cNvSpPr>
+            <a:spLocks noGrp="1"/>
+          </p:cNvSpPr>
+          <p:nvPr>
+            <p:ph idx="10"/>
+          </p:nvPr>
+        </p:nvSpPr>
+        <p:spPr>
+          <a:xfrm>
+            <a:off x="411480" y="987552"/>
+            <a:ext cx="11384280" cy="2944368"/>
+          </a:xfrm>
+        </p:spPr>
+        <p:txBody>
+          <a:bodyPr/>
+          <a:lstStyle/>
+          <a:p>
+            <a:pPr>
+              <a:spcAft>
+                <a:spcPts val="400"/>
+              </a:spcAft>
+            </a:pPr>
+            <a:r>
+              <a:rPr sz="1700" b="1">
+                <a:solidFill>
+                  <a:srgbClr val="2B7A43"/>
+                </a:solidFill>
+              </a:rPr>
+              <a:t>From the file alone: C_comp, kept unless the file's own Ku &gt; 1 test rejects it; then s_up, s_dn, vt and x_lin fitted to the file's Ku(t), for each stage count in the band.</a:t>
+            </a:r>
+          </a:p>
+          <a:p>
+            <a:pPr>
+              <a:spcAft>
+                <a:spcPts val="400"/>
+              </a:spcAft>
+            </a:pPr>
+            <a:r>
+              <a:rPr sz="1700" b="1">
+                <a:solidFill>
+                  <a:srgbClr val="2B7A43"/>
+                </a:solidFill>
+              </a:rPr>
+              <a:t>From the file, but undetermined by it: the stage count K (a band of three) and the map's shape (three candidates) — nine models in all.</a:t>
+            </a:r>
+          </a:p>
+          <a:p>
+            <a:pPr>
+              <a:spcAft>
+                <a:spcPts val="400"/>
+              </a:spcAft>
+            </a:pPr>
+            <a:r>
+              <a:rPr sz="1700" b="1">
+                <a:solidFill>
+                  <a:srgbClr val="2B7A43"/>
+                </a:solidFill>
+              </a:rPr>
+              <a:t>From one stressed pad run, in order: bisect vt until the peak matches; then pick the candidate whose whole waveform matches.</a:t>
+            </a:r>
+          </a:p>
+          <a:p>
+            <a:pPr>
+              <a:spcAft>
+                <a:spcPts val="400"/>
+              </a:spcAft>
+            </a:pPr>
+            <a:r>
+              <a:rPr sz="1700" b="1">
+                <a:solidFill>
+                  <a:srgbClr val="2B7A43"/>
+                </a:solidFill>
+              </a:rPr>
+              <a:t>Nothing is probed. The only measurement is a pad voltage, taken from outside the chip with ordinary equipment.</a:t>
+            </a:r>
+          </a:p>
+        </p:txBody>
+      </p:sp>
+    </p:spTree>
+  </p:cSld>
+  <p:clrMapOvr>
+    <a:masterClrMapping/>
+  </p:clrMapOvr>
+</p:sld>
+</file>
+
+<file path=ppt/slides/slide21.xml><?xml version="1.0" encoding="utf-8"?>
+<p:sld xmlns:a="http://schemas.openxmlformats.org/drawingml/2006/main" xmlns:p="http://schemas.openxmlformats.org/presentationml/2006/main" xmlns:r="http://schemas.openxmlformats.org/officeDocument/2006/relationships">
+  <p:cSld>
+    <p:spTree>
+      <p:nvGrpSpPr>
+        <p:cNvPr id="1" name=""/>
+        <p:cNvGrpSpPr/>
+        <p:nvPr/>
+      </p:nvGrpSpPr>
+      <p:grpSpPr/>
+      <p:sp>
+        <p:nvSpPr>
+          <p:cNvPr id="2" name="Title 1"/>
+          <p:cNvSpPr>
+            <a:spLocks noGrp="1"/>
+          </p:cNvSpPr>
+          <p:nvPr>
+            <p:ph type="title"/>
+          </p:nvPr>
+        </p:nvSpPr>
+        <p:spPr/>
+        <p:txBody>
+          <a:bodyPr/>
+          <a:lstStyle/>
+          <a:p>
+            <a:r>
+              <a:t>Where the file-only recipe stands</a:t>
             </a:r>
           </a:p>
         </p:txBody>
@@ -4581,7 +5607,7 @@
                   <a:srgbClr val="2B7A43"/>
                 </a:solidFill>
               </a:rPr>
-              <a:t>What it costs: the full transition is worse than the shipped model on 10 of 12 buffers, and a stressed pulse train is still lost on ex2 and io_buf. We buy accuracy in the interior with accuracy at the endpoints.</a:t>
+              <a:t>What it costs: the full transition is worse than the shipped model on 10 of 12 buffers, and a stressed pulse train is still lost on ex2 and io_buf. We buy accuracy in stressed accuracy with full-swing accuracy.</a:t>
             </a:r>
           </a:p>
         </p:txBody>
@@ -4618,7 +5644,7 @@
 </p:sld>
 </file>
 
-<file path=ppt/slides/slide17.xml><?xml version="1.0" encoding="utf-8"?>
+<file path=ppt/slides/slide22.xml><?xml version="1.0" encoding="utf-8"?>
 <p:sld xmlns:a="http://schemas.openxmlformats.org/drawingml/2006/main" xmlns:p="http://schemas.openxmlformats.org/presentationml/2006/main" xmlns:r="http://schemas.openxmlformats.org/officeDocument/2006/relationships">
   <p:cSld>
     <p:spTree>
@@ -4644,7 +5670,7 @@
           <a:lstStyle/>
           <a:p>
             <a:r>
-              <a:t>13 · What this does not cover yet</a:t>
+              <a:t>What this does not cover yet</a:t>
             </a:r>
           </a:p>
         </p:txBody>
@@ -4738,7 +5764,7 @@
 </p:sld>
 </file>
 
-<file path=ppt/slides/slide18.xml><?xml version="1.0" encoding="utf-8"?>
+<file path=ppt/slides/slide23.xml><?xml version="1.0" encoding="utf-8"?>
 <p:sld xmlns:a="http://schemas.openxmlformats.org/drawingml/2006/main" xmlns:p="http://schemas.openxmlformats.org/presentationml/2006/main" xmlns:r="http://schemas.openxmlformats.org/officeDocument/2006/relationships">
   <p:cSld>
     <p:spTree>
@@ -4845,116 +5871,6 @@
           <a:xfrm>
             <a:off x="2085298" y="3291840"/>
             <a:ext cx="8036642" cy="3227832"/>
-          </a:xfrm>
-          <a:prstGeom prst="rect">
-            <a:avLst/>
-          </a:prstGeom>
-        </p:spPr>
-      </p:pic>
-    </p:spTree>
-  </p:cSld>
-  <p:clrMapOvr>
-    <a:masterClrMapping/>
-  </p:clrMapOvr>
-</p:sld>
-</file>
-
-<file path=ppt/slides/slide2.xml><?xml version="1.0" encoding="utf-8"?>
-<p:sld xmlns:a="http://schemas.openxmlformats.org/drawingml/2006/main" xmlns:p="http://schemas.openxmlformats.org/presentationml/2006/main" xmlns:r="http://schemas.openxmlformats.org/officeDocument/2006/relationships">
-  <p:cSld>
-    <p:spTree>
-      <p:nvGrpSpPr>
-        <p:cNvPr id="1" name=""/>
-        <p:cNvGrpSpPr/>
-        <p:nvPr/>
-      </p:nvGrpSpPr>
-      <p:grpSpPr/>
-      <p:sp>
-        <p:nvSpPr>
-          <p:cNvPr id="2" name="Title 1"/>
-          <p:cNvSpPr>
-            <a:spLocks noGrp="1"/>
-          </p:cNvSpPr>
-          <p:nvPr>
-            <p:ph type="title"/>
-          </p:nvPr>
-        </p:nvSpPr>
-        <p:spPr/>
-        <p:txBody>
-          <a:bodyPr/>
-          <a:lstStyle/>
-          <a:p>
-            <a:r>
-              <a:t>1 · We can look inside our own test chips</a:t>
-            </a:r>
-          </a:p>
-        </p:txBody>
-      </p:sp>
-      <p:sp>
-        <p:nvSpPr>
-          <p:cNvPr id="3" name="Content Placeholder 2"/>
-          <p:cNvSpPr>
-            <a:spLocks noGrp="1"/>
-          </p:cNvSpPr>
-          <p:nvPr>
-            <p:ph idx="10"/>
-          </p:nvPr>
-        </p:nvSpPr>
-        <p:spPr>
-          <a:xfrm>
-            <a:off x="411480" y="987552"/>
-            <a:ext cx="11384280" cy="1819656"/>
-          </a:xfrm>
-        </p:spPr>
-        <p:txBody>
-          <a:bodyPr/>
-          <a:lstStyle/>
-          <a:p>
-            <a:pPr>
-              <a:spcAft>
-                <a:spcPts val="400"/>
-              </a:spcAft>
-            </a:pPr>
-            <a:r>
-              <a:rPr sz="1800"/>
-              <a:t>These are our designs, so the transistor netlist is available and every internal node can be probed. A customer using a vendor's IBIS file cannot do this — which is the whole problem, and the reason to do it once, carefully.</a:t>
-            </a:r>
-          </a:p>
-          <a:p>
-            <a:pPr>
-              <a:spcAft>
-                <a:spcPts val="400"/>
-              </a:spcAft>
-            </a:pPr>
-            <a:r>
-              <a:rPr sz="1800" b="1">
-                <a:solidFill>
-                  <a:srgbClr val="2B7A43"/>
-                </a:solidFill>
-              </a:rPr>
-              <a:t>The node that matters is the output stage's gate — ex2's n4 below. Everything the pad does is decided there.</a:t>
-            </a:r>
-          </a:p>
-        </p:txBody>
-      </p:sp>
-      <p:pic>
-        <p:nvPicPr>
-          <p:cNvPr id="4" name="Picture 3" descr="schematic_ex2.png"/>
-          <p:cNvPicPr>
-            <a:picLocks noChangeAspect="1"/>
-          </p:cNvPicPr>
-          <p:nvPr/>
-        </p:nvPicPr>
-        <p:blipFill>
-          <a:blip r:embed="rId2"/>
-          <a:stretch>
-            <a:fillRect/>
-          </a:stretch>
-        </p:blipFill>
-        <p:spPr>
-          <a:xfrm>
-            <a:off x="1554480" y="2880360"/>
-            <a:ext cx="9098280" cy="3639312"/>
           </a:xfrm>
           <a:prstGeom prst="rect">
             <a:avLst/>

--- a/results/meeting_deck_2026-09-24/0924_track1_story.pptx
+++ b/results/meeting_deck_2026-09-24/0924_track1_story.pptx
@@ -31,6 +31,8 @@
     <p:sldId id="276" r:id="rId29"/>
     <p:sldId id="277" r:id="rId30"/>
     <p:sldId id="278" r:id="rId31"/>
+    <p:sldId id="279" r:id="rId32"/>
+    <p:sldId id="280" r:id="rId33"/>
   </p:sldIdLst>
   <p:sldSz cx="12192000" cy="6858000"/>
   <p:notesSz cx="6858000" cy="9144000"/>
@@ -612,7 +614,7 @@
           <a:lstStyle/>
           <a:p>
             <a:r>
-              <a:t>Slide 13 is the measured form of this - at K = 7 and K = 9 the model fits the file to the same four decimal places and predicts stressed gates running from extinguished to almost intact. Same composition, different split.</a:t>
+              <a:t>Data from the 09-17 method film's export. This is the beat the film spends most time on, and the deck previously skipped: Ku(t) is solved, not fitted.</a:t>
             </a:r>
           </a:p>
         </p:txBody>
@@ -682,7 +684,7 @@
           <a:lstStyle/>
           <a:p>
             <a:r>
-              <a:t>Grey is the full transition. The five coloured curves follow it and peel off at different points. This is the justification for asking the user for one stressed pad run, and for the 50-90 percent depth ladder.</a:t>
+              <a:t>The figure is the same point in the other factor: with no probe the map's shape has to be assumed, and the assumed shape and the measured one differ. Which shape you assume forces which gate the fit produces.</a:t>
             </a:r>
           </a:p>
         </p:txBody>
@@ -752,7 +754,7 @@
           <a:lstStyle/>
           <a:p>
             <a:r>
-              <a:t>This rules out RC cascades, delay-plus-RC and superposition - which is what the shipped model is built from. Data: predriver_stages_2026-09-09, whose own module computes the superposition.</a:t>
+              <a:t>Grey is the full transition; the coloured curves follow it and peel off at different points.</a:t>
             </a:r>
           </a:p>
         </p:txBody>
@@ -822,7 +824,7 @@
           <a:lstStyle/>
           <a:p>
             <a:r>
-              <a:t>The four are not free knobs: each names something the circuit has. x_lin is pinned at 0.45 on most buffers, inside the 0.37-0.63 the real probed stages fitted. This slide answers 'what are the equations and where do the numbers come from'.</a:t>
+              <a:t>This rules out RC cascades, delay-plus-RC and superposition, which is what the shipped model is built from.</a:t>
             </a:r>
           </a:p>
         </p:txBody>
@@ -892,7 +894,7 @@
           <a:lstStyle/>
           <a:p>
             <a:r>
-              <a:t>Worth saying out loud that the right-hand half is not ours and is not in question. The whole method is about producing a gate.</a:t>
+              <a:t>The left panel is the input and its threshold; the right is the output the constant current produces. The next slide shows what each of the four actually does.</a:t>
             </a:r>
           </a:p>
         </p:txBody>
@@ -962,7 +964,7 @@
           <a:lstStyle/>
           <a:p>
             <a:r>
-              <a:t>The loop measurement is the hysteresis plot from slide 3, used as an instrument - a wrong C_comp opens the loop because dV/dt flips sign between rise and fall. Track 1 cannot use it, because it needs the probed gate.</a:t>
+              <a:t>Simulated with the project's own stage model from the fitted values the film exported. Note the vt panel: at the top of its range the pulse dies completely.</a:t>
             </a:r>
           </a:p>
         </p:txBody>
@@ -1032,7 +1034,7 @@
           <a:lstStyle/>
           <a:p>
             <a:r>
-              <a:t>x_lin is pinned at 0.45 on most buffers rather than fitted, a value inside the 0.37-0.63 the real probed stages gave. p is assumed at 1.</a:t>
+              <a:t>Worth saying out loud that the right-hand half is not ours and is not in question.</a:t>
             </a:r>
           </a:p>
         </p:txBody>
@@ -1102,7 +1104,7 @@
           <a:lstStyle/>
           <a:p>
             <a:r>
-              <a:t>The three shapes are (0.50, 0.70), (0.40, 0.60) and (0.40, 0.90). Note on the right that all three already match the PEAK - that is the calibration of the next slide, and it is why the peak cannot be the thing that chooses.</a:t>
+              <a:t>The loop measurement is slide 3's hysteresis plot used as an instrument - a wrong C_comp opens the loop, because dV/dt flips sign between rise and fall. Track 1 cannot use it, since it needs the probed gate.</a:t>
             </a:r>
           </a:p>
         </p:txBody>
@@ -1172,7 +1174,7 @@
           <a:lstStyle/>
           <a:p>
             <a:r>
-              <a:t>The bracket the bisection starts from, printed in the build log: vt = 0 gives +40.1 %, vt = 0.7 gives -97.1 %. Every one of the nine candidates gets this treatment, which is what makes the peak useless for choosing between them.</a:t>
+              <a:t>Every trial the optimiser actually took, exported live by the 09-17 film. What this does NOT give us is K or the map's shape - the next slide.</a:t>
             </a:r>
           </a:p>
         </p:txBody>
@@ -1242,7 +1244,7 @@
           <a:lstStyle/>
           <a:p>
             <a:r>
-              <a:t>The rms numbers are computed in build_0924_deck_figures.calib_select and printed when it runs. On this buffer the rule picks the best of the nine outright.</a:t>
+              <a:t>The three shapes are (0.50, 0.70), (0.40, 0.60) and (0.40, 0.90). Note on the right that all three already match the peak - that is the calibration, and it is why the peak cannot be what chooses.</a:t>
             </a:r>
           </a:p>
         </p:txBody>
@@ -1382,7 +1384,7 @@
           <a:lstStyle/>
           <a:p>
             <a:r>
-              <a:t>This is the slide to leave up during questions.</a:t>
+              <a:t>Every iteration the calibration actually wrote, recovered from the netlists it emitted. The vt here is the film's ex2 case; the deck's own K = 3 build lands on 0.632 from a different starting fit.</a:t>
             </a:r>
           </a:p>
         </p:txBody>
@@ -1452,7 +1454,7 @@
           <a:lstStyle/>
           <a:p>
             <a:r>
-              <a:t>Grey is the shipped model, blue the build using probed silicon, red the file-only one. Full numbers in docs/track1_recipe.md.</a:t>
+              <a:t>On this buffer the rule picks the best of the nine outright.</a:t>
             </a:r>
           </a:p>
         </p:txBody>
@@ -1522,7 +1524,7 @@
           <a:lstStyle/>
           <a:p>
             <a:r>
-              <a:t>Better said than asked. The direction gap is the one that would most change the headline number.</a:t>
+              <a:t>The same block diagram as slide 12, now with the recipe attached to it. This is the slide to leave up during questions.</a:t>
             </a:r>
           </a:p>
         </p:txBody>
@@ -1548,6 +1550,146 @@
 </file>
 
 <file path=ppt/notesSlides/notesSlide23.xml><?xml version="1.0" encoding="utf-8"?>
+<p:notes xmlns:a="http://schemas.openxmlformats.org/drawingml/2006/main" xmlns:p="http://schemas.openxmlformats.org/presentationml/2006/main" xmlns:r="http://schemas.openxmlformats.org/officeDocument/2006/relationships">
+  <p:cSld>
+    <p:spTree>
+      <p:nvGrpSpPr>
+        <p:cNvPr id="1" name=""/>
+        <p:cNvGrpSpPr/>
+        <p:nvPr/>
+      </p:nvGrpSpPr>
+      <p:grpSpPr>
+        <a:xfrm>
+          <a:off x="0" y="0"/>
+          <a:ext cx="0" cy="0"/>
+          <a:chOff x="0" y="0"/>
+          <a:chExt cx="0" cy="0"/>
+        </a:xfrm>
+      </p:grpSpPr>
+      <p:sp>
+        <p:nvSpPr>
+          <p:cNvPr id="2" name="Slide Image Placeholder 1"/>
+          <p:cNvSpPr>
+            <a:spLocks noGrp="1"/>
+          </p:cNvSpPr>
+          <p:nvPr>
+            <p:ph type="sldImg" idx="2"/>
+          </p:nvPr>
+        </p:nvSpPr>
+        <p:spPr/>
+      </p:sp>
+      <p:sp>
+        <p:nvSpPr>
+          <p:cNvPr id="3" name="Notes Placeholder 2"/>
+          <p:cNvSpPr>
+            <a:spLocks noGrp="1"/>
+          </p:cNvSpPr>
+          <p:nvPr>
+            <p:ph type="body" idx="3" sz="quarter"/>
+          </p:nvPr>
+        </p:nvSpPr>
+        <p:spPr/>
+        <p:txBody>
+          <a:bodyPr/>
+          <a:lstStyle/>
+          <a:p>
+            <a:r>
+              <a:t>Grey is the shipped model, blue the build using probed silicon, red the file-only one. Full numbers in docs/track1_recipe.md.</a:t>
+            </a:r>
+          </a:p>
+        </p:txBody>
+      </p:sp>
+      <p:sp>
+        <p:nvSpPr>
+          <p:cNvPr id="4" name="Slide Number Placeholder 3"/>
+          <p:cNvSpPr>
+            <a:spLocks noGrp="1"/>
+          </p:cNvSpPr>
+          <p:nvPr>
+            <p:ph type="sldNum" idx="5" sz="quarter"/>
+          </p:nvPr>
+        </p:nvSpPr>
+        <p:spPr/>
+      </p:sp>
+    </p:spTree>
+  </p:cSld>
+  <p:clrMapOvr>
+    <a:masterClrMapping/>
+  </p:clrMapOvr>
+</p:notes>
+</file>
+
+<file path=ppt/notesSlides/notesSlide24.xml><?xml version="1.0" encoding="utf-8"?>
+<p:notes xmlns:a="http://schemas.openxmlformats.org/drawingml/2006/main" xmlns:p="http://schemas.openxmlformats.org/presentationml/2006/main" xmlns:r="http://schemas.openxmlformats.org/officeDocument/2006/relationships">
+  <p:cSld>
+    <p:spTree>
+      <p:nvGrpSpPr>
+        <p:cNvPr id="1" name=""/>
+        <p:cNvGrpSpPr/>
+        <p:nvPr/>
+      </p:nvGrpSpPr>
+      <p:grpSpPr>
+        <a:xfrm>
+          <a:off x="0" y="0"/>
+          <a:ext cx="0" cy="0"/>
+          <a:chOff x="0" y="0"/>
+          <a:chExt cx="0" cy="0"/>
+        </a:xfrm>
+      </p:grpSpPr>
+      <p:sp>
+        <p:nvSpPr>
+          <p:cNvPr id="2" name="Slide Image Placeholder 1"/>
+          <p:cNvSpPr>
+            <a:spLocks noGrp="1"/>
+          </p:cNvSpPr>
+          <p:nvPr>
+            <p:ph type="sldImg" idx="2"/>
+          </p:nvPr>
+        </p:nvSpPr>
+        <p:spPr/>
+      </p:sp>
+      <p:sp>
+        <p:nvSpPr>
+          <p:cNvPr id="3" name="Notes Placeholder 2"/>
+          <p:cNvSpPr>
+            <a:spLocks noGrp="1"/>
+          </p:cNvSpPr>
+          <p:nvPr>
+            <p:ph type="body" idx="3" sz="quarter"/>
+          </p:nvPr>
+        </p:nvSpPr>
+        <p:spPr/>
+        <p:txBody>
+          <a:bodyPr/>
+          <a:lstStyle/>
+          <a:p>
+            <a:r>
+              <a:t>Better said than asked. The direction gap is the one that would most change the headline number.</a:t>
+            </a:r>
+          </a:p>
+        </p:txBody>
+      </p:sp>
+      <p:sp>
+        <p:nvSpPr>
+          <p:cNvPr id="4" name="Slide Number Placeholder 3"/>
+          <p:cNvSpPr>
+            <a:spLocks noGrp="1"/>
+          </p:cNvSpPr>
+          <p:nvPr>
+            <p:ph type="sldNum" idx="5" sz="quarter"/>
+          </p:nvPr>
+        </p:nvSpPr>
+        <p:spPr/>
+      </p:sp>
+    </p:spTree>
+  </p:cSld>
+  <p:clrMapOvr>
+    <a:masterClrMapping/>
+  </p:clrMapOvr>
+</p:notes>
+</file>
+
+<file path=ppt/notesSlides/notesSlide25.xml><?xml version="1.0" encoding="utf-8"?>
 <p:notes xmlns:a="http://schemas.openxmlformats.org/drawingml/2006/main" xmlns:p="http://schemas.openxmlformats.org/presentationml/2006/main" xmlns:r="http://schemas.openxmlformats.org/officeDocument/2006/relationships">
   <p:cSld>
     <p:spTree>
@@ -4141,7 +4283,7 @@
           <a:lstStyle/>
           <a:p>
             <a:r>
-              <a:t>6 · What the file gives, and what is missing</a:t>
+              <a:t>6 · Where Ku(t) comes from, and what it is</a:t>
             </a:r>
           </a:p>
         </p:txBody>
@@ -4159,7 +4301,7 @@
         <p:spPr>
           <a:xfrm>
             <a:off x="411480" y="987552"/>
-            <a:ext cx="11384280" cy="3547872"/>
+            <a:ext cx="11384280" cy="2231136"/>
           </a:xfrm>
         </p:spPr>
         <p:txBody>
@@ -4172,8 +4314,8 @@
               </a:spcAft>
             </a:pPr>
             <a:r>
-              <a:rPr sz="1700"/>
-              <a:t>The file records Ku(t) on one full transition. That is a complete waveform — it has shape at every instant, not just at its ends. Shape is not what is missing.</a:t>
+              <a:rPr sz="1800"/>
+              <a:t>Before asking what the file cannot give, be clear about what it does. The file holds the pull-up and pull-down I-V curves, and recordings of one transition into two different loads.</a:t>
             </a:r>
           </a:p>
           <a:p>
@@ -4183,46 +4325,51 @@
               </a:spcAft>
             </a:pPr>
             <a:r>
-              <a:rPr sz="1700" b="1">
+              <a:rPr sz="1800"/>
+              <a:t>At any instant the pad took some current, and it is the two branches together that supplied it. Two loads give two equations in the same two unknowns.</a:t>
+            </a:r>
+          </a:p>
+          <a:p>
+            <a:pPr>
+              <a:spcAft>
+                <a:spcPts val="400"/>
+              </a:spcAft>
+            </a:pPr>
+            <a:r>
+              <a:rPr sz="1800" b="1">
                 <a:solidFill>
                   <a:srgbClr val="2B7A43"/>
                 </a:solidFill>
               </a:rPr>
-              <a:t>What is missing is the split. Ku(t) = map(gate(t)) fixes the composition and nothing more: pick any gate trajectory you like, and the map is forced to be whatever reproduces Ku(t). Every such pair matches the file exactly.</a:t>
-            </a:r>
-          </a:p>
-          <a:p>
-            <a:pPr>
-              <a:spcAft>
-                <a:spcPts val="400"/>
-              </a:spcAft>
-            </a:pPr>
-            <a:r>
-              <a:rPr sz="1700" b="1">
-                <a:solidFill>
-                  <a:srgbClr val="2B7A43"/>
-                </a:solidFill>
-              </a:rPr>
-              <a:t>A truncated pulse breaks the tie — because the chain then produces a different gate trajectory, and where it turns round depends on how fast the gate was really travelling. A fast gate is near the rail at the reversal, a slow one is only halfway, and the same static map reads different values off them.</a:t>
-            </a:r>
-          </a:p>
-          <a:p>
-            <a:pPr>
-              <a:spcAft>
-                <a:spcPts val="400"/>
-              </a:spcAft>
-            </a:pPr>
-            <a:r>
-              <a:rPr sz="1700" b="1">
-                <a:solidFill>
-                  <a:srgbClr val="2B7A43"/>
-                </a:solidFill>
-              </a:rPr>
-              <a:t>That is why our GUP passes the full-swing check and fails under stress: it is one legal split, and not the right one.</a:t>
-            </a:r>
-          </a:p>
-        </p:txBody>
-      </p:sp>
+              <a:t>Solve them at every instant and you have Ku(t) and Kd(t) — the fraction of each branch that was conducting. No fitting anywhere.</a:t>
+            </a:r>
+          </a:p>
+        </p:txBody>
+      </p:sp>
+      <p:pic>
+        <p:nvPicPr>
+          <p:cNvPr id="4" name="Picture 3" descr="solve_ku.png"/>
+          <p:cNvPicPr>
+            <a:picLocks noChangeAspect="1"/>
+          </p:cNvPicPr>
+          <p:nvPr/>
+        </p:nvPicPr>
+        <p:blipFill>
+          <a:blip r:embed="rId2"/>
+          <a:stretch>
+            <a:fillRect/>
+          </a:stretch>
+        </p:blipFill>
+        <p:spPr>
+          <a:xfrm>
+            <a:off x="1483466" y="3291840"/>
+            <a:ext cx="9240306" cy="3227832"/>
+          </a:xfrm>
+          <a:prstGeom prst="rect">
+            <a:avLst/>
+          </a:prstGeom>
+        </p:spPr>
+      </p:pic>
     </p:spTree>
   </p:cSld>
   <p:clrMapOvr>
@@ -4257,7 +4404,139 @@
           <a:lstStyle/>
           <a:p>
             <a:r>
-              <a:t>7 · One stressed pulse is the measurement that reaches the gate</a:t>
+              <a:t>7 · What Ku(t) fixes, and what it leaves open</a:t>
+            </a:r>
+          </a:p>
+        </p:txBody>
+      </p:sp>
+      <p:sp>
+        <p:nvSpPr>
+          <p:cNvPr id="3" name="Content Placeholder 2"/>
+          <p:cNvSpPr>
+            <a:spLocks noGrp="1"/>
+          </p:cNvSpPr>
+          <p:nvPr>
+            <p:ph idx="10"/>
+          </p:nvPr>
+        </p:nvSpPr>
+        <p:spPr>
+          <a:xfrm>
+            <a:off x="411480" y="987552"/>
+            <a:ext cx="11384280" cy="2944368"/>
+          </a:xfrm>
+        </p:spPr>
+        <p:txBody>
+          <a:bodyPr/>
+          <a:lstStyle/>
+          <a:p>
+            <a:pPr>
+              <a:spcAft>
+                <a:spcPts val="400"/>
+              </a:spcAft>
+            </a:pPr>
+            <a:r>
+              <a:rPr sz="1600"/>
+              <a:t>Ku(t) has shape at every instant — shape is not what is missing.</a:t>
+            </a:r>
+          </a:p>
+          <a:p>
+            <a:pPr>
+              <a:spcAft>
+                <a:spcPts val="400"/>
+              </a:spcAft>
+            </a:pPr>
+            <a:r>
+              <a:rPr sz="1600" b="1"/>
+              <a:t>What is missing is the split. Ku(t) = map(gate(t)) fixes the composition and nothing more: pick any gate trajectory, and the map is forced to be whatever reproduces Ku(t). Every such pair matches the file exactly.</a:t>
+            </a:r>
+          </a:p>
+          <a:p>
+            <a:pPr>
+              <a:spcAft>
+                <a:spcPts val="400"/>
+              </a:spcAft>
+            </a:pPr>
+            <a:r>
+              <a:rPr sz="1600" b="1"/>
+              <a:t>A truncated pulse breaks the tie — the chain then makes a different gate trajectory, and where it turns round depends on how fast the gate was really travelling.</a:t>
+            </a:r>
+          </a:p>
+          <a:p>
+            <a:pPr>
+              <a:spcAft>
+                <a:spcPts val="400"/>
+              </a:spcAft>
+            </a:pPr>
+            <a:r>
+              <a:rPr sz="1600" b="1">
+                <a:solidFill>
+                  <a:srgbClr val="2B7A43"/>
+                </a:solidFill>
+              </a:rPr>
+              <a:t>That is why our GUP passes the full-swing check and fails under stress: it is one legal split, and not the right one.</a:t>
+            </a:r>
+          </a:p>
+        </p:txBody>
+      </p:sp>
+      <p:pic>
+        <p:nvPicPr>
+          <p:cNvPr id="4" name="Picture 3" descr="prior_shape.png"/>
+          <p:cNvPicPr>
+            <a:picLocks noChangeAspect="1"/>
+          </p:cNvPicPr>
+          <p:nvPr/>
+        </p:nvPicPr>
+        <p:blipFill>
+          <a:blip r:embed="rId2"/>
+          <a:stretch>
+            <a:fillRect/>
+          </a:stretch>
+        </p:blipFill>
+        <p:spPr>
+          <a:xfrm>
+            <a:off x="3472270" y="4005072"/>
+            <a:ext cx="5262698" cy="2514600"/>
+          </a:xfrm>
+          <a:prstGeom prst="rect">
+            <a:avLst/>
+          </a:prstGeom>
+        </p:spPr>
+      </p:pic>
+    </p:spTree>
+  </p:cSld>
+  <p:clrMapOvr>
+    <a:masterClrMapping/>
+  </p:clrMapOvr>
+</p:sld>
+</file>
+
+<file path=ppt/slides/slide12.xml><?xml version="1.0" encoding="utf-8"?>
+<p:sld xmlns:a="http://schemas.openxmlformats.org/drawingml/2006/main" xmlns:p="http://schemas.openxmlformats.org/presentationml/2006/main" xmlns:r="http://schemas.openxmlformats.org/officeDocument/2006/relationships">
+  <p:cSld>
+    <p:spTree>
+      <p:nvGrpSpPr>
+        <p:cNvPr id="1" name=""/>
+        <p:cNvGrpSpPr/>
+        <p:nvPr/>
+      </p:nvGrpSpPr>
+      <p:grpSpPr/>
+      <p:sp>
+        <p:nvSpPr>
+          <p:cNvPr id="2" name="Title 1"/>
+          <p:cNvSpPr>
+            <a:spLocks noGrp="1"/>
+          </p:cNvSpPr>
+          <p:nvPr>
+            <p:ph type="title"/>
+          </p:nvPr>
+        </p:nvSpPr>
+        <p:spPr/>
+        <p:txBody>
+          <a:bodyPr/>
+          <a:lstStyle/>
+          <a:p>
+            <a:r>
+              <a:t>8 · One stressed pulse is the measurement that reaches the gate</a:t>
             </a:r>
           </a:p>
         </p:txBody>
@@ -4304,7 +4583,7 @@
                   <a:srgbClr val="2B7A43"/>
                 </a:solidFill>
               </a:rPr>
-              <a:t>Each stressed width is one sample of the interior of the same path — here the five widths stop the gate at 0.76, 0.80, 0.84, 0.88 and 0.94.</a:t>
+              <a:t>Each stressed width is one sample of the same path — here the five widths stop the gate at 0.76, 0.80, 0.84, 0.88 and 0.94.</a:t>
             </a:r>
           </a:p>
           <a:p>
@@ -4315,7 +4594,7 @@
             </a:pPr>
             <a:r>
               <a:rPr sz="1800"/>
-              <a:t>So the stress sweep is a sampling grid, not a robustness check — and one pad measurement per buffer, taken from outside the chip, is the extra input track 1 needs.</a:t>
+              <a:t>So the stress sweep is a sampling grid, and one pad measurement per buffer, taken from outside the chip, is the extra input track 1 needs.</a:t>
             </a:r>
           </a:p>
         </p:txBody>
@@ -4352,7 +4631,7 @@
 </p:sld>
 </file>
 
-<file path=ppt/slides/slide12.xml><?xml version="1.0" encoding="utf-8"?>
+<file path=ppt/slides/slide13.xml><?xml version="1.0" encoding="utf-8"?>
 <p:sld xmlns:a="http://schemas.openxmlformats.org/drawingml/2006/main" xmlns:p="http://schemas.openxmlformats.org/presentationml/2006/main" xmlns:r="http://schemas.openxmlformats.org/officeDocument/2006/relationships">
   <p:cSld>
     <p:spTree>
@@ -4378,7 +4657,7 @@
           <a:lstStyle/>
           <a:p>
             <a:r>
-              <a:t>8 · What shape may the gate be?  Measure a stage</a:t>
+              <a:t>9 · What shape may the gate be?  Measure a stage</a:t>
             </a:r>
           </a:p>
         </p:txBody>
@@ -4421,7 +4700,7 @@
             </a:pPr>
             <a:r>
               <a:rPr sz="1800"/>
-              <a:t>So probe every stage under a short pulse and compare with what a linear filter would give (its own step response, superposed).</a:t>
+              <a:t>So probe every stage under a short pulse, and compare with what a linear filter would give: its own step response, superposed.</a:t>
             </a:r>
           </a:p>
           <a:p>
@@ -4436,7 +4715,7 @@
                   <a:srgbClr val="2B7A43"/>
                 </a:solidFill>
               </a:rPr>
-              <a:t>Every stage under-reaches, and the gap compounds down the chain: at the pad the linear prediction says 1.00 where the transistor does 0.50.</a:t>
+              <a:t>Every stage under-reaches, and the gap compounds down the chain — at the pad the linear prediction says 1.00 where the transistor does 0.50.</a:t>
             </a:r>
           </a:p>
         </p:txBody>
@@ -4473,7 +4752,7 @@
 </p:sld>
 </file>
 
-<file path=ppt/slides/slide13.xml><?xml version="1.0" encoding="utf-8"?>
+<file path=ppt/slides/slide14.xml><?xml version="1.0" encoding="utf-8"?>
 <p:sld xmlns:a="http://schemas.openxmlformats.org/drawingml/2006/main" xmlns:p="http://schemas.openxmlformats.org/presentationml/2006/main" xmlns:r="http://schemas.openxmlformats.org/officeDocument/2006/relationships">
   <p:cSld>
     <p:spTree>
@@ -4499,7 +4778,7 @@
           <a:lstStyle/>
           <a:p>
             <a:r>
-              <a:t>9 · The physics that explains it, and the four numbers it forces</a:t>
+              <a:t>10 · The physics behind it — a stage is a current source with a threshold</a:t>
             </a:r>
           </a:p>
         </p:txBody>
@@ -4517,7 +4796,7 @@
         <p:spPr>
           <a:xfrm>
             <a:off x="411480" y="987552"/>
-            <a:ext cx="11384280" cy="2532888"/>
+            <a:ext cx="11384280" cy="2231136"/>
           </a:xfrm>
         </p:spPr>
         <p:txBody>
@@ -4531,7 +4810,18 @@
             </a:pPr>
             <a:r>
               <a:rPr sz="1800"/>
-              <a:t>A CMOS inverter driving a large load is a current source while its input sits at the rail — its device is in saturation — and becomes a resistor only near the destination rail, in triode. A constant current into a gate capacitance is a ramp.</a:t>
+              <a:t>A CMOS inverter driving a large load is a current source while its input sits at the rail, because its conducting device is in saturation. Only near the destination rail does it leave saturation and become a resistor.</a:t>
+            </a:r>
+          </a:p>
+          <a:p>
+            <a:pPr>
+              <a:spcAft>
+                <a:spcPts val="400"/>
+              </a:spcAft>
+            </a:pPr>
+            <a:r>
+              <a:rPr sz="1800"/>
+              <a:t>A constant current into a gate capacitance is a ramp, tapering at the end.</a:t>
             </a:r>
           </a:p>
           <a:p>
@@ -4546,22 +4836,7 @@
                   <a:srgbClr val="2B7A43"/>
                 </a:solidFill>
               </a:rPr>
-              <a:t>That picture forces exactly four numbers per stage, and no more — named below. s_dn is the same picture on the way back.</a:t>
-            </a:r>
-          </a:p>
-          <a:p>
-            <a:pPr>
-              <a:spcAft>
-                <a:spcPts val="400"/>
-              </a:spcAft>
-            </a:pPr>
-            <a:r>
-              <a:rPr sz="1800" b="1">
-                <a:solidFill>
-                  <a:srgbClr val="2B7A43"/>
-                </a:solidFill>
-              </a:rPr>
-              <a:t>All four are fitted to the file's own Ku(t), so they cost no measurement. (p, the drive's curvature under a partial input, is assumed: full swing cannot see it.)</a:t>
+              <a:t>So a stage needs four numbers, and the picture says which four: how hard it charges and discharges, how much input it needs before it does anything, and how near the rail the current gives way.</a:t>
             </a:r>
           </a:p>
         </p:txBody>
@@ -4582,8 +4857,8 @@
         </p:blipFill>
         <p:spPr>
           <a:xfrm>
-            <a:off x="1351194" y="3593592"/>
-            <a:ext cx="9504850" cy="2926080"/>
+            <a:off x="861100" y="3291840"/>
+            <a:ext cx="10485038" cy="3227832"/>
           </a:xfrm>
           <a:prstGeom prst="rect">
             <a:avLst/>
@@ -4598,7 +4873,7 @@
 </p:sld>
 </file>
 
-<file path=ppt/slides/slide14.xml><?xml version="1.0" encoding="utf-8"?>
+<file path=ppt/slides/slide15.xml><?xml version="1.0" encoding="utf-8"?>
 <p:sld xmlns:a="http://schemas.openxmlformats.org/drawingml/2006/main" xmlns:p="http://schemas.openxmlformats.org/presentationml/2006/main" xmlns:r="http://schemas.openxmlformats.org/officeDocument/2006/relationships">
   <p:cSld>
     <p:spTree>
@@ -4624,7 +4899,7 @@
           <a:lstStyle/>
           <a:p>
             <a:r>
-              <a:t>The model we build</a:t>
+              <a:t>11 · What each of the four numbers does</a:t>
             </a:r>
           </a:p>
         </p:txBody>
@@ -4655,8 +4930,118 @@
               </a:spcAft>
             </a:pPr>
             <a:r>
+              <a:rPr sz="1600"/>
+              <a:t>Each swept on its own about the value the fit chose, on the 810 ps pulse. The thick black trace is the fitted value.</a:t>
+            </a:r>
+          </a:p>
+          <a:p>
+            <a:pPr>
+              <a:spcAft>
+                <a:spcPts val="400"/>
+              </a:spcAft>
+            </a:pPr>
+            <a:r>
+              <a:rPr sz="1600" b="1">
+                <a:solidFill>
+                  <a:srgbClr val="2B7A43"/>
+                </a:solidFill>
+              </a:rPr>
+              <a:t>Look at the vt panel: pushed high enough the gate never leaves the floor — a chain can extinguish a short pulse, not merely shrink it.</a:t>
+            </a:r>
+          </a:p>
+        </p:txBody>
+      </p:sp>
+      <p:pic>
+        <p:nvPicPr>
+          <p:cNvPr id="4" name="Picture 3" descr="knobs.png"/>
+          <p:cNvPicPr>
+            <a:picLocks noChangeAspect="1"/>
+          </p:cNvPicPr>
+          <p:nvPr/>
+        </p:nvPicPr>
+        <p:blipFill>
+          <a:blip r:embed="rId2"/>
+          <a:stretch>
+            <a:fillRect/>
+          </a:stretch>
+        </p:blipFill>
+        <p:spPr>
+          <a:xfrm>
+            <a:off x="1567646" y="2578608"/>
+            <a:ext cx="9071947" cy="3941064"/>
+          </a:xfrm>
+          <a:prstGeom prst="rect">
+            <a:avLst/>
+          </a:prstGeom>
+        </p:spPr>
+      </p:pic>
+    </p:spTree>
+  </p:cSld>
+  <p:clrMapOvr>
+    <a:masterClrMapping/>
+  </p:clrMapOvr>
+</p:sld>
+</file>
+
+<file path=ppt/slides/slide16.xml><?xml version="1.0" encoding="utf-8"?>
+<p:sld xmlns:a="http://schemas.openxmlformats.org/drawingml/2006/main" xmlns:p="http://schemas.openxmlformats.org/presentationml/2006/main" xmlns:r="http://schemas.openxmlformats.org/officeDocument/2006/relationships">
+  <p:cSld>
+    <p:spTree>
+      <p:nvGrpSpPr>
+        <p:cNvPr id="1" name=""/>
+        <p:cNvGrpSpPr/>
+        <p:nvPr/>
+      </p:nvGrpSpPr>
+      <p:grpSpPr/>
+      <p:sp>
+        <p:nvSpPr>
+          <p:cNvPr id="2" name="Title 1"/>
+          <p:cNvSpPr>
+            <a:spLocks noGrp="1"/>
+          </p:cNvSpPr>
+          <p:nvPr>
+            <p:ph type="title"/>
+          </p:nvPr>
+        </p:nvSpPr>
+        <p:spPr/>
+        <p:txBody>
+          <a:bodyPr/>
+          <a:lstStyle/>
+          <a:p>
+            <a:r>
+              <a:t>12 · What we build</a:t>
+            </a:r>
+          </a:p>
+        </p:txBody>
+      </p:sp>
+      <p:sp>
+        <p:nvSpPr>
+          <p:cNvPr id="3" name="Content Placeholder 2"/>
+          <p:cNvSpPr>
+            <a:spLocks noGrp="1"/>
+          </p:cNvSpPr>
+          <p:nvPr>
+            <p:ph idx="10"/>
+          </p:nvPr>
+        </p:nvSpPr>
+        <p:spPr>
+          <a:xfrm>
+            <a:off x="411480" y="987552"/>
+            <a:ext cx="11384280" cy="1517904"/>
+          </a:xfrm>
+        </p:spPr>
+        <p:txBody>
+          <a:bodyPr/>
+          <a:lstStyle/>
+          <a:p>
+            <a:pPr>
+              <a:spcAft>
+                <a:spcPts val="400"/>
+              </a:spcAft>
+            </a:pPr>
+            <a:r>
               <a:rPr sz="1800"/>
-              <a:t>Everything to the right of the gate is the file's own, untouched: the map turns the gate into Ku, and Ku scales the file's I-V tables. That part we have already shown is right.</a:t>
+              <a:t>Everything to the right of the gate is the file's own, untouched: the map turns the gate into Ku, and Ku scales the file's I-V tables. That half we have already shown is right.</a:t>
             </a:r>
           </a:p>
           <a:p>
@@ -4671,7 +5056,7 @@
                   <a:srgbClr val="2B7A43"/>
                 </a:solidFill>
               </a:rPr>
-              <a:t>What we are building is the left-hand box — a chain of K identical current-limited stages standing in for the predriver we cannot see.</a:t>
+              <a:t>What we build is the left-hand box — K identical stages of the kind the last two slides measured, standing in for the predriver we cannot see.</a:t>
             </a:r>
           </a:p>
         </p:txBody>
@@ -4708,233 +5093,6 @@
 </p:sld>
 </file>
 
-<file path=ppt/slides/slide15.xml><?xml version="1.0" encoding="utf-8"?>
-<p:sld xmlns:a="http://schemas.openxmlformats.org/drawingml/2006/main" xmlns:p="http://schemas.openxmlformats.org/presentationml/2006/main" xmlns:r="http://schemas.openxmlformats.org/officeDocument/2006/relationships">
-  <p:cSld>
-    <p:spTree>
-      <p:nvGrpSpPr>
-        <p:cNvPr id="1" name=""/>
-        <p:cNvGrpSpPr/>
-        <p:nvPr/>
-      </p:nvGrpSpPr>
-      <p:grpSpPr/>
-      <p:sp>
-        <p:nvSpPr>
-          <p:cNvPr id="2" name="Title 1"/>
-          <p:cNvSpPr>
-            <a:spLocks noGrp="1"/>
-          </p:cNvSpPr>
-          <p:nvPr>
-            <p:ph type="title"/>
-          </p:nvPr>
-        </p:nvSpPr>
-        <p:spPr/>
-        <p:txBody>
-          <a:bodyPr/>
-          <a:lstStyle/>
-          <a:p>
-            <a:r>
-              <a:t>Step 1 — C_comp, from the file's own arithmetic</a:t>
-            </a:r>
-          </a:p>
-        </p:txBody>
-      </p:sp>
-      <p:sp>
-        <p:nvSpPr>
-          <p:cNvPr id="3" name="Content Placeholder 2"/>
-          <p:cNvSpPr>
-            <a:spLocks noGrp="1"/>
-          </p:cNvSpPr>
-          <p:nvPr>
-            <p:ph idx="10"/>
-          </p:nvPr>
-        </p:nvSpPr>
-        <p:spPr>
-          <a:xfrm>
-            <a:off x="411480" y="987552"/>
-            <a:ext cx="11384280" cy="2944368"/>
-          </a:xfrm>
-        </p:spPr>
-        <p:txBody>
-          <a:bodyPr/>
-          <a:lstStyle/>
-          <a:p>
-            <a:pPr>
-              <a:spcAft>
-                <a:spcPts val="400"/>
-              </a:spcAft>
-            </a:pPr>
-            <a:r>
-              <a:rPr sz="1700"/>
-              <a:t>C_comp is not a model parameter. It is a number in the file that the file's own Ku tables were solved with, so a wrong value inflates the curve everything downstream is fitted to.</a:t>
-            </a:r>
-          </a:p>
-          <a:p>
-            <a:pPr>
-              <a:spcAft>
-                <a:spcPts val="400"/>
-              </a:spcAft>
-            </a:pPr>
-            <a:r>
-              <a:rPr sz="1700"/>
-              <a:t>Ku is a conducting fraction, so it cannot exceed 1. ex2's declared 5.0 pF implies Ku = 1.24 — impossible, so the file rejects its own declared value.</a:t>
-            </a:r>
-          </a:p>
-          <a:p>
-            <a:pPr>
-              <a:spcAft>
-                <a:spcPts val="400"/>
-              </a:spcAft>
-            </a:pPr>
-            <a:r>
-              <a:rPr sz="1700"/>
-              <a:t>Rule: keep what the file declares unless it implies Ku &gt; 1; then take the value at which Ku just reaches 1. On ex2 that reads 2.64 pF, against 1.70 measured by the loop.</a:t>
-            </a:r>
-          </a:p>
-          <a:p>
-            <a:pPr>
-              <a:spcAft>
-                <a:spcPts val="400"/>
-              </a:spcAft>
-            </a:pPr>
-            <a:r>
-              <a:rPr sz="1700" b="1">
-                <a:solidFill>
-                  <a:srgbClr val="2B7A43"/>
-                </a:solidFill>
-              </a:rPr>
-              <a:t>55 % off the measured value, and it still works — the stressed peak is not sharp in C_comp once it is in the right range.</a:t>
-            </a:r>
-          </a:p>
-        </p:txBody>
-      </p:sp>
-    </p:spTree>
-  </p:cSld>
-  <p:clrMapOvr>
-    <a:masterClrMapping/>
-  </p:clrMapOvr>
-</p:sld>
-</file>
-
-<file path=ppt/slides/slide16.xml><?xml version="1.0" encoding="utf-8"?>
-<p:sld xmlns:a="http://schemas.openxmlformats.org/drawingml/2006/main" xmlns:p="http://schemas.openxmlformats.org/presentationml/2006/main" xmlns:r="http://schemas.openxmlformats.org/officeDocument/2006/relationships">
-  <p:cSld>
-    <p:spTree>
-      <p:nvGrpSpPr>
-        <p:cNvPr id="1" name=""/>
-        <p:cNvGrpSpPr/>
-        <p:nvPr/>
-      </p:nvGrpSpPr>
-      <p:grpSpPr/>
-      <p:sp>
-        <p:nvSpPr>
-          <p:cNvPr id="2" name="Title 1"/>
-          <p:cNvSpPr>
-            <a:spLocks noGrp="1"/>
-          </p:cNvSpPr>
-          <p:nvPr>
-            <p:ph type="title"/>
-          </p:nvPr>
-        </p:nvSpPr>
-        <p:spPr/>
-        <p:txBody>
-          <a:bodyPr/>
-          <a:lstStyle/>
-          <a:p>
-            <a:r>
-              <a:t>Step 2 — the four numbers, fitted to the file</a:t>
-            </a:r>
-          </a:p>
-        </p:txBody>
-      </p:sp>
-      <p:sp>
-        <p:nvSpPr>
-          <p:cNvPr id="3" name="Content Placeholder 2"/>
-          <p:cNvSpPr>
-            <a:spLocks noGrp="1"/>
-          </p:cNvSpPr>
-          <p:nvPr>
-            <p:ph idx="10"/>
-          </p:nvPr>
-        </p:nvSpPr>
-        <p:spPr>
-          <a:xfrm>
-            <a:off x="411480" y="987552"/>
-            <a:ext cx="11384280" cy="2752344"/>
-          </a:xfrm>
-        </p:spPr>
-        <p:txBody>
-          <a:bodyPr/>
-          <a:lstStyle/>
-          <a:p>
-            <a:pPr>
-              <a:spcAft>
-                <a:spcPts val="400"/>
-              </a:spcAft>
-            </a:pPr>
-            <a:r>
-              <a:rPr sz="1700"/>
-              <a:t>For a given number of stages, the four numbers are fitted so that the chain's output, put through the map, reproduces the file's own full-swing Ku(t).</a:t>
-            </a:r>
-          </a:p>
-          <a:p>
-            <a:pPr>
-              <a:spcAft>
-                <a:spcPts val="400"/>
-              </a:spcAft>
-            </a:pPr>
-            <a:r>
-              <a:rPr sz="1700"/>
-              <a:t>Nelder–Mead, three restarts. No measurement is involved — the target is a curve the file already contains.</a:t>
-            </a:r>
-          </a:p>
-          <a:p>
-            <a:pPr>
-              <a:spcAft>
-                <a:spcPts val="400"/>
-              </a:spcAft>
-            </a:pPr>
-            <a:r>
-              <a:rPr sz="1700" b="1">
-                <a:solidFill>
-                  <a:srgbClr val="2B7A43"/>
-                </a:solidFill>
-              </a:rPr>
-              <a:t>So the stage law costs nothing. What it does not give us is K, or the map's shape.</a:t>
-            </a:r>
-          </a:p>
-          <a:p>
-            <a:pPr>
-              <a:spcAft>
-                <a:spcPts val="400"/>
-              </a:spcAft>
-            </a:pPr>
-            <a:r>
-              <a:rPr sz="1700"/>
-              <a:t/>
-            </a:r>
-          </a:p>
-          <a:p>
-            <a:pPr>
-              <a:spcAft>
-                <a:spcPts val="400"/>
-              </a:spcAft>
-            </a:pPr>
-            <a:r>
-              <a:rPr sz="1700"/>
-              <a:t>Why not? Because a stage count that fits the file worse by a few per cent can behave completely differently under stress — which is the next slide.</a:t>
-            </a:r>
-          </a:p>
-        </p:txBody>
-      </p:sp>
-    </p:spTree>
-  </p:cSld>
-  <p:clrMapOvr>
-    <a:masterClrMapping/>
-  </p:clrMapOvr>
-</p:sld>
-</file>
-
 <file path=ppt/slides/slide17.xml><?xml version="1.0" encoding="utf-8"?>
 <p:sld xmlns:a="http://schemas.openxmlformats.org/drawingml/2006/main" xmlns:p="http://schemas.openxmlformats.org/presentationml/2006/main" xmlns:r="http://schemas.openxmlformats.org/officeDocument/2006/relationships">
   <p:cSld>
@@ -4961,7 +5119,7 @@
           <a:lstStyle/>
           <a:p>
             <a:r>
-              <a:t>Step 3 — what the file cannot choose</a:t>
+              <a:t>13 · Step 1 — C_comp, rejected by the file's own arithmetic</a:t>
             </a:r>
           </a:p>
         </p:txBody>
@@ -4979,7 +5137,7 @@
         <p:spPr>
           <a:xfrm>
             <a:off x="411480" y="987552"/>
-            <a:ext cx="11384280" cy="2231136"/>
+            <a:ext cx="11384280" cy="2944368"/>
           </a:xfrm>
         </p:spPr>
         <p:txBody>
@@ -4992,8 +5150,8 @@
               </a:spcAft>
             </a:pPr>
             <a:r>
-              <a:rPr sz="1800"/>
-              <a:t>Left: the fit error against the file's Ku(t), for every stage count. Past K = 3 it is flat — the file has nothing left to say.</a:t>
+              <a:rPr sz="1600"/>
+              <a:t>C_comp is not a model parameter. It is a number in the file that the file's own Ku tables were solved with — the solve on slide 6 subtracts it — so a wrong value inflates the curve everything downstream is fitted to.</a:t>
             </a:r>
           </a:p>
           <a:p>
@@ -5003,8 +5161,8 @@
               </a:spcAft>
             </a:pPr>
             <a:r>
-              <a:rPr sz="1800"/>
-              <a:t>Right: the three candidates inside that band, on one 810 ps stressed pulse. Same file, same fit quality, three completely different buffers.</a:t>
+              <a:rPr sz="1600"/>
+              <a:t>Ku is a conducting fraction, so it cannot exceed 1. ex2's declared 5.0 pF implies Ku = 1.24: the file rejects its own declared value.</a:t>
             </a:r>
           </a:p>
           <a:p>
@@ -5014,19 +5172,30 @@
               </a:spcAft>
             </a:pPr>
             <a:r>
-              <a:rPr sz="1800" b="1">
+              <a:rPr sz="1600"/>
+              <a:t>Rule: keep what the file declares unless it implies Ku &gt; 1, then take the value at which Ku just reaches 1 — 2.64 pF here, against 1.70 measured by the loop.</a:t>
+            </a:r>
+          </a:p>
+          <a:p>
+            <a:pPr>
+              <a:spcAft>
+                <a:spcPts val="400"/>
+              </a:spcAft>
+            </a:pPr>
+            <a:r>
+              <a:rPr sz="1600" b="1">
                 <a:solidFill>
                   <a:srgbClr val="2B7A43"/>
                 </a:solidFill>
               </a:rPr>
-              <a:t>So the file gives a band of three, and the map's shape is under-determined in exactly the same way. Three stage counts × three map shapes = nine candidates.</a:t>
+              <a:t>55 % off, and it still works: the stressed peak is not sharp in C_comp once it is in the right range.</a:t>
             </a:r>
           </a:p>
         </p:txBody>
       </p:sp>
       <p:pic>
         <p:nvPicPr>
-          <p:cNvPr id="4" name="Picture 3" descr="k_choice.png"/>
+          <p:cNvPr id="4" name="Picture 3" descr="ccomp.png"/>
           <p:cNvPicPr>
             <a:picLocks noChangeAspect="1"/>
           </p:cNvPicPr>
@@ -5040,8 +5209,8 @@
         </p:blipFill>
         <p:spPr>
           <a:xfrm>
-            <a:off x="1397800" y="3291840"/>
-            <a:ext cx="9411638" cy="3227832"/>
+            <a:off x="2531745" y="4005072"/>
+            <a:ext cx="7143750" cy="2514600"/>
           </a:xfrm>
           <a:prstGeom prst="rect">
             <a:avLst/>
@@ -5082,7 +5251,7 @@
           <a:lstStyle/>
           <a:p>
             <a:r>
-              <a:t>Step 4 — the stressed run, first job: set the amplitude</a:t>
+              <a:t>14 · Step 2 — the four numbers, fitted to the file</a:t>
             </a:r>
           </a:p>
         </p:txBody>
@@ -5100,7 +5269,7 @@
         <p:spPr>
           <a:xfrm>
             <a:off x="411480" y="987552"/>
-            <a:ext cx="11384280" cy="2340864"/>
+            <a:ext cx="11384280" cy="2231136"/>
           </a:xfrm>
         </p:spPr>
         <p:txBody>
@@ -5113,8 +5282,8 @@
               </a:spcAft>
             </a:pPr>
             <a:r>
-              <a:rPr sz="1700"/>
-              <a:t>Now the one measured waveform enters. Its first job is to fix how hard the chain drives.</a:t>
+              <a:rPr sz="1800"/>
+              <a:t>The four are searched until the chain's output, put through the map, reproduces the file's own full-swing Ku(t). Nelder–Mead, three restarts.</a:t>
             </a:r>
           </a:p>
           <a:p>
@@ -5124,12 +5293,12 @@
               </a:spcAft>
             </a:pPr>
             <a:r>
-              <a:rPr sz="1700" b="1">
+              <a:rPr sz="1800" b="1">
                 <a:solidFill>
                   <a:srgbClr val="2B7A43"/>
                 </a:solidFill>
               </a:rPr>
-              <a:t>The parameters fitted to the file alone are nowhere near right under stress. On ex2 at K = 3 the fitted threshold vt = 0.700 gives a pad 97 % too low on the 810 ps pulse.</a:t>
+              <a:t>No measurement is involved. The target is a curve the file already contains, so the stage law costs nothing.</a:t>
             </a:r>
           </a:p>
           <a:p>
@@ -5139,27 +5308,36 @@
               </a:spcAft>
             </a:pPr>
             <a:r>
-              <a:rPr sz="1700"/>
-              <a:t>So bisect vt until the model's peak matches the measured one — seven ngspice runs, 0.700 → 0.632.</a:t>
-            </a:r>
-          </a:p>
-          <a:p>
-            <a:pPr>
-              <a:spcAft>
-                <a:spcPts val="400"/>
-              </a:spcAft>
-            </a:pPr>
-            <a:r>
-              <a:rPr sz="1700" b="1">
-                <a:solidFill>
-                  <a:srgbClr val="2B7A43"/>
-                </a:solidFill>
-              </a:rPr>
-              <a:t>Why vt and not the drive rates? The rates were fitted to reproduce the full swing, and moving them breaks it. vt changes *when* the chain hands off, not how fast it runs.</a:t>
-            </a:r>
-          </a:p>
-        </p:txBody>
-      </p:sp>
+              <a:rPr sz="1800"/>
+              <a:t>Here the search runs from an error of 0.28 down to 0.0098, landing on s_up 2.59, s_dn 2.38, vt 0.51, x_lin 0.66.</a:t>
+            </a:r>
+          </a:p>
+        </p:txBody>
+      </p:sp>
+      <p:pic>
+        <p:nvPicPr>
+          <p:cNvPr id="4" name="Picture 3" descr="fit_search.png"/>
+          <p:cNvPicPr>
+            <a:picLocks noChangeAspect="1"/>
+          </p:cNvPicPr>
+          <p:nvPr/>
+        </p:nvPicPr>
+        <p:blipFill>
+          <a:blip r:embed="rId2"/>
+          <a:stretch>
+            <a:fillRect/>
+          </a:stretch>
+        </p:blipFill>
+        <p:spPr>
+          <a:xfrm>
+            <a:off x="1393260" y="3291840"/>
+            <a:ext cx="9420719" cy="3227832"/>
+          </a:xfrm>
+          <a:prstGeom prst="rect">
+            <a:avLst/>
+          </a:prstGeom>
+        </p:spPr>
+      </p:pic>
     </p:spTree>
   </p:cSld>
   <p:clrMapOvr>
@@ -5194,7 +5372,7 @@
           <a:lstStyle/>
           <a:p>
             <a:r>
-              <a:t>Step 5 — the stressed run, second job: pick one</a:t>
+              <a:t>15 · Step 3 — what the file cannot choose</a:t>
             </a:r>
           </a:p>
         </p:txBody>
@@ -5212,7 +5390,7 @@
         <p:spPr>
           <a:xfrm>
             <a:off x="411480" y="987552"/>
-            <a:ext cx="11384280" cy="2532888"/>
+            <a:ext cx="11384280" cy="2231136"/>
           </a:xfrm>
         </p:spPr>
         <p:txBody>
@@ -5226,7 +5404,7 @@
             </a:pPr>
             <a:r>
               <a:rPr sz="1800"/>
-              <a:t>All nine candidates have now been calibrated, so all nine hit the measured peak — the calibration put it there. The peak has no information left in it.</a:t>
+              <a:t>Left: the fit error against the file's Ku(t), for every stage count. Past K = 3 it is flat — the file has nothing left to say.</a:t>
             </a:r>
           </a:p>
           <a:p>
@@ -5237,7 +5415,7 @@
             </a:pPr>
             <a:r>
               <a:rPr sz="1800"/>
-              <a:t>They differ everywhere else. Compare the whole measured waveform instead, over the pulse and its return, and one candidate wins: K = 3 with the 0.50/0.70 shape, at 59 mV rms against 84, 140 and worse for the rest.</a:t>
+              <a:t>Right: the three candidates inside that band, on one 810 ps pulse. Same file, same fit quality, three completely different buffers.</a:t>
             </a:r>
           </a:p>
           <a:p>
@@ -5252,14 +5430,14 @@
                   <a:srgbClr val="2B7A43"/>
                 </a:solidFill>
               </a:rPr>
-              <a:t>Ranking on the peak instead picks a chain that arrives up to 300 ps late with four times the waveform error.</a:t>
+              <a:t>The map's shape is under-determined in the same way (slide 7). Three stage counts × three map shapes = nine candidates.</a:t>
             </a:r>
           </a:p>
         </p:txBody>
       </p:sp>
       <p:pic>
         <p:nvPicPr>
-          <p:cNvPr id="4" name="Picture 3" descr="calib_select.png"/>
+          <p:cNvPr id="4" name="Picture 3" descr="k_choice.png"/>
           <p:cNvPicPr>
             <a:picLocks noChangeAspect="1"/>
           </p:cNvPicPr>
@@ -5273,8 +5451,8 @@
         </p:blipFill>
         <p:spPr>
           <a:xfrm>
-            <a:off x="2227668" y="3593592"/>
-            <a:ext cx="7751902" cy="2926080"/>
+            <a:off x="1397800" y="3291840"/>
+            <a:ext cx="9411638" cy="3227832"/>
           </a:xfrm>
           <a:prstGeom prst="rect">
             <a:avLst/>
@@ -5425,7 +5603,7 @@
           <a:lstStyle/>
           <a:p>
             <a:r>
-              <a:t>The recipe, on one slide</a:t>
+              <a:t>16 · Step 4 — the stressed run, first job: set the amplitude</a:t>
             </a:r>
           </a:p>
         </p:txBody>
@@ -5443,7 +5621,7 @@
         <p:spPr>
           <a:xfrm>
             <a:off x="411480" y="987552"/>
-            <a:ext cx="11384280" cy="2944368"/>
+            <a:ext cx="11384280" cy="1929384"/>
           </a:xfrm>
         </p:spPr>
         <p:txBody>
@@ -5456,61 +5634,62 @@
               </a:spcAft>
             </a:pPr>
             <a:r>
-              <a:rPr sz="1700" b="1">
+              <a:rPr sz="1800"/>
+              <a:t>Now the measured waveform enters. The parameters fitted to the file alone are nowhere near right under stress: on ex2 the fitted threshold leaves the 810 ps pad 97 % low.</a:t>
+            </a:r>
+          </a:p>
+          <a:p>
+            <a:pPr>
+              <a:spcAft>
+                <a:spcPts val="400"/>
+              </a:spcAft>
+            </a:pPr>
+            <a:r>
+              <a:rPr sz="1800"/>
+              <a:t>So bisect vt against the measured peak — bracket 0 to 0.7, then halve. Ten runs, landing on 0.487.</a:t>
+            </a:r>
+          </a:p>
+          <a:p>
+            <a:pPr>
+              <a:spcAft>
+                <a:spcPts val="400"/>
+              </a:spcAft>
+            </a:pPr>
+            <a:r>
+              <a:rPr sz="1800" b="1">
                 <a:solidFill>
                   <a:srgbClr val="2B7A43"/>
                 </a:solidFill>
               </a:rPr>
-              <a:t>From the file alone: C_comp, kept unless the file's own Ku &gt; 1 test rejects it; then s_up, s_dn, vt and x_lin fitted to the file's Ku(t), for each stage count in the band.</a:t>
-            </a:r>
-          </a:p>
-          <a:p>
-            <a:pPr>
-              <a:spcAft>
-                <a:spcPts val="400"/>
-              </a:spcAft>
-            </a:pPr>
-            <a:r>
-              <a:rPr sz="1700" b="1">
-                <a:solidFill>
-                  <a:srgbClr val="2B7A43"/>
-                </a:solidFill>
-              </a:rPr>
-              <a:t>From the file, but undetermined by it: the stage count K (a band of three) and the map's shape (three candidates) — nine models in all.</a:t>
-            </a:r>
-          </a:p>
-          <a:p>
-            <a:pPr>
-              <a:spcAft>
-                <a:spcPts val="400"/>
-              </a:spcAft>
-            </a:pPr>
-            <a:r>
-              <a:rPr sz="1700" b="1">
-                <a:solidFill>
-                  <a:srgbClr val="2B7A43"/>
-                </a:solidFill>
-              </a:rPr>
-              <a:t>From one stressed pad run, in order: bisect vt until the peak matches; then pick the candidate whose whole waveform matches.</a:t>
-            </a:r>
-          </a:p>
-          <a:p>
-            <a:pPr>
-              <a:spcAft>
-                <a:spcPts val="400"/>
-              </a:spcAft>
-            </a:pPr>
-            <a:r>
-              <a:rPr sz="1700" b="1">
-                <a:solidFill>
-                  <a:srgbClr val="2B7A43"/>
-                </a:solidFill>
-              </a:rPr>
-              <a:t>Nothing is probed. The only measurement is a pad voltage, taken from outside the chip with ordinary equipment.</a:t>
-            </a:r>
-          </a:p>
-        </p:txBody>
-      </p:sp>
+              <a:t>Why vt and not the drive rates? The rates were fitted to reproduce the full swing, and moving them breaks it. vt changes *when* the chain hands off, not how fast it runs.</a:t>
+            </a:r>
+          </a:p>
+        </p:txBody>
+      </p:sp>
+      <p:pic>
+        <p:nvPicPr>
+          <p:cNvPr id="4" name="Picture 3" descr="bisection.png"/>
+          <p:cNvPicPr>
+            <a:picLocks noChangeAspect="1"/>
+          </p:cNvPicPr>
+          <p:nvPr/>
+        </p:nvPicPr>
+        <p:blipFill>
+          <a:blip r:embed="rId2"/>
+          <a:stretch>
+            <a:fillRect/>
+          </a:stretch>
+        </p:blipFill>
+        <p:spPr>
+          <a:xfrm>
+            <a:off x="955059" y="2990088"/>
+            <a:ext cx="10297121" cy="3529584"/>
+          </a:xfrm>
+          <a:prstGeom prst="rect">
+            <a:avLst/>
+          </a:prstGeom>
+        </p:spPr>
+      </p:pic>
     </p:spTree>
   </p:cSld>
   <p:clrMapOvr>
@@ -5545,6 +5724,259 @@
           <a:lstStyle/>
           <a:p>
             <a:r>
+              <a:t>17 · Step 5 — the stressed run, second job: pick one</a:t>
+            </a:r>
+          </a:p>
+        </p:txBody>
+      </p:sp>
+      <p:sp>
+        <p:nvSpPr>
+          <p:cNvPr id="3" name="Content Placeholder 2"/>
+          <p:cNvSpPr>
+            <a:spLocks noGrp="1"/>
+          </p:cNvSpPr>
+          <p:nvPr>
+            <p:ph idx="10"/>
+          </p:nvPr>
+        </p:nvSpPr>
+        <p:spPr>
+          <a:xfrm>
+            <a:off x="411480" y="987552"/>
+            <a:ext cx="11384280" cy="2231136"/>
+          </a:xfrm>
+        </p:spPr>
+        <p:txBody>
+          <a:bodyPr/>
+          <a:lstStyle/>
+          <a:p>
+            <a:pPr>
+              <a:spcAft>
+                <a:spcPts val="400"/>
+              </a:spcAft>
+            </a:pPr>
+            <a:r>
+              <a:rPr sz="1800"/>
+              <a:t>All nine candidates have been calibrated, so all nine hit the measured peak — the calibration put it there. The peak has no information left in it.</a:t>
+            </a:r>
+          </a:p>
+          <a:p>
+            <a:pPr>
+              <a:spcAft>
+                <a:spcPts val="400"/>
+              </a:spcAft>
+            </a:pPr>
+            <a:r>
+              <a:rPr sz="1800"/>
+              <a:t>They differ everywhere else. Compare the whole measured waveform and one wins: K = 3 with the 0.50/0.70 shape, 59 mV rms against 84, 140 and worse.</a:t>
+            </a:r>
+          </a:p>
+          <a:p>
+            <a:pPr>
+              <a:spcAft>
+                <a:spcPts val="400"/>
+              </a:spcAft>
+            </a:pPr>
+            <a:r>
+              <a:rPr sz="1800" b="1">
+                <a:solidFill>
+                  <a:srgbClr val="2B7A43"/>
+                </a:solidFill>
+              </a:rPr>
+              <a:t>Ranking on the peak instead picks a chain that arrives up to 300 ps late with four times the waveform error.</a:t>
+            </a:r>
+          </a:p>
+        </p:txBody>
+      </p:sp>
+      <p:pic>
+        <p:nvPicPr>
+          <p:cNvPr id="4" name="Picture 3" descr="calib_select.png"/>
+          <p:cNvPicPr>
+            <a:picLocks noChangeAspect="1"/>
+          </p:cNvPicPr>
+          <p:nvPr/>
+        </p:nvPicPr>
+        <p:blipFill>
+          <a:blip r:embed="rId2"/>
+          <a:stretch>
+            <a:fillRect/>
+          </a:stretch>
+        </p:blipFill>
+        <p:spPr>
+          <a:xfrm>
+            <a:off x="1827961" y="3291840"/>
+            <a:ext cx="8551317" cy="3227832"/>
+          </a:xfrm>
+          <a:prstGeom prst="rect">
+            <a:avLst/>
+          </a:prstGeom>
+        </p:spPr>
+      </p:pic>
+    </p:spTree>
+  </p:cSld>
+  <p:clrMapOvr>
+    <a:masterClrMapping/>
+  </p:clrMapOvr>
+</p:sld>
+</file>
+
+<file path=ppt/slides/slide22.xml><?xml version="1.0" encoding="utf-8"?>
+<p:sld xmlns:a="http://schemas.openxmlformats.org/drawingml/2006/main" xmlns:p="http://schemas.openxmlformats.org/presentationml/2006/main" xmlns:r="http://schemas.openxmlformats.org/officeDocument/2006/relationships">
+  <p:cSld>
+    <p:spTree>
+      <p:nvGrpSpPr>
+        <p:cNvPr id="1" name=""/>
+        <p:cNvGrpSpPr/>
+        <p:nvPr/>
+      </p:nvGrpSpPr>
+      <p:grpSpPr/>
+      <p:sp>
+        <p:nvSpPr>
+          <p:cNvPr id="2" name="Title 1"/>
+          <p:cNvSpPr>
+            <a:spLocks noGrp="1"/>
+          </p:cNvSpPr>
+          <p:nvPr>
+            <p:ph type="title"/>
+          </p:nvPr>
+        </p:nvSpPr>
+        <p:spPr/>
+        <p:txBody>
+          <a:bodyPr/>
+          <a:lstStyle/>
+          <a:p>
+            <a:r>
+              <a:t>18 · The recipe, end to end</a:t>
+            </a:r>
+          </a:p>
+        </p:txBody>
+      </p:sp>
+      <p:sp>
+        <p:nvSpPr>
+          <p:cNvPr id="3" name="Content Placeholder 2"/>
+          <p:cNvSpPr>
+            <a:spLocks noGrp="1"/>
+          </p:cNvSpPr>
+          <p:nvPr>
+            <p:ph idx="10"/>
+          </p:nvPr>
+        </p:nvSpPr>
+        <p:spPr>
+          <a:xfrm>
+            <a:off x="411480" y="987552"/>
+            <a:ext cx="11384280" cy="2340864"/>
+          </a:xfrm>
+        </p:spPr>
+        <p:txBody>
+          <a:bodyPr/>
+          <a:lstStyle/>
+          <a:p>
+            <a:pPr>
+              <a:spcAft>
+                <a:spcPts val="400"/>
+              </a:spcAft>
+            </a:pPr>
+            <a:r>
+              <a:rPr sz="1600" b="1"/>
+              <a:t>From the file alone: C_comp, kept unless its own Ku &gt; 1 test rejects it; then s_up, s_dn, vt, x_lin fitted to the file's Ku(t) at each stage count in the band.</a:t>
+            </a:r>
+          </a:p>
+          <a:p>
+            <a:pPr>
+              <a:spcAft>
+                <a:spcPts val="400"/>
+              </a:spcAft>
+            </a:pPr>
+            <a:r>
+              <a:rPr sz="1600" b="1"/>
+              <a:t>Left undetermined by the file: the stage count and the map's shape — nine candidates in all.</a:t>
+            </a:r>
+          </a:p>
+          <a:p>
+            <a:pPr>
+              <a:spcAft>
+                <a:spcPts val="400"/>
+              </a:spcAft>
+            </a:pPr>
+            <a:r>
+              <a:rPr sz="1600" b="1"/>
+              <a:t>From one stressed pad run, in order: bisect vt until the peak matches, then pick the candidate whose whole waveform matches.</a:t>
+            </a:r>
+          </a:p>
+          <a:p>
+            <a:pPr>
+              <a:spcAft>
+                <a:spcPts val="400"/>
+              </a:spcAft>
+            </a:pPr>
+            <a:r>
+              <a:rPr sz="1600" b="1">
+                <a:solidFill>
+                  <a:srgbClr val="2B7A43"/>
+                </a:solidFill>
+              </a:rPr>
+              <a:t>Nothing is probed. The only measurement is a pad voltage, from outside the chip.</a:t>
+            </a:r>
+          </a:p>
+        </p:txBody>
+      </p:sp>
+      <p:pic>
+        <p:nvPicPr>
+          <p:cNvPr id="4" name="Picture 3" descr="model_blocks.png"/>
+          <p:cNvPicPr>
+            <a:picLocks noChangeAspect="1"/>
+          </p:cNvPicPr>
+          <p:nvPr/>
+        </p:nvPicPr>
+        <p:blipFill>
+          <a:blip r:embed="rId2"/>
+          <a:stretch>
+            <a:fillRect/>
+          </a:stretch>
+        </p:blipFill>
+        <p:spPr>
+          <a:xfrm>
+            <a:off x="460887" y="3401568"/>
+            <a:ext cx="11285464" cy="3118104"/>
+          </a:xfrm>
+          <a:prstGeom prst="rect">
+            <a:avLst/>
+          </a:prstGeom>
+        </p:spPr>
+      </p:pic>
+    </p:spTree>
+  </p:cSld>
+  <p:clrMapOvr>
+    <a:masterClrMapping/>
+  </p:clrMapOvr>
+</p:sld>
+</file>
+
+<file path=ppt/slides/slide23.xml><?xml version="1.0" encoding="utf-8"?>
+<p:sld xmlns:a="http://schemas.openxmlformats.org/drawingml/2006/main" xmlns:p="http://schemas.openxmlformats.org/presentationml/2006/main" xmlns:r="http://schemas.openxmlformats.org/officeDocument/2006/relationships">
+  <p:cSld>
+    <p:spTree>
+      <p:nvGrpSpPr>
+        <p:cNvPr id="1" name=""/>
+        <p:cNvGrpSpPr/>
+        <p:nvPr/>
+      </p:nvGrpSpPr>
+      <p:grpSpPr/>
+      <p:sp>
+        <p:nvSpPr>
+          <p:cNvPr id="2" name="Title 1"/>
+          <p:cNvSpPr>
+            <a:spLocks noGrp="1"/>
+          </p:cNvSpPr>
+          <p:nvPr>
+            <p:ph type="title"/>
+          </p:nvPr>
+        </p:nvSpPr>
+        <p:spPr/>
+        <p:txBody>
+          <a:bodyPr/>
+          <a:lstStyle/>
+          <a:p>
+            <a:r>
               <a:t>Where the file-only recipe stands</a:t>
             </a:r>
           </a:p>
@@ -5576,11 +6008,7 @@
               </a:spcAft>
             </a:pPr>
             <a:r>
-              <a:rPr sz="1800" b="1">
-                <a:solidFill>
-                  <a:srgbClr val="2B7A43"/>
-                </a:solidFill>
-              </a:rPr>
+              <a:rPr sz="1800" b="1"/>
               <a:t>12 of 12 buffers within ±10 % on the worst stressed pulse; mean 6.9 %.</a:t>
             </a:r>
           </a:p>
@@ -5644,7 +6072,7 @@
 </p:sld>
 </file>
 
-<file path=ppt/slides/slide22.xml><?xml version="1.0" encoding="utf-8"?>
+<file path=ppt/slides/slide24.xml><?xml version="1.0" encoding="utf-8"?>
 <p:sld xmlns:a="http://schemas.openxmlformats.org/drawingml/2006/main" xmlns:p="http://schemas.openxmlformats.org/presentationml/2006/main" xmlns:r="http://schemas.openxmlformats.org/officeDocument/2006/relationships">
   <p:cSld>
     <p:spTree>
@@ -5701,11 +6129,7 @@
               </a:spcAft>
             </a:pPr>
             <a:r>
-              <a:rPr sz="1800" b="1">
-                <a:solidFill>
-                  <a:srgbClr val="2B7A43"/>
-                </a:solidFill>
-              </a:rPr>
+              <a:rPr sz="1800" b="1"/>
               <a:t>Direction. Everything here is a short HIGH pulse. Only io_buf has been run pulling down, where the model is 16–21 points too shallow — its pull-down chain never turns on at all on a short pulse.</a:t>
             </a:r>
           </a:p>
@@ -5716,11 +6140,7 @@
               </a:spcAft>
             </a:pPr>
             <a:r>
-              <a:rPr sz="1800" b="1">
-                <a:solidFill>
-                  <a:srgbClr val="2B7A43"/>
-                </a:solidFill>
-              </a:rPr>
+              <a:rPr sz="1800" b="1"/>
               <a:t>Depth. The ladder samples 50–90 % of the travel. Below 50 % is unsampled.</a:t>
             </a:r>
           </a:p>
@@ -5731,11 +6151,7 @@
               </a:spcAft>
             </a:pPr>
             <a:r>
-              <a:rPr sz="1800" b="1">
-                <a:solidFill>
-                  <a:srgbClr val="2B7A43"/>
-                </a:solidFill>
-              </a:rPr>
+              <a:rPr sz="1800" b="1"/>
               <a:t>Trains. One pulse at a time; a stressed train is still lost on two of three buffers.</a:t>
             </a:r>
           </a:p>
@@ -5756,6 +6172,30 @@
           </a:p>
         </p:txBody>
       </p:sp>
+      <p:pic>
+        <p:nvPicPr>
+          <p:cNvPr id="4" name="Picture 3" descr="coverage.png"/>
+          <p:cNvPicPr>
+            <a:picLocks noChangeAspect="1"/>
+          </p:cNvPicPr>
+          <p:nvPr/>
+        </p:nvPicPr>
+        <p:blipFill>
+          <a:blip r:embed="rId2"/>
+          <a:stretch>
+            <a:fillRect/>
+          </a:stretch>
+        </p:blipFill>
+        <p:spPr>
+          <a:xfrm>
+            <a:off x="1785954" y="3401568"/>
+            <a:ext cx="8635331" cy="3118104"/>
+          </a:xfrm>
+          <a:prstGeom prst="rect">
+            <a:avLst/>
+          </a:prstGeom>
+        </p:spPr>
+      </p:pic>
     </p:spTree>
   </p:cSld>
   <p:clrMapOvr>
@@ -5764,7 +6204,7 @@
 </p:sld>
 </file>
 
-<file path=ppt/slides/slide23.xml><?xml version="1.0" encoding="utf-8"?>
+<file path=ppt/slides/slide25.xml><?xml version="1.0" encoding="utf-8"?>
 <p:sld xmlns:a="http://schemas.openxmlformats.org/drawingml/2006/main" xmlns:p="http://schemas.openxmlformats.org/presentationml/2006/main" xmlns:r="http://schemas.openxmlformats.org/officeDocument/2006/relationships">
   <p:cSld>
     <p:spTree>
@@ -6304,6 +6744,30 @@
           </a:p>
         </p:txBody>
       </p:sp>
+      <p:pic>
+        <p:nvPicPr>
+          <p:cNvPr id="4" name="Picture 3" descr="map_summary.png"/>
+          <p:cNvPicPr>
+            <a:picLocks noChangeAspect="1"/>
+          </p:cNvPicPr>
+          <p:nvPr/>
+        </p:nvPicPr>
+        <p:blipFill>
+          <a:blip r:embed="rId2"/>
+          <a:stretch>
+            <a:fillRect/>
+          </a:stretch>
+        </p:blipFill>
+        <p:spPr>
+          <a:xfrm>
+            <a:off x="899969" y="2688336"/>
+            <a:ext cx="10407301" cy="3831336"/>
+          </a:xfrm>
+          <a:prstGeom prst="rect">
+            <a:avLst/>
+          </a:prstGeom>
+        </p:spPr>
+      </p:pic>
     </p:spTree>
   </p:cSld>
   <p:clrMapOvr>
@@ -6665,6 +7129,30 @@
           </a:p>
         </p:txBody>
       </p:sp>
+      <p:pic>
+        <p:nvPicPr>
+          <p:cNvPr id="4" name="Picture 3" descr="what_we_have.png"/>
+          <p:cNvPicPr>
+            <a:picLocks noChangeAspect="1"/>
+          </p:cNvPicPr>
+          <p:nvPr/>
+        </p:nvPicPr>
+        <p:blipFill>
+          <a:blip r:embed="rId2"/>
+          <a:stretch>
+            <a:fillRect/>
+          </a:stretch>
+        </p:blipFill>
+        <p:spPr>
+          <a:xfrm>
+            <a:off x="3085310" y="4224528"/>
+            <a:ext cx="6036619" cy="2295144"/>
+          </a:xfrm>
+          <a:prstGeom prst="rect">
+            <a:avLst/>
+          </a:prstGeom>
+        </p:spPr>
+      </p:pic>
     </p:spTree>
   </p:cSld>
   <p:clrMapOvr>

--- a/results/meeting_deck_2026-09-24/0924_track1_story.pptx
+++ b/results/meeting_deck_2026-09-24/0924_track1_story.pptx
@@ -33,6 +33,8 @@
     <p:sldId id="278" r:id="rId31"/>
     <p:sldId id="279" r:id="rId32"/>
     <p:sldId id="280" r:id="rId33"/>
+    <p:sldId id="281" r:id="rId34"/>
+    <p:sldId id="282" r:id="rId35"/>
   </p:sldIdLst>
   <p:sldSz cx="12192000" cy="6858000"/>
   <p:notesSz cx="6858000" cy="9144000"/>
@@ -614,7 +616,7 @@
           <a:lstStyle/>
           <a:p>
             <a:r>
-              <a:t>Data from the 09-17 method film's export. This is the beat the film spends most time on, and the deck previously skipped: Ku(t) is solved, not fitted.</a:t>
+              <a:t>Slide 10 in the earlier cut explained where Ku(t) itself comes from - the two-fixture solve. It is now a backup slide: this audience knows it.</a:t>
             </a:r>
           </a:p>
         </p:txBody>
@@ -684,7 +686,7 @@
           <a:lstStyle/>
           <a:p>
             <a:r>
-              <a:t>The figure is the same point in the other factor: with no probe the map's shape has to be assumed, and the assumed shape and the measured one differ. Which shape you assume forces which gate the fit produces.</a:t>
+              <a:t>Grey is the full transition; the coloured curves follow it and peel off at different points. This is why the recipe needs exactly one extra measurement.</a:t>
             </a:r>
           </a:p>
         </p:txBody>
@@ -754,7 +756,7 @@
           <a:lstStyle/>
           <a:p>
             <a:r>
-              <a:t>Grey is the full transition; the coloured curves follow it and peel off at different points.</a:t>
+              <a:t>This rules out RC cascades, delay-plus-RC and superposition - which is what the shipped model is built from.</a:t>
             </a:r>
           </a:p>
         </p:txBody>
@@ -824,7 +826,7 @@
           <a:lstStyle/>
           <a:p>
             <a:r>
-              <a:t>This rules out RC cascades, delay-plus-RC and superposition, which is what the shipped model is built from.</a:t>
+              <a:t>Left: the input and the threshold it must pass. Right: the output the constant current produces. The next slide turns this picture into the four numbers.</a:t>
             </a:r>
           </a:p>
         </p:txBody>
@@ -894,7 +896,7 @@
           <a:lstStyle/>
           <a:p>
             <a:r>
-              <a:t>The left panel is the input and its threshold; the right is the output the constant current produces. The next slide shows what each of the four actually does.</a:t>
+              <a:t>Colours tie each term of the equation to its row. u is the stage's input, v its output, both on their own 0-to-1 swing.</a:t>
             </a:r>
           </a:p>
         </p:txBody>
@@ -964,7 +966,7 @@
           <a:lstStyle/>
           <a:p>
             <a:r>
-              <a:t>Simulated with the project's own stage model from the fitted values the film exported. Note the vt panel: at the top of its range the pulse dies completely.</a:t>
+              <a:t>Simulated with the project's own stage model from the fitted values the 09-17 film exported.</a:t>
             </a:r>
           </a:p>
         </p:txBody>
@@ -1034,7 +1036,7 @@
           <a:lstStyle/>
           <a:p>
             <a:r>
-              <a:t>Worth saying out loud that the right-hand half is not ours and is not in question.</a:t>
+              <a:t>Degenerate: a free fit splits the delay into one sluggish stage plus one quick one, reproduces the full swing slightly better, and predicts a stressed gate of 0.23 against a measured 0.76.</a:t>
             </a:r>
           </a:p>
         </p:txBody>
@@ -1104,7 +1106,7 @@
           <a:lstStyle/>
           <a:p>
             <a:r>
-              <a:t>The loop measurement is slide 3's hysteresis plot used as an instrument - a wrong C_comp opens the loop, because dV/dt flips sign between rise and fall. Track 1 cannot use it, since it needs the probed gate.</a:t>
+              <a:t>C_comp is not a model parameter: it is a number the file's own Ku tables were solved with, so a wrong value inflates the curve everything downstream is fitted to.</a:t>
             </a:r>
           </a:p>
         </p:txBody>
@@ -1174,7 +1176,7 @@
           <a:lstStyle/>
           <a:p>
             <a:r>
-              <a:t>Every trial the optimiser actually took, exported live by the 09-17 film. What this does NOT give us is K or the map's shape - the next slide.</a:t>
+              <a:t>Every trial the optimiser actually took, exported live by the 09-17 film. What it does NOT give us is K, or the map's shape.</a:t>
             </a:r>
           </a:p>
         </p:txBody>
@@ -1454,7 +1456,7 @@
           <a:lstStyle/>
           <a:p>
             <a:r>
-              <a:t>On this buffer the rule picks the best of the nine outright.</a:t>
+              <a:t>Ranking on the peak instead picks a chain that arrives up to 300 ps late with four times the waveform error. The nine waveforms themselves are the backup slide.</a:t>
             </a:r>
           </a:p>
         </p:txBody>
@@ -1690,6 +1692,146 @@
 </file>
 
 <file path=ppt/notesSlides/notesSlide25.xml><?xml version="1.0" encoding="utf-8"?>
+<p:notes xmlns:a="http://schemas.openxmlformats.org/drawingml/2006/main" xmlns:p="http://schemas.openxmlformats.org/presentationml/2006/main" xmlns:r="http://schemas.openxmlformats.org/officeDocument/2006/relationships">
+  <p:cSld>
+    <p:spTree>
+      <p:nvGrpSpPr>
+        <p:cNvPr id="1" name=""/>
+        <p:cNvGrpSpPr/>
+        <p:nvPr/>
+      </p:nvGrpSpPr>
+      <p:grpSpPr>
+        <a:xfrm>
+          <a:off x="0" y="0"/>
+          <a:ext cx="0" cy="0"/>
+          <a:chOff x="0" y="0"/>
+          <a:chExt cx="0" cy="0"/>
+        </a:xfrm>
+      </p:grpSpPr>
+      <p:sp>
+        <p:nvSpPr>
+          <p:cNvPr id="2" name="Slide Image Placeholder 1"/>
+          <p:cNvSpPr>
+            <a:spLocks noGrp="1"/>
+          </p:cNvSpPr>
+          <p:nvPr>
+            <p:ph type="sldImg" idx="2"/>
+          </p:nvPr>
+        </p:nvSpPr>
+        <p:spPr/>
+      </p:sp>
+      <p:sp>
+        <p:nvSpPr>
+          <p:cNvPr id="3" name="Notes Placeholder 2"/>
+          <p:cNvSpPr>
+            <a:spLocks noGrp="1"/>
+          </p:cNvSpPr>
+          <p:nvPr>
+            <p:ph type="body" idx="3" sz="quarter"/>
+          </p:nvPr>
+        </p:nvSpPr>
+        <p:spPr/>
+        <p:txBody>
+          <a:bodyPr/>
+          <a:lstStyle/>
+          <a:p>
+            <a:r>
+              <a:t>Moved out of the main line: this audience knows where Ku comes from.</a:t>
+            </a:r>
+          </a:p>
+        </p:txBody>
+      </p:sp>
+      <p:sp>
+        <p:nvSpPr>
+          <p:cNvPr id="4" name="Slide Number Placeholder 3"/>
+          <p:cNvSpPr>
+            <a:spLocks noGrp="1"/>
+          </p:cNvSpPr>
+          <p:nvPr>
+            <p:ph type="sldNum" idx="5" sz="quarter"/>
+          </p:nvPr>
+        </p:nvSpPr>
+        <p:spPr/>
+      </p:sp>
+    </p:spTree>
+  </p:cSld>
+  <p:clrMapOvr>
+    <a:masterClrMapping/>
+  </p:clrMapOvr>
+</p:notes>
+</file>
+
+<file path=ppt/notesSlides/notesSlide26.xml><?xml version="1.0" encoding="utf-8"?>
+<p:notes xmlns:a="http://schemas.openxmlformats.org/drawingml/2006/main" xmlns:p="http://schemas.openxmlformats.org/presentationml/2006/main" xmlns:r="http://schemas.openxmlformats.org/officeDocument/2006/relationships">
+  <p:cSld>
+    <p:spTree>
+      <p:nvGrpSpPr>
+        <p:cNvPr id="1" name=""/>
+        <p:cNvGrpSpPr/>
+        <p:nvPr/>
+      </p:nvGrpSpPr>
+      <p:grpSpPr>
+        <a:xfrm>
+          <a:off x="0" y="0"/>
+          <a:ext cx="0" cy="0"/>
+          <a:chOff x="0" y="0"/>
+          <a:chExt cx="0" cy="0"/>
+        </a:xfrm>
+      </p:grpSpPr>
+      <p:sp>
+        <p:nvSpPr>
+          <p:cNvPr id="2" name="Slide Image Placeholder 1"/>
+          <p:cNvSpPr>
+            <a:spLocks noGrp="1"/>
+          </p:cNvSpPr>
+          <p:nvPr>
+            <p:ph type="sldImg" idx="2"/>
+          </p:nvPr>
+        </p:nvSpPr>
+        <p:spPr/>
+      </p:sp>
+      <p:sp>
+        <p:nvSpPr>
+          <p:cNvPr id="3" name="Notes Placeholder 2"/>
+          <p:cNvSpPr>
+            <a:spLocks noGrp="1"/>
+          </p:cNvSpPr>
+          <p:nvPr>
+            <p:ph type="body" idx="3" sz="quarter"/>
+          </p:nvPr>
+        </p:nvSpPr>
+        <p:spPr/>
+        <p:txBody>
+          <a:bodyPr/>
+          <a:lstStyle/>
+          <a:p>
+            <a:r>
+              <a:t>This was the main slide before; the ranking says the same thing more directly.</a:t>
+            </a:r>
+          </a:p>
+        </p:txBody>
+      </p:sp>
+      <p:sp>
+        <p:nvSpPr>
+          <p:cNvPr id="4" name="Slide Number Placeholder 3"/>
+          <p:cNvSpPr>
+            <a:spLocks noGrp="1"/>
+          </p:cNvSpPr>
+          <p:nvPr>
+            <p:ph type="sldNum" idx="5" sz="quarter"/>
+          </p:nvPr>
+        </p:nvSpPr>
+        <p:spPr/>
+      </p:sp>
+    </p:spTree>
+  </p:cSld>
+  <p:clrMapOvr>
+    <a:masterClrMapping/>
+  </p:clrMapOvr>
+</p:notes>
+</file>
+
+<file path=ppt/notesSlides/notesSlide27.xml><?xml version="1.0" encoding="utf-8"?>
 <p:notes xmlns:a="http://schemas.openxmlformats.org/drawingml/2006/main" xmlns:p="http://schemas.openxmlformats.org/presentationml/2006/main" xmlns:r="http://schemas.openxmlformats.org/officeDocument/2006/relationships">
   <p:cSld>
     <p:spTree>
@@ -4283,7 +4425,7 @@
           <a:lstStyle/>
           <a:p>
             <a:r>
-              <a:t>6 · Where Ku(t) comes from, and what it is</a:t>
+              <a:t>6 · What the file fixes, and what it leaves open</a:t>
             </a:r>
           </a:p>
         </p:txBody>
@@ -4301,7 +4443,7 @@
         <p:spPr>
           <a:xfrm>
             <a:off x="411480" y="987552"/>
-            <a:ext cx="11384280" cy="2231136"/>
+            <a:ext cx="11384280" cy="2642616"/>
           </a:xfrm>
         </p:spPr>
         <p:txBody>
@@ -4314,8 +4456,8 @@
               </a:spcAft>
             </a:pPr>
             <a:r>
-              <a:rPr sz="1800"/>
-              <a:t>Before asking what the file cannot give, be clear about what it does. The file holds the pull-up and pull-down I-V curves, and recordings of one transition into two different loads.</a:t>
+              <a:rPr sz="1600"/>
+              <a:t>The file gives Ku(t) — a complete waveform, with shape at every instant. Shape is not what is missing.</a:t>
             </a:r>
           </a:p>
           <a:p>
@@ -4325,8 +4467,8 @@
               </a:spcAft>
             </a:pPr>
             <a:r>
-              <a:rPr sz="1800"/>
-              <a:t>At any instant the pad took some current, and it is the two branches together that supplied it. Two loads give two equations in the same two unknowns.</a:t>
+              <a:rPr sz="1600" b="1"/>
+              <a:t>What is missing is the split. Ku(t) = map(gate(t)) fixes the composition and nothing more: pick any gate trajectory, and the map is forced to be whatever reproduces Ku(t). Every such pair matches the file exactly.</a:t>
             </a:r>
           </a:p>
           <a:p>
@@ -4336,19 +4478,30 @@
               </a:spcAft>
             </a:pPr>
             <a:r>
-              <a:rPr sz="1800" b="1">
+              <a:rPr sz="1600"/>
+              <a:t>With no probe we cannot measure the map, so its shape has to be assumed — and the assumed shape and the measured one are not the same curve.</a:t>
+            </a:r>
+          </a:p>
+          <a:p>
+            <a:pPr>
+              <a:spcAft>
+                <a:spcPts val="400"/>
+              </a:spcAft>
+            </a:pPr>
+            <a:r>
+              <a:rPr sz="1600" b="1">
                 <a:solidFill>
                   <a:srgbClr val="2B7A43"/>
                 </a:solidFill>
               </a:rPr>
-              <a:t>Solve them at every instant and you have Ku(t) and Kd(t) — the fraction of each branch that was conducting. No fitting anywhere.</a:t>
+              <a:t>Assume a different map and the fit hands you a different gate. That is the whole difficulty.</a:t>
             </a:r>
           </a:p>
         </p:txBody>
       </p:sp>
       <p:pic>
         <p:nvPicPr>
-          <p:cNvPr id="4" name="Picture 3" descr="solve_ku.png"/>
+          <p:cNvPr id="4" name="Picture 3" descr="prior_shape.png"/>
           <p:cNvPicPr>
             <a:picLocks noChangeAspect="1"/>
           </p:cNvPicPr>
@@ -4362,8 +4515,8 @@
         </p:blipFill>
         <p:spPr>
           <a:xfrm>
-            <a:off x="1483466" y="3291840"/>
-            <a:ext cx="9240306" cy="3227832"/>
+            <a:off x="3156508" y="3703320"/>
+            <a:ext cx="5894222" cy="2816352"/>
           </a:xfrm>
           <a:prstGeom prst="rect">
             <a:avLst/>
@@ -4404,139 +4557,7 @@
           <a:lstStyle/>
           <a:p>
             <a:r>
-              <a:t>7 · What Ku(t) fixes, and what it leaves open</a:t>
-            </a:r>
-          </a:p>
-        </p:txBody>
-      </p:sp>
-      <p:sp>
-        <p:nvSpPr>
-          <p:cNvPr id="3" name="Content Placeholder 2"/>
-          <p:cNvSpPr>
-            <a:spLocks noGrp="1"/>
-          </p:cNvSpPr>
-          <p:nvPr>
-            <p:ph idx="10"/>
-          </p:nvPr>
-        </p:nvSpPr>
-        <p:spPr>
-          <a:xfrm>
-            <a:off x="411480" y="987552"/>
-            <a:ext cx="11384280" cy="2944368"/>
-          </a:xfrm>
-        </p:spPr>
-        <p:txBody>
-          <a:bodyPr/>
-          <a:lstStyle/>
-          <a:p>
-            <a:pPr>
-              <a:spcAft>
-                <a:spcPts val="400"/>
-              </a:spcAft>
-            </a:pPr>
-            <a:r>
-              <a:rPr sz="1600"/>
-              <a:t>Ku(t) has shape at every instant — shape is not what is missing.</a:t>
-            </a:r>
-          </a:p>
-          <a:p>
-            <a:pPr>
-              <a:spcAft>
-                <a:spcPts val="400"/>
-              </a:spcAft>
-            </a:pPr>
-            <a:r>
-              <a:rPr sz="1600" b="1"/>
-              <a:t>What is missing is the split. Ku(t) = map(gate(t)) fixes the composition and nothing more: pick any gate trajectory, and the map is forced to be whatever reproduces Ku(t). Every such pair matches the file exactly.</a:t>
-            </a:r>
-          </a:p>
-          <a:p>
-            <a:pPr>
-              <a:spcAft>
-                <a:spcPts val="400"/>
-              </a:spcAft>
-            </a:pPr>
-            <a:r>
-              <a:rPr sz="1600" b="1"/>
-              <a:t>A truncated pulse breaks the tie — the chain then makes a different gate trajectory, and where it turns round depends on how fast the gate was really travelling.</a:t>
-            </a:r>
-          </a:p>
-          <a:p>
-            <a:pPr>
-              <a:spcAft>
-                <a:spcPts val="400"/>
-              </a:spcAft>
-            </a:pPr>
-            <a:r>
-              <a:rPr sz="1600" b="1">
-                <a:solidFill>
-                  <a:srgbClr val="2B7A43"/>
-                </a:solidFill>
-              </a:rPr>
-              <a:t>That is why our GUP passes the full-swing check and fails under stress: it is one legal split, and not the right one.</a:t>
-            </a:r>
-          </a:p>
-        </p:txBody>
-      </p:sp>
-      <p:pic>
-        <p:nvPicPr>
-          <p:cNvPr id="4" name="Picture 3" descr="prior_shape.png"/>
-          <p:cNvPicPr>
-            <a:picLocks noChangeAspect="1"/>
-          </p:cNvPicPr>
-          <p:nvPr/>
-        </p:nvPicPr>
-        <p:blipFill>
-          <a:blip r:embed="rId2"/>
-          <a:stretch>
-            <a:fillRect/>
-          </a:stretch>
-        </p:blipFill>
-        <p:spPr>
-          <a:xfrm>
-            <a:off x="3472270" y="4005072"/>
-            <a:ext cx="5262698" cy="2514600"/>
-          </a:xfrm>
-          <a:prstGeom prst="rect">
-            <a:avLst/>
-          </a:prstGeom>
-        </p:spPr>
-      </p:pic>
-    </p:spTree>
-  </p:cSld>
-  <p:clrMapOvr>
-    <a:masterClrMapping/>
-  </p:clrMapOvr>
-</p:sld>
-</file>
-
-<file path=ppt/slides/slide12.xml><?xml version="1.0" encoding="utf-8"?>
-<p:sld xmlns:a="http://schemas.openxmlformats.org/drawingml/2006/main" xmlns:p="http://schemas.openxmlformats.org/presentationml/2006/main" xmlns:r="http://schemas.openxmlformats.org/officeDocument/2006/relationships">
-  <p:cSld>
-    <p:spTree>
-      <p:nvGrpSpPr>
-        <p:cNvPr id="1" name=""/>
-        <p:cNvGrpSpPr/>
-        <p:nvPr/>
-      </p:nvGrpSpPr>
-      <p:grpSpPr/>
-      <p:sp>
-        <p:nvSpPr>
-          <p:cNvPr id="2" name="Title 1"/>
-          <p:cNvSpPr>
-            <a:spLocks noGrp="1"/>
-          </p:cNvSpPr>
-          <p:nvPr>
-            <p:ph type="title"/>
-          </p:nvPr>
-        </p:nvSpPr>
-        <p:spPr/>
-        <p:txBody>
-          <a:bodyPr/>
-          <a:lstStyle/>
-          <a:p>
-            <a:r>
-              <a:t>8 · One stressed pulse is the measurement that reaches the gate</a:t>
+              <a:t>7 · So we need one more measurement — and a stressed pulse is the one</a:t>
             </a:r>
           </a:p>
         </p:txBody>
@@ -4568,7 +4589,18 @@
             </a:pPr>
             <a:r>
               <a:rPr sz="1800"/>
-              <a:t>Cutting the input short stops the clock partway through the gate's travel. What the pad does next depends on where the gate had got to.</a:t>
+              <a:t>A full transition cannot separate them. A truncated one can: the chain then produces a different gate trajectory, and where it turns round depends on how fast the gate was really travelling.</a:t>
+            </a:r>
+          </a:p>
+          <a:p>
+            <a:pPr>
+              <a:spcAft>
+                <a:spcPts val="400"/>
+              </a:spcAft>
+            </a:pPr>
+            <a:r>
+              <a:rPr sz="1800"/>
+              <a:t>Each stressed width stops the gate at a different height on the same path — here at 0.76, 0.80, 0.84, 0.88 and 0.94.</a:t>
             </a:r>
           </a:p>
           <a:p>
@@ -4583,18 +4615,7 @@
                   <a:srgbClr val="2B7A43"/>
                 </a:solidFill>
               </a:rPr>
-              <a:t>Each stressed width is one sample of the same path — here the five widths stop the gate at 0.76, 0.80, 0.84, 0.88 and 0.94.</a:t>
-            </a:r>
-          </a:p>
-          <a:p>
-            <a:pPr>
-              <a:spcAft>
-                <a:spcPts val="400"/>
-              </a:spcAft>
-            </a:pPr>
-            <a:r>
-              <a:rPr sz="1800"/>
-              <a:t>So the stress sweep is a sampling grid, and one pad measurement per buffer, taken from outside the chip, is the extra input track 1 needs.</a:t>
+              <a:t>So the five stress levels are five independent tests of the split, and one pad measurement is what track 1 asks the user for.</a:t>
             </a:r>
           </a:p>
         </p:txBody>
@@ -4631,7 +4652,7 @@
 </p:sld>
 </file>
 
-<file path=ppt/slides/slide13.xml><?xml version="1.0" encoding="utf-8"?>
+<file path=ppt/slides/slide12.xml><?xml version="1.0" encoding="utf-8"?>
 <p:sld xmlns:a="http://schemas.openxmlformats.org/drawingml/2006/main" xmlns:p="http://schemas.openxmlformats.org/presentationml/2006/main" xmlns:r="http://schemas.openxmlformats.org/officeDocument/2006/relationships">
   <p:cSld>
     <p:spTree>
@@ -4657,7 +4678,7 @@
           <a:lstStyle/>
           <a:p>
             <a:r>
-              <a:t>9 · What shape may the gate be?  Measure a stage</a:t>
+              <a:t>8 · But a few samples need a family of shapes to choose from</a:t>
             </a:r>
           </a:p>
         </p:txBody>
@@ -4688,8 +4709,8 @@
               </a:spcAft>
             </a:pPr>
             <a:r>
-              <a:rPr sz="1800"/>
-              <a:t>A sample only helps if we know what gate shapes are possible — five samples cannot pick a curve out of all curves.</a:t>
+              <a:rPr sz="1700"/>
+              <a:t>Five samples cannot pick a curve out of all possible curves. They can pick one out of a small family — so what family does this circuit actually produce?</a:t>
             </a:r>
           </a:p>
           <a:p>
@@ -4699,8 +4720,8 @@
               </a:spcAft>
             </a:pPr>
             <a:r>
-              <a:rPr sz="1800"/>
-              <a:t>So probe every stage under a short pulse, and compare with what a linear filter would give: its own step response, superposed.</a:t>
+              <a:rPr sz="1700"/>
+              <a:t>Probe every stage under a short pulse and compare against what a linear filter would give: its own step response, superposed.</a:t>
             </a:r>
           </a:p>
           <a:p>
@@ -4710,12 +4731,12 @@
               </a:spcAft>
             </a:pPr>
             <a:r>
-              <a:rPr sz="1800" b="1">
+              <a:rPr sz="1700" b="1">
                 <a:solidFill>
                   <a:srgbClr val="2B7A43"/>
                 </a:solidFill>
               </a:rPr>
-              <a:t>Every stage under-reaches, and the gap compounds down the chain — at the pad the linear prediction says 1.00 where the transistor does 0.50.</a:t>
+              <a:t>Every stage under-reaches, and the gap compounds down the chain — at the pad the linear prediction says 1.00 where the transistor does 0.50. So the family is not linear.</a:t>
             </a:r>
           </a:p>
         </p:txBody>
@@ -4752,7 +4773,7 @@
 </p:sld>
 </file>
 
-<file path=ppt/slides/slide14.xml><?xml version="1.0" encoding="utf-8"?>
+<file path=ppt/slides/slide13.xml><?xml version="1.0" encoding="utf-8"?>
 <p:sld xmlns:a="http://schemas.openxmlformats.org/drawingml/2006/main" xmlns:p="http://schemas.openxmlformats.org/presentationml/2006/main" xmlns:r="http://schemas.openxmlformats.org/officeDocument/2006/relationships">
   <p:cSld>
     <p:spTree>
@@ -4778,7 +4799,7 @@
           <a:lstStyle/>
           <a:p>
             <a:r>
-              <a:t>10 · The physics behind it — a stage is a current source with a threshold</a:t>
+              <a:t>9 · The family: a stage is a current source with a threshold</a:t>
             </a:r>
           </a:p>
         </p:txBody>
@@ -4796,7 +4817,7 @@
         <p:spPr>
           <a:xfrm>
             <a:off x="411480" y="987552"/>
-            <a:ext cx="11384280" cy="2231136"/>
+            <a:ext cx="11384280" cy="1819656"/>
           </a:xfrm>
         </p:spPr>
         <p:txBody>
@@ -4811,17 +4832,6 @@
             <a:r>
               <a:rPr sz="1800"/>
               <a:t>A CMOS inverter driving a large load is a current source while its input sits at the rail, because its conducting device is in saturation. Only near the destination rail does it leave saturation and become a resistor.</a:t>
-            </a:r>
-          </a:p>
-          <a:p>
-            <a:pPr>
-              <a:spcAft>
-                <a:spcPts val="400"/>
-              </a:spcAft>
-            </a:pPr>
-            <a:r>
-              <a:rPr sz="1800"/>
-              <a:t>A constant current into a gate capacitance is a ramp, tapering at the end.</a:t>
             </a:r>
           </a:p>
           <a:p>
@@ -4836,7 +4846,7 @@
                   <a:srgbClr val="2B7A43"/>
                 </a:solidFill>
               </a:rPr>
-              <a:t>So a stage needs four numbers, and the picture says which four: how hard it charges and discharges, how much input it needs before it does anything, and how near the rail the current gives way.</a:t>
+              <a:t>A constant current into a gate capacitance is a ramp, tapering at the end — which is what the measured stages do.</a:t>
             </a:r>
           </a:p>
         </p:txBody>
@@ -4857,8 +4867,118 @@
         </p:blipFill>
         <p:spPr>
           <a:xfrm>
-            <a:off x="861100" y="3291840"/>
-            <a:ext cx="10485038" cy="3227832"/>
+            <a:off x="411480" y="2880360"/>
+            <a:ext cx="11384280" cy="3504664"/>
+          </a:xfrm>
+          <a:prstGeom prst="rect">
+            <a:avLst/>
+          </a:prstGeom>
+        </p:spPr>
+      </p:pic>
+    </p:spTree>
+  </p:cSld>
+  <p:clrMapOvr>
+    <a:masterClrMapping/>
+  </p:clrMapOvr>
+</p:sld>
+</file>
+
+<file path=ppt/slides/slide14.xml><?xml version="1.0" encoding="utf-8"?>
+<p:sld xmlns:a="http://schemas.openxmlformats.org/drawingml/2006/main" xmlns:p="http://schemas.openxmlformats.org/presentationml/2006/main" xmlns:r="http://schemas.openxmlformats.org/officeDocument/2006/relationships">
+  <p:cSld>
+    <p:spTree>
+      <p:nvGrpSpPr>
+        <p:cNvPr id="1" name=""/>
+        <p:cNvGrpSpPr/>
+        <p:nvPr/>
+      </p:nvGrpSpPr>
+      <p:grpSpPr/>
+      <p:sp>
+        <p:nvSpPr>
+          <p:cNvPr id="2" name="Title 1"/>
+          <p:cNvSpPr>
+            <a:spLocks noGrp="1"/>
+          </p:cNvSpPr>
+          <p:nvPr>
+            <p:ph type="title"/>
+          </p:nvPr>
+        </p:nvSpPr>
+        <p:spPr/>
+        <p:txBody>
+          <a:bodyPr/>
+          <a:lstStyle/>
+          <a:p>
+            <a:r>
+              <a:t>10 · The four numbers that picture requires</a:t>
+            </a:r>
+          </a:p>
+        </p:txBody>
+      </p:sp>
+      <p:sp>
+        <p:nvSpPr>
+          <p:cNvPr id="3" name="Content Placeholder 2"/>
+          <p:cNvSpPr>
+            <a:spLocks noGrp="1"/>
+          </p:cNvSpPr>
+          <p:nvPr>
+            <p:ph idx="10"/>
+          </p:nvPr>
+        </p:nvSpPr>
+        <p:spPr>
+          <a:xfrm>
+            <a:off x="411480" y="987552"/>
+            <a:ext cx="11384280" cy="1517904"/>
+          </a:xfrm>
+        </p:spPr>
+        <p:txBody>
+          <a:bodyPr/>
+          <a:lstStyle/>
+          <a:p>
+            <a:pPr>
+              <a:spcAft>
+                <a:spcPts val="400"/>
+              </a:spcAft>
+            </a:pPr>
+            <a:r>
+              <a:rPr sz="1800"/>
+              <a:t>Written out, the stage law has exactly four free numbers and no more. Each one is a named part of the picture on the last slide, not a fitting coefficient.</a:t>
+            </a:r>
+          </a:p>
+          <a:p>
+            <a:pPr>
+              <a:spcAft>
+                <a:spcPts val="400"/>
+              </a:spcAft>
+            </a:pPr>
+            <a:r>
+              <a:rPr sz="1800" b="1">
+                <a:solidFill>
+                  <a:srgbClr val="2B7A43"/>
+                </a:solidFill>
+              </a:rPr>
+              <a:t>Three are fitted to the file and cost nothing. One, vt, is fitted and then re-set by the single stressed run — that is step 4.</a:t>
+            </a:r>
+          </a:p>
+        </p:txBody>
+      </p:sp>
+      <p:pic>
+        <p:nvPicPr>
+          <p:cNvPr id="4" name="Picture 3" descr="four_numbers.png"/>
+          <p:cNvPicPr>
+            <a:picLocks noChangeAspect="1"/>
+          </p:cNvPicPr>
+          <p:nvPr/>
+        </p:nvPicPr>
+        <p:blipFill>
+          <a:blip r:embed="rId2"/>
+          <a:stretch>
+            <a:fillRect/>
+          </a:stretch>
+        </p:blipFill>
+        <p:spPr>
+          <a:xfrm>
+            <a:off x="1500917" y="2578608"/>
+            <a:ext cx="9205404" cy="3941064"/>
           </a:xfrm>
           <a:prstGeom prst="rect">
             <a:avLst/>
@@ -4899,7 +5019,7 @@
           <a:lstStyle/>
           <a:p>
             <a:r>
-              <a:t>11 · What each of the four numbers does</a:t>
+              <a:t>11 · What each of the four actually does</a:t>
             </a:r>
           </a:p>
         </p:txBody>
@@ -4930,7 +5050,7 @@
               </a:spcAft>
             </a:pPr>
             <a:r>
-              <a:rPr sz="1600"/>
+              <a:rPr sz="1800"/>
               <a:t>Each swept on its own about the value the fit chose, on the 810 ps pulse. The thick black trace is the fitted value.</a:t>
             </a:r>
           </a:p>
@@ -4941,7 +5061,7 @@
               </a:spcAft>
             </a:pPr>
             <a:r>
-              <a:rPr sz="1600" b="1">
+              <a:rPr sz="1800" b="1">
                 <a:solidFill>
                   <a:srgbClr val="2B7A43"/>
                 </a:solidFill>
@@ -5009,7 +5129,7 @@
           <a:lstStyle/>
           <a:p>
             <a:r>
-              <a:t>12 · What we build</a:t>
+              <a:t>12 · Why a chain of K of them</a:t>
             </a:r>
           </a:p>
         </p:txBody>
@@ -5027,7 +5147,7 @@
         <p:spPr>
           <a:xfrm>
             <a:off x="411480" y="987552"/>
-            <a:ext cx="11384280" cy="1517904"/>
+            <a:ext cx="11384280" cy="2231136"/>
           </a:xfrm>
         </p:spPr>
         <p:txBody>
@@ -5040,8 +5160,8 @@
               </a:spcAft>
             </a:pPr>
             <a:r>
-              <a:rPr sz="1800"/>
-              <a:t>Everything to the right of the gate is the file's own, untouched: the map turns the gate into Ku, and Ku scales the file's I-V tables. That half we have already shown is right.</a:t>
+              <a:rPr sz="1700"/>
+              <a:t>The real predriver is a chain — the schematic earlier showed three inverters between ex2's input and its output gate, and the stage walk watched a pulse lose height at each.</a:t>
             </a:r>
           </a:p>
           <a:p>
@@ -5051,12 +5171,23 @@
               </a:spcAft>
             </a:pPr>
             <a:r>
-              <a:rPr sz="1800" b="1">
+              <a:rPr sz="1700"/>
+              <a:t>We cannot see how many a vendor's part has, so the count K is a parameter. The stages are held identical: a real tapered predriver approximately is, and letting them differ makes the fit degenerate.</a:t>
+            </a:r>
+          </a:p>
+          <a:p>
+            <a:pPr>
+              <a:spcAft>
+                <a:spcPts val="400"/>
+              </a:spcAft>
+            </a:pPr>
+            <a:r>
+              <a:rPr sz="1700" b="1">
                 <a:solidFill>
                   <a:srgbClr val="2B7A43"/>
                 </a:solidFill>
               </a:rPr>
-              <a:t>What we build is the left-hand box — K identical stages of the kind the last two slides measured, standing in for the predriver we cannot see.</a:t>
+              <a:t>Everything to the right of the gate is the file's own, untouched — the map and the I-V tables. We are only building the left-hand box.</a:t>
             </a:r>
           </a:p>
         </p:txBody>
@@ -5077,8 +5208,8 @@
         </p:blipFill>
         <p:spPr>
           <a:xfrm>
-            <a:off x="411480" y="2578608"/>
-            <a:ext cx="11384280" cy="3145406"/>
+            <a:off x="411480" y="3291840"/>
+            <a:ext cx="11384280" cy="3096299"/>
           </a:xfrm>
           <a:prstGeom prst="rect">
             <a:avLst/>
@@ -5137,7 +5268,7 @@
         <p:spPr>
           <a:xfrm>
             <a:off x="411480" y="987552"/>
-            <a:ext cx="11384280" cy="2944368"/>
+            <a:ext cx="11384280" cy="2532888"/>
           </a:xfrm>
         </p:spPr>
         <p:txBody>
@@ -5150,8 +5281,8 @@
               </a:spcAft>
             </a:pPr>
             <a:r>
-              <a:rPr sz="1600"/>
-              <a:t>C_comp is not a model parameter. It is a number in the file that the file's own Ku tables were solved with — the solve on slide 6 subtracts it — so a wrong value inflates the curve everything downstream is fitted to.</a:t>
+              <a:rPr sz="1700"/>
+              <a:t>Ku is a fraction of the device's own current, so it cannot exceed 1. Solve the file at a range of assumed C_comp and watch what the solve returns.</a:t>
             </a:r>
           </a:p>
           <a:p>
@@ -5161,41 +5292,30 @@
               </a:spcAft>
             </a:pPr>
             <a:r>
-              <a:rPr sz="1600"/>
-              <a:t>Ku is a conducting fraction, so it cannot exceed 1. ex2's declared 5.0 pF implies Ku = 1.24: the file rejects its own declared value.</a:t>
-            </a:r>
-          </a:p>
-          <a:p>
-            <a:pPr>
-              <a:spcAft>
-                <a:spcPts val="400"/>
-              </a:spcAft>
-            </a:pPr>
-            <a:r>
-              <a:rPr sz="1600"/>
-              <a:t>Rule: keep what the file declares unless it implies Ku &gt; 1, then take the value at which Ku just reaches 1 — 2.64 pF here, against 1.70 measured by the loop.</a:t>
-            </a:r>
-          </a:p>
-          <a:p>
-            <a:pPr>
-              <a:spcAft>
-                <a:spcPts val="400"/>
-              </a:spcAft>
-            </a:pPr>
-            <a:r>
-              <a:rPr sz="1600" b="1">
+              <a:rPr sz="1700" b="1">
                 <a:solidFill>
                   <a:srgbClr val="2B7A43"/>
                 </a:solidFill>
               </a:rPr>
-              <a:t>55 % off, and it still works: the stressed peak is not sharp in C_comp once it is in the right range.</a:t>
+              <a:t>ex2's declared 5.0 pF makes the file imply Ku = 1.24 — impossible. The file rejects its own declared value.</a:t>
+            </a:r>
+          </a:p>
+          <a:p>
+            <a:pPr>
+              <a:spcAft>
+                <a:spcPts val="400"/>
+              </a:spcAft>
+            </a:pPr>
+            <a:r>
+              <a:rPr sz="1700"/>
+              <a:t>So: keep what the file declares unless it implies Ku &gt; 1, then take the value at which Ku just reaches 1. That reads 2.64 pF here, against 1.70 measured with a probe — 55 % off, and it still works, because the stressed peak is not sharp in C_comp.</a:t>
             </a:r>
           </a:p>
         </p:txBody>
       </p:sp>
       <p:pic>
         <p:nvPicPr>
-          <p:cNvPr id="4" name="Picture 3" descr="ccomp.png"/>
+          <p:cNvPr id="4" name="Picture 3" descr="ccomp_reject.png"/>
           <p:cNvPicPr>
             <a:picLocks noChangeAspect="1"/>
           </p:cNvPicPr>
@@ -5209,8 +5329,8 @@
         </p:blipFill>
         <p:spPr>
           <a:xfrm>
-            <a:off x="2531745" y="4005072"/>
-            <a:ext cx="7143750" cy="2514600"/>
+            <a:off x="2725718" y="3593592"/>
+            <a:ext cx="6755802" cy="2926080"/>
           </a:xfrm>
           <a:prstGeom prst="rect">
             <a:avLst/>
@@ -5251,7 +5371,7 @@
           <a:lstStyle/>
           <a:p>
             <a:r>
-              <a:t>14 · Step 2 — the four numbers, fitted to the file</a:t>
+              <a:t>14 · Step 2 — the four numbers, fitted to the file's Ku(t)</a:t>
             </a:r>
           </a:p>
         </p:txBody>
@@ -5269,7 +5389,7 @@
         <p:spPr>
           <a:xfrm>
             <a:off x="411480" y="987552"/>
-            <a:ext cx="11384280" cy="2231136"/>
+            <a:ext cx="11384280" cy="1627632"/>
           </a:xfrm>
         </p:spPr>
         <p:txBody>
@@ -5283,7 +5403,18 @@
             </a:pPr>
             <a:r>
               <a:rPr sz="1800"/>
-              <a:t>The four are searched until the chain's output, put through the map, reproduces the file's own full-swing Ku(t). Nelder–Mead, three restarts.</a:t>
+              <a:t>The four are searched until the chain's output, put through the map, reproduces the file's own full-swing Ku(t) — the black curve. Nelder–Mead, three restarts.</a:t>
+            </a:r>
+          </a:p>
+          <a:p>
+            <a:pPr>
+              <a:spcAft>
+                <a:spcPts val="400"/>
+              </a:spcAft>
+            </a:pPr>
+            <a:r>
+              <a:rPr sz="1800"/>
+              <a:t>Error 0.284 down to 0.0098, landing on s_up 2.59, s_dn 2.38, vt 0.51, x_lin 0.66.</a:t>
             </a:r>
           </a:p>
           <a:p>
@@ -5298,18 +5429,7 @@
                   <a:srgbClr val="2B7A43"/>
                 </a:solidFill>
               </a:rPr>
-              <a:t>No measurement is involved. The target is a curve the file already contains, so the stage law costs nothing.</a:t>
-            </a:r>
-          </a:p>
-          <a:p>
-            <a:pPr>
-              <a:spcAft>
-                <a:spcPts val="400"/>
-              </a:spcAft>
-            </a:pPr>
-            <a:r>
-              <a:rPr sz="1800"/>
-              <a:t>Here the search runs from an error of 0.28 down to 0.0098, landing on s_up 2.59, s_dn 2.38, vt 0.51, x_lin 0.66.</a:t>
+              <a:t>No measurement is involved: the target is a curve the file already contains.</a:t>
             </a:r>
           </a:p>
         </p:txBody>
@@ -5330,8 +5450,8 @@
         </p:blipFill>
         <p:spPr>
           <a:xfrm>
-            <a:off x="1393260" y="3291840"/>
-            <a:ext cx="9420719" cy="3227832"/>
+            <a:off x="512569" y="2688336"/>
+            <a:ext cx="11182100" cy="3831336"/>
           </a:xfrm>
           <a:prstGeom prst="rect">
             <a:avLst/>
@@ -5621,7 +5741,7 @@
         <p:spPr>
           <a:xfrm>
             <a:off x="411480" y="987552"/>
-            <a:ext cx="11384280" cy="1929384"/>
+            <a:ext cx="11384280" cy="2231136"/>
           </a:xfrm>
         </p:spPr>
         <p:txBody>
@@ -5635,7 +5755,7 @@
             </a:pPr>
             <a:r>
               <a:rPr sz="1800"/>
-              <a:t>Now the measured waveform enters. The parameters fitted to the file alone are nowhere near right under stress: on ex2 the fitted threshold leaves the 810 ps pad 97 % low.</a:t>
+              <a:t>Now the measured waveform enters. Fitted to the file alone the chain leaves the 810 ps pad 28 % low — the file can set the shape, but not the amplitude.</a:t>
             </a:r>
           </a:p>
           <a:p>
@@ -5646,7 +5766,7 @@
             </a:pPr>
             <a:r>
               <a:rPr sz="1800"/>
-              <a:t>So bisect vt against the measured peak — bracket 0 to 0.7, then halve. Ten runs, landing on 0.487.</a:t>
+              <a:t>So bisect vt against the measured peak. The two spikes are the bracket being probed first: vt = 0 overshoots by 26 %, vt = 0.7 kills the pulse entirely at −99 %. Then halve. Ten runs, landing on vt 0.487 and +1.4 %.</a:t>
             </a:r>
           </a:p>
           <a:p>
@@ -5661,7 +5781,7 @@
                   <a:srgbClr val="2B7A43"/>
                 </a:solidFill>
               </a:rPr>
-              <a:t>Why vt and not the drive rates? The rates were fitted to reproduce the full swing, and moving them breaks it. vt changes *when* the chain hands off, not how fast it runs.</a:t>
+              <a:t>Why vt and not the drive rates? The rates were fitted to reproduce the full swing, and moving them breaks it. vt changes when the chain hands off, not how fast it runs.</a:t>
             </a:r>
           </a:p>
         </p:txBody>
@@ -5682,8 +5802,8 @@
         </p:blipFill>
         <p:spPr>
           <a:xfrm>
-            <a:off x="955059" y="2990088"/>
-            <a:ext cx="10297121" cy="3529584"/>
+            <a:off x="1395221" y="3291840"/>
+            <a:ext cx="9416797" cy="3227832"/>
           </a:xfrm>
           <a:prstGeom prst="rect">
             <a:avLst/>
@@ -5755,8 +5875,8 @@
               </a:spcAft>
             </a:pPr>
             <a:r>
-              <a:rPr sz="1800"/>
-              <a:t>All nine candidates have been calibrated, so all nine hit the measured peak — the calibration put it there. The peak has no information left in it.</a:t>
+              <a:rPr sz="1700"/>
+              <a:t>All nine candidates are now calibrated, so all nine hit the measured peak — the calibration put it there. Right-hand panel: ranked on the peak every one is within 2.5 %, in no meaningful order.</a:t>
             </a:r>
           </a:p>
           <a:p>
@@ -5766,8 +5886,8 @@
               </a:spcAft>
             </a:pPr>
             <a:r>
-              <a:rPr sz="1800"/>
-              <a:t>They differ everywhere else. Compare the whole measured waveform and one wins: K = 3 with the 0.50/0.70 shape, 59 mV rms against 84, 140 and worse.</a:t>
+              <a:rPr sz="1700"/>
+              <a:t>Left-hand panel: score each one against the whole measured waveform instead, over the pulse and its return. Now they separate, from 59 mV to over 200.</a:t>
             </a:r>
           </a:p>
           <a:p>
@@ -5777,19 +5897,19 @@
               </a:spcAft>
             </a:pPr>
             <a:r>
-              <a:rPr sz="1800" b="1">
+              <a:rPr sz="1700" b="1">
                 <a:solidFill>
                   <a:srgbClr val="2B7A43"/>
                 </a:solidFill>
               </a:rPr>
-              <a:t>Ranking on the peak instead picks a chain that arrives up to 300 ps late with four times the waveform error.</a:t>
+              <a:t>That ranking is the choice. The recipe keeps the top row — here K = 3 with the 0.50/0.70 shape, which is also the best of the nine outright.</a:t>
             </a:r>
           </a:p>
         </p:txBody>
       </p:sp>
       <p:pic>
         <p:nvPicPr>
-          <p:cNvPr id="4" name="Picture 3" descr="calib_select.png"/>
+          <p:cNvPr id="4" name="Picture 3" descr="pick_rank.png"/>
           <p:cNvPicPr>
             <a:picLocks noChangeAspect="1"/>
           </p:cNvPicPr>
@@ -5803,8 +5923,8 @@
         </p:blipFill>
         <p:spPr>
           <a:xfrm>
-            <a:off x="1827961" y="3291840"/>
-            <a:ext cx="8551317" cy="3227832"/>
+            <a:off x="1734237" y="3291840"/>
+            <a:ext cx="8738764" cy="3227832"/>
           </a:xfrm>
           <a:prstGeom prst="rect">
             <a:avLst/>
@@ -5935,8 +6055,8 @@
         </p:blipFill>
         <p:spPr>
           <a:xfrm>
-            <a:off x="460887" y="3401568"/>
-            <a:ext cx="11285464" cy="3118104"/>
+            <a:off x="411480" y="3401568"/>
+            <a:ext cx="11384280" cy="3096299"/>
           </a:xfrm>
           <a:prstGeom prst="rect">
             <a:avLst/>
@@ -6205,6 +6325,222 @@
 </file>
 
 <file path=ppt/slides/slide25.xml><?xml version="1.0" encoding="utf-8"?>
+<p:sld xmlns:a="http://schemas.openxmlformats.org/drawingml/2006/main" xmlns:p="http://schemas.openxmlformats.org/presentationml/2006/main" xmlns:r="http://schemas.openxmlformats.org/officeDocument/2006/relationships">
+  <p:cSld>
+    <p:spTree>
+      <p:nvGrpSpPr>
+        <p:cNvPr id="1" name=""/>
+        <p:cNvGrpSpPr/>
+        <p:nvPr/>
+      </p:nvGrpSpPr>
+      <p:grpSpPr/>
+      <p:sp>
+        <p:nvSpPr>
+          <p:cNvPr id="2" name="Title 1"/>
+          <p:cNvSpPr>
+            <a:spLocks noGrp="1"/>
+          </p:cNvSpPr>
+          <p:nvPr>
+            <p:ph type="title"/>
+          </p:nvPr>
+        </p:nvSpPr>
+        <p:spPr/>
+        <p:txBody>
+          <a:bodyPr/>
+          <a:lstStyle/>
+          <a:p>
+            <a:r>
+              <a:t>Backup · where Ku(t) comes from</a:t>
+            </a:r>
+          </a:p>
+        </p:txBody>
+      </p:sp>
+      <p:sp>
+        <p:nvSpPr>
+          <p:cNvPr id="3" name="Content Placeholder 2"/>
+          <p:cNvSpPr>
+            <a:spLocks noGrp="1"/>
+          </p:cNvSpPr>
+          <p:nvPr>
+            <p:ph idx="10"/>
+          </p:nvPr>
+        </p:nvSpPr>
+        <p:spPr>
+          <a:xfrm>
+            <a:off x="411480" y="987552"/>
+            <a:ext cx="11384280" cy="1517904"/>
+          </a:xfrm>
+        </p:spPr>
+        <p:txBody>
+          <a:bodyPr/>
+          <a:lstStyle/>
+          <a:p>
+            <a:pPr>
+              <a:spcAft>
+                <a:spcPts val="400"/>
+              </a:spcAft>
+            </a:pPr>
+            <a:r>
+              <a:rPr sz="1800"/>
+              <a:t>The file holds the I-V curves and recordings of one transition into two different loads. At any instant the pad took some current, and both branches supplied it.</a:t>
+            </a:r>
+          </a:p>
+          <a:p>
+            <a:pPr>
+              <a:spcAft>
+                <a:spcPts val="400"/>
+              </a:spcAft>
+            </a:pPr>
+            <a:r>
+              <a:rPr sz="1800"/>
+              <a:t>Two loads give two equations in the same two unknowns, so one instant gives Ku and Kd outright — no fitting. Repeat at every instant and the result is Ku(t).</a:t>
+            </a:r>
+          </a:p>
+        </p:txBody>
+      </p:sp>
+      <p:pic>
+        <p:nvPicPr>
+          <p:cNvPr id="4" name="Picture 3" descr="solve_ku.png"/>
+          <p:cNvPicPr>
+            <a:picLocks noChangeAspect="1"/>
+          </p:cNvPicPr>
+          <p:nvPr/>
+        </p:nvPicPr>
+        <p:blipFill>
+          <a:blip r:embed="rId2"/>
+          <a:stretch>
+            <a:fillRect/>
+          </a:stretch>
+        </p:blipFill>
+        <p:spPr>
+          <a:xfrm>
+            <a:off x="462583" y="2578608"/>
+            <a:ext cx="11282073" cy="3941064"/>
+          </a:xfrm>
+          <a:prstGeom prst="rect">
+            <a:avLst/>
+          </a:prstGeom>
+        </p:spPr>
+      </p:pic>
+    </p:spTree>
+  </p:cSld>
+  <p:clrMapOvr>
+    <a:masterClrMapping/>
+  </p:clrMapOvr>
+</p:sld>
+</file>
+
+<file path=ppt/slides/slide26.xml><?xml version="1.0" encoding="utf-8"?>
+<p:sld xmlns:a="http://schemas.openxmlformats.org/drawingml/2006/main" xmlns:p="http://schemas.openxmlformats.org/presentationml/2006/main" xmlns:r="http://schemas.openxmlformats.org/officeDocument/2006/relationships">
+  <p:cSld>
+    <p:spTree>
+      <p:nvGrpSpPr>
+        <p:cNvPr id="1" name=""/>
+        <p:cNvGrpSpPr/>
+        <p:nvPr/>
+      </p:nvGrpSpPr>
+      <p:grpSpPr/>
+      <p:sp>
+        <p:nvSpPr>
+          <p:cNvPr id="2" name="Title 1"/>
+          <p:cNvSpPr>
+            <a:spLocks noGrp="1"/>
+          </p:cNvSpPr>
+          <p:nvPr>
+            <p:ph type="title"/>
+          </p:nvPr>
+        </p:nvSpPr>
+        <p:spPr/>
+        <p:txBody>
+          <a:bodyPr/>
+          <a:lstStyle/>
+          <a:p>
+            <a:r>
+              <a:t>Backup · the nine candidates as waveforms</a:t>
+            </a:r>
+          </a:p>
+        </p:txBody>
+      </p:sp>
+      <p:sp>
+        <p:nvSpPr>
+          <p:cNvPr id="3" name="Content Placeholder 2"/>
+          <p:cNvSpPr>
+            <a:spLocks noGrp="1"/>
+          </p:cNvSpPr>
+          <p:nvPr>
+            <p:ph idx="10"/>
+          </p:nvPr>
+        </p:nvSpPr>
+        <p:spPr>
+          <a:xfrm>
+            <a:off x="411480" y="987552"/>
+            <a:ext cx="11384280" cy="1216152"/>
+          </a:xfrm>
+        </p:spPr>
+        <p:txBody>
+          <a:bodyPr/>
+          <a:lstStyle/>
+          <a:p>
+            <a:pPr>
+              <a:spcAft>
+                <a:spcPts val="400"/>
+              </a:spcAft>
+            </a:pPr>
+            <a:r>
+              <a:rPr sz="1800"/>
+              <a:t>The same nine as step 5, drawn rather than ranked: all sharing the measured peak because the calibration put it there, and separating in the tail.</a:t>
+            </a:r>
+          </a:p>
+          <a:p>
+            <a:pPr>
+              <a:spcAft>
+                <a:spcPts val="400"/>
+              </a:spcAft>
+            </a:pPr>
+            <a:r>
+              <a:rPr sz="1800" b="1">
+                <a:solidFill>
+                  <a:srgbClr val="2B7A43"/>
+                </a:solidFill>
+              </a:rPr>
+              <a:t>The one the recipe picks sits on the transistor.</a:t>
+            </a:r>
+          </a:p>
+        </p:txBody>
+      </p:sp>
+      <p:pic>
+        <p:nvPicPr>
+          <p:cNvPr id="4" name="Picture 3" descr="calib_select.png"/>
+          <p:cNvPicPr>
+            <a:picLocks noChangeAspect="1"/>
+          </p:cNvPicPr>
+          <p:nvPr/>
+        </p:nvPicPr>
+        <p:blipFill>
+          <a:blip r:embed="rId2"/>
+          <a:stretch>
+            <a:fillRect/>
+          </a:stretch>
+        </p:blipFill>
+        <p:spPr>
+          <a:xfrm>
+            <a:off x="483490" y="2276856"/>
+            <a:ext cx="11240259" cy="4242816"/>
+          </a:xfrm>
+          <a:prstGeom prst="rect">
+            <a:avLst/>
+          </a:prstGeom>
+        </p:spPr>
+      </p:pic>
+    </p:spTree>
+  </p:cSld>
+  <p:clrMapOvr>
+    <a:masterClrMapping/>
+  </p:clrMapOvr>
+</p:sld>
+</file>
+
+<file path=ppt/slides/slide27.xml><?xml version="1.0" encoding="utf-8"?>
 <p:sld xmlns:a="http://schemas.openxmlformats.org/drawingml/2006/main" xmlns:p="http://schemas.openxmlformats.org/presentationml/2006/main" xmlns:r="http://schemas.openxmlformats.org/officeDocument/2006/relationships">
   <p:cSld>
     <p:spTree>

--- a/results/meeting_deck_2026-09-24/0924_track1_story.pptx
+++ b/results/meeting_deck_2026-09-24/0924_track1_story.pptx
@@ -616,7 +616,7 @@
           <a:lstStyle/>
           <a:p>
             <a:r>
-              <a:t>Slide 10 in the earlier cut explained where Ku(t) itself comes from - the two-fixture solve. It is now a backup slide: this audience knows it.</a:t>
+              <a:t>An earlier cut explained where Ku(t) itself comes from - the two-fixture solve. It is now a backup slide: this audience knows it.</a:t>
             </a:r>
           </a:p>
         </p:txBody>
@@ -1526,7 +1526,7 @@
           <a:lstStyle/>
           <a:p>
             <a:r>
-              <a:t>The same block diagram as slide 12, now with the recipe attached to it. This is the slide to leave up during questions.</a:t>
+              <a:t>The same block diagram as the chain slide, with the recipe attached. This is the slide to leave up during questions.</a:t>
             </a:r>
           </a:p>
         </p:txBody>
@@ -1876,7 +1876,7 @@
           <a:lstStyle/>
           <a:p>
             <a:r>
-              <a:t>Carried from the 09-18 deck so the inv_chain numbers on slide 3 are not read as a win. review_2026-09-09 item 12B has the measurement.</a:t>
+              <a:t>Carried from the 09-18 deck so the inv_chain numbers earlier are not read as a win. review_2026-09-09 item 12B has the measurement.</a:t>
             </a:r>
           </a:p>
         </p:txBody>
@@ -2366,7 +2366,7 @@
           <a:lstStyle/>
           <a:p>
             <a:r>
-              <a:t>This is the motivation slide, and it only works because slides 2-4 have already shown that the gate's shape is the entire error. Earlier versions of this deck asserted the motivation before showing that.</a:t>
+              <a:t>This is the motivation slide, and it only works because the evidence half has shown that the gate's shape is the entire error. Earlier versions of this deck asserted the motivation before showing that.</a:t>
             </a:r>
           </a:p>
         </p:txBody>
@@ -4324,7 +4324,7 @@
         <p:spPr>
           <a:xfrm>
             <a:off x="411480" y="987552"/>
-            <a:ext cx="11384280" cy="2450592"/>
+            <a:ext cx="11384280" cy="2862072"/>
           </a:xfrm>
         </p:spPr>
         <p:txBody>
@@ -4338,7 +4338,7 @@
             </a:pPr>
             <a:r>
               <a:rPr sz="1800"/>
-              <a:t>Simon Huang  ·  24 September 2026</a:t>
+              <a:t>Simon Huang    ·    24 September 2026</a:t>
             </a:r>
           </a:p>
           <a:p>
@@ -4347,9 +4347,16 @@
                 <a:spcPts val="400"/>
               </a:spcAft>
             </a:pPr>
+          </a:p>
+          <a:p>
+            <a:pPr>
+              <a:spcAft>
+                <a:spcPts val="400"/>
+              </a:spcAft>
+            </a:pPr>
             <a:r>
               <a:rPr sz="1800"/>
-              <a:t/>
+              <a:t>The output stage is a static map of its own gate, so a stressed pad is right when the gate's shape is right — and the gate is the one thing an IBIS file does not record.</a:t>
             </a:r>
           </a:p>
           <a:p>
@@ -4358,10 +4365,6 @@
                 <a:spcPts val="400"/>
               </a:spcAft>
             </a:pPr>
-            <a:r>
-              <a:rPr sz="1800"/>
-              <a:t>The story in one line: the output stage is a static map of its own gate, so a stressed pad is right when the gate's shape is right — and the gate is the thing IBIS does not record.</a:t>
-            </a:r>
           </a:p>
           <a:p>
             <a:pPr>
@@ -4370,8 +4373,8 @@
               </a:spcAft>
             </a:pPr>
             <a:r>
-              <a:rPr sz="1800"/>
-              <a:t/>
+              <a:rPr sz="1800" b="1"/>
+              <a:t>1  measure the map      2  show it works      3  show why our gate fails</a:t>
             </a:r>
           </a:p>
           <a:p>
@@ -4386,7 +4389,7 @@
                   <a:srgbClr val="2B7A43"/>
                 </a:solidFill>
               </a:rPr>
-              <a:t>1  measure the map   2  show it works   3  show why our gate fails   4  reproduce the gate from the file</a:t>
+              <a:t>4  the motivation      5  the method, step by step      6  where it stands</a:t>
             </a:r>
           </a:p>
         </p:txBody>
@@ -4443,7 +4446,7 @@
         <p:spPr>
           <a:xfrm>
             <a:off x="411480" y="987552"/>
-            <a:ext cx="11384280" cy="2642616"/>
+            <a:ext cx="11384280" cy="2340864"/>
           </a:xfrm>
         </p:spPr>
         <p:txBody>
@@ -4468,7 +4471,11 @@
             </a:pPr>
             <a:r>
               <a:rPr sz="1600" b="1"/>
-              <a:t>What is missing is the split. Ku(t) = map(gate(t)) fixes the composition and nothing more: pick any gate trajectory, and the map is forced to be whatever reproduces Ku(t). Every such pair matches the file exactly.</a:t>
+              <a:t>What is missing is the split.</a:t>
+            </a:r>
+            <a:r>
+              <a:rPr sz="1600"/>
+              <a:t> Ku(t) = map(gate(t)) fixes the composition and nothing more: pick any gate trajectory and the map is forced to whatever reproduces Ku(t). Every such pair matches the file exactly.</a:t>
             </a:r>
           </a:p>
           <a:p>
@@ -4479,7 +4486,7 @@
             </a:pPr>
             <a:r>
               <a:rPr sz="1600"/>
-              <a:t>With no probe we cannot measure the map, so its shape has to be assumed — and the assumed shape and the measured one are not the same curve.</a:t>
+              <a:t>With no probe the map cannot be measured, so its shape has to be assumed — and the assumed shape is not the measured curve.</a:t>
             </a:r>
           </a:p>
           <a:p>
@@ -4515,8 +4522,8 @@
         </p:blipFill>
         <p:spPr>
           <a:xfrm>
-            <a:off x="3156508" y="3703320"/>
-            <a:ext cx="5894222" cy="2816352"/>
+            <a:off x="2840746" y="3401568"/>
+            <a:ext cx="6525746" cy="3118104"/>
           </a:xfrm>
           <a:prstGeom prst="rect">
             <a:avLst/>
@@ -4557,7 +4564,7 @@
           <a:lstStyle/>
           <a:p>
             <a:r>
-              <a:t>7 · So we need one more measurement — and a stressed pulse is the one</a:t>
+              <a:t>7 · One more measurement, and a stressed pulse is the one</a:t>
             </a:r>
           </a:p>
         </p:txBody>
@@ -4575,7 +4582,7 @@
         <p:spPr>
           <a:xfrm>
             <a:off x="411480" y="987552"/>
-            <a:ext cx="11384280" cy="2231136"/>
+            <a:ext cx="11384280" cy="1929384"/>
           </a:xfrm>
         </p:spPr>
         <p:txBody>
@@ -4589,7 +4596,15 @@
             </a:pPr>
             <a:r>
               <a:rPr sz="1800"/>
-              <a:t>A full transition cannot separate them. A truncated one can: the chain then produces a different gate trajectory, and where it turns round depends on how fast the gate was really travelling.</a:t>
+              <a:t>A full transition cannot separate them. A truncated one can: the chain then produces a </a:t>
+            </a:r>
+            <a:r>
+              <a:rPr sz="1800" b="1"/>
+              <a:t>different</a:t>
+            </a:r>
+            <a:r>
+              <a:rPr sz="1800"/>
+              <a:t> gate trajectory, and where it turns round depends on how fast the gate was really travelling.</a:t>
             </a:r>
           </a:p>
           <a:p>
@@ -4615,7 +4630,7 @@
                   <a:srgbClr val="2B7A43"/>
                 </a:solidFill>
               </a:rPr>
-              <a:t>So the five stress levels are five independent tests of the split, and one pad measurement is what track 1 asks the user for.</a:t>
+              <a:t>Five stress levels are five independent tests of the split, and they cost one measurement at the pad.</a:t>
             </a:r>
           </a:p>
         </p:txBody>
@@ -4636,8 +4651,8 @@
         </p:blipFill>
         <p:spPr>
           <a:xfrm>
-            <a:off x="1923192" y="3291840"/>
-            <a:ext cx="8360854" cy="3227832"/>
+            <a:off x="1532388" y="2990088"/>
+            <a:ext cx="9142463" cy="3529584"/>
           </a:xfrm>
           <a:prstGeom prst="rect">
             <a:avLst/>
@@ -4721,7 +4736,15 @@
             </a:pPr>
             <a:r>
               <a:rPr sz="1700"/>
-              <a:t>Probe every stage under a short pulse and compare against what a linear filter would give: its own step response, superposed.</a:t>
+              <a:t>Probe every stage under a short pulse against what a </a:t>
+            </a:r>
+            <a:r>
+              <a:rPr sz="1700" b="1"/>
+              <a:t>linear</a:t>
+            </a:r>
+            <a:r>
+              <a:rPr sz="1700"/>
+              <a:t> filter would give: its own step response, superposed.</a:t>
             </a:r>
           </a:p>
           <a:p>
@@ -4831,7 +4854,15 @@
             </a:pPr>
             <a:r>
               <a:rPr sz="1800"/>
-              <a:t>A CMOS inverter driving a large load is a current source while its input sits at the rail, because its conducting device is in saturation. Only near the destination rail does it leave saturation and become a resistor.</a:t>
+              <a:t>A CMOS inverter driving a large load is a </a:t>
+            </a:r>
+            <a:r>
+              <a:rPr sz="1800" b="1"/>
+              <a:t>current source</a:t>
+            </a:r>
+            <a:r>
+              <a:rPr sz="1800"/>
+              <a:t> while its input sits at the rail, because its conducting device is in saturation. Only near the destination rail does it leave saturation and become a resistor.</a:t>
             </a:r>
           </a:p>
           <a:p>
@@ -4846,7 +4877,11 @@
                   <a:srgbClr val="2B7A43"/>
                 </a:solidFill>
               </a:rPr>
-              <a:t>A constant current into a gate capacitance is a ramp, tapering at the end — which is what the measured stages do.</a:t>
+              <a:t>A constant current into a gate capacitance is a ramp, tapering at the end</a:t>
+            </a:r>
+            <a:r>
+              <a:rPr sz="1800"/>
+              <a:t> — which is what the measured stages do.</a:t>
             </a:r>
           </a:p>
         </p:txBody>
@@ -5161,7 +5196,15 @@
             </a:pPr>
             <a:r>
               <a:rPr sz="1700"/>
-              <a:t>The real predriver is a chain — the schematic earlier showed three inverters between ex2's input and its output gate, and the stage walk watched a pulse lose height at each.</a:t>
+              <a:t>The real predriver </a:t>
+            </a:r>
+            <a:r>
+              <a:rPr sz="1700" b="1"/>
+              <a:t>is</a:t>
+            </a:r>
+            <a:r>
+              <a:rPr sz="1700"/>
+              <a:t> a chain — the schematic earlier showed three inverters between ex2's input and its output gate, and the stage walk watched a pulse lose height at each.</a:t>
             </a:r>
           </a:p>
           <a:p>
@@ -5172,7 +5215,15 @@
             </a:pPr>
             <a:r>
               <a:rPr sz="1700"/>
-              <a:t>We cannot see how many a vendor's part has, so the count K is a parameter. The stages are held identical: a real tapered predriver approximately is, and letting them differ makes the fit degenerate.</a:t>
+              <a:t>We cannot see how many a vendor's part has, so the count K is a parameter. The stages are held </a:t>
+            </a:r>
+            <a:r>
+              <a:rPr sz="1700" b="1"/>
+              <a:t>identical</a:t>
+            </a:r>
+            <a:r>
+              <a:rPr sz="1700"/>
+              <a:t>: a real tapered predriver approximately is, and letting them differ makes the fit degenerate.</a:t>
             </a:r>
           </a:p>
           <a:p>
@@ -5329,8 +5380,8 @@
         </p:blipFill>
         <p:spPr>
           <a:xfrm>
-            <a:off x="2725718" y="3593592"/>
-            <a:ext cx="6755802" cy="2926080"/>
+            <a:off x="2657163" y="3593592"/>
+            <a:ext cx="6892913" cy="2926080"/>
           </a:xfrm>
           <a:prstGeom prst="rect">
             <a:avLst/>
@@ -5403,7 +5454,15 @@
             </a:pPr>
             <a:r>
               <a:rPr sz="1800"/>
-              <a:t>The four are searched until the chain's output, put through the map, reproduces the file's own full-swing Ku(t) — the black curve. Nelder–Mead, three restarts.</a:t>
+              <a:t>The four are searched until the chain's output, put through the map, reproduces </a:t>
+            </a:r>
+            <a:r>
+              <a:rPr sz="1800" b="1"/>
+              <a:t>the file's own full-swing Ku(t)</a:t>
+            </a:r>
+            <a:r>
+              <a:rPr sz="1800"/>
+              <a:t> — the black curve. Nelder–Mead, three restarts.</a:t>
             </a:r>
           </a:p>
           <a:p>
@@ -5524,7 +5583,15 @@
             </a:pPr>
             <a:r>
               <a:rPr sz="1800"/>
-              <a:t>Left: the fit error against the file's Ku(t), for every stage count. Past K = 3 it is flat — the file has nothing left to say.</a:t>
+              <a:t>Left: the fit error against the file's Ku(t), for every stage count. Past K = 3 it is </a:t>
+            </a:r>
+            <a:r>
+              <a:rPr sz="1800" b="1"/>
+              <a:t>flat</a:t>
+            </a:r>
+            <a:r>
+              <a:rPr sz="1800"/>
+              <a:t> — the file has nothing left to say.</a:t>
             </a:r>
           </a:p>
           <a:p>
@@ -5535,7 +5602,15 @@
             </a:pPr>
             <a:r>
               <a:rPr sz="1800"/>
-              <a:t>Right: the three candidates inside that band, on one 810 ps pulse. Same file, same fit quality, three completely different buffers.</a:t>
+              <a:t>Right: the three candidates inside that band, on one 810 ps pulse. Same file, same fit quality, </a:t>
+            </a:r>
+            <a:r>
+              <a:rPr sz="1800" b="1"/>
+              <a:t>three completely different buffers</a:t>
+            </a:r>
+            <a:r>
+              <a:rPr sz="1800"/>
+              <a:t>.</a:t>
             </a:r>
           </a:p>
           <a:p>
@@ -5550,7 +5625,11 @@
                   <a:srgbClr val="2B7A43"/>
                 </a:solidFill>
               </a:rPr>
-              <a:t>The map's shape is under-determined in the same way (slide 7). Three stage counts × three map shapes = nine candidates.</a:t>
+              <a:t>The map's shape is under-determined in the same way</a:t>
+            </a:r>
+            <a:r>
+              <a:rPr sz="1800"/>
+              <a:t> — the degeneracy slide. Three stage counts × three map shapes = nine candidates.</a:t>
             </a:r>
           </a:p>
         </p:txBody>
@@ -5660,7 +5739,11 @@
                   <a:srgbClr val="2B7A43"/>
                 </a:solidFill>
               </a:rPr>
-              <a:t>The node that matters is the output stage's gate — ex2's n4 below. Everything the pad does is decided there.</a:t>
+              <a:t>The node that matters is the output stage's gate</a:t>
+            </a:r>
+            <a:r>
+              <a:rPr sz="1800"/>
+              <a:t> — ex2's n4 below. Everything the pad does is decided there.</a:t>
             </a:r>
           </a:p>
         </p:txBody>
@@ -5755,7 +5838,15 @@
             </a:pPr>
             <a:r>
               <a:rPr sz="1800"/>
-              <a:t>Now the measured waveform enters. Fitted to the file alone the chain leaves the 810 ps pad 28 % low — the file can set the shape, but not the amplitude.</a:t>
+              <a:t>Now the measured waveform enters. </a:t>
+            </a:r>
+            <a:r>
+              <a:rPr sz="1800" b="1"/>
+              <a:t>Fitted to the file alone the chain leaves the 810 ps pad 28 % low</a:t>
+            </a:r>
+            <a:r>
+              <a:rPr sz="1800"/>
+              <a:t> — the file can set the shape, but not the amplitude.</a:t>
             </a:r>
           </a:p>
           <a:p>
@@ -5876,7 +5967,15 @@
             </a:pPr>
             <a:r>
               <a:rPr sz="1700"/>
-              <a:t>All nine candidates are now calibrated, so all nine hit the measured peak — the calibration put it there. Right-hand panel: ranked on the peak every one is within 2.5 %, in no meaningful order.</a:t>
+              <a:t>All nine candidates are now calibrated, so </a:t>
+            </a:r>
+            <a:r>
+              <a:rPr sz="1700" b="1"/>
+              <a:t>all nine hit the measured peak</a:t>
+            </a:r>
+            <a:r>
+              <a:rPr sz="1700"/>
+              <a:t> — the calibration put it there. Right-hand panel: ranked on the peak every one is within 2.5 %, in no meaningful order.</a:t>
             </a:r>
           </a:p>
           <a:p>
@@ -5887,7 +5986,15 @@
             </a:pPr>
             <a:r>
               <a:rPr sz="1700"/>
-              <a:t>Left-hand panel: score each one against the whole measured waveform instead, over the pulse and its return. Now they separate, from 59 mV to over 200.</a:t>
+              <a:t>Left-hand panel: score each one against the </a:t>
+            </a:r>
+            <a:r>
+              <a:rPr sz="1700" b="1"/>
+              <a:t>whole</a:t>
+            </a:r>
+            <a:r>
+              <a:rPr sz="1700"/>
+              <a:t> measured waveform instead, over the pulse and its return. Now they separate, from 59 mV to over 200.</a:t>
             </a:r>
           </a:p>
           <a:p>
@@ -5997,7 +6104,11 @@
             </a:pPr>
             <a:r>
               <a:rPr sz="1600" b="1"/>
-              <a:t>From the file alone: C_comp, kept unless its own Ku &gt; 1 test rejects it; then s_up, s_dn, vt, x_lin fitted to the file's Ku(t) at each stage count in the band.</a:t>
+              <a:t>From the file alone:</a:t>
+            </a:r>
+            <a:r>
+              <a:rPr sz="1600"/>
+              <a:t> C_comp, kept unless its own Ku &gt; 1 test rejects it; then s_up, s_dn, vt, x_lin fitted to the file's Ku(t) at each stage count in the band.</a:t>
             </a:r>
           </a:p>
           <a:p>
@@ -6008,7 +6119,11 @@
             </a:pPr>
             <a:r>
               <a:rPr sz="1600" b="1"/>
-              <a:t>Left undetermined by the file: the stage count and the map's shape — nine candidates in all.</a:t>
+              <a:t>Left undetermined by the file:</a:t>
+            </a:r>
+            <a:r>
+              <a:rPr sz="1600"/>
+              <a:t> the stage count and the map's shape — nine candidates in all.</a:t>
             </a:r>
           </a:p>
           <a:p>
@@ -6019,7 +6134,11 @@
             </a:pPr>
             <a:r>
               <a:rPr sz="1600" b="1"/>
-              <a:t>From one stressed pad run, in order: bisect vt until the peak matches, then pick the candidate whose whole waveform matches.</a:t>
+              <a:t>From one stressed pad run, in order:</a:t>
+            </a:r>
+            <a:r>
+              <a:rPr sz="1600"/>
+              <a:t> bisect vt until the peak matches, then pick the candidate whose whole waveform matches.</a:t>
             </a:r>
           </a:p>
           <a:p>
@@ -6034,7 +6153,11 @@
                   <a:srgbClr val="2B7A43"/>
                 </a:solidFill>
               </a:rPr>
-              <a:t>Nothing is probed. The only measurement is a pad voltage, from outside the chip.</a:t>
+              <a:t>Nothing is probed.</a:t>
+            </a:r>
+            <a:r>
+              <a:rPr sz="1600"/>
+              <a:t> The only measurement is a pad voltage, from outside the chip.</a:t>
             </a:r>
           </a:p>
         </p:txBody>
@@ -6097,7 +6220,7 @@
           <a:lstStyle/>
           <a:p>
             <a:r>
-              <a:t>Where the file-only recipe stands</a:t>
+              <a:t>Result · where the file-only recipe stands</a:t>
             </a:r>
           </a:p>
         </p:txBody>
@@ -6155,7 +6278,11 @@
                   <a:srgbClr val="2B7A43"/>
                 </a:solidFill>
               </a:rPr>
-              <a:t>What it costs: the full transition is worse than the shipped model on 10 of 12 buffers, and a stressed pulse train is still lost on ex2 and io_buf. We buy accuracy in stressed accuracy with full-swing accuracy.</a:t>
+              <a:t>What it costs:</a:t>
+            </a:r>
+            <a:r>
+              <a:rPr sz="1800"/>
+              <a:t> the full transition is worse than the shipped model on 10 of 12 buffers, and a stressed pulse train is still lost on ex2 and io_buf. We are buying stressed accuracy with full-swing accuracy.</a:t>
             </a:r>
           </a:p>
         </p:txBody>
@@ -6218,7 +6345,7 @@
           <a:lstStyle/>
           <a:p>
             <a:r>
-              <a:t>What this does not cover yet</a:t>
+              <a:t>Result · what this does not cover yet</a:t>
             </a:r>
           </a:p>
         </p:txBody>
@@ -6250,7 +6377,11 @@
             </a:pPr>
             <a:r>
               <a:rPr sz="1800" b="1"/>
-              <a:t>Direction. Everything here is a short HIGH pulse. Only io_buf has been run pulling down, where the model is 16–21 points too shallow — its pull-down chain never turns on at all on a short pulse.</a:t>
+              <a:t>Direction.</a:t>
+            </a:r>
+            <a:r>
+              <a:rPr sz="1800"/>
+              <a:t> Everything here is a short HIGH pulse. Only io_buf has been run pulling down, where the model is 16–21 points too shallow — its pull-down chain never turns on at all on a short pulse.</a:t>
             </a:r>
           </a:p>
           <a:p>
@@ -6261,7 +6392,11 @@
             </a:pPr>
             <a:r>
               <a:rPr sz="1800" b="1"/>
-              <a:t>Depth. The ladder samples 50–90 % of the travel. Below 50 % is unsampled.</a:t>
+              <a:t>Depth.</a:t>
+            </a:r>
+            <a:r>
+              <a:rPr sz="1800"/>
+              <a:t> The ladder samples 50–90 % of the travel. Below 50 % is unsampled.</a:t>
             </a:r>
           </a:p>
           <a:p>
@@ -6272,7 +6407,11 @@
             </a:pPr>
             <a:r>
               <a:rPr sz="1800" b="1"/>
-              <a:t>Trains. One pulse at a time; a stressed train is still lost on two of three buffers.</a:t>
+              <a:t>Trains.</a:t>
+            </a:r>
+            <a:r>
+              <a:rPr sz="1800"/>
+              <a:t> One pulse at a time; a stressed train is still lost on two of three buffers.</a:t>
             </a:r>
           </a:p>
           <a:p>
@@ -6287,7 +6426,11 @@
                   <a:srgbClr val="2B7A43"/>
                 </a:solidFill>
               </a:rPr>
-              <a:t>The recipe has seen the answer key. Two of the three candidate map shapes were chosen by looking at results on these same twelve buffers. A thirteenth buffer may need a shape the grid does not contain.</a:t>
+              <a:t>The recipe has seen the answer key.</a:t>
+            </a:r>
+            <a:r>
+              <a:rPr sz="1800"/>
+              <a:t> Two of the three candidate map shapes were chosen by looking at results on these same twelve buffers. A thirteenth buffer may need a shape the grid does not contain.</a:t>
             </a:r>
           </a:p>
         </p:txBody>
@@ -6382,7 +6525,15 @@
             </a:pPr>
             <a:r>
               <a:rPr sz="1800"/>
-              <a:t>The file holds the I-V curves and recordings of one transition into two different loads. At any instant the pad took some current, and both branches supplied it.</a:t>
+              <a:t>The file holds the I-V curves and recordings of one transition into </a:t>
+            </a:r>
+            <a:r>
+              <a:rPr sz="1800" b="1"/>
+              <a:t>two different loads</a:t>
+            </a:r>
+            <a:r>
+              <a:rPr sz="1800"/>
+              <a:t>. At any instant the pad took some current, and both branches supplied it.</a:t>
             </a:r>
           </a:p>
           <a:p>
@@ -6393,7 +6544,7 @@
             </a:pPr>
             <a:r>
               <a:rPr sz="1800"/>
-              <a:t>Two loads give two equations in the same two unknowns, so one instant gives Ku and Kd outright — no fitting. Repeat at every instant and the result is Ku(t).</a:t>
+              <a:t>Two loads give two equations in the same two unknowns, so one instant gives Ku and Kd outright — no fitting. Every instant gives Ku(t).</a:t>
             </a:r>
           </a:p>
         </p:txBody>
@@ -6488,7 +6639,7 @@
             </a:pPr>
             <a:r>
               <a:rPr sz="1800"/>
-              <a:t>The same nine as step 5, drawn rather than ranked: all sharing the measured peak because the calibration put it there, and separating in the tail.</a:t>
+              <a:t>The same nine as step 5, drawn rather than ranked. Every one reaches the measured peak height — the calibration put it there — and they separate in when that peak arrives, and in the tail.</a:t>
             </a:r>
           </a:p>
           <a:p>
@@ -6624,7 +6775,11 @@
                   <a:srgbClr val="2B7A43"/>
                 </a:solidFill>
               </a:rPr>
-              <a:t>It is a defect that flatters us, not a result. With the threshold at mid-supply the shipped error roughly doubles.</a:t>
+              <a:t>It is a defect that flatters us, not a result.</a:t>
+            </a:r>
+            <a:r>
+              <a:rPr sz="1800"/>
+              <a:t> With the threshold at mid-supply the shipped error roughly doubles.</a:t>
             </a:r>
           </a:p>
         </p:txBody>
@@ -6734,7 +6889,11 @@
                   <a:srgbClr val="2B7A43"/>
                 </a:solidFill>
               </a:rPr>
-              <a:t>The pairing is the map. No fitting: it is read off a single full-swing run.</a:t>
+              <a:t>The pairing is the map.</a:t>
+            </a:r>
+            <a:r>
+              <a:rPr sz="1800"/>
+              <a:t> No fitting: it is read off a single full-swing run.</a:t>
             </a:r>
           </a:p>
         </p:txBody>
@@ -6815,7 +6974,7 @@
         <p:spPr>
           <a:xfrm>
             <a:off x="411480" y="987552"/>
-            <a:ext cx="11384280" cy="1517904"/>
+            <a:ext cx="11384280" cy="1216152"/>
           </a:xfrm>
         </p:spPr>
         <p:txBody>
@@ -6829,7 +6988,7 @@
             </a:pPr>
             <a:r>
               <a:rPr sz="1800"/>
-              <a:t>Drive that measured map with the transistor's own gate, and compare the pad against the transistor at all five stress levels.</a:t>
+              <a:t>Drive that measured map with the transistor's own gate; compare against the transistor at all five stress levels.</a:t>
             </a:r>
           </a:p>
           <a:p>
@@ -6844,7 +7003,7 @@
                   <a:srgbClr val="2B7A43"/>
                 </a:solidFill>
               </a:rPr>
-              <a:t>Within ±5 % at every level, where native IBIS runs +71 % at the deepest and our own gate-state model +74 %.</a:t>
+              <a:t>Within ±5 % at every level. Native IBIS runs +71 % at the deepest, our own gate-state model +74 %.</a:t>
             </a:r>
           </a:p>
         </p:txBody>
@@ -6865,8 +7024,8 @@
         </p:blipFill>
         <p:spPr>
           <a:xfrm>
-            <a:off x="411480" y="2578608"/>
-            <a:ext cx="11384280" cy="3382757"/>
+            <a:off x="411480" y="2276856"/>
+            <a:ext cx="11384280" cy="3342312"/>
           </a:xfrm>
           <a:prstGeom prst="rect">
             <a:avLst/>
@@ -6939,7 +7098,7 @@
             </a:pPr>
             <a:r>
               <a:rPr sz="1800"/>
-              <a:t>Drive that measured map with the transistor's own gate, and compare the pad against the transistor at all five stress levels.</a:t>
+              <a:t>Drive that measured map with the transistor's own gate; compare against the transistor at all five stress levels.</a:t>
             </a:r>
           </a:p>
           <a:p>
@@ -6954,7 +7113,7 @@
                   <a:srgbClr val="2B7A43"/>
                 </a:solidFill>
               </a:rPr>
-              <a:t>Within +2…+9 %, where native IBIS runs +87 % at the deepest. Our gate-state model looks good at 70–90 % for the wrong reason — see the backup slide on Vinh.</a:t>
+              <a:t>Within +2…+9 %, where native IBIS runs +87 %. Our gate-state model looks good at 70–90 % for the wrong reason — see the backup slide on Vinh.</a:t>
             </a:r>
           </a:p>
         </p:txBody>
@@ -6976,7 +7135,7 @@
         <p:spPr>
           <a:xfrm>
             <a:off x="411480" y="2578608"/>
-            <a:ext cx="11384280" cy="3401048"/>
+            <a:ext cx="11384280" cy="3364661"/>
           </a:xfrm>
           <a:prstGeom prst="rect">
             <a:avLst/>
@@ -7277,7 +7436,7 @@
         <p:spPr>
           <a:xfrm>
             <a:off x="411480" y="987552"/>
-            <a:ext cx="11384280" cy="1216152"/>
+            <a:ext cx="11384280" cy="914400"/>
           </a:xfrm>
         </p:spPr>
         <p:txBody>
@@ -7291,7 +7450,7 @@
             </a:pPr>
             <a:r>
               <a:rPr sz="1800"/>
-              <a:t>Same map, two gates. The top row is Ku, the bottom row the pad.</a:t>
+              <a:t>Same map, two gates: Ku on top, the pad below. Our peak error: +74 % at 50 % stress, +4 % at 90 %.</a:t>
             </a:r>
           </a:p>
           <a:p>
@@ -7306,7 +7465,7 @@
                   <a:srgbClr val="2B7A43"/>
                 </a:solidFill>
               </a:rPr>
-              <a:t>GUP holds Ku high long after the real gate has let go — and the pad overshoot is exactly that extra area. +74 % at 50 % stress, +4 % at 90 %.</a:t>
+              <a:t>GUP holds Ku high after the real gate has let go, and the pad overshoot is exactly that extra area.</a:t>
             </a:r>
           </a:p>
         </p:txBody>
@@ -7327,8 +7486,8 @@
         </p:blipFill>
         <p:spPr>
           <a:xfrm>
-            <a:off x="2121632" y="2276856"/>
-            <a:ext cx="7963974" cy="4242816"/>
+            <a:off x="1988349" y="1975104"/>
+            <a:ext cx="8230540" cy="4544568"/>
           </a:xfrm>
           <a:prstGeom prst="rect">
             <a:avLst/>
@@ -7401,7 +7560,15 @@
             </a:pPr>
             <a:r>
               <a:rPr sz="1800"/>
-              <a:t>We know what a correct model needs: the real gate's shape, and the map.</a:t>
+              <a:t>We know what a correct model needs: </a:t>
+            </a:r>
+            <a:r>
+              <a:rPr sz="1800" b="1"/>
+              <a:t>the real gate's shape</a:t>
+            </a:r>
+            <a:r>
+              <a:rPr sz="1800"/>
+              <a:t>, and the map.</a:t>
             </a:r>
           </a:p>
           <a:p>
@@ -7421,10 +7588,6 @@
                 <a:spcPts val="400"/>
               </a:spcAft>
             </a:pPr>
-            <a:r>
-              <a:rPr sz="1800"/>
-              <a:t/>
-            </a:r>
           </a:p>
           <a:p>
             <a:pPr>
@@ -7447,10 +7610,6 @@
                 <a:spcPts val="400"/>
               </a:spcAft>
             </a:pPr>
-            <a:r>
-              <a:rPr sz="1800"/>
-              <a:t/>
-            </a:r>
           </a:p>
           <a:p>
             <a:pPr>

--- a/results/meeting_deck_2026-09-24/0924_track1_story.pptx
+++ b/results/meeting_deck_2026-09-24/0924_track1_story.pptx
@@ -4331,7 +4331,7 @@
           <a:bodyPr/>
           <a:lstStyle/>
           <a:p>
-            <a:pPr>
+            <a:pPr latinLnBrk="0">
               <a:spcAft>
                 <a:spcPts val="400"/>
               </a:spcAft>
@@ -4342,14 +4342,14 @@
             </a:r>
           </a:p>
           <a:p>
-            <a:pPr>
+            <a:pPr latinLnBrk="0">
               <a:spcAft>
                 <a:spcPts val="400"/>
               </a:spcAft>
             </a:pPr>
           </a:p>
           <a:p>
-            <a:pPr>
+            <a:pPr latinLnBrk="0">
               <a:spcAft>
                 <a:spcPts val="400"/>
               </a:spcAft>
@@ -4360,14 +4360,14 @@
             </a:r>
           </a:p>
           <a:p>
-            <a:pPr>
+            <a:pPr latinLnBrk="0">
               <a:spcAft>
                 <a:spcPts val="400"/>
               </a:spcAft>
             </a:pPr>
           </a:p>
           <a:p>
-            <a:pPr>
+            <a:pPr latinLnBrk="0">
               <a:spcAft>
                 <a:spcPts val="400"/>
               </a:spcAft>
@@ -4378,7 +4378,7 @@
             </a:r>
           </a:p>
           <a:p>
-            <a:pPr>
+            <a:pPr latinLnBrk="0">
               <a:spcAft>
                 <a:spcPts val="400"/>
               </a:spcAft>
@@ -4453,7 +4453,7 @@
           <a:bodyPr/>
           <a:lstStyle/>
           <a:p>
-            <a:pPr>
+            <a:pPr latinLnBrk="0">
               <a:spcAft>
                 <a:spcPts val="400"/>
               </a:spcAft>
@@ -4464,7 +4464,7 @@
             </a:r>
           </a:p>
           <a:p>
-            <a:pPr>
+            <a:pPr latinLnBrk="0">
               <a:spcAft>
                 <a:spcPts val="400"/>
               </a:spcAft>
@@ -4479,7 +4479,7 @@
             </a:r>
           </a:p>
           <a:p>
-            <a:pPr>
+            <a:pPr latinLnBrk="0">
               <a:spcAft>
                 <a:spcPts val="400"/>
               </a:spcAft>
@@ -4490,7 +4490,7 @@
             </a:r>
           </a:p>
           <a:p>
-            <a:pPr>
+            <a:pPr latinLnBrk="0">
               <a:spcAft>
                 <a:spcPts val="400"/>
               </a:spcAft>
@@ -4589,7 +4589,7 @@
           <a:bodyPr/>
           <a:lstStyle/>
           <a:p>
-            <a:pPr>
+            <a:pPr latinLnBrk="0">
               <a:spcAft>
                 <a:spcPts val="400"/>
               </a:spcAft>
@@ -4608,7 +4608,7 @@
             </a:r>
           </a:p>
           <a:p>
-            <a:pPr>
+            <a:pPr latinLnBrk="0">
               <a:spcAft>
                 <a:spcPts val="400"/>
               </a:spcAft>
@@ -4619,7 +4619,7 @@
             </a:r>
           </a:p>
           <a:p>
-            <a:pPr>
+            <a:pPr latinLnBrk="0">
               <a:spcAft>
                 <a:spcPts val="400"/>
               </a:spcAft>
@@ -4718,7 +4718,7 @@
           <a:bodyPr/>
           <a:lstStyle/>
           <a:p>
-            <a:pPr>
+            <a:pPr latinLnBrk="0">
               <a:spcAft>
                 <a:spcPts val="400"/>
               </a:spcAft>
@@ -4729,7 +4729,7 @@
             </a:r>
           </a:p>
           <a:p>
-            <a:pPr>
+            <a:pPr latinLnBrk="0">
               <a:spcAft>
                 <a:spcPts val="400"/>
               </a:spcAft>
@@ -4748,7 +4748,7 @@
             </a:r>
           </a:p>
           <a:p>
-            <a:pPr>
+            <a:pPr latinLnBrk="0">
               <a:spcAft>
                 <a:spcPts val="400"/>
               </a:spcAft>
@@ -4847,7 +4847,7 @@
           <a:bodyPr/>
           <a:lstStyle/>
           <a:p>
-            <a:pPr>
+            <a:pPr latinLnBrk="0">
               <a:spcAft>
                 <a:spcPts val="400"/>
               </a:spcAft>
@@ -4866,7 +4866,7 @@
             </a:r>
           </a:p>
           <a:p>
-            <a:pPr>
+            <a:pPr latinLnBrk="0">
               <a:spcAft>
                 <a:spcPts val="400"/>
               </a:spcAft>
@@ -4969,7 +4969,7 @@
           <a:bodyPr/>
           <a:lstStyle/>
           <a:p>
-            <a:pPr>
+            <a:pPr latinLnBrk="0">
               <a:spcAft>
                 <a:spcPts val="400"/>
               </a:spcAft>
@@ -4980,7 +4980,7 @@
             </a:r>
           </a:p>
           <a:p>
-            <a:pPr>
+            <a:pPr latinLnBrk="0">
               <a:spcAft>
                 <a:spcPts val="400"/>
               </a:spcAft>
@@ -5079,7 +5079,7 @@
           <a:bodyPr/>
           <a:lstStyle/>
           <a:p>
-            <a:pPr>
+            <a:pPr latinLnBrk="0">
               <a:spcAft>
                 <a:spcPts val="400"/>
               </a:spcAft>
@@ -5090,7 +5090,7 @@
             </a:r>
           </a:p>
           <a:p>
-            <a:pPr>
+            <a:pPr latinLnBrk="0">
               <a:spcAft>
                 <a:spcPts val="400"/>
               </a:spcAft>
@@ -5189,7 +5189,7 @@
           <a:bodyPr/>
           <a:lstStyle/>
           <a:p>
-            <a:pPr>
+            <a:pPr latinLnBrk="0">
               <a:spcAft>
                 <a:spcPts val="400"/>
               </a:spcAft>
@@ -5208,7 +5208,7 @@
             </a:r>
           </a:p>
           <a:p>
-            <a:pPr>
+            <a:pPr latinLnBrk="0">
               <a:spcAft>
                 <a:spcPts val="400"/>
               </a:spcAft>
@@ -5227,7 +5227,7 @@
             </a:r>
           </a:p>
           <a:p>
-            <a:pPr>
+            <a:pPr latinLnBrk="0">
               <a:spcAft>
                 <a:spcPts val="400"/>
               </a:spcAft>
@@ -5326,7 +5326,7 @@
           <a:bodyPr/>
           <a:lstStyle/>
           <a:p>
-            <a:pPr>
+            <a:pPr latinLnBrk="0">
               <a:spcAft>
                 <a:spcPts val="400"/>
               </a:spcAft>
@@ -5337,7 +5337,7 @@
             </a:r>
           </a:p>
           <a:p>
-            <a:pPr>
+            <a:pPr latinLnBrk="0">
               <a:spcAft>
                 <a:spcPts val="400"/>
               </a:spcAft>
@@ -5352,7 +5352,7 @@
             </a:r>
           </a:p>
           <a:p>
-            <a:pPr>
+            <a:pPr latinLnBrk="0">
               <a:spcAft>
                 <a:spcPts val="400"/>
               </a:spcAft>
@@ -5447,7 +5447,7 @@
           <a:bodyPr/>
           <a:lstStyle/>
           <a:p>
-            <a:pPr>
+            <a:pPr latinLnBrk="0">
               <a:spcAft>
                 <a:spcPts val="400"/>
               </a:spcAft>
@@ -5466,7 +5466,7 @@
             </a:r>
           </a:p>
           <a:p>
-            <a:pPr>
+            <a:pPr latinLnBrk="0">
               <a:spcAft>
                 <a:spcPts val="400"/>
               </a:spcAft>
@@ -5477,7 +5477,7 @@
             </a:r>
           </a:p>
           <a:p>
-            <a:pPr>
+            <a:pPr latinLnBrk="0">
               <a:spcAft>
                 <a:spcPts val="400"/>
               </a:spcAft>
@@ -5576,7 +5576,7 @@
           <a:bodyPr/>
           <a:lstStyle/>
           <a:p>
-            <a:pPr>
+            <a:pPr latinLnBrk="0">
               <a:spcAft>
                 <a:spcPts val="400"/>
               </a:spcAft>
@@ -5595,7 +5595,7 @@
             </a:r>
           </a:p>
           <a:p>
-            <a:pPr>
+            <a:pPr latinLnBrk="0">
               <a:spcAft>
                 <a:spcPts val="400"/>
               </a:spcAft>
@@ -5614,7 +5614,7 @@
             </a:r>
           </a:p>
           <a:p>
-            <a:pPr>
+            <a:pPr latinLnBrk="0">
               <a:spcAft>
                 <a:spcPts val="400"/>
               </a:spcAft>
@@ -5717,7 +5717,7 @@
           <a:bodyPr/>
           <a:lstStyle/>
           <a:p>
-            <a:pPr>
+            <a:pPr latinLnBrk="0">
               <a:spcAft>
                 <a:spcPts val="400"/>
               </a:spcAft>
@@ -5728,7 +5728,7 @@
             </a:r>
           </a:p>
           <a:p>
-            <a:pPr>
+            <a:pPr latinLnBrk="0">
               <a:spcAft>
                 <a:spcPts val="400"/>
               </a:spcAft>
@@ -5831,7 +5831,7 @@
           <a:bodyPr/>
           <a:lstStyle/>
           <a:p>
-            <a:pPr>
+            <a:pPr latinLnBrk="0">
               <a:spcAft>
                 <a:spcPts val="400"/>
               </a:spcAft>
@@ -5850,7 +5850,7 @@
             </a:r>
           </a:p>
           <a:p>
-            <a:pPr>
+            <a:pPr latinLnBrk="0">
               <a:spcAft>
                 <a:spcPts val="400"/>
               </a:spcAft>
@@ -5861,7 +5861,7 @@
             </a:r>
           </a:p>
           <a:p>
-            <a:pPr>
+            <a:pPr latinLnBrk="0">
               <a:spcAft>
                 <a:spcPts val="400"/>
               </a:spcAft>
@@ -5960,7 +5960,7 @@
           <a:bodyPr/>
           <a:lstStyle/>
           <a:p>
-            <a:pPr>
+            <a:pPr latinLnBrk="0">
               <a:spcAft>
                 <a:spcPts val="400"/>
               </a:spcAft>
@@ -5979,7 +5979,7 @@
             </a:r>
           </a:p>
           <a:p>
-            <a:pPr>
+            <a:pPr latinLnBrk="0">
               <a:spcAft>
                 <a:spcPts val="400"/>
               </a:spcAft>
@@ -5998,7 +5998,7 @@
             </a:r>
           </a:p>
           <a:p>
-            <a:pPr>
+            <a:pPr latinLnBrk="0">
               <a:spcAft>
                 <a:spcPts val="400"/>
               </a:spcAft>
@@ -6097,7 +6097,7 @@
           <a:bodyPr/>
           <a:lstStyle/>
           <a:p>
-            <a:pPr>
+            <a:pPr latinLnBrk="0">
               <a:spcAft>
                 <a:spcPts val="400"/>
               </a:spcAft>
@@ -6112,7 +6112,7 @@
             </a:r>
           </a:p>
           <a:p>
-            <a:pPr>
+            <a:pPr latinLnBrk="0">
               <a:spcAft>
                 <a:spcPts val="400"/>
               </a:spcAft>
@@ -6127,7 +6127,7 @@
             </a:r>
           </a:p>
           <a:p>
-            <a:pPr>
+            <a:pPr latinLnBrk="0">
               <a:spcAft>
                 <a:spcPts val="400"/>
               </a:spcAft>
@@ -6142,7 +6142,7 @@
             </a:r>
           </a:p>
           <a:p>
-            <a:pPr>
+            <a:pPr latinLnBrk="0">
               <a:spcAft>
                 <a:spcPts val="400"/>
               </a:spcAft>
@@ -6245,7 +6245,7 @@
           <a:bodyPr/>
           <a:lstStyle/>
           <a:p>
-            <a:pPr>
+            <a:pPr latinLnBrk="0">
               <a:spcAft>
                 <a:spcPts val="400"/>
               </a:spcAft>
@@ -6256,7 +6256,7 @@
             </a:r>
           </a:p>
           <a:p>
-            <a:pPr>
+            <a:pPr latinLnBrk="0">
               <a:spcAft>
                 <a:spcPts val="400"/>
               </a:spcAft>
@@ -6267,7 +6267,7 @@
             </a:r>
           </a:p>
           <a:p>
-            <a:pPr>
+            <a:pPr latinLnBrk="0">
               <a:spcAft>
                 <a:spcPts val="400"/>
               </a:spcAft>
@@ -6370,7 +6370,7 @@
           <a:bodyPr/>
           <a:lstStyle/>
           <a:p>
-            <a:pPr>
+            <a:pPr latinLnBrk="0">
               <a:spcAft>
                 <a:spcPts val="400"/>
               </a:spcAft>
@@ -6385,7 +6385,7 @@
             </a:r>
           </a:p>
           <a:p>
-            <a:pPr>
+            <a:pPr latinLnBrk="0">
               <a:spcAft>
                 <a:spcPts val="400"/>
               </a:spcAft>
@@ -6400,7 +6400,7 @@
             </a:r>
           </a:p>
           <a:p>
-            <a:pPr>
+            <a:pPr latinLnBrk="0">
               <a:spcAft>
                 <a:spcPts val="400"/>
               </a:spcAft>
@@ -6415,7 +6415,7 @@
             </a:r>
           </a:p>
           <a:p>
-            <a:pPr>
+            <a:pPr latinLnBrk="0">
               <a:spcAft>
                 <a:spcPts val="400"/>
               </a:spcAft>
@@ -6518,7 +6518,7 @@
           <a:bodyPr/>
           <a:lstStyle/>
           <a:p>
-            <a:pPr>
+            <a:pPr latinLnBrk="0">
               <a:spcAft>
                 <a:spcPts val="400"/>
               </a:spcAft>
@@ -6537,7 +6537,7 @@
             </a:r>
           </a:p>
           <a:p>
-            <a:pPr>
+            <a:pPr latinLnBrk="0">
               <a:spcAft>
                 <a:spcPts val="400"/>
               </a:spcAft>
@@ -6632,7 +6632,7 @@
           <a:bodyPr/>
           <a:lstStyle/>
           <a:p>
-            <a:pPr>
+            <a:pPr latinLnBrk="0">
               <a:spcAft>
                 <a:spcPts val="400"/>
               </a:spcAft>
@@ -6643,7 +6643,7 @@
             </a:r>
           </a:p>
           <a:p>
-            <a:pPr>
+            <a:pPr latinLnBrk="0">
               <a:spcAft>
                 <a:spcPts val="400"/>
               </a:spcAft>
@@ -6742,7 +6742,7 @@
           <a:bodyPr/>
           <a:lstStyle/>
           <a:p>
-            <a:pPr>
+            <a:pPr latinLnBrk="0">
               <a:spcAft>
                 <a:spcPts val="400"/>
               </a:spcAft>
@@ -6753,7 +6753,7 @@
             </a:r>
           </a:p>
           <a:p>
-            <a:pPr>
+            <a:pPr latinLnBrk="0">
               <a:spcAft>
                 <a:spcPts val="400"/>
               </a:spcAft>
@@ -6764,7 +6764,7 @@
             </a:r>
           </a:p>
           <a:p>
-            <a:pPr>
+            <a:pPr latinLnBrk="0">
               <a:spcAft>
                 <a:spcPts val="400"/>
               </a:spcAft>
@@ -6867,7 +6867,7 @@
           <a:bodyPr/>
           <a:lstStyle/>
           <a:p>
-            <a:pPr>
+            <a:pPr latinLnBrk="0">
               <a:spcAft>
                 <a:spcPts val="400"/>
               </a:spcAft>
@@ -6878,7 +6878,7 @@
             </a:r>
           </a:p>
           <a:p>
-            <a:pPr>
+            <a:pPr latinLnBrk="0">
               <a:spcAft>
                 <a:spcPts val="400"/>
               </a:spcAft>
@@ -6981,7 +6981,7 @@
           <a:bodyPr/>
           <a:lstStyle/>
           <a:p>
-            <a:pPr>
+            <a:pPr latinLnBrk="0">
               <a:spcAft>
                 <a:spcPts val="400"/>
               </a:spcAft>
@@ -6992,7 +6992,7 @@
             </a:r>
           </a:p>
           <a:p>
-            <a:pPr>
+            <a:pPr latinLnBrk="0">
               <a:spcAft>
                 <a:spcPts val="400"/>
               </a:spcAft>
@@ -7091,7 +7091,7 @@
           <a:bodyPr/>
           <a:lstStyle/>
           <a:p>
-            <a:pPr>
+            <a:pPr latinLnBrk="0">
               <a:spcAft>
                 <a:spcPts val="400"/>
               </a:spcAft>
@@ -7102,7 +7102,7 @@
             </a:r>
           </a:p>
           <a:p>
-            <a:pPr>
+            <a:pPr latinLnBrk="0">
               <a:spcAft>
                 <a:spcPts val="400"/>
               </a:spcAft>
@@ -7201,7 +7201,7 @@
           <a:bodyPr/>
           <a:lstStyle/>
           <a:p>
-            <a:pPr>
+            <a:pPr latinLnBrk="0">
               <a:spcAft>
                 <a:spcPts val="400"/>
               </a:spcAft>
@@ -7212,7 +7212,7 @@
             </a:r>
           </a:p>
           <a:p>
-            <a:pPr>
+            <a:pPr latinLnBrk="0">
               <a:spcAft>
                 <a:spcPts val="400"/>
               </a:spcAft>
@@ -7223,7 +7223,7 @@
             </a:r>
           </a:p>
           <a:p>
-            <a:pPr>
+            <a:pPr latinLnBrk="0">
               <a:spcAft>
                 <a:spcPts val="400"/>
               </a:spcAft>
@@ -7322,7 +7322,7 @@
           <a:bodyPr/>
           <a:lstStyle/>
           <a:p>
-            <a:pPr>
+            <a:pPr latinLnBrk="0">
               <a:spcAft>
                 <a:spcPts val="400"/>
               </a:spcAft>
@@ -7333,7 +7333,7 @@
             </a:r>
           </a:p>
           <a:p>
-            <a:pPr>
+            <a:pPr latinLnBrk="0">
               <a:spcAft>
                 <a:spcPts val="400"/>
               </a:spcAft>
@@ -7344,7 +7344,7 @@
             </a:r>
           </a:p>
           <a:p>
-            <a:pPr>
+            <a:pPr latinLnBrk="0">
               <a:spcAft>
                 <a:spcPts val="400"/>
               </a:spcAft>
@@ -7443,7 +7443,7 @@
           <a:bodyPr/>
           <a:lstStyle/>
           <a:p>
-            <a:pPr>
+            <a:pPr latinLnBrk="0">
               <a:spcAft>
                 <a:spcPts val="400"/>
               </a:spcAft>
@@ -7454,7 +7454,7 @@
             </a:r>
           </a:p>
           <a:p>
-            <a:pPr>
+            <a:pPr latinLnBrk="0">
               <a:spcAft>
                 <a:spcPts val="400"/>
               </a:spcAft>
@@ -7553,7 +7553,7 @@
           <a:bodyPr/>
           <a:lstStyle/>
           <a:p>
-            <a:pPr>
+            <a:pPr latinLnBrk="0">
               <a:spcAft>
                 <a:spcPts val="400"/>
               </a:spcAft>
@@ -7572,7 +7572,7 @@
             </a:r>
           </a:p>
           <a:p>
-            <a:pPr>
+            <a:pPr latinLnBrk="0">
               <a:spcAft>
                 <a:spcPts val="400"/>
               </a:spcAft>
@@ -7583,14 +7583,14 @@
             </a:r>
           </a:p>
           <a:p>
-            <a:pPr>
+            <a:pPr latinLnBrk="0">
               <a:spcAft>
                 <a:spcPts val="400"/>
               </a:spcAft>
             </a:pPr>
           </a:p>
           <a:p>
-            <a:pPr>
+            <a:pPr latinLnBrk="0">
               <a:spcAft>
                 <a:spcPts val="400"/>
               </a:spcAft>
@@ -7605,14 +7605,14 @@
             </a:r>
           </a:p>
           <a:p>
-            <a:pPr>
+            <a:pPr latinLnBrk="0">
               <a:spcAft>
                 <a:spcPts val="400"/>
               </a:spcAft>
             </a:pPr>
           </a:p>
           <a:p>
-            <a:pPr>
+            <a:pPr latinLnBrk="0">
               <a:spcAft>
                 <a:spcPts val="400"/>
               </a:spcAft>

--- a/results/meeting_deck_2026-09-24/0924_track1_story.pptx
+++ b/results/meeting_deck_2026-09-24/0924_track1_story.pptx
@@ -35,6 +35,8 @@
     <p:sldId id="280" r:id="rId33"/>
     <p:sldId id="281" r:id="rId34"/>
     <p:sldId id="282" r:id="rId35"/>
+    <p:sldId id="283" r:id="rId36"/>
+    <p:sldId id="284" r:id="rId37"/>
   </p:sldIdLst>
   <p:sldSz cx="12192000" cy="6858000"/>
   <p:notesSz cx="6858000" cy="9144000"/>
@@ -896,7 +898,7 @@
           <a:lstStyle/>
           <a:p>
             <a:r>
-              <a:t>Colours tie each term of the equation to its row. u is the stage's input, v its output, both on their own 0-to-1 swing.</a:t>
+              <a:t>Colours tie each term of the equation to its row. u is the stage's input, v its output, both on their own 0-to-1 swing. On inv_chain the file's Vinh is 2.0 V on a 1.8 V part, which is why the converter guards it - the backup slide.</a:t>
             </a:r>
           </a:p>
         </p:txBody>
@@ -1036,7 +1038,7 @@
           <a:lstStyle/>
           <a:p>
             <a:r>
-              <a:t>Degenerate: a free fit splits the delay into one sluggish stage plus one quick one, reproduces the full swing slightly better, and predicts a stressed gate of 0.23 against a measured 0.76.</a:t>
+              <a:t>est_knee fit, ex2 pull-up: K=1 rms 0.0920, K=2 0.0360, K=3 0.0233, best (K=6) 0.0202. The real predriver is a chain too - ex2's schematic showed three inverters - but this is the file saying so on its own.</a:t>
             </a:r>
           </a:p>
         </p:txBody>
@@ -1106,7 +1108,7 @@
           <a:lstStyle/>
           <a:p>
             <a:r>
-              <a:t>C_comp is not a model parameter: it is a number the file's own Ku tables were solved with, so a wrong value inflates the curve everything downstream is fitted to.</a:t>
+              <a:t>Degenerate: a free fit splits the delay into one sluggish stage plus one quick one, reproduces the full swing slightly better, and predicts a stressed gate of 0.23 against a measured 0.76.</a:t>
             </a:r>
           </a:p>
         </p:txBody>
@@ -1176,7 +1178,7 @@
           <a:lstStyle/>
           <a:p>
             <a:r>
-              <a:t>Every trial the optimiser actually took, exported live by the 09-17 film. What it does NOT give us is K, or the map's shape.</a:t>
+              <a:t>C_comp is not a model parameter: it is a number the file's own Ku tables were solved with, so a wrong value inflates the curve everything downstream is fitted to.</a:t>
             </a:r>
           </a:p>
         </p:txBody>
@@ -1246,7 +1248,7 @@
           <a:lstStyle/>
           <a:p>
             <a:r>
-              <a:t>The three shapes are (0.50, 0.70), (0.40, 0.60) and (0.40, 0.90). Note on the right that all three already match the peak - that is the calibration, and it is why the peak cannot be what chooses.</a:t>
+              <a:t>Every trial the optimiser actually took, exported live by the 09-17 film. What it does NOT give us is K, or the map's shape.</a:t>
             </a:r>
           </a:p>
         </p:txBody>
@@ -1386,7 +1388,7 @@
           <a:lstStyle/>
           <a:p>
             <a:r>
-              <a:t>Every iteration the calibration actually wrote, recovered from the netlists it emitted. The vt here is the film's ex2 case; the deck's own K = 3 build lands on 0.632 from a different starting fit.</a:t>
+              <a:t>The three shapes are (0.50, 0.70), (0.40, 0.60) and (0.40, 0.90). Note on the right that all three already match the peak - that is the calibration, and it is why the peak cannot be what chooses.</a:t>
             </a:r>
           </a:p>
         </p:txBody>
@@ -1456,7 +1458,7 @@
           <a:lstStyle/>
           <a:p>
             <a:r>
-              <a:t>Ranking on the peak instead picks a chain that arrives up to 300 ps late with four times the waveform error. The nine waveforms themselves are the backup slide.</a:t>
+              <a:t>Every iteration the calibration actually wrote, recovered from the netlists it emitted. The vt here is the film's ex2 case; the deck's own K = 3 build lands on 0.632 from a different starting fit.</a:t>
             </a:r>
           </a:p>
         </p:txBody>
@@ -1526,7 +1528,7 @@
           <a:lstStyle/>
           <a:p>
             <a:r>
-              <a:t>The same block diagram as the chain slide, with the recipe attached. This is the slide to leave up during questions.</a:t>
+              <a:t>Ranking on the peak instead picks a chain that arrives up to 300 ps late with four times the waveform error. The nine waveforms themselves are the backup slide.</a:t>
             </a:r>
           </a:p>
         </p:txBody>
@@ -1596,7 +1598,7 @@
           <a:lstStyle/>
           <a:p>
             <a:r>
-              <a:t>Grey is the shipped model, blue the build using probed silicon, red the file-only one. Full numbers in docs/track1_recipe.md.</a:t>
+              <a:t>The same block diagram as the chain slide, with the recipe attached. This is the slide to leave up during questions.</a:t>
             </a:r>
           </a:p>
         </p:txBody>
@@ -1666,7 +1668,7 @@
           <a:lstStyle/>
           <a:p>
             <a:r>
-              <a:t>Better said than asked. The direction gap is the one that would most change the headline number.</a:t>
+              <a:t>The deepest rung of each ladder: ex2 810 ps, inv_chain 104 ps, io_buf 1505 ps. io_buf's deepest rung is 37 % of its swing, not 50 - its ladder is shallower.</a:t>
             </a:r>
           </a:p>
         </p:txBody>
@@ -1736,7 +1738,7 @@
           <a:lstStyle/>
           <a:p>
             <a:r>
-              <a:t>Moved out of the main line: this audience knows where Ku comes from.</a:t>
+              <a:t>Native from gate_cascade_prototype_2026-09-09 sweeps, track 1 from selector_from_one_run_2026-09-23. Same five widths per buffer in both. The tr1ps death is documented in docs/native_vt_waveform_modes.md.</a:t>
             </a:r>
           </a:p>
         </p:txBody>
@@ -1806,7 +1808,7 @@
           <a:lstStyle/>
           <a:p>
             <a:r>
-              <a:t>This was the main slide before; the ranking says the same thing more directly.</a:t>
+              <a:t>Better said than asked. The direction gap is the one that would most change the headline number.</a:t>
             </a:r>
           </a:p>
         </p:txBody>
@@ -1832,6 +1834,146 @@
 </file>
 
 <file path=ppt/notesSlides/notesSlide27.xml><?xml version="1.0" encoding="utf-8"?>
+<p:notes xmlns:a="http://schemas.openxmlformats.org/drawingml/2006/main" xmlns:p="http://schemas.openxmlformats.org/presentationml/2006/main" xmlns:r="http://schemas.openxmlformats.org/officeDocument/2006/relationships">
+  <p:cSld>
+    <p:spTree>
+      <p:nvGrpSpPr>
+        <p:cNvPr id="1" name=""/>
+        <p:cNvGrpSpPr/>
+        <p:nvPr/>
+      </p:nvGrpSpPr>
+      <p:grpSpPr>
+        <a:xfrm>
+          <a:off x="0" y="0"/>
+          <a:ext cx="0" cy="0"/>
+          <a:chOff x="0" y="0"/>
+          <a:chExt cx="0" cy="0"/>
+        </a:xfrm>
+      </p:grpSpPr>
+      <p:sp>
+        <p:nvSpPr>
+          <p:cNvPr id="2" name="Slide Image Placeholder 1"/>
+          <p:cNvSpPr>
+            <a:spLocks noGrp="1"/>
+          </p:cNvSpPr>
+          <p:nvPr>
+            <p:ph type="sldImg" idx="2"/>
+          </p:nvPr>
+        </p:nvSpPr>
+        <p:spPr/>
+      </p:sp>
+      <p:sp>
+        <p:nvSpPr>
+          <p:cNvPr id="3" name="Notes Placeholder 2"/>
+          <p:cNvSpPr>
+            <a:spLocks noGrp="1"/>
+          </p:cNvSpPr>
+          <p:nvPr>
+            <p:ph type="body" idx="3" sz="quarter"/>
+          </p:nvPr>
+        </p:nvSpPr>
+        <p:spPr/>
+        <p:txBody>
+          <a:bodyPr/>
+          <a:lstStyle/>
+          <a:p>
+            <a:r>
+              <a:t>Moved out of the main line: this audience knows where Ku comes from.</a:t>
+            </a:r>
+          </a:p>
+        </p:txBody>
+      </p:sp>
+      <p:sp>
+        <p:nvSpPr>
+          <p:cNvPr id="4" name="Slide Number Placeholder 3"/>
+          <p:cNvSpPr>
+            <a:spLocks noGrp="1"/>
+          </p:cNvSpPr>
+          <p:nvPr>
+            <p:ph type="sldNum" idx="5" sz="quarter"/>
+          </p:nvPr>
+        </p:nvSpPr>
+        <p:spPr/>
+      </p:sp>
+    </p:spTree>
+  </p:cSld>
+  <p:clrMapOvr>
+    <a:masterClrMapping/>
+  </p:clrMapOvr>
+</p:notes>
+</file>
+
+<file path=ppt/notesSlides/notesSlide28.xml><?xml version="1.0" encoding="utf-8"?>
+<p:notes xmlns:a="http://schemas.openxmlformats.org/drawingml/2006/main" xmlns:p="http://schemas.openxmlformats.org/presentationml/2006/main" xmlns:r="http://schemas.openxmlformats.org/officeDocument/2006/relationships">
+  <p:cSld>
+    <p:spTree>
+      <p:nvGrpSpPr>
+        <p:cNvPr id="1" name=""/>
+        <p:cNvGrpSpPr/>
+        <p:nvPr/>
+      </p:nvGrpSpPr>
+      <p:grpSpPr>
+        <a:xfrm>
+          <a:off x="0" y="0"/>
+          <a:ext cx="0" cy="0"/>
+          <a:chOff x="0" y="0"/>
+          <a:chExt cx="0" cy="0"/>
+        </a:xfrm>
+      </p:grpSpPr>
+      <p:sp>
+        <p:nvSpPr>
+          <p:cNvPr id="2" name="Slide Image Placeholder 1"/>
+          <p:cNvSpPr>
+            <a:spLocks noGrp="1"/>
+          </p:cNvSpPr>
+          <p:nvPr>
+            <p:ph type="sldImg" idx="2"/>
+          </p:nvPr>
+        </p:nvSpPr>
+        <p:spPr/>
+      </p:sp>
+      <p:sp>
+        <p:nvSpPr>
+          <p:cNvPr id="3" name="Notes Placeholder 2"/>
+          <p:cNvSpPr>
+            <a:spLocks noGrp="1"/>
+          </p:cNvSpPr>
+          <p:nvPr>
+            <p:ph type="body" idx="3" sz="quarter"/>
+          </p:nvPr>
+        </p:nvSpPr>
+        <p:spPr/>
+        <p:txBody>
+          <a:bodyPr/>
+          <a:lstStyle/>
+          <a:p>
+            <a:r>
+              <a:t>This was the main slide before; the ranking says the same thing more directly.</a:t>
+            </a:r>
+          </a:p>
+        </p:txBody>
+      </p:sp>
+      <p:sp>
+        <p:nvSpPr>
+          <p:cNvPr id="4" name="Slide Number Placeholder 3"/>
+          <p:cNvSpPr>
+            <a:spLocks noGrp="1"/>
+          </p:cNvSpPr>
+          <p:nvPr>
+            <p:ph type="sldNum" idx="5" sz="quarter"/>
+          </p:nvPr>
+        </p:nvSpPr>
+        <p:spPr/>
+      </p:sp>
+    </p:spTree>
+  </p:cSld>
+  <p:clrMapOvr>
+    <a:masterClrMapping/>
+  </p:clrMapOvr>
+</p:notes>
+</file>
+
+<file path=ppt/notesSlides/notesSlide29.xml><?xml version="1.0" encoding="utf-8"?>
 <p:notes xmlns:a="http://schemas.openxmlformats.org/drawingml/2006/main" xmlns:p="http://schemas.openxmlformats.org/presentationml/2006/main" xmlns:r="http://schemas.openxmlformats.org/officeDocument/2006/relationships">
   <p:cSld>
     <p:spTree>
@@ -4822,7 +4964,7 @@
           <a:lstStyle/>
           <a:p>
             <a:r>
-              <a:t>9 · The family: a stage is a current source with a threshold</a:t>
+              <a:t>9 · Where the stage law comes from</a:t>
             </a:r>
           </a:p>
         </p:txBody>
@@ -4840,7 +4982,7 @@
         <p:spPr>
           <a:xfrm>
             <a:off x="411480" y="987552"/>
-            <a:ext cx="11384280" cy="1819656"/>
+            <a:ext cx="11384280" cy="1517904"/>
           </a:xfrm>
         </p:spPr>
         <p:txBody>
@@ -4854,15 +4996,7 @@
             </a:pPr>
             <a:r>
               <a:rPr sz="1800"/>
-              <a:t>A CMOS inverter driving a large load is a </a:t>
-            </a:r>
-            <a:r>
-              <a:rPr sz="1800" b="1"/>
-              <a:t>current source</a:t>
-            </a:r>
-            <a:r>
-              <a:rPr sz="1800"/>
-              <a:t> while its input sits at the rail, because its conducting device is in saturation. Only near the destination rail does it leave saturation and become a resistor.</a:t>
+              <a:t>Three facts about one CMOS inverter driving the next one's gate. Each contributes one factor, and together they are the whole law — there is nothing else in it.</a:t>
             </a:r>
           </a:p>
           <a:p>
@@ -4877,11 +5011,7 @@
                   <a:srgbClr val="2B7A43"/>
                 </a:solidFill>
               </a:rPr>
-              <a:t>A constant current into a gate capacitance is a ramp, tapering at the end</a:t>
-            </a:r>
-            <a:r>
-              <a:rPr sz="1800"/>
-              <a:t> — which is what the measured stages do.</a:t>
+              <a:t>A constant current into a fixed capacitance is a constant slope. That is the backbone; the threshold and the taper only modulate it.</a:t>
             </a:r>
           </a:p>
         </p:txBody>
@@ -4902,8 +5032,8 @@
         </p:blipFill>
         <p:spPr>
           <a:xfrm>
-            <a:off x="411480" y="2880360"/>
-            <a:ext cx="11384280" cy="3504664"/>
+            <a:off x="411480" y="2578608"/>
+            <a:ext cx="11384280" cy="3352845"/>
           </a:xfrm>
           <a:prstGeom prst="rect">
             <a:avLst/>
@@ -4944,7 +5074,7 @@
           <a:lstStyle/>
           <a:p>
             <a:r>
-              <a:t>10 · The four numbers that picture requires</a:t>
+              <a:t>10 · The four numbers, and what each one is</a:t>
             </a:r>
           </a:p>
         </p:txBody>
@@ -4975,8 +5105,20 @@
               </a:spcAft>
             </a:pPr>
             <a:r>
-              <a:rPr sz="1800"/>
-              <a:t>Written out, the stage law has exactly four free numbers and no more. Each one is a named part of the picture on the last slide, not a fitting coefficient.</a:t>
+              <a:rPr sz="1600" b="1"/>
+              <a:t>s_up and s_dn are slopes, not currents</a:t>
+            </a:r>
+            <a:r>
+              <a:rPr sz="1600"/>
+              <a:t> — v is normalised, so dv/dt is swings per nanosecond. </a:t>
+            </a:r>
+            <a:r>
+              <a:rPr sz="1600" b="1"/>
+              <a:t>x_lin</a:t>
+            </a:r>
+            <a:r>
+              <a:rPr sz="1600"/>
+              <a:t> is named for the MOSFET's linear (triode) region.</a:t>
             </a:r>
           </a:p>
           <a:p>
@@ -4986,12 +5128,40 @@
               </a:spcAft>
             </a:pPr>
             <a:r>
-              <a:rPr sz="1800" b="1">
+              <a:rPr sz="1600" b="1">
                 <a:solidFill>
                   <a:srgbClr val="2B7A43"/>
                 </a:solidFill>
               </a:rPr>
-              <a:t>Three are fitted to the file and cost nothing. One, vt, is fitted and then re-set by the single stressed run — that is step 4.</a:t>
+              <a:t>Does the file not give vt?</a:t>
+            </a:r>
+            <a:r>
+              <a:rPr sz="1600"/>
+              <a:t> Its Vinh/Vinl are the input </a:t>
+            </a:r>
+            <a:r>
+              <a:rPr sz="1600" b="1">
+                <a:solidFill>
+                  <a:srgbClr val="2B7A43"/>
+                </a:solidFill>
+              </a:rPr>
+              <a:t>pin's</a:t>
+            </a:r>
+            <a:r>
+              <a:rPr sz="1600"/>
+              <a:t> thresholds, and we do use those — for our input comparator. vt is an </a:t>
+            </a:r>
+            <a:r>
+              <a:rPr sz="1600" b="1">
+                <a:solidFill>
+                  <a:srgbClr val="2B7A43"/>
+                </a:solidFill>
+              </a:rPr>
+              <a:t>internal</a:t>
+            </a:r>
+            <a:r>
+              <a:rPr sz="1600"/>
+              <a:t> stage's threshold, and the file never describes that node.</a:t>
             </a:r>
           </a:p>
         </p:txBody>
@@ -5012,8 +5182,8 @@
         </p:blipFill>
         <p:spPr>
           <a:xfrm>
-            <a:off x="1500917" y="2578608"/>
-            <a:ext cx="9205404" cy="3941064"/>
+            <a:off x="411480" y="2578608"/>
+            <a:ext cx="11384280" cy="3796063"/>
           </a:xfrm>
           <a:prstGeom prst="rect">
             <a:avLst/>
@@ -5164,7 +5334,7 @@
           <a:lstStyle/>
           <a:p>
             <a:r>
-              <a:t>12 · Why a chain of K of them</a:t>
+              <a:t>12 · Why a chain, and not one stage</a:t>
             </a:r>
           </a:p>
         </p:txBody>
@@ -5182,7 +5352,7 @@
         <p:spPr>
           <a:xfrm>
             <a:off x="411480" y="987552"/>
-            <a:ext cx="11384280" cy="2231136"/>
+            <a:ext cx="11384280" cy="1819656"/>
           </a:xfrm>
         </p:spPr>
         <p:txBody>
@@ -5195,16 +5365,8 @@
               </a:spcAft>
             </a:pPr>
             <a:r>
-              <a:rPr sz="1700"/>
-              <a:t>The real predriver </a:t>
-            </a:r>
-            <a:r>
-              <a:rPr sz="1700" b="1"/>
-              <a:t>is</a:t>
-            </a:r>
-            <a:r>
-              <a:rPr sz="1700"/>
-              <a:t> a chain — the schematic earlier showed three inverters between ex2's input and its output gate, and the stage walk watched a pulse lose height at each.</a:t>
+              <a:rPr sz="1800"/>
+              <a:t>Fit one stage as well as it can be fitted and it still misses the file's own Ku(t) by 4.6× the best error. One stage is one ramp: it starts the instant the input does, where the real Ku(t) waits, and then bends over too early.</a:t>
             </a:r>
           </a:p>
           <a:p>
@@ -5214,38 +5376,23 @@
               </a:spcAft>
             </a:pPr>
             <a:r>
-              <a:rPr sz="1700"/>
-              <a:t>We cannot see how many a vendor's part has, so the count K is a parameter. The stages are held </a:t>
-            </a:r>
-            <a:r>
-              <a:rPr sz="1700" b="1"/>
-              <a:t>identical</a:t>
-            </a:r>
-            <a:r>
-              <a:rPr sz="1700"/>
-              <a:t>: a real tapered predriver approximately is, and letting them differ makes the fit degenerate.</a:t>
-            </a:r>
-          </a:p>
-          <a:p>
-            <a:pPr latinLnBrk="0">
-              <a:spcAft>
-                <a:spcPts val="400"/>
-              </a:spcAft>
-            </a:pPr>
-            <a:r>
-              <a:rPr sz="1700" b="1">
+              <a:rPr sz="1800" b="1">
                 <a:solidFill>
                   <a:srgbClr val="2B7A43"/>
                 </a:solidFill>
               </a:rPr>
-              <a:t>Everything to the right of the gate is the file's own, untouched — the map and the I-V tables. We are only building the left-hand box.</a:t>
+              <a:t>The file itself rules out a single stage — no stressed data needed to see it.</a:t>
+            </a:r>
+            <a:r>
+              <a:rPr sz="1800"/>
+              <a:t> Three stages is where the error settles.</a:t>
             </a:r>
           </a:p>
         </p:txBody>
       </p:sp>
       <p:pic>
         <p:nvPicPr>
-          <p:cNvPr id="4" name="Picture 3" descr="model_blocks.png"/>
+          <p:cNvPr id="4" name="Picture 3" descr="why_chain.png"/>
           <p:cNvPicPr>
             <a:picLocks noChangeAspect="1"/>
           </p:cNvPicPr>
@@ -5259,8 +5406,8 @@
         </p:blipFill>
         <p:spPr>
           <a:xfrm>
-            <a:off x="411480" y="3291840"/>
-            <a:ext cx="11384280" cy="3096299"/>
+            <a:off x="733152" y="2880360"/>
+            <a:ext cx="10740935" cy="3639312"/>
           </a:xfrm>
           <a:prstGeom prst="rect">
             <a:avLst/>
@@ -5301,7 +5448,7 @@
           <a:lstStyle/>
           <a:p>
             <a:r>
-              <a:t>13 · Step 1 — C_comp, rejected by the file's own arithmetic</a:t>
+              <a:t>12 · So: K identical stages, then the file's own map</a:t>
             </a:r>
           </a:p>
         </p:txBody>
@@ -5319,7 +5466,7 @@
         <p:spPr>
           <a:xfrm>
             <a:off x="411480" y="987552"/>
-            <a:ext cx="11384280" cy="2532888"/>
+            <a:ext cx="11384280" cy="1517904"/>
           </a:xfrm>
         </p:spPr>
         <p:txBody>
@@ -5332,8 +5479,16 @@
               </a:spcAft>
             </a:pPr>
             <a:r>
-              <a:rPr sz="1700"/>
-              <a:t>Ku is a fraction of the device's own current, so it cannot exceed 1. Solve the file at a range of assumed C_comp and watch what the solve returns.</a:t>
+              <a:rPr sz="1800"/>
+              <a:t>We cannot see how many stages a vendor's part has, so the count K is a parameter. The stages are held </a:t>
+            </a:r>
+            <a:r>
+              <a:rPr sz="1800" b="1"/>
+              <a:t>identical</a:t>
+            </a:r>
+            <a:r>
+              <a:rPr sz="1800"/>
+              <a:t>: a real tapered predriver approximately is, and letting them differ makes the fit degenerate.</a:t>
             </a:r>
           </a:p>
           <a:p>
@@ -5343,30 +5498,19 @@
               </a:spcAft>
             </a:pPr>
             <a:r>
-              <a:rPr sz="1700" b="1">
+              <a:rPr sz="1800" b="1">
                 <a:solidFill>
                   <a:srgbClr val="2B7A43"/>
                 </a:solidFill>
               </a:rPr>
-              <a:t>ex2's declared 5.0 pF makes the file imply Ku = 1.24 — impossible. The file rejects its own declared value.</a:t>
-            </a:r>
-          </a:p>
-          <a:p>
-            <a:pPr latinLnBrk="0">
-              <a:spcAft>
-                <a:spcPts val="400"/>
-              </a:spcAft>
-            </a:pPr>
-            <a:r>
-              <a:rPr sz="1700"/>
-              <a:t>So: keep what the file declares unless it implies Ku &gt; 1, then take the value at which Ku just reaches 1. That reads 2.64 pF here, against 1.70 measured with a probe — 55 % off, and it still works, because the stressed peak is not sharp in C_comp.</a:t>
+              <a:t>Everything to the right of the gate is the file's own, untouched — the map and the I-V tables. We are only building the left-hand box.</a:t>
             </a:r>
           </a:p>
         </p:txBody>
       </p:sp>
       <p:pic>
         <p:nvPicPr>
-          <p:cNvPr id="4" name="Picture 3" descr="ccomp_reject.png"/>
+          <p:cNvPr id="4" name="Picture 3" descr="model_blocks.png"/>
           <p:cNvPicPr>
             <a:picLocks noChangeAspect="1"/>
           </p:cNvPicPr>
@@ -5380,8 +5524,8 @@
         </p:blipFill>
         <p:spPr>
           <a:xfrm>
-            <a:off x="2657163" y="3593592"/>
-            <a:ext cx="6892913" cy="2926080"/>
+            <a:off x="411480" y="2578608"/>
+            <a:ext cx="11384280" cy="3096299"/>
           </a:xfrm>
           <a:prstGeom prst="rect">
             <a:avLst/>
@@ -5422,7 +5566,7 @@
           <a:lstStyle/>
           <a:p>
             <a:r>
-              <a:t>14 · Step 2 — the four numbers, fitted to the file's Ku(t)</a:t>
+              <a:t>13 · Before the recipe: C_comp is an input, and this file's is wrong</a:t>
             </a:r>
           </a:p>
         </p:txBody>
@@ -5440,7 +5584,7 @@
         <p:spPr>
           <a:xfrm>
             <a:off x="411480" y="987552"/>
-            <a:ext cx="11384280" cy="1627632"/>
+            <a:ext cx="11384280" cy="2834640"/>
           </a:xfrm>
         </p:spPr>
         <p:txBody>
@@ -5453,16 +5597,12 @@
               </a:spcAft>
             </a:pPr>
             <a:r>
-              <a:rPr sz="1800"/>
-              <a:t>The four are searched until the chain's output, put through the map, reproduces </a:t>
-            </a:r>
-            <a:r>
-              <a:rPr sz="1800" b="1"/>
-              <a:t>the file's own full-swing Ku(t)</a:t>
-            </a:r>
-            <a:r>
-              <a:rPr sz="1800"/>
-              <a:t> — the black curve. Nelder–Mead, three restarts.</a:t>
+              <a:rPr sz="1700"/>
+              <a:t>C_comp is not something the method derives — it is an input the solve needs, and we assume it arrives with the file. </a:t>
+            </a:r>
+            <a:r>
+              <a:rPr sz="1700" b="1"/>
+              <a:t>When s2ibispy extracts it properly, it drops into this same slot and nothing downstream changes.</a:t>
             </a:r>
           </a:p>
           <a:p>
@@ -5472,8 +5612,16 @@
               </a:spcAft>
             </a:pPr>
             <a:r>
-              <a:rPr sz="1800"/>
-              <a:t>Error 0.284 down to 0.0098, landing on s_up 2.59, s_dn 2.38, vt 0.51, x_lin 0.66.</a:t>
+              <a:rPr sz="1700"/>
+              <a:t>It still needs a validity check, because this file's declared value fails one. Ku is a fraction of the device's own current, so it cannot exceed 1; ex2's declared 5.0 pF makes the file imply </a:t>
+            </a:r>
+            <a:r>
+              <a:rPr sz="1700" b="1"/>
+              <a:t>Ku = 1.24</a:t>
+            </a:r>
+            <a:r>
+              <a:rPr sz="1700"/>
+              <a:t>, which is impossible.</a:t>
             </a:r>
           </a:p>
           <a:p>
@@ -5483,19 +5631,15 @@
               </a:spcAft>
             </a:pPr>
             <a:r>
-              <a:rPr sz="1800" b="1">
-                <a:solidFill>
-                  <a:srgbClr val="2B7A43"/>
-                </a:solidFill>
-              </a:rPr>
-              <a:t>No measurement is involved: the target is a curve the file already contains.</a:t>
+              <a:rPr sz="1700"/>
+              <a:t>Today's numbers therefore use the value at which Ku just reaches 1 — 2.64 pF here, against 1.70 measured with a probe. 55 % off, and it still works, because the stressed peak is not sharp in C_comp.</a:t>
             </a:r>
           </a:p>
         </p:txBody>
       </p:sp>
       <p:pic>
         <p:nvPicPr>
-          <p:cNvPr id="4" name="Picture 3" descr="fit_search.png"/>
+          <p:cNvPr id="4" name="Picture 3" descr="ccomp_reject.png"/>
           <p:cNvPicPr>
             <a:picLocks noChangeAspect="1"/>
           </p:cNvPicPr>
@@ -5509,8 +5653,8 @@
         </p:blipFill>
         <p:spPr>
           <a:xfrm>
-            <a:off x="512569" y="2688336"/>
-            <a:ext cx="11182100" cy="3831336"/>
+            <a:off x="2933551" y="3895344"/>
+            <a:ext cx="6340137" cy="2624328"/>
           </a:xfrm>
           <a:prstGeom prst="rect">
             <a:avLst/>
@@ -5551,7 +5695,7 @@
           <a:lstStyle/>
           <a:p>
             <a:r>
-              <a:t>15 · Step 3 — what the file cannot choose</a:t>
+              <a:t>14 · Recipe step 1 of 4 — fit the four numbers to the file's Ku(t)</a:t>
             </a:r>
           </a:p>
         </p:txBody>
@@ -5569,7 +5713,7 @@
         <p:spPr>
           <a:xfrm>
             <a:off x="411480" y="987552"/>
-            <a:ext cx="11384280" cy="2231136"/>
+            <a:ext cx="11384280" cy="1929384"/>
           </a:xfrm>
         </p:spPr>
         <p:txBody>
@@ -5582,16 +5726,20 @@
               </a:spcAft>
             </a:pPr>
             <a:r>
+              <a:rPr sz="1800" b="1"/>
+              <a:t>The chain</a:t>
+            </a:r>
+            <a:r>
               <a:rPr sz="1800"/>
-              <a:t>Left: the fit error against the file's Ku(t), for every stage count. Past K = 3 it is </a:t>
+              <a:t> is the K stages above, in series. Its output is a gate; put that gate through the map and it becomes a Ku. The four numbers are searched until that Ku reproduces </a:t>
             </a:r>
             <a:r>
               <a:rPr sz="1800" b="1"/>
-              <a:t>flat</a:t>
+              <a:t>the file's own full-swing Ku(t)</a:t>
             </a:r>
             <a:r>
               <a:rPr sz="1800"/>
-              <a:t> — the file has nothing left to say.</a:t>
+              <a:t> — the black curve. Nelder–Mead, three restarts.</a:t>
             </a:r>
           </a:p>
           <a:p>
@@ -5602,15 +5750,7 @@
             </a:pPr>
             <a:r>
               <a:rPr sz="1800"/>
-              <a:t>Right: the three candidates inside that band, on one 810 ps pulse. Same file, same fit quality, </a:t>
-            </a:r>
-            <a:r>
-              <a:rPr sz="1800" b="1"/>
-              <a:t>three completely different buffers</a:t>
-            </a:r>
-            <a:r>
-              <a:rPr sz="1800"/>
-              <a:t>.</a:t>
+              <a:t>Error 0.284 down to 0.0098, landing on s_up 2.59, s_dn 2.38, vt 0.51, x_lin 0.66.</a:t>
             </a:r>
           </a:p>
           <a:p>
@@ -5625,18 +5765,14 @@
                   <a:srgbClr val="2B7A43"/>
                 </a:solidFill>
               </a:rPr>
-              <a:t>The map's shape is under-determined in the same way</a:t>
-            </a:r>
-            <a:r>
-              <a:rPr sz="1800"/>
-              <a:t> — the degeneracy slide. Three stage counts × three map shapes = nine candidates.</a:t>
+              <a:t>No measurement is involved: the target is a curve the file already contains.</a:t>
             </a:r>
           </a:p>
         </p:txBody>
       </p:sp>
       <p:pic>
         <p:nvPicPr>
-          <p:cNvPr id="4" name="Picture 3" descr="k_choice.png"/>
+          <p:cNvPr id="4" name="Picture 3" descr="fit_search.png"/>
           <p:cNvPicPr>
             <a:picLocks noChangeAspect="1"/>
           </p:cNvPicPr>
@@ -5650,8 +5786,8 @@
         </p:blipFill>
         <p:spPr>
           <a:xfrm>
-            <a:off x="1397800" y="3291840"/>
-            <a:ext cx="9411638" cy="3227832"/>
+            <a:off x="952914" y="2990088"/>
+            <a:ext cx="10301410" cy="3529584"/>
           </a:xfrm>
           <a:prstGeom prst="rect">
             <a:avLst/>
@@ -5806,7 +5942,7 @@
           <a:lstStyle/>
           <a:p>
             <a:r>
-              <a:t>16 · Step 4 — the stressed run, first job: set the amplitude</a:t>
+              <a:t>15 · Recipe step 2 of 4 — enumerate what the file cannot choose</a:t>
             </a:r>
           </a:p>
         </p:txBody>
@@ -5824,7 +5960,7 @@
         <p:spPr>
           <a:xfrm>
             <a:off x="411480" y="987552"/>
-            <a:ext cx="11384280" cy="2231136"/>
+            <a:ext cx="11384280" cy="1929384"/>
           </a:xfrm>
         </p:spPr>
         <p:txBody>
@@ -5838,15 +5974,23 @@
             </a:pPr>
             <a:r>
               <a:rPr sz="1800"/>
-              <a:t>Now the measured waveform enters. </a:t>
+              <a:t>Left: past K = 3 the fit error against the file's Ku(t) is </a:t>
             </a:r>
             <a:r>
               <a:rPr sz="1800" b="1"/>
-              <a:t>Fitted to the file alone the chain leaves the 810 ps pad 28 % low</a:t>
+              <a:t>flat</a:t>
             </a:r>
             <a:r>
               <a:rPr sz="1800"/>
-              <a:t> — the file can set the shape, but not the amplitude.</a:t>
+              <a:t>. Right: the three candidates inside that band on one 810 ps pulse — same file, same fit quality, </a:t>
+            </a:r>
+            <a:r>
+              <a:rPr sz="1800" b="1"/>
+              <a:t>three completely different buffers</a:t>
+            </a:r>
+            <a:r>
+              <a:rPr sz="1800"/>
+              <a:t>.</a:t>
             </a:r>
           </a:p>
           <a:p>
@@ -5857,7 +6001,15 @@
             </a:pPr>
             <a:r>
               <a:rPr sz="1800"/>
-              <a:t>So bisect vt against the measured peak. The two spikes are the bracket being probed first: vt = 0 overshoots by 26 %, vt = 0.7 kills the pulse entirely at −99 %. Then halve. Ten runs, landing on vt 0.487 and +1.4 %.</a:t>
+              <a:t>The map's shape is under-determined the same way: 3 stage counts × 3 map shapes = </a:t>
+            </a:r>
+            <a:r>
+              <a:rPr sz="1800" b="1"/>
+              <a:t>nine candidates</a:t>
+            </a:r>
+            <a:r>
+              <a:rPr sz="1800"/>
+              <a:t>, all equally good against the file.</a:t>
             </a:r>
           </a:p>
           <a:p>
@@ -5872,14 +6024,14 @@
                   <a:srgbClr val="2B7A43"/>
                 </a:solidFill>
               </a:rPr>
-              <a:t>Why vt and not the drive rates? The rates were fitted to reproduce the full swing, and moving them breaks it. vt changes when the chain hands off, not how fast it runs.</a:t>
+              <a:t>The file is now spent. Everything left is decided by the one stressed run.</a:t>
             </a:r>
           </a:p>
         </p:txBody>
       </p:sp>
       <p:pic>
         <p:nvPicPr>
-          <p:cNvPr id="4" name="Picture 3" descr="bisection.png"/>
+          <p:cNvPr id="4" name="Picture 3" descr="k_choice.png"/>
           <p:cNvPicPr>
             <a:picLocks noChangeAspect="1"/>
           </p:cNvPicPr>
@@ -5893,8 +6045,8 @@
         </p:blipFill>
         <p:spPr>
           <a:xfrm>
-            <a:off x="1395221" y="3291840"/>
-            <a:ext cx="9416797" cy="3227832"/>
+            <a:off x="1174235" y="2990088"/>
+            <a:ext cx="9858769" cy="3529584"/>
           </a:xfrm>
           <a:prstGeom prst="rect">
             <a:avLst/>
@@ -5935,7 +6087,133 @@
           <a:lstStyle/>
           <a:p>
             <a:r>
-              <a:t>17 · Step 5 — the stressed run, second job: pick one</a:t>
+              <a:t>16 · Recipe step 3 of 4 — the stressed run sets the amplitude</a:t>
+            </a:r>
+          </a:p>
+        </p:txBody>
+      </p:sp>
+      <p:sp>
+        <p:nvSpPr>
+          <p:cNvPr id="3" name="Content Placeholder 2"/>
+          <p:cNvSpPr>
+            <a:spLocks noGrp="1"/>
+          </p:cNvSpPr>
+          <p:nvPr>
+            <p:ph idx="10"/>
+          </p:nvPr>
+        </p:nvSpPr>
+        <p:spPr>
+          <a:xfrm>
+            <a:off x="411480" y="987552"/>
+            <a:ext cx="11384280" cy="1517904"/>
+          </a:xfrm>
+        </p:spPr>
+        <p:txBody>
+          <a:bodyPr/>
+          <a:lstStyle/>
+          <a:p>
+            <a:pPr latinLnBrk="0">
+              <a:spcAft>
+                <a:spcPts val="400"/>
+              </a:spcAft>
+            </a:pPr>
+            <a:r>
+              <a:rPr sz="1800"/>
+              <a:t>One pulse into the real part, at the deepest rung of the ladder, and one number off it: the peak. Nothing is probed.</a:t>
+            </a:r>
+          </a:p>
+          <a:p>
+            <a:pPr latinLnBrk="0">
+              <a:spcAft>
+                <a:spcPts val="400"/>
+              </a:spcAft>
+            </a:pPr>
+            <a:r>
+              <a:rPr sz="1800" b="1">
+                <a:solidFill>
+                  <a:srgbClr val="2B7A43"/>
+                </a:solidFill>
+              </a:rPr>
+              <a:t>Why vt and not the drive rates?</a:t>
+            </a:r>
+            <a:r>
+              <a:rPr sz="1800"/>
+              <a:t> The rates were fitted to reproduce the full swing, and moving them breaks it. vt changes </a:t>
+            </a:r>
+            <a:r>
+              <a:rPr sz="1800" b="1">
+                <a:solidFill>
+                  <a:srgbClr val="2B7A43"/>
+                </a:solidFill>
+              </a:rPr>
+              <a:t>when</a:t>
+            </a:r>
+            <a:r>
+              <a:rPr sz="1800"/>
+              <a:t> the chain hands off, not how fast it runs.</a:t>
+            </a:r>
+          </a:p>
+        </p:txBody>
+      </p:sp>
+      <p:pic>
+        <p:nvPicPr>
+          <p:cNvPr id="4" name="Picture 3" descr="calib_run.png"/>
+          <p:cNvPicPr>
+            <a:picLocks noChangeAspect="1"/>
+          </p:cNvPicPr>
+          <p:nvPr/>
+        </p:nvPicPr>
+        <p:blipFill>
+          <a:blip r:embed="rId2"/>
+          <a:stretch>
+            <a:fillRect/>
+          </a:stretch>
+        </p:blipFill>
+        <p:spPr>
+          <a:xfrm>
+            <a:off x="411480" y="2578608"/>
+            <a:ext cx="11384280" cy="3463682"/>
+          </a:xfrm>
+          <a:prstGeom prst="rect">
+            <a:avLst/>
+          </a:prstGeom>
+        </p:spPr>
+      </p:pic>
+    </p:spTree>
+  </p:cSld>
+  <p:clrMapOvr>
+    <a:masterClrMapping/>
+  </p:clrMapOvr>
+</p:sld>
+</file>
+
+<file path=ppt/slides/slide22.xml><?xml version="1.0" encoding="utf-8"?>
+<p:sld xmlns:a="http://schemas.openxmlformats.org/drawingml/2006/main" xmlns:p="http://schemas.openxmlformats.org/presentationml/2006/main" xmlns:r="http://schemas.openxmlformats.org/officeDocument/2006/relationships">
+  <p:cSld>
+    <p:spTree>
+      <p:nvGrpSpPr>
+        <p:cNvPr id="1" name=""/>
+        <p:cNvGrpSpPr/>
+        <p:nvPr/>
+      </p:nvGrpSpPr>
+      <p:grpSpPr/>
+      <p:sp>
+        <p:nvSpPr>
+          <p:cNvPr id="2" name="Title 1"/>
+          <p:cNvSpPr>
+            <a:spLocks noGrp="1"/>
+          </p:cNvSpPr>
+          <p:nvPr>
+            <p:ph type="title"/>
+          </p:nvPr>
+        </p:nvSpPr>
+        <p:spPr/>
+        <p:txBody>
+          <a:bodyPr/>
+          <a:lstStyle/>
+          <a:p>
+            <a:r>
+              <a:t>17 · Recipe step 4 of 4 — the same run picks one of the nine</a:t>
             </a:r>
           </a:p>
         </p:txBody>
@@ -6046,7 +6324,7 @@
 </p:sld>
 </file>
 
-<file path=ppt/slides/slide22.xml><?xml version="1.0" encoding="utf-8"?>
+<file path=ppt/slides/slide23.xml><?xml version="1.0" encoding="utf-8"?>
 <p:sld xmlns:a="http://schemas.openxmlformats.org/drawingml/2006/main" xmlns:p="http://schemas.openxmlformats.org/presentationml/2006/main" xmlns:r="http://schemas.openxmlformats.org/officeDocument/2006/relationships">
   <p:cSld>
     <p:spTree>
@@ -6104,11 +6382,11 @@
             </a:pPr>
             <a:r>
               <a:rPr sz="1600" b="1"/>
-              <a:t>From the file alone:</a:t>
+              <a:t>Assumed as an input:</a:t>
             </a:r>
             <a:r>
               <a:rPr sz="1600"/>
-              <a:t> C_comp, kept unless its own Ku &gt; 1 test rejects it; then s_up, s_dn, vt, x_lin fitted to the file's Ku(t) at each stage count in the band.</a:t>
+              <a:t> C_comp, with a Ku &gt; 1 validity check on it.</a:t>
             </a:r>
           </a:p>
           <a:p>
@@ -6119,11 +6397,11 @@
             </a:pPr>
             <a:r>
               <a:rPr sz="1600" b="1"/>
-              <a:t>Left undetermined by the file:</a:t>
+              <a:t>Steps 1–2, from the file alone:</a:t>
             </a:r>
             <a:r>
               <a:rPr sz="1600"/>
-              <a:t> the stage count and the map's shape — nine candidates in all.</a:t>
+              <a:t> fit s_up, s_dn, vt, x_lin to the file's Ku(t) at each stage count in the band; that leaves nine candidates the file cannot separate.</a:t>
             </a:r>
           </a:p>
           <a:p>
@@ -6134,7 +6412,7 @@
             </a:pPr>
             <a:r>
               <a:rPr sz="1600" b="1"/>
-              <a:t>From one stressed pad run, in order:</a:t>
+              <a:t>Steps 3–4, from one stressed pad run:</a:t>
             </a:r>
             <a:r>
               <a:rPr sz="1600"/>
@@ -6194,7 +6472,7 @@
 </p:sld>
 </file>
 
-<file path=ppt/slides/slide23.xml><?xml version="1.0" encoding="utf-8"?>
+<file path=ppt/slides/slide24.xml><?xml version="1.0" encoding="utf-8"?>
 <p:sld xmlns:a="http://schemas.openxmlformats.org/drawingml/2006/main" xmlns:p="http://schemas.openxmlformats.org/presentationml/2006/main" xmlns:r="http://schemas.openxmlformats.org/officeDocument/2006/relationships">
   <p:cSld>
     <p:spTree>
@@ -6220,7 +6498,7 @@
           <a:lstStyle/>
           <a:p>
             <a:r>
-              <a:t>Result · where the file-only recipe stands</a:t>
+              <a:t>Result · the three on one bench, at the deepest pulse</a:t>
             </a:r>
           </a:p>
         </p:txBody>
@@ -6238,7 +6516,7 @@
         <p:spPr>
           <a:xfrm>
             <a:off x="411480" y="987552"/>
-            <a:ext cx="11384280" cy="1929384"/>
+            <a:ext cx="11384280" cy="914400"/>
           </a:xfrm>
         </p:spPr>
         <p:txBody>
@@ -6251,19 +6529,8 @@
               </a:spcAft>
             </a:pPr>
             <a:r>
-              <a:rPr sz="1800" b="1"/>
-              <a:t>12 of 12 buffers within ±10 % on the worst stressed pulse; mean 6.9 %.</a:t>
-            </a:r>
-          </a:p>
-          <a:p>
-            <a:pPr latinLnBrk="0">
-              <a:spcAft>
-                <a:spcPts val="400"/>
-              </a:spcAft>
-            </a:pPr>
-            <a:r>
               <a:rPr sz="1800"/>
-              <a:t>On inv_chain the file-only build reaches 5.1 %, against 25.8 % for a build that uses the probed silicon — the shape choice matters more than the measurement.</a:t>
+              <a:t>Transistor in black, HSPICE native IBIS dotted, track 1 in teal. Same netlist, same stimulus, same load.</a:t>
             </a:r>
           </a:p>
           <a:p>
@@ -6278,18 +6545,14 @@
                   <a:srgbClr val="2B7A43"/>
                 </a:solidFill>
               </a:rPr>
-              <a:t>What it costs:</a:t>
-            </a:r>
-            <a:r>
-              <a:rPr sz="1800"/>
-              <a:t> the full transition is worse than the shipped model on 10 of 12 buffers, and a stressed pulse train is still lost on ex2 and io_buf. We are buying stressed accuracy with full-swing accuracy.</a:t>
+              <a:t>Native IBIS is +71 %, +87 % and −20 % on the three buffers. Track 1 is −2 %, −4 % and +2 %.</a:t>
             </a:r>
           </a:p>
         </p:txBody>
       </p:sp>
       <p:pic>
         <p:nvPicPr>
-          <p:cNvPr id="4" name="Picture 3" descr="endtoend.png"/>
+          <p:cNvPr id="4" name="Picture 3" descr="three_way.png"/>
           <p:cNvPicPr>
             <a:picLocks noChangeAspect="1"/>
           </p:cNvPicPr>
@@ -6303,8 +6566,8 @@
         </p:blipFill>
         <p:spPr>
           <a:xfrm>
-            <a:off x="1507807" y="2990088"/>
-            <a:ext cx="9191625" cy="3529584"/>
+            <a:off x="411480" y="1975104"/>
+            <a:ext cx="11384280" cy="3950629"/>
           </a:xfrm>
           <a:prstGeom prst="rect">
             <a:avLst/>
@@ -6319,7 +6582,144 @@
 </p:sld>
 </file>
 
-<file path=ppt/slides/slide24.xml><?xml version="1.0" encoding="utf-8"?>
+<file path=ppt/slides/slide25.xml><?xml version="1.0" encoding="utf-8"?>
+<p:sld xmlns:a="http://schemas.openxmlformats.org/drawingml/2006/main" xmlns:p="http://schemas.openxmlformats.org/presentationml/2006/main" xmlns:r="http://schemas.openxmlformats.org/officeDocument/2006/relationships">
+  <p:cSld>
+    <p:spTree>
+      <p:nvGrpSpPr>
+        <p:cNvPr id="1" name=""/>
+        <p:cNvGrpSpPr/>
+        <p:nvPr/>
+      </p:nvGrpSpPr>
+      <p:grpSpPr/>
+      <p:sp>
+        <p:nvSpPr>
+          <p:cNvPr id="2" name="Title 1"/>
+          <p:cNvSpPr>
+            <a:spLocks noGrp="1"/>
+          </p:cNvSpPr>
+          <p:nvPr>
+            <p:ph type="title"/>
+          </p:nvPr>
+        </p:nvSpPr>
+        <p:spPr/>
+        <p:txBody>
+          <a:bodyPr/>
+          <a:lstStyle/>
+          <a:p>
+            <a:r>
+              <a:t>Result · every buffer, worst of its stressed widths</a:t>
+            </a:r>
+          </a:p>
+        </p:txBody>
+      </p:sp>
+      <p:sp>
+        <p:nvSpPr>
+          <p:cNvPr id="3" name="Content Placeholder 2"/>
+          <p:cNvSpPr>
+            <a:spLocks noGrp="1"/>
+          </p:cNvSpPr>
+          <p:nvPr>
+            <p:ph idx="10"/>
+          </p:nvPr>
+        </p:nvSpPr>
+        <p:spPr>
+          <a:xfrm>
+            <a:off x="411480" y="987552"/>
+            <a:ext cx="11384280" cy="2231136"/>
+          </a:xfrm>
+        </p:spPr>
+        <p:txBody>
+          <a:bodyPr/>
+          <a:lstStyle/>
+          <a:p>
+            <a:pPr latinLnBrk="0">
+              <a:spcAft>
+                <a:spcPts val="400"/>
+              </a:spcAft>
+            </a:pPr>
+            <a:r>
+              <a:rPr sz="1600" b="1"/>
+              <a:t>12 of 12 within ±10 % against the transistor; mean 6.9 %.</a:t>
+            </a:r>
+            <a:r>
+              <a:rPr sz="1600"/>
+              <a:t> Native IBIS, where it runs at all, is 20 % to 100 %.</a:t>
+            </a:r>
+          </a:p>
+          <a:p>
+            <a:pPr latinLnBrk="0">
+              <a:spcAft>
+                <a:spcPts val="400"/>
+              </a:spcAft>
+            </a:pPr>
+            <a:r>
+              <a:rPr sz="1600"/>
+              <a:t>Native does not converge on the five ex2 variants — HSPICE's two-waveform solver dies on their 1 ps files and reports the pulse missing at </a:t>
+            </a:r>
+            <a:r>
+              <a:rPr sz="1600" b="1"/>
+              <a:t>every</a:t>
+            </a:r>
+            <a:r>
+              <a:rPr sz="1600"/>
+              <a:t> depth, the mildest included. Those bars are hatched, not scored.</a:t>
+            </a:r>
+          </a:p>
+          <a:p>
+            <a:pPr latinLnBrk="0">
+              <a:spcAft>
+                <a:spcPts val="400"/>
+              </a:spcAft>
+            </a:pPr>
+            <a:r>
+              <a:rPr sz="1600" b="1">
+                <a:solidFill>
+                  <a:srgbClr val="2B7A43"/>
+                </a:solidFill>
+              </a:rPr>
+              <a:t>What it costs:</a:t>
+            </a:r>
+            <a:r>
+              <a:rPr sz="1600"/>
+              <a:t> the full transition is worse than the shipped model on 10 of 12 buffers, and a stressed pulse train is still lost on ex2 and io_buf. We are buying stressed accuracy with full-swing accuracy.</a:t>
+            </a:r>
+          </a:p>
+        </p:txBody>
+      </p:sp>
+      <p:pic>
+        <p:nvPicPr>
+          <p:cNvPr id="4" name="Picture 3" descr="endtoend_3.png"/>
+          <p:cNvPicPr>
+            <a:picLocks noChangeAspect="1"/>
+          </p:cNvPicPr>
+          <p:nvPr/>
+        </p:nvPicPr>
+        <p:blipFill>
+          <a:blip r:embed="rId2"/>
+          <a:stretch>
+            <a:fillRect/>
+          </a:stretch>
+        </p:blipFill>
+        <p:spPr>
+          <a:xfrm>
+            <a:off x="1762501" y="3291840"/>
+            <a:ext cx="8682237" cy="3227832"/>
+          </a:xfrm>
+          <a:prstGeom prst="rect">
+            <a:avLst/>
+          </a:prstGeom>
+        </p:spPr>
+      </p:pic>
+    </p:spTree>
+  </p:cSld>
+  <p:clrMapOvr>
+    <a:masterClrMapping/>
+  </p:clrMapOvr>
+</p:sld>
+</file>
+
+<file path=ppt/slides/slide26.xml><?xml version="1.0" encoding="utf-8"?>
 <p:sld xmlns:a="http://schemas.openxmlformats.org/drawingml/2006/main" xmlns:p="http://schemas.openxmlformats.org/presentationml/2006/main" xmlns:r="http://schemas.openxmlformats.org/officeDocument/2006/relationships">
   <p:cSld>
     <p:spTree>
@@ -6467,7 +6867,7 @@
 </p:sld>
 </file>
 
-<file path=ppt/slides/slide25.xml><?xml version="1.0" encoding="utf-8"?>
+<file path=ppt/slides/slide27.xml><?xml version="1.0" encoding="utf-8"?>
 <p:sld xmlns:a="http://schemas.openxmlformats.org/drawingml/2006/main" xmlns:p="http://schemas.openxmlformats.org/presentationml/2006/main" xmlns:r="http://schemas.openxmlformats.org/officeDocument/2006/relationships">
   <p:cSld>
     <p:spTree>
@@ -6581,7 +6981,7 @@
 </p:sld>
 </file>
 
-<file path=ppt/slides/slide26.xml><?xml version="1.0" encoding="utf-8"?>
+<file path=ppt/slides/slide28.xml><?xml version="1.0" encoding="utf-8"?>
 <p:sld xmlns:a="http://schemas.openxmlformats.org/drawingml/2006/main" xmlns:p="http://schemas.openxmlformats.org/presentationml/2006/main" xmlns:r="http://schemas.openxmlformats.org/officeDocument/2006/relationships">
   <p:cSld>
     <p:spTree>
@@ -6691,7 +7091,7 @@
 </p:sld>
 </file>
 
-<file path=ppt/slides/slide27.xml><?xml version="1.0" encoding="utf-8"?>
+<file path=ppt/slides/slide29.xml><?xml version="1.0" encoding="utf-8"?>
 <p:sld xmlns:a="http://schemas.openxmlformats.org/drawingml/2006/main" xmlns:p="http://schemas.openxmlformats.org/presentationml/2006/main" xmlns:r="http://schemas.openxmlformats.org/officeDocument/2006/relationships">
   <p:cSld>
     <p:spTree>

--- a/results/meeting_deck_2026-09-24/0924_track1_story.pptx
+++ b/results/meeting_deck_2026-09-24/0924_track1_story.pptx
@@ -37,6 +37,9 @@
     <p:sldId id="282" r:id="rId35"/>
     <p:sldId id="283" r:id="rId36"/>
     <p:sldId id="284" r:id="rId37"/>
+    <p:sldId id="285" r:id="rId38"/>
+    <p:sldId id="286" r:id="rId39"/>
+    <p:sldId id="287" r:id="rId40"/>
   </p:sldIdLst>
   <p:sldSz cx="12192000" cy="6858000"/>
   <p:notesSz cx="6858000" cy="9144000"/>
@@ -898,7 +901,7 @@
           <a:lstStyle/>
           <a:p>
             <a:r>
-              <a:t>Colours tie each term of the equation to its row. u is the stage's input, v its output, both on their own 0-to-1 swing. On inv_chain the file's Vinh is 2.0 V on a 1.8 V part, which is why the converter guards it - the backup slide.</a:t>
+              <a:t>u is the stage's input, v its output, both on their own 0-to-1 swing. The minus term is the same three factors mirrored for the discharge.</a:t>
             </a:r>
           </a:p>
         </p:txBody>
@@ -968,7 +971,7 @@
           <a:lstStyle/>
           <a:p>
             <a:r>
-              <a:t>Simulated with the project's own stage model from the fitted values the 09-17 film exported.</a:t>
+              <a:t>On inv_chain the file's Vinh is 2.0 V on a 1.8 V part, which is why the converter guards it - the backup slide. p is assumed 1 because it is invisible at full swing: every p from 1 to 2 fits to rms 0.002-0.007.</a:t>
             </a:r>
           </a:p>
         </p:txBody>
@@ -1038,7 +1041,7 @@
           <a:lstStyle/>
           <a:p>
             <a:r>
-              <a:t>est_knee fit, ex2 pull-up: K=1 rms 0.0920, K=2 0.0360, K=3 0.0233, best (K=6) 0.0202. The real predriver is a chain too - ex2's schematic showed three inverters - but this is the file saying so on its own.</a:t>
+              <a:t>Simulated with the project's own stage model from the fitted values the 09-17 film exported.</a:t>
             </a:r>
           </a:p>
         </p:txBody>
@@ -1108,7 +1111,7 @@
           <a:lstStyle/>
           <a:p>
             <a:r>
-              <a:t>Degenerate: a free fit splits the delay into one sluggish stage plus one quick one, reproduces the full swing slightly better, and predicts a stressed gate of 0.23 against a measured 0.76.</a:t>
+              <a:t>est_knee fit, ex2 pull-up: K=1 rms 0.0920, K=2 0.0360, K=3 0.0233, best (K=6) 0.0202. The real predriver is a chain too - ex2's schematic showed three inverters - but this is the file saying so on its own.</a:t>
             </a:r>
           </a:p>
         </p:txBody>
@@ -1178,7 +1181,7 @@
           <a:lstStyle/>
           <a:p>
             <a:r>
-              <a:t>C_comp is not a model parameter: it is a number the file's own Ku tables were solved with, so a wrong value inflates the curve everything downstream is fitted to.</a:t>
+              <a:t>Degenerate: a free fit splits the delay into one sluggish stage plus one quick one, reproduces the full swing slightly better, and predicts a stressed gate of 0.23 against a measured 0.76.</a:t>
             </a:r>
           </a:p>
         </p:txBody>
@@ -1248,7 +1251,7 @@
           <a:lstStyle/>
           <a:p>
             <a:r>
-              <a:t>Every trial the optimiser actually took, exported live by the 09-17 film. What it does NOT give us is K, or the map's shape.</a:t>
+              <a:t>C_comp is not a model parameter: it is a number the file's own Ku tables were solved with, so a wrong value inflates the curve everything downstream is fitted to.</a:t>
             </a:r>
           </a:p>
         </p:txBody>
@@ -1388,7 +1391,7 @@
           <a:lstStyle/>
           <a:p>
             <a:r>
-              <a:t>The three shapes are (0.50, 0.70), (0.40, 0.60) and (0.40, 0.90). Note on the right that all three already match the peak - that is the calibration, and it is why the peak cannot be what chooses.</a:t>
+              <a:t>Every trial the optimiser actually took, exported live by the 09-17 film. What it does NOT give us is K, or the map's shape.</a:t>
             </a:r>
           </a:p>
         </p:txBody>
@@ -1458,7 +1461,7 @@
           <a:lstStyle/>
           <a:p>
             <a:r>
-              <a:t>Every iteration the calibration actually wrote, recovered from the netlists it emitted. The vt here is the film's ex2 case; the deck's own K = 3 build lands on 0.632 from a different starting fit.</a:t>
+              <a:t>The three shapes are (0.50, 0.70), (0.40, 0.60) and (0.40, 0.90). Note on the right that all three already match the peak - that is the calibration, and it is why the peak cannot be what chooses.</a:t>
             </a:r>
           </a:p>
         </p:txBody>
@@ -1528,7 +1531,7 @@
           <a:lstStyle/>
           <a:p>
             <a:r>
-              <a:t>Ranking on the peak instead picks a chain that arrives up to 300 ps late with four times the waveform error. The nine waveforms themselves are the backup slide.</a:t>
+              <a:t>Every iteration the calibration actually wrote, recovered from the netlists it emitted. The vt here is the film's ex2 case; the deck's own K = 3 build lands on 0.632 from a different starting fit.</a:t>
             </a:r>
           </a:p>
         </p:txBody>
@@ -1598,7 +1601,7 @@
           <a:lstStyle/>
           <a:p>
             <a:r>
-              <a:t>The same block diagram as the chain slide, with the recipe attached. This is the slide to leave up during questions.</a:t>
+              <a:t>Ranking on the peak instead picks a chain that arrives up to 300 ps late with four times the waveform error. The nine waveforms themselves are the backup slide.</a:t>
             </a:r>
           </a:p>
         </p:txBody>
@@ -1668,7 +1671,7 @@
           <a:lstStyle/>
           <a:p>
             <a:r>
-              <a:t>The deepest rung of each ladder: ex2 810 ps, inv_chain 104 ps, io_buf 1505 ps. io_buf's deepest rung is 37 % of its swing, not 50 - its ladder is shallower.</a:t>
+              <a:t>The same block diagram as the chain slide, with the recipe attached. This is the slide to leave up during questions.</a:t>
             </a:r>
           </a:p>
         </p:txBody>
@@ -1738,7 +1741,7 @@
           <a:lstStyle/>
           <a:p>
             <a:r>
-              <a:t>Native from gate_cascade_prototype_2026-09-09 sweeps, track 1 from selector_from_one_run_2026-09-23. Same five widths per buffer in both. The tr1ps death is documented in docs/native_vt_waveform_modes.md.</a:t>
+              <a:t>Native from the delay_cmd waveform set, track 1 from the selector's pick for ex2. The calibration used the deepest rung only, so the milder two are out-of-sample.</a:t>
             </a:r>
           </a:p>
         </p:txBody>
@@ -1808,7 +1811,7 @@
           <a:lstStyle/>
           <a:p>
             <a:r>
-              <a:t>Better said than asked. The direction gap is the one that would most change the headline number.</a:t>
+              <a:t>Native from the delay_cmd waveform set, track 1 from the selector's pick for inv_chain. The calibration used the deepest rung only, so the milder two are out-of-sample.</a:t>
             </a:r>
           </a:p>
         </p:txBody>
@@ -1878,7 +1881,7 @@
           <a:lstStyle/>
           <a:p>
             <a:r>
-              <a:t>Moved out of the main line: this audience knows where Ku comes from.</a:t>
+              <a:t>Native from the delay_cmd waveform set, track 1 from the selector's pick for io_buf. The calibration used the deepest rung only, so the milder two are out-of-sample.</a:t>
             </a:r>
           </a:p>
         </p:txBody>
@@ -1948,7 +1951,7 @@
           <a:lstStyle/>
           <a:p>
             <a:r>
-              <a:t>This was the main slide before; the ranking says the same thing more directly.</a:t>
+              <a:t>Native from gate_cascade_prototype_2026-09-09 sweeps, track 1 from selector_from_one_run_2026-09-23. Same five widths per buffer in both. The tr1ps death is documented in docs/native_vt_waveform_modes.md.</a:t>
             </a:r>
           </a:p>
         </p:txBody>
@@ -2018,7 +2021,7 @@
           <a:lstStyle/>
           <a:p>
             <a:r>
-              <a:t>Carried from the 09-18 deck so the inv_chain numbers earlier are not read as a win. review_2026-09-09 item 12B has the measurement.</a:t>
+              <a:t>Better said than asked. The direction gap is the one that would most change the headline number.</a:t>
             </a:r>
           </a:p>
         </p:txBody>
@@ -2089,6 +2092,216 @@
           <a:p>
             <a:r>
               <a:t>Left: Ku(t) from the file and the probed n4(t), with five instants marked. Right: the same five instants plotted Ku against gate. This is the measured Ku-vs-gate map, and it is what the next slides drive.</a:t>
+            </a:r>
+          </a:p>
+        </p:txBody>
+      </p:sp>
+      <p:sp>
+        <p:nvSpPr>
+          <p:cNvPr id="4" name="Slide Number Placeholder 3"/>
+          <p:cNvSpPr>
+            <a:spLocks noGrp="1"/>
+          </p:cNvSpPr>
+          <p:nvPr>
+            <p:ph type="sldNum" idx="5" sz="quarter"/>
+          </p:nvPr>
+        </p:nvSpPr>
+        <p:spPr/>
+      </p:sp>
+    </p:spTree>
+  </p:cSld>
+  <p:clrMapOvr>
+    <a:masterClrMapping/>
+  </p:clrMapOvr>
+</p:notes>
+</file>
+
+<file path=ppt/notesSlides/notesSlide30.xml><?xml version="1.0" encoding="utf-8"?>
+<p:notes xmlns:a="http://schemas.openxmlformats.org/drawingml/2006/main" xmlns:p="http://schemas.openxmlformats.org/presentationml/2006/main" xmlns:r="http://schemas.openxmlformats.org/officeDocument/2006/relationships">
+  <p:cSld>
+    <p:spTree>
+      <p:nvGrpSpPr>
+        <p:cNvPr id="1" name=""/>
+        <p:cNvGrpSpPr/>
+        <p:nvPr/>
+      </p:nvGrpSpPr>
+      <p:grpSpPr>
+        <a:xfrm>
+          <a:off x="0" y="0"/>
+          <a:ext cx="0" cy="0"/>
+          <a:chOff x="0" y="0"/>
+          <a:chExt cx="0" cy="0"/>
+        </a:xfrm>
+      </p:grpSpPr>
+      <p:sp>
+        <p:nvSpPr>
+          <p:cNvPr id="2" name="Slide Image Placeholder 1"/>
+          <p:cNvSpPr>
+            <a:spLocks noGrp="1"/>
+          </p:cNvSpPr>
+          <p:nvPr>
+            <p:ph type="sldImg" idx="2"/>
+          </p:nvPr>
+        </p:nvSpPr>
+        <p:spPr/>
+      </p:sp>
+      <p:sp>
+        <p:nvSpPr>
+          <p:cNvPr id="3" name="Notes Placeholder 2"/>
+          <p:cNvSpPr>
+            <a:spLocks noGrp="1"/>
+          </p:cNvSpPr>
+          <p:nvPr>
+            <p:ph type="body" idx="3" sz="quarter"/>
+          </p:nvPr>
+        </p:nvSpPr>
+        <p:spPr/>
+        <p:txBody>
+          <a:bodyPr/>
+          <a:lstStyle/>
+          <a:p>
+            <a:r>
+              <a:t>Moved out of the main line: this audience knows where Ku comes from.</a:t>
+            </a:r>
+          </a:p>
+        </p:txBody>
+      </p:sp>
+      <p:sp>
+        <p:nvSpPr>
+          <p:cNvPr id="4" name="Slide Number Placeholder 3"/>
+          <p:cNvSpPr>
+            <a:spLocks noGrp="1"/>
+          </p:cNvSpPr>
+          <p:nvPr>
+            <p:ph type="sldNum" idx="5" sz="quarter"/>
+          </p:nvPr>
+        </p:nvSpPr>
+        <p:spPr/>
+      </p:sp>
+    </p:spTree>
+  </p:cSld>
+  <p:clrMapOvr>
+    <a:masterClrMapping/>
+  </p:clrMapOvr>
+</p:notes>
+</file>
+
+<file path=ppt/notesSlides/notesSlide31.xml><?xml version="1.0" encoding="utf-8"?>
+<p:notes xmlns:a="http://schemas.openxmlformats.org/drawingml/2006/main" xmlns:p="http://schemas.openxmlformats.org/presentationml/2006/main" xmlns:r="http://schemas.openxmlformats.org/officeDocument/2006/relationships">
+  <p:cSld>
+    <p:spTree>
+      <p:nvGrpSpPr>
+        <p:cNvPr id="1" name=""/>
+        <p:cNvGrpSpPr/>
+        <p:nvPr/>
+      </p:nvGrpSpPr>
+      <p:grpSpPr>
+        <a:xfrm>
+          <a:off x="0" y="0"/>
+          <a:ext cx="0" cy="0"/>
+          <a:chOff x="0" y="0"/>
+          <a:chExt cx="0" cy="0"/>
+        </a:xfrm>
+      </p:grpSpPr>
+      <p:sp>
+        <p:nvSpPr>
+          <p:cNvPr id="2" name="Slide Image Placeholder 1"/>
+          <p:cNvSpPr>
+            <a:spLocks noGrp="1"/>
+          </p:cNvSpPr>
+          <p:nvPr>
+            <p:ph type="sldImg" idx="2"/>
+          </p:nvPr>
+        </p:nvSpPr>
+        <p:spPr/>
+      </p:sp>
+      <p:sp>
+        <p:nvSpPr>
+          <p:cNvPr id="3" name="Notes Placeholder 2"/>
+          <p:cNvSpPr>
+            <a:spLocks noGrp="1"/>
+          </p:cNvSpPr>
+          <p:nvPr>
+            <p:ph type="body" idx="3" sz="quarter"/>
+          </p:nvPr>
+        </p:nvSpPr>
+        <p:spPr/>
+        <p:txBody>
+          <a:bodyPr/>
+          <a:lstStyle/>
+          <a:p>
+            <a:r>
+              <a:t>This was the main slide before; the ranking says the same thing more directly.</a:t>
+            </a:r>
+          </a:p>
+        </p:txBody>
+      </p:sp>
+      <p:sp>
+        <p:nvSpPr>
+          <p:cNvPr id="4" name="Slide Number Placeholder 3"/>
+          <p:cNvSpPr>
+            <a:spLocks noGrp="1"/>
+          </p:cNvSpPr>
+          <p:nvPr>
+            <p:ph type="sldNum" idx="5" sz="quarter"/>
+          </p:nvPr>
+        </p:nvSpPr>
+        <p:spPr/>
+      </p:sp>
+    </p:spTree>
+  </p:cSld>
+  <p:clrMapOvr>
+    <a:masterClrMapping/>
+  </p:clrMapOvr>
+</p:notes>
+</file>
+
+<file path=ppt/notesSlides/notesSlide32.xml><?xml version="1.0" encoding="utf-8"?>
+<p:notes xmlns:a="http://schemas.openxmlformats.org/drawingml/2006/main" xmlns:p="http://schemas.openxmlformats.org/presentationml/2006/main" xmlns:r="http://schemas.openxmlformats.org/officeDocument/2006/relationships">
+  <p:cSld>
+    <p:spTree>
+      <p:nvGrpSpPr>
+        <p:cNvPr id="1" name=""/>
+        <p:cNvGrpSpPr/>
+        <p:nvPr/>
+      </p:nvGrpSpPr>
+      <p:grpSpPr>
+        <a:xfrm>
+          <a:off x="0" y="0"/>
+          <a:ext cx="0" cy="0"/>
+          <a:chOff x="0" y="0"/>
+          <a:chExt cx="0" cy="0"/>
+        </a:xfrm>
+      </p:grpSpPr>
+      <p:sp>
+        <p:nvSpPr>
+          <p:cNvPr id="2" name="Slide Image Placeholder 1"/>
+          <p:cNvSpPr>
+            <a:spLocks noGrp="1"/>
+          </p:cNvSpPr>
+          <p:nvPr>
+            <p:ph type="sldImg" idx="2"/>
+          </p:nvPr>
+        </p:nvSpPr>
+        <p:spPr/>
+      </p:sp>
+      <p:sp>
+        <p:nvSpPr>
+          <p:cNvPr id="3" name="Notes Placeholder 2"/>
+          <p:cNvSpPr>
+            <a:spLocks noGrp="1"/>
+          </p:cNvSpPr>
+          <p:nvPr>
+            <p:ph type="body" idx="3" sz="quarter"/>
+          </p:nvPr>
+        </p:nvSpPr>
+        <p:spPr/>
+        <p:txBody>
+          <a:bodyPr/>
+          <a:lstStyle/>
+          <a:p>
+            <a:r>
+              <a:t>Carried from the 09-18 deck so the inv_chain numbers earlier are not read as a win. review_2026-09-09 item 12B has the measurement.</a:t>
             </a:r>
           </a:p>
         </p:txBody>
@@ -4964,7 +5177,7 @@
           <a:lstStyle/>
           <a:p>
             <a:r>
-              <a:t>9 · Where the stage law comes from</a:t>
+              <a:t>9 · What the stage law is a model of</a:t>
             </a:r>
           </a:p>
         </p:txBody>
@@ -4996,7 +5209,15 @@
             </a:pPr>
             <a:r>
               <a:rPr sz="1800"/>
-              <a:t>Three facts about one CMOS inverter driving the next one's gate. Each contributes one factor, and together they are the whole law — there is nothing else in it.</a:t>
+              <a:t>Take one inverter out of ex2's predriver and draw it as transistors. While its output is rising the NMOS is off and the PMOS is </a:t>
+            </a:r>
+            <a:r>
+              <a:rPr sz="1800" b="1"/>
+              <a:t>saturated</a:t>
+            </a:r>
+            <a:r>
+              <a:rPr sz="1800"/>
+              <a:t>, so the current it passes does not depend on how far the output has got.</a:t>
             </a:r>
           </a:p>
           <a:p>
@@ -5011,7 +5232,11 @@
                   <a:srgbClr val="2B7A43"/>
                 </a:solidFill>
               </a:rPr>
-              <a:t>A constant current into a fixed capacitance is a constant slope. That is the backbone; the threshold and the taper only modulate it.</a:t>
+              <a:t>A fixed current into a fixed capacitance is a straight ramp.</a:t>
+            </a:r>
+            <a:r>
+              <a:rPr sz="1800"/>
+              <a:t> That ramp is the backbone of the law; the next slide adds the two things that modulate it.</a:t>
             </a:r>
           </a:p>
         </p:txBody>
@@ -5033,7 +5258,7 @@
         <p:spPr>
           <a:xfrm>
             <a:off x="411480" y="2578608"/>
-            <a:ext cx="11384280" cy="3352845"/>
+            <a:ext cx="11384280" cy="3695727"/>
           </a:xfrm>
           <a:prstGeom prst="rect">
             <a:avLst/>
@@ -5074,7 +5299,7 @@
           <a:lstStyle/>
           <a:p>
             <a:r>
-              <a:t>10 · The four numbers, and what each one is</a:t>
+              <a:t>10 · The law, symbol by symbol</a:t>
             </a:r>
           </a:p>
         </p:txBody>
@@ -5092,7 +5317,7 @@
         <p:spPr>
           <a:xfrm>
             <a:off x="411480" y="987552"/>
-            <a:ext cx="11384280" cy="1517904"/>
+            <a:ext cx="11384280" cy="1216152"/>
           </a:xfrm>
         </p:spPr>
         <p:txBody>
@@ -5105,20 +5330,8 @@
               </a:spcAft>
             </a:pPr>
             <a:r>
-              <a:rPr sz="1600" b="1"/>
-              <a:t>s_up and s_dn are slopes, not currents</a:t>
-            </a:r>
-            <a:r>
-              <a:rPr sz="1600"/>
-              <a:t> — v is normalised, so dv/dt is swings per nanosecond. </a:t>
-            </a:r>
-            <a:r>
-              <a:rPr sz="1600" b="1"/>
-              <a:t>x_lin</a:t>
-            </a:r>
-            <a:r>
-              <a:rPr sz="1600"/>
-              <a:t> is named for the MOSFET's linear (triode) region.</a:t>
+              <a:rPr sz="1800"/>
+              <a:t>That ramp, times the two things that modulate it. Each symbol below is one picture.</a:t>
             </a:r>
           </a:p>
           <a:p>
@@ -5128,47 +5341,47 @@
               </a:spcAft>
             </a:pPr>
             <a:r>
-              <a:rPr sz="1600" b="1">
+              <a:rPr sz="1800" b="1">
                 <a:solidFill>
                   <a:srgbClr val="2B7A43"/>
                 </a:solidFill>
               </a:rPr>
-              <a:t>Does the file not give vt?</a:t>
-            </a:r>
-            <a:r>
-              <a:rPr sz="1600"/>
-              <a:t> Its Vinh/Vinl are the input </a:t>
-            </a:r>
-            <a:r>
-              <a:rPr sz="1600" b="1">
+              <a:t>dv/dt is a slope, not a current</a:t>
+            </a:r>
+            <a:r>
+              <a:rPr sz="1800"/>
+              <a:t> — v runs 0 at rest to 1 at full swing, so it is swings per nanosecond. </a:t>
+            </a:r>
+            <a:r>
+              <a:rPr sz="1800" b="1">
                 <a:solidFill>
                   <a:srgbClr val="2B7A43"/>
                 </a:solidFill>
               </a:rPr>
-              <a:t>pin's</a:t>
-            </a:r>
-            <a:r>
-              <a:rPr sz="1600"/>
-              <a:t> thresholds, and we do use those — for our input comparator. vt is an </a:t>
-            </a:r>
-            <a:r>
-              <a:rPr sz="1600" b="1">
+              <a:t>h(u)</a:t>
+            </a:r>
+            <a:r>
+              <a:rPr sz="1800"/>
+              <a:t> is the </a:t>
+            </a:r>
+            <a:r>
+              <a:rPr sz="1800" b="1">
                 <a:solidFill>
                   <a:srgbClr val="2B7A43"/>
                 </a:solidFill>
               </a:rPr>
-              <a:t>internal</a:t>
-            </a:r>
-            <a:r>
-              <a:rPr sz="1600"/>
-              <a:t> stage's threshold, and the file never describes that node.</a:t>
+              <a:t>share</a:t>
+            </a:r>
+            <a:r>
+              <a:rPr sz="1800"/>
+              <a:t> of its full current the device passes.</a:t>
             </a:r>
           </a:p>
         </p:txBody>
       </p:sp>
       <p:pic>
         <p:nvPicPr>
-          <p:cNvPr id="4" name="Picture 3" descr="four_numbers.png"/>
+          <p:cNvPr id="4" name="Picture 3" descr="law_symbols.png"/>
           <p:cNvPicPr>
             <a:picLocks noChangeAspect="1"/>
           </p:cNvPicPr>
@@ -5182,8 +5395,8 @@
         </p:blipFill>
         <p:spPr>
           <a:xfrm>
-            <a:off x="411480" y="2578608"/>
-            <a:ext cx="11384280" cy="3796063"/>
+            <a:off x="518773" y="2276856"/>
+            <a:ext cx="11169692" cy="4242816"/>
           </a:xfrm>
           <a:prstGeom prst="rect">
             <a:avLst/>
@@ -5199,6 +5412,160 @@
 </file>
 
 <file path=ppt/slides/slide15.xml><?xml version="1.0" encoding="utf-8"?>
+<p:sld xmlns:a="http://schemas.openxmlformats.org/drawingml/2006/main" xmlns:p="http://schemas.openxmlformats.org/presentationml/2006/main" xmlns:r="http://schemas.openxmlformats.org/officeDocument/2006/relationships">
+  <p:cSld>
+    <p:spTree>
+      <p:nvGrpSpPr>
+        <p:cNvPr id="1" name=""/>
+        <p:cNvGrpSpPr/>
+        <p:nvPr/>
+      </p:nvGrpSpPr>
+      <p:grpSpPr/>
+      <p:sp>
+        <p:nvSpPr>
+          <p:cNvPr id="2" name="Title 1"/>
+          <p:cNvSpPr>
+            <a:spLocks noGrp="1"/>
+          </p:cNvSpPr>
+          <p:nvPr>
+            <p:ph type="title"/>
+          </p:nvPr>
+        </p:nvSpPr>
+        <p:spPr/>
+        <p:txBody>
+          <a:bodyPr/>
+          <a:lstStyle/>
+          <a:p>
+            <a:r>
+              <a:t>10 · The four numbers that leaves</a:t>
+            </a:r>
+          </a:p>
+        </p:txBody>
+      </p:sp>
+      <p:sp>
+        <p:nvSpPr>
+          <p:cNvPr id="3" name="Content Placeholder 2"/>
+          <p:cNvSpPr>
+            <a:spLocks noGrp="1"/>
+          </p:cNvSpPr>
+          <p:nvPr>
+            <p:ph idx="10"/>
+          </p:nvPr>
+        </p:nvSpPr>
+        <p:spPr>
+          <a:xfrm>
+            <a:off x="411480" y="987552"/>
+            <a:ext cx="11384280" cy="1819656"/>
+          </a:xfrm>
+        </p:spPr>
+        <p:txBody>
+          <a:bodyPr/>
+          <a:lstStyle/>
+          <a:p>
+            <a:pPr latinLnBrk="0">
+              <a:spcAft>
+                <a:spcPts val="400"/>
+              </a:spcAft>
+            </a:pPr>
+            <a:r>
+              <a:rPr sz="1700"/>
+              <a:t>Four free numbers and no more. </a:t>
+            </a:r>
+            <a:r>
+              <a:rPr sz="1700" b="1"/>
+              <a:t>s_up and s_dn are slopes</a:t>
+            </a:r>
+            <a:r>
+              <a:rPr sz="1700"/>
+              <a:t> — ex2 fits 2.59/ns, 0.39 ns to cross a stage's swing flat out. </a:t>
+            </a:r>
+            <a:r>
+              <a:rPr sz="1700" b="1"/>
+              <a:t>x_lin</a:t>
+            </a:r>
+            <a:r>
+              <a:rPr sz="1700"/>
+              <a:t> is named for the MOSFET's linear (triode) region.</a:t>
+            </a:r>
+          </a:p>
+          <a:p>
+            <a:pPr latinLnBrk="0">
+              <a:spcAft>
+                <a:spcPts val="400"/>
+              </a:spcAft>
+            </a:pPr>
+            <a:r>
+              <a:rPr sz="1700" b="1">
+                <a:solidFill>
+                  <a:srgbClr val="2B7A43"/>
+                </a:solidFill>
+              </a:rPr>
+              <a:t>Does the file not give vt?</a:t>
+            </a:r>
+            <a:r>
+              <a:rPr sz="1700"/>
+              <a:t> Its Vinh/Vinl are the input </a:t>
+            </a:r>
+            <a:r>
+              <a:rPr sz="1700" b="1">
+                <a:solidFill>
+                  <a:srgbClr val="2B7A43"/>
+                </a:solidFill>
+              </a:rPr>
+              <a:t>pin's</a:t>
+            </a:r>
+            <a:r>
+              <a:rPr sz="1700"/>
+              <a:t> thresholds, and the converter does use those, for our input comparator. vt is an </a:t>
+            </a:r>
+            <a:r>
+              <a:rPr sz="1700" b="1">
+                <a:solidFill>
+                  <a:srgbClr val="2B7A43"/>
+                </a:solidFill>
+              </a:rPr>
+              <a:t>internal</a:t>
+            </a:r>
+            <a:r>
+              <a:rPr sz="1700"/>
+              <a:t> stage's threshold — the file never describes that node.</a:t>
+            </a:r>
+          </a:p>
+        </p:txBody>
+      </p:sp>
+      <p:pic>
+        <p:nvPicPr>
+          <p:cNvPr id="4" name="Picture 3" descr="four_table.png"/>
+          <p:cNvPicPr>
+            <a:picLocks noChangeAspect="1"/>
+          </p:cNvPicPr>
+          <p:nvPr/>
+        </p:nvPicPr>
+        <p:blipFill>
+          <a:blip r:embed="rId2"/>
+          <a:stretch>
+            <a:fillRect/>
+          </a:stretch>
+        </p:blipFill>
+        <p:spPr>
+          <a:xfrm>
+            <a:off x="411480" y="2880360"/>
+            <a:ext cx="11384280" cy="3203616"/>
+          </a:xfrm>
+          <a:prstGeom prst="rect">
+            <a:avLst/>
+          </a:prstGeom>
+        </p:spPr>
+      </p:pic>
+    </p:spTree>
+  </p:cSld>
+  <p:clrMapOvr>
+    <a:masterClrMapping/>
+  </p:clrMapOvr>
+</p:sld>
+</file>
+
+<file path=ppt/slides/slide16.xml><?xml version="1.0" encoding="utf-8"?>
 <p:sld xmlns:a="http://schemas.openxmlformats.org/drawingml/2006/main" xmlns:p="http://schemas.openxmlformats.org/presentationml/2006/main" xmlns:r="http://schemas.openxmlformats.org/officeDocument/2006/relationships">
   <p:cSld>
     <p:spTree>
@@ -5308,7 +5675,7 @@
 </p:sld>
 </file>
 
-<file path=ppt/slides/slide16.xml><?xml version="1.0" encoding="utf-8"?>
+<file path=ppt/slides/slide17.xml><?xml version="1.0" encoding="utf-8"?>
 <p:sld xmlns:a="http://schemas.openxmlformats.org/drawingml/2006/main" xmlns:p="http://schemas.openxmlformats.org/presentationml/2006/main" xmlns:r="http://schemas.openxmlformats.org/officeDocument/2006/relationships">
   <p:cSld>
     <p:spTree>
@@ -5422,7 +5789,7 @@
 </p:sld>
 </file>
 
-<file path=ppt/slides/slide17.xml><?xml version="1.0" encoding="utf-8"?>
+<file path=ppt/slides/slide18.xml><?xml version="1.0" encoding="utf-8"?>
 <p:sld xmlns:a="http://schemas.openxmlformats.org/drawingml/2006/main" xmlns:p="http://schemas.openxmlformats.org/presentationml/2006/main" xmlns:r="http://schemas.openxmlformats.org/officeDocument/2006/relationships">
   <p:cSld>
     <p:spTree>
@@ -5540,7 +5907,7 @@
 </p:sld>
 </file>
 
-<file path=ppt/slides/slide18.xml><?xml version="1.0" encoding="utf-8"?>
+<file path=ppt/slides/slide19.xml><?xml version="1.0" encoding="utf-8"?>
 <p:sld xmlns:a="http://schemas.openxmlformats.org/drawingml/2006/main" xmlns:p="http://schemas.openxmlformats.org/presentationml/2006/main" xmlns:r="http://schemas.openxmlformats.org/officeDocument/2006/relationships">
   <p:cSld>
     <p:spTree>
@@ -5655,139 +6022,6 @@
           <a:xfrm>
             <a:off x="2933551" y="3895344"/>
             <a:ext cx="6340137" cy="2624328"/>
-          </a:xfrm>
-          <a:prstGeom prst="rect">
-            <a:avLst/>
-          </a:prstGeom>
-        </p:spPr>
-      </p:pic>
-    </p:spTree>
-  </p:cSld>
-  <p:clrMapOvr>
-    <a:masterClrMapping/>
-  </p:clrMapOvr>
-</p:sld>
-</file>
-
-<file path=ppt/slides/slide19.xml><?xml version="1.0" encoding="utf-8"?>
-<p:sld xmlns:a="http://schemas.openxmlformats.org/drawingml/2006/main" xmlns:p="http://schemas.openxmlformats.org/presentationml/2006/main" xmlns:r="http://schemas.openxmlformats.org/officeDocument/2006/relationships">
-  <p:cSld>
-    <p:spTree>
-      <p:nvGrpSpPr>
-        <p:cNvPr id="1" name=""/>
-        <p:cNvGrpSpPr/>
-        <p:nvPr/>
-      </p:nvGrpSpPr>
-      <p:grpSpPr/>
-      <p:sp>
-        <p:nvSpPr>
-          <p:cNvPr id="2" name="Title 1"/>
-          <p:cNvSpPr>
-            <a:spLocks noGrp="1"/>
-          </p:cNvSpPr>
-          <p:nvPr>
-            <p:ph type="title"/>
-          </p:nvPr>
-        </p:nvSpPr>
-        <p:spPr/>
-        <p:txBody>
-          <a:bodyPr/>
-          <a:lstStyle/>
-          <a:p>
-            <a:r>
-              <a:t>14 · Recipe step 1 of 4 — fit the four numbers to the file's Ku(t)</a:t>
-            </a:r>
-          </a:p>
-        </p:txBody>
-      </p:sp>
-      <p:sp>
-        <p:nvSpPr>
-          <p:cNvPr id="3" name="Content Placeholder 2"/>
-          <p:cNvSpPr>
-            <a:spLocks noGrp="1"/>
-          </p:cNvSpPr>
-          <p:nvPr>
-            <p:ph idx="10"/>
-          </p:nvPr>
-        </p:nvSpPr>
-        <p:spPr>
-          <a:xfrm>
-            <a:off x="411480" y="987552"/>
-            <a:ext cx="11384280" cy="1929384"/>
-          </a:xfrm>
-        </p:spPr>
-        <p:txBody>
-          <a:bodyPr/>
-          <a:lstStyle/>
-          <a:p>
-            <a:pPr latinLnBrk="0">
-              <a:spcAft>
-                <a:spcPts val="400"/>
-              </a:spcAft>
-            </a:pPr>
-            <a:r>
-              <a:rPr sz="1800" b="1"/>
-              <a:t>The chain</a:t>
-            </a:r>
-            <a:r>
-              <a:rPr sz="1800"/>
-              <a:t> is the K stages above, in series. Its output is a gate; put that gate through the map and it becomes a Ku. The four numbers are searched until that Ku reproduces </a:t>
-            </a:r>
-            <a:r>
-              <a:rPr sz="1800" b="1"/>
-              <a:t>the file's own full-swing Ku(t)</a:t>
-            </a:r>
-            <a:r>
-              <a:rPr sz="1800"/>
-              <a:t> — the black curve. Nelder–Mead, three restarts.</a:t>
-            </a:r>
-          </a:p>
-          <a:p>
-            <a:pPr latinLnBrk="0">
-              <a:spcAft>
-                <a:spcPts val="400"/>
-              </a:spcAft>
-            </a:pPr>
-            <a:r>
-              <a:rPr sz="1800"/>
-              <a:t>Error 0.284 down to 0.0098, landing on s_up 2.59, s_dn 2.38, vt 0.51, x_lin 0.66.</a:t>
-            </a:r>
-          </a:p>
-          <a:p>
-            <a:pPr latinLnBrk="0">
-              <a:spcAft>
-                <a:spcPts val="400"/>
-              </a:spcAft>
-            </a:pPr>
-            <a:r>
-              <a:rPr sz="1800" b="1">
-                <a:solidFill>
-                  <a:srgbClr val="2B7A43"/>
-                </a:solidFill>
-              </a:rPr>
-              <a:t>No measurement is involved: the target is a curve the file already contains.</a:t>
-            </a:r>
-          </a:p>
-        </p:txBody>
-      </p:sp>
-      <p:pic>
-        <p:nvPicPr>
-          <p:cNvPr id="4" name="Picture 3" descr="fit_search.png"/>
-          <p:cNvPicPr>
-            <a:picLocks noChangeAspect="1"/>
-          </p:cNvPicPr>
-          <p:nvPr/>
-        </p:nvPicPr>
-        <p:blipFill>
-          <a:blip r:embed="rId2"/>
-          <a:stretch>
-            <a:fillRect/>
-          </a:stretch>
-        </p:blipFill>
-        <p:spPr>
-          <a:xfrm>
-            <a:off x="952914" y="2990088"/>
-            <a:ext cx="10301410" cy="3529584"/>
           </a:xfrm>
           <a:prstGeom prst="rect">
             <a:avLst/>
@@ -5942,6 +6176,139 @@
           <a:lstStyle/>
           <a:p>
             <a:r>
+              <a:t>14 · Recipe step 1 of 4 — fit the four numbers to the file's Ku(t)</a:t>
+            </a:r>
+          </a:p>
+        </p:txBody>
+      </p:sp>
+      <p:sp>
+        <p:nvSpPr>
+          <p:cNvPr id="3" name="Content Placeholder 2"/>
+          <p:cNvSpPr>
+            <a:spLocks noGrp="1"/>
+          </p:cNvSpPr>
+          <p:nvPr>
+            <p:ph idx="10"/>
+          </p:nvPr>
+        </p:nvSpPr>
+        <p:spPr>
+          <a:xfrm>
+            <a:off x="411480" y="987552"/>
+            <a:ext cx="11384280" cy="1929384"/>
+          </a:xfrm>
+        </p:spPr>
+        <p:txBody>
+          <a:bodyPr/>
+          <a:lstStyle/>
+          <a:p>
+            <a:pPr latinLnBrk="0">
+              <a:spcAft>
+                <a:spcPts val="400"/>
+              </a:spcAft>
+            </a:pPr>
+            <a:r>
+              <a:rPr sz="1800" b="1"/>
+              <a:t>The chain</a:t>
+            </a:r>
+            <a:r>
+              <a:rPr sz="1800"/>
+              <a:t> is the K stages above, in series. Its output is a gate; put that gate through the map and it becomes a Ku. The four numbers are searched until that Ku reproduces </a:t>
+            </a:r>
+            <a:r>
+              <a:rPr sz="1800" b="1"/>
+              <a:t>the file's own full-swing Ku(t)</a:t>
+            </a:r>
+            <a:r>
+              <a:rPr sz="1800"/>
+              <a:t> — the black curve. Nelder–Mead, three restarts.</a:t>
+            </a:r>
+          </a:p>
+          <a:p>
+            <a:pPr latinLnBrk="0">
+              <a:spcAft>
+                <a:spcPts val="400"/>
+              </a:spcAft>
+            </a:pPr>
+            <a:r>
+              <a:rPr sz="1800"/>
+              <a:t>Error 0.284 down to 0.0098, landing on s_up 2.59, s_dn 2.38, vt 0.51, x_lin 0.66.</a:t>
+            </a:r>
+          </a:p>
+          <a:p>
+            <a:pPr latinLnBrk="0">
+              <a:spcAft>
+                <a:spcPts val="400"/>
+              </a:spcAft>
+            </a:pPr>
+            <a:r>
+              <a:rPr sz="1800" b="1">
+                <a:solidFill>
+                  <a:srgbClr val="2B7A43"/>
+                </a:solidFill>
+              </a:rPr>
+              <a:t>No measurement is involved: the target is a curve the file already contains.</a:t>
+            </a:r>
+          </a:p>
+        </p:txBody>
+      </p:sp>
+      <p:pic>
+        <p:nvPicPr>
+          <p:cNvPr id="4" name="Picture 3" descr="fit_search.png"/>
+          <p:cNvPicPr>
+            <a:picLocks noChangeAspect="1"/>
+          </p:cNvPicPr>
+          <p:nvPr/>
+        </p:nvPicPr>
+        <p:blipFill>
+          <a:blip r:embed="rId2"/>
+          <a:stretch>
+            <a:fillRect/>
+          </a:stretch>
+        </p:blipFill>
+        <p:spPr>
+          <a:xfrm>
+            <a:off x="952914" y="2990088"/>
+            <a:ext cx="10301410" cy="3529584"/>
+          </a:xfrm>
+          <a:prstGeom prst="rect">
+            <a:avLst/>
+          </a:prstGeom>
+        </p:spPr>
+      </p:pic>
+    </p:spTree>
+  </p:cSld>
+  <p:clrMapOvr>
+    <a:masterClrMapping/>
+  </p:clrMapOvr>
+</p:sld>
+</file>
+
+<file path=ppt/slides/slide21.xml><?xml version="1.0" encoding="utf-8"?>
+<p:sld xmlns:a="http://schemas.openxmlformats.org/drawingml/2006/main" xmlns:p="http://schemas.openxmlformats.org/presentationml/2006/main" xmlns:r="http://schemas.openxmlformats.org/officeDocument/2006/relationships">
+  <p:cSld>
+    <p:spTree>
+      <p:nvGrpSpPr>
+        <p:cNvPr id="1" name=""/>
+        <p:cNvGrpSpPr/>
+        <p:nvPr/>
+      </p:nvGrpSpPr>
+      <p:grpSpPr/>
+      <p:sp>
+        <p:nvSpPr>
+          <p:cNvPr id="2" name="Title 1"/>
+          <p:cNvSpPr>
+            <a:spLocks noGrp="1"/>
+          </p:cNvSpPr>
+          <p:nvPr>
+            <p:ph type="title"/>
+          </p:nvPr>
+        </p:nvSpPr>
+        <p:spPr/>
+        <p:txBody>
+          <a:bodyPr/>
+          <a:lstStyle/>
+          <a:p>
+            <a:r>
               <a:t>15 · Recipe step 2 of 4 — enumerate what the file cannot choose</a:t>
             </a:r>
           </a:p>
@@ -6061,7 +6428,7 @@
 </p:sld>
 </file>
 
-<file path=ppt/slides/slide21.xml><?xml version="1.0" encoding="utf-8"?>
+<file path=ppt/slides/slide22.xml><?xml version="1.0" encoding="utf-8"?>
 <p:sld xmlns:a="http://schemas.openxmlformats.org/drawingml/2006/main" xmlns:p="http://schemas.openxmlformats.org/presentationml/2006/main" xmlns:r="http://schemas.openxmlformats.org/officeDocument/2006/relationships">
   <p:cSld>
     <p:spTree>
@@ -6187,7 +6554,7 @@
 </p:sld>
 </file>
 
-<file path=ppt/slides/slide22.xml><?xml version="1.0" encoding="utf-8"?>
+<file path=ppt/slides/slide23.xml><?xml version="1.0" encoding="utf-8"?>
 <p:sld xmlns:a="http://schemas.openxmlformats.org/drawingml/2006/main" xmlns:p="http://schemas.openxmlformats.org/presentationml/2006/main" xmlns:r="http://schemas.openxmlformats.org/officeDocument/2006/relationships">
   <p:cSld>
     <p:spTree>
@@ -6324,7 +6691,7 @@
 </p:sld>
 </file>
 
-<file path=ppt/slides/slide23.xml><?xml version="1.0" encoding="utf-8"?>
+<file path=ppt/slides/slide24.xml><?xml version="1.0" encoding="utf-8"?>
 <p:sld xmlns:a="http://schemas.openxmlformats.org/drawingml/2006/main" xmlns:p="http://schemas.openxmlformats.org/presentationml/2006/main" xmlns:r="http://schemas.openxmlformats.org/officeDocument/2006/relationships">
   <p:cSld>
     <p:spTree>
@@ -6472,7 +6839,7 @@
 </p:sld>
 </file>
 
-<file path=ppt/slides/slide24.xml><?xml version="1.0" encoding="utf-8"?>
+<file path=ppt/slides/slide25.xml><?xml version="1.0" encoding="utf-8"?>
 <p:sld xmlns:a="http://schemas.openxmlformats.org/drawingml/2006/main" xmlns:p="http://schemas.openxmlformats.org/presentationml/2006/main" xmlns:r="http://schemas.openxmlformats.org/officeDocument/2006/relationships">
   <p:cSld>
     <p:spTree>
@@ -6498,7 +6865,7 @@
           <a:lstStyle/>
           <a:p>
             <a:r>
-              <a:t>Result · the three on one bench, at the deepest pulse</a:t>
+              <a:t>Result · ex2</a:t>
             </a:r>
           </a:p>
         </p:txBody>
@@ -6516,7 +6883,7 @@
         <p:spPr>
           <a:xfrm>
             <a:off x="411480" y="987552"/>
-            <a:ext cx="11384280" cy="914400"/>
+            <a:ext cx="11384280" cy="1517904"/>
           </a:xfrm>
         </p:spPr>
         <p:txBody>
@@ -6530,7 +6897,15 @@
             </a:pPr>
             <a:r>
               <a:rPr sz="1800"/>
-              <a:t>Transistor in black, HSPICE native IBIS dotted, track 1 in teal. Same netlist, same stimulus, same load.</a:t>
+              <a:t>Transistor in black, HSPICE native IBIS dotted, track 1 in teal. Only the </a:t>
+            </a:r>
+            <a:r>
+              <a:rPr sz="1800" b="1"/>
+              <a:t>810 ps</a:t>
+            </a:r>
+            <a:r>
+              <a:rPr sz="1800"/>
+              <a:t> rung was measured; the other two are predictions.</a:t>
             </a:r>
           </a:p>
           <a:p>
@@ -6545,14 +6920,14 @@
                   <a:srgbClr val="2B7A43"/>
                 </a:solidFill>
               </a:rPr>
-              <a:t>Native IBIS is +71 %, +87 % and −20 % on the three buffers. Track 1 is −2 %, −4 % and +2 %.</a:t>
+              <a:t>Native IBIS collapses from +71 % to +1 % as the pulse lengthens. Track 1 holds −2, −7, −7 % — flat, and slightly shallow away from the rung it was calibrated on.</a:t>
             </a:r>
           </a:p>
         </p:txBody>
       </p:sp>
       <p:pic>
         <p:nvPicPr>
-          <p:cNvPr id="4" name="Picture 3" descr="three_way.png"/>
+          <p:cNvPr id="4" name="Picture 3" descr="result_ex2.png"/>
           <p:cNvPicPr>
             <a:picLocks noChangeAspect="1"/>
           </p:cNvPicPr>
@@ -6566,8 +6941,8 @@
         </p:blipFill>
         <p:spPr>
           <a:xfrm>
-            <a:off x="411480" y="1975104"/>
-            <a:ext cx="11384280" cy="3950629"/>
+            <a:off x="411480" y="2578608"/>
+            <a:ext cx="11384280" cy="3892601"/>
           </a:xfrm>
           <a:prstGeom prst="rect">
             <a:avLst/>
@@ -6582,7 +6957,243 @@
 </p:sld>
 </file>
 
-<file path=ppt/slides/slide25.xml><?xml version="1.0" encoding="utf-8"?>
+<file path=ppt/slides/slide26.xml><?xml version="1.0" encoding="utf-8"?>
+<p:sld xmlns:a="http://schemas.openxmlformats.org/drawingml/2006/main" xmlns:p="http://schemas.openxmlformats.org/presentationml/2006/main" xmlns:r="http://schemas.openxmlformats.org/officeDocument/2006/relationships">
+  <p:cSld>
+    <p:spTree>
+      <p:nvGrpSpPr>
+        <p:cNvPr id="1" name=""/>
+        <p:cNvGrpSpPr/>
+        <p:nvPr/>
+      </p:nvGrpSpPr>
+      <p:grpSpPr/>
+      <p:sp>
+        <p:nvSpPr>
+          <p:cNvPr id="2" name="Title 1"/>
+          <p:cNvSpPr>
+            <a:spLocks noGrp="1"/>
+          </p:cNvSpPr>
+          <p:nvPr>
+            <p:ph type="title"/>
+          </p:nvPr>
+        </p:nvSpPr>
+        <p:spPr/>
+        <p:txBody>
+          <a:bodyPr/>
+          <a:lstStyle/>
+          <a:p>
+            <a:r>
+              <a:t>Result · inv_chain</a:t>
+            </a:r>
+          </a:p>
+        </p:txBody>
+      </p:sp>
+      <p:sp>
+        <p:nvSpPr>
+          <p:cNvPr id="3" name="Content Placeholder 2"/>
+          <p:cNvSpPr>
+            <a:spLocks noGrp="1"/>
+          </p:cNvSpPr>
+          <p:nvPr>
+            <p:ph idx="10"/>
+          </p:nvPr>
+        </p:nvSpPr>
+        <p:spPr>
+          <a:xfrm>
+            <a:off x="411480" y="987552"/>
+            <a:ext cx="11384280" cy="1517904"/>
+          </a:xfrm>
+        </p:spPr>
+        <p:txBody>
+          <a:bodyPr/>
+          <a:lstStyle/>
+          <a:p>
+            <a:pPr latinLnBrk="0">
+              <a:spcAft>
+                <a:spcPts val="400"/>
+              </a:spcAft>
+            </a:pPr>
+            <a:r>
+              <a:rPr sz="1800"/>
+              <a:t>Transistor in black, HSPICE native IBIS dotted, track 1 in teal. Only the </a:t>
+            </a:r>
+            <a:r>
+              <a:rPr sz="1800" b="1"/>
+              <a:t>104 ps</a:t>
+            </a:r>
+            <a:r>
+              <a:rPr sz="1800"/>
+              <a:t> rung was measured; the other two are predictions.</a:t>
+            </a:r>
+          </a:p>
+          <a:p>
+            <a:pPr latinLnBrk="0">
+              <a:spcAft>
+                <a:spcPts val="400"/>
+              </a:spcAft>
+            </a:pPr>
+            <a:r>
+              <a:rPr sz="1800" b="1">
+                <a:solidFill>
+                  <a:srgbClr val="2B7A43"/>
+                </a:solidFill>
+              </a:rPr>
+              <a:t>Native IBIS runs +87 % at the deepest and +7 % at the mildest. Track 1 holds −4, +5, −1 % across the ladder.</a:t>
+            </a:r>
+          </a:p>
+        </p:txBody>
+      </p:sp>
+      <p:pic>
+        <p:nvPicPr>
+          <p:cNvPr id="4" name="Picture 3" descr="result_inv_chain.png"/>
+          <p:cNvPicPr>
+            <a:picLocks noChangeAspect="1"/>
+          </p:cNvPicPr>
+          <p:nvPr/>
+        </p:nvPicPr>
+        <p:blipFill>
+          <a:blip r:embed="rId2"/>
+          <a:stretch>
+            <a:fillRect/>
+          </a:stretch>
+        </p:blipFill>
+        <p:spPr>
+          <a:xfrm>
+            <a:off x="411480" y="2578608"/>
+            <a:ext cx="11384280" cy="3892601"/>
+          </a:xfrm>
+          <a:prstGeom prst="rect">
+            <a:avLst/>
+          </a:prstGeom>
+        </p:spPr>
+      </p:pic>
+    </p:spTree>
+  </p:cSld>
+  <p:clrMapOvr>
+    <a:masterClrMapping/>
+  </p:clrMapOvr>
+</p:sld>
+</file>
+
+<file path=ppt/slides/slide27.xml><?xml version="1.0" encoding="utf-8"?>
+<p:sld xmlns:a="http://schemas.openxmlformats.org/drawingml/2006/main" xmlns:p="http://schemas.openxmlformats.org/presentationml/2006/main" xmlns:r="http://schemas.openxmlformats.org/officeDocument/2006/relationships">
+  <p:cSld>
+    <p:spTree>
+      <p:nvGrpSpPr>
+        <p:cNvPr id="1" name=""/>
+        <p:cNvGrpSpPr/>
+        <p:nvPr/>
+      </p:nvGrpSpPr>
+      <p:grpSpPr/>
+      <p:sp>
+        <p:nvSpPr>
+          <p:cNvPr id="2" name="Title 1"/>
+          <p:cNvSpPr>
+            <a:spLocks noGrp="1"/>
+          </p:cNvSpPr>
+          <p:nvPr>
+            <p:ph type="title"/>
+          </p:nvPr>
+        </p:nvSpPr>
+        <p:spPr/>
+        <p:txBody>
+          <a:bodyPr/>
+          <a:lstStyle/>
+          <a:p>
+            <a:r>
+              <a:t>Result · io_buf</a:t>
+            </a:r>
+          </a:p>
+        </p:txBody>
+      </p:sp>
+      <p:sp>
+        <p:nvSpPr>
+          <p:cNvPr id="3" name="Content Placeholder 2"/>
+          <p:cNvSpPr>
+            <a:spLocks noGrp="1"/>
+          </p:cNvSpPr>
+          <p:nvPr>
+            <p:ph idx="10"/>
+          </p:nvPr>
+        </p:nvSpPr>
+        <p:spPr>
+          <a:xfrm>
+            <a:off x="411480" y="987552"/>
+            <a:ext cx="11384280" cy="1517904"/>
+          </a:xfrm>
+        </p:spPr>
+        <p:txBody>
+          <a:bodyPr/>
+          <a:lstStyle/>
+          <a:p>
+            <a:pPr latinLnBrk="0">
+              <a:spcAft>
+                <a:spcPts val="400"/>
+              </a:spcAft>
+            </a:pPr>
+            <a:r>
+              <a:rPr sz="1800"/>
+              <a:t>Transistor in black, HSPICE native IBIS dotted, track 1 in teal. Only the </a:t>
+            </a:r>
+            <a:r>
+              <a:rPr sz="1800" b="1"/>
+              <a:t>1505 ps</a:t>
+            </a:r>
+            <a:r>
+              <a:rPr sz="1800"/>
+              <a:t> rung was measured; the other two are predictions.</a:t>
+            </a:r>
+          </a:p>
+          <a:p>
+            <a:pPr latinLnBrk="0">
+              <a:spcAft>
+                <a:spcPts val="400"/>
+              </a:spcAft>
+            </a:pPr>
+            <a:r>
+              <a:rPr sz="1800" b="1">
+                <a:solidFill>
+                  <a:srgbClr val="2B7A43"/>
+                </a:solidFill>
+              </a:rPr>
+              <a:t>io_buf's ladder is shallower — 37 % is as deep as its pulse goes, and native is only −20 % there. Track 1 is +2, +7, +5 %.</a:t>
+            </a:r>
+          </a:p>
+        </p:txBody>
+      </p:sp>
+      <p:pic>
+        <p:nvPicPr>
+          <p:cNvPr id="4" name="Picture 3" descr="result_io_buf.png"/>
+          <p:cNvPicPr>
+            <a:picLocks noChangeAspect="1"/>
+          </p:cNvPicPr>
+          <p:nvPr/>
+        </p:nvPicPr>
+        <p:blipFill>
+          <a:blip r:embed="rId2"/>
+          <a:stretch>
+            <a:fillRect/>
+          </a:stretch>
+        </p:blipFill>
+        <p:spPr>
+          <a:xfrm>
+            <a:off x="411480" y="2578608"/>
+            <a:ext cx="11384280" cy="3892601"/>
+          </a:xfrm>
+          <a:prstGeom prst="rect">
+            <a:avLst/>
+          </a:prstGeom>
+        </p:spPr>
+      </p:pic>
+    </p:spTree>
+  </p:cSld>
+  <p:clrMapOvr>
+    <a:masterClrMapping/>
+  </p:clrMapOvr>
+</p:sld>
+</file>
+
+<file path=ppt/slides/slide28.xml><?xml version="1.0" encoding="utf-8"?>
 <p:sld xmlns:a="http://schemas.openxmlformats.org/drawingml/2006/main" xmlns:p="http://schemas.openxmlformats.org/presentationml/2006/main" xmlns:r="http://schemas.openxmlformats.org/officeDocument/2006/relationships">
   <p:cSld>
     <p:spTree>
@@ -6719,7 +7330,7 @@
 </p:sld>
 </file>
 
-<file path=ppt/slides/slide26.xml><?xml version="1.0" encoding="utf-8"?>
+<file path=ppt/slides/slide29.xml><?xml version="1.0" encoding="utf-8"?>
 <p:sld xmlns:a="http://schemas.openxmlformats.org/drawingml/2006/main" xmlns:p="http://schemas.openxmlformats.org/presentationml/2006/main" xmlns:r="http://schemas.openxmlformats.org/officeDocument/2006/relationships">
   <p:cSld>
     <p:spTree>
@@ -6867,7 +7478,121 @@
 </p:sld>
 </file>
 
-<file path=ppt/slides/slide27.xml><?xml version="1.0" encoding="utf-8"?>
+<file path=ppt/slides/slide3.xml><?xml version="1.0" encoding="utf-8"?>
+<p:sld xmlns:a="http://schemas.openxmlformats.org/drawingml/2006/main" xmlns:p="http://schemas.openxmlformats.org/presentationml/2006/main" xmlns:r="http://schemas.openxmlformats.org/officeDocument/2006/relationships">
+  <p:cSld>
+    <p:spTree>
+      <p:nvGrpSpPr>
+        <p:cNvPr id="1" name=""/>
+        <p:cNvGrpSpPr/>
+        <p:nvPr/>
+      </p:nvGrpSpPr>
+      <p:grpSpPr/>
+      <p:sp>
+        <p:nvSpPr>
+          <p:cNvPr id="2" name="Title 1"/>
+          <p:cNvSpPr>
+            <a:spLocks noGrp="1"/>
+          </p:cNvSpPr>
+          <p:nvPr>
+            <p:ph type="title"/>
+          </p:nvPr>
+        </p:nvSpPr>
+        <p:spPr/>
+        <p:txBody>
+          <a:bodyPr/>
+          <a:lstStyle/>
+          <a:p>
+            <a:r>
+              <a:t>2 · Measuring the map: pair Ku(t) with the gate, instant by instant</a:t>
+            </a:r>
+          </a:p>
+        </p:txBody>
+      </p:sp>
+      <p:sp>
+        <p:nvSpPr>
+          <p:cNvPr id="3" name="Content Placeholder 2"/>
+          <p:cNvSpPr>
+            <a:spLocks noGrp="1"/>
+          </p:cNvSpPr>
+          <p:nvPr>
+            <p:ph idx="10"/>
+          </p:nvPr>
+        </p:nvSpPr>
+        <p:spPr>
+          <a:xfrm>
+            <a:off x="411480" y="987552"/>
+            <a:ext cx="11384280" cy="1216152"/>
+          </a:xfrm>
+        </p:spPr>
+        <p:txBody>
+          <a:bodyPr/>
+          <a:lstStyle/>
+          <a:p>
+            <a:pPr latinLnBrk="0">
+              <a:spcAft>
+                <a:spcPts val="400"/>
+              </a:spcAft>
+            </a:pPr>
+            <a:r>
+              <a:rPr sz="1800"/>
+              <a:t>The IBIS file gives Ku(t) on one full transition. The probe gives the gate on the same run. At each instant we have both numbers — so plot one against the other.</a:t>
+            </a:r>
+          </a:p>
+          <a:p>
+            <a:pPr latinLnBrk="0">
+              <a:spcAft>
+                <a:spcPts val="400"/>
+              </a:spcAft>
+            </a:pPr>
+            <a:r>
+              <a:rPr sz="1800" b="1">
+                <a:solidFill>
+                  <a:srgbClr val="2B7A43"/>
+                </a:solidFill>
+              </a:rPr>
+              <a:t>The pairing is the map.</a:t>
+            </a:r>
+            <a:r>
+              <a:rPr sz="1800"/>
+              <a:t> No fitting: it is read off a single full-swing run.</a:t>
+            </a:r>
+          </a:p>
+        </p:txBody>
+      </p:sp>
+      <p:pic>
+        <p:nvPicPr>
+          <p:cNvPr id="4" name="Picture 3" descr="map_from_probe_ex2.png"/>
+          <p:cNvPicPr>
+            <a:picLocks noChangeAspect="1"/>
+          </p:cNvPicPr>
+          <p:nvPr/>
+        </p:nvPicPr>
+        <p:blipFill>
+          <a:blip r:embed="rId2"/>
+          <a:stretch>
+            <a:fillRect/>
+          </a:stretch>
+        </p:blipFill>
+        <p:spPr>
+          <a:xfrm>
+            <a:off x="411480" y="2276856"/>
+            <a:ext cx="11384280" cy="4029790"/>
+          </a:xfrm>
+          <a:prstGeom prst="rect">
+            <a:avLst/>
+          </a:prstGeom>
+        </p:spPr>
+      </p:pic>
+    </p:spTree>
+  </p:cSld>
+  <p:clrMapOvr>
+    <a:masterClrMapping/>
+  </p:clrMapOvr>
+</p:sld>
+</file>
+
+<file path=ppt/slides/slide30.xml><?xml version="1.0" encoding="utf-8"?>
 <p:sld xmlns:a="http://schemas.openxmlformats.org/drawingml/2006/main" xmlns:p="http://schemas.openxmlformats.org/presentationml/2006/main" xmlns:r="http://schemas.openxmlformats.org/officeDocument/2006/relationships">
   <p:cSld>
     <p:spTree>
@@ -6981,7 +7706,7 @@
 </p:sld>
 </file>
 
-<file path=ppt/slides/slide28.xml><?xml version="1.0" encoding="utf-8"?>
+<file path=ppt/slides/slide31.xml><?xml version="1.0" encoding="utf-8"?>
 <p:sld xmlns:a="http://schemas.openxmlformats.org/drawingml/2006/main" xmlns:p="http://schemas.openxmlformats.org/presentationml/2006/main" xmlns:r="http://schemas.openxmlformats.org/officeDocument/2006/relationships">
   <p:cSld>
     <p:spTree>
@@ -7091,7 +7816,7 @@
 </p:sld>
 </file>
 
-<file path=ppt/slides/slide29.xml><?xml version="1.0" encoding="utf-8"?>
+<file path=ppt/slides/slide32.xml><?xml version="1.0" encoding="utf-8"?>
 <p:sld xmlns:a="http://schemas.openxmlformats.org/drawingml/2006/main" xmlns:p="http://schemas.openxmlformats.org/presentationml/2006/main" xmlns:r="http://schemas.openxmlformats.org/officeDocument/2006/relationships">
   <p:cSld>
     <p:spTree>
@@ -7202,120 +7927,6 @@
           <a:xfrm>
             <a:off x="2085298" y="3291840"/>
             <a:ext cx="8036642" cy="3227832"/>
-          </a:xfrm>
-          <a:prstGeom prst="rect">
-            <a:avLst/>
-          </a:prstGeom>
-        </p:spPr>
-      </p:pic>
-    </p:spTree>
-  </p:cSld>
-  <p:clrMapOvr>
-    <a:masterClrMapping/>
-  </p:clrMapOvr>
-</p:sld>
-</file>
-
-<file path=ppt/slides/slide3.xml><?xml version="1.0" encoding="utf-8"?>
-<p:sld xmlns:a="http://schemas.openxmlformats.org/drawingml/2006/main" xmlns:p="http://schemas.openxmlformats.org/presentationml/2006/main" xmlns:r="http://schemas.openxmlformats.org/officeDocument/2006/relationships">
-  <p:cSld>
-    <p:spTree>
-      <p:nvGrpSpPr>
-        <p:cNvPr id="1" name=""/>
-        <p:cNvGrpSpPr/>
-        <p:nvPr/>
-      </p:nvGrpSpPr>
-      <p:grpSpPr/>
-      <p:sp>
-        <p:nvSpPr>
-          <p:cNvPr id="2" name="Title 1"/>
-          <p:cNvSpPr>
-            <a:spLocks noGrp="1"/>
-          </p:cNvSpPr>
-          <p:nvPr>
-            <p:ph type="title"/>
-          </p:nvPr>
-        </p:nvSpPr>
-        <p:spPr/>
-        <p:txBody>
-          <a:bodyPr/>
-          <a:lstStyle/>
-          <a:p>
-            <a:r>
-              <a:t>2 · Measuring the map: pair Ku(t) with the gate, instant by instant</a:t>
-            </a:r>
-          </a:p>
-        </p:txBody>
-      </p:sp>
-      <p:sp>
-        <p:nvSpPr>
-          <p:cNvPr id="3" name="Content Placeholder 2"/>
-          <p:cNvSpPr>
-            <a:spLocks noGrp="1"/>
-          </p:cNvSpPr>
-          <p:nvPr>
-            <p:ph idx="10"/>
-          </p:nvPr>
-        </p:nvSpPr>
-        <p:spPr>
-          <a:xfrm>
-            <a:off x="411480" y="987552"/>
-            <a:ext cx="11384280" cy="1216152"/>
-          </a:xfrm>
-        </p:spPr>
-        <p:txBody>
-          <a:bodyPr/>
-          <a:lstStyle/>
-          <a:p>
-            <a:pPr latinLnBrk="0">
-              <a:spcAft>
-                <a:spcPts val="400"/>
-              </a:spcAft>
-            </a:pPr>
-            <a:r>
-              <a:rPr sz="1800"/>
-              <a:t>The IBIS file gives Ku(t) on one full transition. The probe gives the gate on the same run. At each instant we have both numbers — so plot one against the other.</a:t>
-            </a:r>
-          </a:p>
-          <a:p>
-            <a:pPr latinLnBrk="0">
-              <a:spcAft>
-                <a:spcPts val="400"/>
-              </a:spcAft>
-            </a:pPr>
-            <a:r>
-              <a:rPr sz="1800" b="1">
-                <a:solidFill>
-                  <a:srgbClr val="2B7A43"/>
-                </a:solidFill>
-              </a:rPr>
-              <a:t>The pairing is the map.</a:t>
-            </a:r>
-            <a:r>
-              <a:rPr sz="1800"/>
-              <a:t> No fitting: it is read off a single full-swing run.</a:t>
-            </a:r>
-          </a:p>
-        </p:txBody>
-      </p:sp>
-      <p:pic>
-        <p:nvPicPr>
-          <p:cNvPr id="4" name="Picture 3" descr="map_from_probe_ex2.png"/>
-          <p:cNvPicPr>
-            <a:picLocks noChangeAspect="1"/>
-          </p:cNvPicPr>
-          <p:nvPr/>
-        </p:nvPicPr>
-        <p:blipFill>
-          <a:blip r:embed="rId2"/>
-          <a:stretch>
-            <a:fillRect/>
-          </a:stretch>
-        </p:blipFill>
-        <p:spPr>
-          <a:xfrm>
-            <a:off x="411480" y="2276856"/>
-            <a:ext cx="11384280" cy="4029790"/>
           </a:xfrm>
           <a:prstGeom prst="rect">
             <a:avLst/>

--- a/results/meeting_deck_2026-09-24/0924_track1_story.pptx
+++ b/results/meeting_deck_2026-09-24/0924_track1_story.pptx
@@ -40,6 +40,8 @@
     <p:sldId id="285" r:id="rId38"/>
     <p:sldId id="286" r:id="rId39"/>
     <p:sldId id="287" r:id="rId40"/>
+    <p:sldId id="288" r:id="rId41"/>
+    <p:sldId id="289" r:id="rId42"/>
   </p:sldIdLst>
   <p:sldSz cx="12192000" cy="6858000"/>
   <p:notesSz cx="6858000" cy="9144000"/>
@@ -901,7 +903,7 @@
           <a:lstStyle/>
           <a:p>
             <a:r>
-              <a:t>u is the stage's input, v its output, both on their own 0-to-1 swing. The minus term is the same three factors mirrored for the discharge.</a:t>
+              <a:t>Leventhal &amp; Green, Semiconductor Modeling, section 3.8 printed page 89 (pdf 105): the SPICE Level 1 / Shichman-Hodges equations 3-23 to 3-25. Note the naming trap: a MOSFET's SATURATION region is its constant-current one, the opposite sense to a BJT (the book makes the same point on p.63).</a:t>
             </a:r>
           </a:p>
         </p:txBody>
@@ -971,7 +973,7 @@
           <a:lstStyle/>
           <a:p>
             <a:r>
-              <a:t>On inv_chain the file's Vinh is 2.0 V on a 1.8 V part, which is why the converter guards it - the backup slide. p is assumed 1 because it is invisible at full swing: every p from 1 to 2 fits to rms 0.002-0.007.</a:t>
+              <a:t>Why p = 1: it is not a claim about the device, it is an admission that the file cannot see p - every value from 1 to 2 fits the full-swing Ku(t) to rms 0.002-0.007. Why the straight line: it keeps the stage law solvable in one expression, and the stressed pulse turns round before the gate is deep into this region on most buffers.</a:t>
             </a:r>
           </a:p>
         </p:txBody>
@@ -1041,7 +1043,7 @@
           <a:lstStyle/>
           <a:p>
             <a:r>
-              <a:t>Simulated with the project's own stage model from the fitted values the 09-17 film exported.</a:t>
+              <a:t>The honest summary: the backbone and the threshold come from the book, the exponent is ours by necessity, the taper and the chain are ours by choice.</a:t>
             </a:r>
           </a:p>
         </p:txBody>
@@ -1111,7 +1113,7 @@
           <a:lstStyle/>
           <a:p>
             <a:r>
-              <a:t>est_knee fit, ex2 pull-up: K=1 rms 0.0920, K=2 0.0360, K=3 0.0233, best (K=6) 0.0202. The real predriver is a chain too - ex2's schematic showed three inverters - but this is the file saying so on its own.</a:t>
+              <a:t>On inv_chain the file's Vinh is 2.0 V on a 1.8 V part, which is why the converter guards it - the backup slide. p is assumed 1 because it is invisible at full swing: every p from 1 to 2 fits to rms 0.002-0.007.</a:t>
             </a:r>
           </a:p>
         </p:txBody>
@@ -1181,7 +1183,7 @@
           <a:lstStyle/>
           <a:p>
             <a:r>
-              <a:t>Degenerate: a free fit splits the delay into one sluggish stage plus one quick one, reproduces the full swing slightly better, and predicts a stressed gate of 0.23 against a measured 0.76.</a:t>
+              <a:t>Simulated with the project's own stage model from the fitted values the 09-17 film exported.</a:t>
             </a:r>
           </a:p>
         </p:txBody>
@@ -1251,7 +1253,7 @@
           <a:lstStyle/>
           <a:p>
             <a:r>
-              <a:t>C_comp is not a model parameter: it is a number the file's own Ku tables were solved with, so a wrong value inflates the curve everything downstream is fitted to.</a:t>
+              <a:t>est_knee fit, ex2 pull-up: K=1 rms 0.0920, K=2 0.0360, K=3 0.0233, best (K=6) 0.0202. The real predriver is a chain too - ex2's schematic showed three inverters - but this is the file saying so on its own.</a:t>
             </a:r>
           </a:p>
         </p:txBody>
@@ -1391,7 +1393,7 @@
           <a:lstStyle/>
           <a:p>
             <a:r>
-              <a:t>Every trial the optimiser actually took, exported live by the 09-17 film. What it does NOT give us is K, or the map's shape.</a:t>
+              <a:t>Degenerate: a free fit splits the delay into one sluggish stage plus one quick one, reproduces the full swing slightly better, and predicts a stressed gate of 0.23 against a measured 0.76.</a:t>
             </a:r>
           </a:p>
         </p:txBody>
@@ -1461,7 +1463,7 @@
           <a:lstStyle/>
           <a:p>
             <a:r>
-              <a:t>The three shapes are (0.50, 0.70), (0.40, 0.60) and (0.40, 0.90). Note on the right that all three already match the peak - that is the calibration, and it is why the peak cannot be what chooses.</a:t>
+              <a:t>C_comp is not a model parameter: it is a number the file's own Ku tables were solved with, so a wrong value inflates the curve everything downstream is fitted to.</a:t>
             </a:r>
           </a:p>
         </p:txBody>
@@ -1531,7 +1533,7 @@
           <a:lstStyle/>
           <a:p>
             <a:r>
-              <a:t>Every iteration the calibration actually wrote, recovered from the netlists it emitted. The vt here is the film's ex2 case; the deck's own K = 3 build lands on 0.632 from a different starting fit.</a:t>
+              <a:t>Every trial the optimiser actually took, exported live by the 09-17 film. What it does NOT give us is K, or the map's shape.</a:t>
             </a:r>
           </a:p>
         </p:txBody>
@@ -1601,7 +1603,7 @@
           <a:lstStyle/>
           <a:p>
             <a:r>
-              <a:t>Ranking on the peak instead picks a chain that arrives up to 300 ps late with four times the waveform error. The nine waveforms themselves are the backup slide.</a:t>
+              <a:t>The three shapes are (0.50, 0.70), (0.40, 0.60) and (0.40, 0.90). Note on the right that all three already match the peak - that is the calibration, and it is why the peak cannot be what chooses.</a:t>
             </a:r>
           </a:p>
         </p:txBody>
@@ -1671,7 +1673,7 @@
           <a:lstStyle/>
           <a:p>
             <a:r>
-              <a:t>The same block diagram as the chain slide, with the recipe attached. This is the slide to leave up during questions.</a:t>
+              <a:t>Every iteration the calibration actually wrote, recovered from the netlists it emitted. The vt here is the film's ex2 case; the deck's own K = 3 build lands on 0.632 from a different starting fit.</a:t>
             </a:r>
           </a:p>
         </p:txBody>
@@ -1741,7 +1743,7 @@
           <a:lstStyle/>
           <a:p>
             <a:r>
-              <a:t>Native from the delay_cmd waveform set, track 1 from the selector's pick for ex2. The calibration used the deepest rung only, so the milder two are out-of-sample.</a:t>
+              <a:t>Ranking on the peak instead picks a chain that arrives up to 300 ps late with four times the waveform error. The nine waveforms themselves are the backup slide.</a:t>
             </a:r>
           </a:p>
         </p:txBody>
@@ -1811,7 +1813,7 @@
           <a:lstStyle/>
           <a:p>
             <a:r>
-              <a:t>Native from the delay_cmd waveform set, track 1 from the selector's pick for inv_chain. The calibration used the deepest rung only, so the milder two are out-of-sample.</a:t>
+              <a:t>The same block diagram as the chain slide, with the recipe attached. This is the slide to leave up during questions.</a:t>
             </a:r>
           </a:p>
         </p:txBody>
@@ -1881,7 +1883,7 @@
           <a:lstStyle/>
           <a:p>
             <a:r>
-              <a:t>Native from the delay_cmd waveform set, track 1 from the selector's pick for io_buf. The calibration used the deepest rung only, so the milder two are out-of-sample.</a:t>
+              <a:t>Native from the delay_cmd waveform set, track 1 from the selector's pick for ex2. The calibration used the deepest rung only, so the milder two are out-of-sample.</a:t>
             </a:r>
           </a:p>
         </p:txBody>
@@ -1951,7 +1953,7 @@
           <a:lstStyle/>
           <a:p>
             <a:r>
-              <a:t>Native from gate_cascade_prototype_2026-09-09 sweeps, track 1 from selector_from_one_run_2026-09-23. Same five widths per buffer in both. The tr1ps death is documented in docs/native_vt_waveform_modes.md.</a:t>
+              <a:t>Native from the delay_cmd waveform set, track 1 from the selector's pick for inv_chain. The calibration used the deepest rung only, so the milder two are out-of-sample.</a:t>
             </a:r>
           </a:p>
         </p:txBody>
@@ -2021,7 +2023,7 @@
           <a:lstStyle/>
           <a:p>
             <a:r>
-              <a:t>Better said than asked. The direction gap is the one that would most change the headline number.</a:t>
+              <a:t>Native from the delay_cmd waveform set, track 1 from the selector's pick for io_buf. The calibration used the deepest rung only, so the milder two are out-of-sample.</a:t>
             </a:r>
           </a:p>
         </p:txBody>
@@ -2161,7 +2163,7 @@
           <a:lstStyle/>
           <a:p>
             <a:r>
-              <a:t>Moved out of the main line: this audience knows where Ku comes from.</a:t>
+              <a:t>Native from gate_cascade_prototype_2026-09-09 sweeps, track 1 from selector_from_one_run_2026-09-23. Same five widths per buffer in both. The tr1ps death is documented in docs/native_vt_waveform_modes.md.</a:t>
             </a:r>
           </a:p>
         </p:txBody>
@@ -2231,7 +2233,7 @@
           <a:lstStyle/>
           <a:p>
             <a:r>
-              <a:t>This was the main slide before; the ranking says the same thing more directly.</a:t>
+              <a:t>Better said than asked. The direction gap is the one that would most change the headline number.</a:t>
             </a:r>
           </a:p>
         </p:txBody>
@@ -2257,6 +2259,146 @@
 </file>
 
 <file path=ppt/notesSlides/notesSlide32.xml><?xml version="1.0" encoding="utf-8"?>
+<p:notes xmlns:a="http://schemas.openxmlformats.org/drawingml/2006/main" xmlns:p="http://schemas.openxmlformats.org/presentationml/2006/main" xmlns:r="http://schemas.openxmlformats.org/officeDocument/2006/relationships">
+  <p:cSld>
+    <p:spTree>
+      <p:nvGrpSpPr>
+        <p:cNvPr id="1" name=""/>
+        <p:cNvGrpSpPr/>
+        <p:nvPr/>
+      </p:nvGrpSpPr>
+      <p:grpSpPr>
+        <a:xfrm>
+          <a:off x="0" y="0"/>
+          <a:ext cx="0" cy="0"/>
+          <a:chOff x="0" y="0"/>
+          <a:chExt cx="0" cy="0"/>
+        </a:xfrm>
+      </p:grpSpPr>
+      <p:sp>
+        <p:nvSpPr>
+          <p:cNvPr id="2" name="Slide Image Placeholder 1"/>
+          <p:cNvSpPr>
+            <a:spLocks noGrp="1"/>
+          </p:cNvSpPr>
+          <p:nvPr>
+            <p:ph type="sldImg" idx="2"/>
+          </p:nvPr>
+        </p:nvSpPr>
+        <p:spPr/>
+      </p:sp>
+      <p:sp>
+        <p:nvSpPr>
+          <p:cNvPr id="3" name="Notes Placeholder 2"/>
+          <p:cNvSpPr>
+            <a:spLocks noGrp="1"/>
+          </p:cNvSpPr>
+          <p:nvPr>
+            <p:ph type="body" idx="3" sz="quarter"/>
+          </p:nvPr>
+        </p:nvSpPr>
+        <p:spPr/>
+        <p:txBody>
+          <a:bodyPr/>
+          <a:lstStyle/>
+          <a:p>
+            <a:r>
+              <a:t>Moved out of the main line: this audience knows where Ku comes from.</a:t>
+            </a:r>
+          </a:p>
+        </p:txBody>
+      </p:sp>
+      <p:sp>
+        <p:nvSpPr>
+          <p:cNvPr id="4" name="Slide Number Placeholder 3"/>
+          <p:cNvSpPr>
+            <a:spLocks noGrp="1"/>
+          </p:cNvSpPr>
+          <p:nvPr>
+            <p:ph type="sldNum" idx="5" sz="quarter"/>
+          </p:nvPr>
+        </p:nvSpPr>
+        <p:spPr/>
+      </p:sp>
+    </p:spTree>
+  </p:cSld>
+  <p:clrMapOvr>
+    <a:masterClrMapping/>
+  </p:clrMapOvr>
+</p:notes>
+</file>
+
+<file path=ppt/notesSlides/notesSlide33.xml><?xml version="1.0" encoding="utf-8"?>
+<p:notes xmlns:a="http://schemas.openxmlformats.org/drawingml/2006/main" xmlns:p="http://schemas.openxmlformats.org/presentationml/2006/main" xmlns:r="http://schemas.openxmlformats.org/officeDocument/2006/relationships">
+  <p:cSld>
+    <p:spTree>
+      <p:nvGrpSpPr>
+        <p:cNvPr id="1" name=""/>
+        <p:cNvGrpSpPr/>
+        <p:nvPr/>
+      </p:nvGrpSpPr>
+      <p:grpSpPr>
+        <a:xfrm>
+          <a:off x="0" y="0"/>
+          <a:ext cx="0" cy="0"/>
+          <a:chOff x="0" y="0"/>
+          <a:chExt cx="0" cy="0"/>
+        </a:xfrm>
+      </p:grpSpPr>
+      <p:sp>
+        <p:nvSpPr>
+          <p:cNvPr id="2" name="Slide Image Placeholder 1"/>
+          <p:cNvSpPr>
+            <a:spLocks noGrp="1"/>
+          </p:cNvSpPr>
+          <p:nvPr>
+            <p:ph type="sldImg" idx="2"/>
+          </p:nvPr>
+        </p:nvSpPr>
+        <p:spPr/>
+      </p:sp>
+      <p:sp>
+        <p:nvSpPr>
+          <p:cNvPr id="3" name="Notes Placeholder 2"/>
+          <p:cNvSpPr>
+            <a:spLocks noGrp="1"/>
+          </p:cNvSpPr>
+          <p:nvPr>
+            <p:ph type="body" idx="3" sz="quarter"/>
+          </p:nvPr>
+        </p:nvSpPr>
+        <p:spPr/>
+        <p:txBody>
+          <a:bodyPr/>
+          <a:lstStyle/>
+          <a:p>
+            <a:r>
+              <a:t>This was the main slide before; the ranking says the same thing more directly.</a:t>
+            </a:r>
+          </a:p>
+        </p:txBody>
+      </p:sp>
+      <p:sp>
+        <p:nvSpPr>
+          <p:cNvPr id="4" name="Slide Number Placeholder 3"/>
+          <p:cNvSpPr>
+            <a:spLocks noGrp="1"/>
+          </p:cNvSpPr>
+          <p:nvPr>
+            <p:ph type="sldNum" idx="5" sz="quarter"/>
+          </p:nvPr>
+        </p:nvSpPr>
+        <p:spPr/>
+      </p:sp>
+    </p:spTree>
+  </p:cSld>
+  <p:clrMapOvr>
+    <a:masterClrMapping/>
+  </p:clrMapOvr>
+</p:notes>
+</file>
+
+<file path=ppt/notesSlides/notesSlide34.xml><?xml version="1.0" encoding="utf-8"?>
 <p:notes xmlns:a="http://schemas.openxmlformats.org/drawingml/2006/main" xmlns:p="http://schemas.openxmlformats.org/presentationml/2006/main" xmlns:r="http://schemas.openxmlformats.org/officeDocument/2006/relationships">
   <p:cSld>
     <p:spTree>
@@ -5236,7 +5378,7 @@
             </a:r>
             <a:r>
               <a:rPr sz="1800"/>
-              <a:t> That ramp is the backbone of the law; the next slide adds the two things that modulate it.</a:t>
+              <a:t> That ramp is the backbone of the law. The next slide is where it, and the two things that modulate it, come from.</a:t>
             </a:r>
           </a:p>
         </p:txBody>
@@ -5299,7 +5441,7 @@
           <a:lstStyle/>
           <a:p>
             <a:r>
-              <a:t>10 · The law, symbol by symbol</a:t>
+              <a:t>10 · What one MOSFET actually does</a:t>
             </a:r>
           </a:p>
         </p:txBody>
@@ -5317,7 +5459,7 @@
         <p:spPr>
           <a:xfrm>
             <a:off x="411480" y="987552"/>
-            <a:ext cx="11384280" cy="1216152"/>
+            <a:ext cx="11384280" cy="1819656"/>
           </a:xfrm>
         </p:spPr>
         <p:txBody>
@@ -5330,8 +5472,32 @@
               </a:spcAft>
             </a:pPr>
             <a:r>
-              <a:rPr sz="1800"/>
-              <a:t>That ramp, times the two things that modulate it. Each symbol below is one picture.</a:t>
+              <a:rPr sz="1700"/>
+              <a:t>A transistor has three regimes, and the book writes an equation for each. </a:t>
+            </a:r>
+            <a:r>
+              <a:rPr sz="1700" b="1"/>
+              <a:t>Below threshold</a:t>
+            </a:r>
+            <a:r>
+              <a:rPr sz="1700"/>
+              <a:t> it passes nothing. </a:t>
+            </a:r>
+            <a:r>
+              <a:rPr sz="1700" b="1"/>
+              <a:t>Saturated</a:t>
+            </a:r>
+            <a:r>
+              <a:rPr sz="1700"/>
+              <a:t> — which here means a large voltage across it — the current stops depending on that voltage. </a:t>
+            </a:r>
+            <a:r>
+              <a:rPr sz="1700" b="1"/>
+              <a:t>In triode</a:t>
+            </a:r>
+            <a:r>
+              <a:rPr sz="1700"/>
+              <a:t>, close to the rail, it is a resistor again.</a:t>
             </a:r>
           </a:p>
           <a:p>
@@ -5341,47 +5507,19 @@
               </a:spcAft>
             </a:pPr>
             <a:r>
-              <a:rPr sz="1800" b="1">
+              <a:rPr sz="1700" b="1">
                 <a:solidFill>
                   <a:srgbClr val="2B7A43"/>
                 </a:solidFill>
               </a:rPr>
-              <a:t>dv/dt is a slope, not a current</a:t>
-            </a:r>
-            <a:r>
-              <a:rPr sz="1800"/>
-              <a:t> — v runs 0 at rest to 1 at full swing, so it is swings per nanosecond. </a:t>
-            </a:r>
-            <a:r>
-              <a:rPr sz="1800" b="1">
-                <a:solidFill>
-                  <a:srgbClr val="2B7A43"/>
-                </a:solidFill>
-              </a:rPr>
-              <a:t>h(u)</a:t>
-            </a:r>
-            <a:r>
-              <a:rPr sz="1800"/>
-              <a:t> is the </a:t>
-            </a:r>
-            <a:r>
-              <a:rPr sz="1800" b="1">
-                <a:solidFill>
-                  <a:srgbClr val="2B7A43"/>
-                </a:solidFill>
-              </a:rPr>
-              <a:t>share</a:t>
-            </a:r>
-            <a:r>
-              <a:rPr sz="1800"/>
-              <a:t> of its full current the device passes.</a:t>
+              <a:t>Those three regimes are the whole of the stage law. Everything after this slide is either taken from them or is an admitted substitute for them.</a:t>
             </a:r>
           </a:p>
         </p:txBody>
       </p:sp>
       <p:pic>
         <p:nvPicPr>
-          <p:cNvPr id="4" name="Picture 3" descr="law_symbols.png"/>
+          <p:cNvPr id="4" name="Picture 3" descr="mos_regions.png"/>
           <p:cNvPicPr>
             <a:picLocks noChangeAspect="1"/>
           </p:cNvPicPr>
@@ -5395,8 +5533,8 @@
         </p:blipFill>
         <p:spPr>
           <a:xfrm>
-            <a:off x="518773" y="2276856"/>
-            <a:ext cx="11169692" cy="4242816"/>
+            <a:off x="756793" y="2880360"/>
+            <a:ext cx="10693652" cy="3639312"/>
           </a:xfrm>
           <a:prstGeom prst="rect">
             <a:avLst/>
@@ -5437,7 +5575,227 @@
           <a:lstStyle/>
           <a:p>
             <a:r>
-              <a:t>10 · The four numbers that leaves</a:t>
+              <a:t>11 · What we keep of that, and what we replace</a:t>
+            </a:r>
+          </a:p>
+        </p:txBody>
+      </p:sp>
+      <p:sp>
+        <p:nvSpPr>
+          <p:cNvPr id="3" name="Content Placeholder 2"/>
+          <p:cNvSpPr>
+            <a:spLocks noGrp="1"/>
+          </p:cNvSpPr>
+          <p:nvPr>
+            <p:ph idx="10"/>
+          </p:nvPr>
+        </p:nvSpPr>
+        <p:spPr>
+          <a:xfrm>
+            <a:off x="411480" y="987552"/>
+            <a:ext cx="11384280" cy="1517904"/>
+          </a:xfrm>
+        </p:spPr>
+        <p:txBody>
+          <a:bodyPr/>
+          <a:lstStyle/>
+          <a:p>
+            <a:pPr latinLnBrk="0">
+              <a:spcAft>
+                <a:spcPts val="400"/>
+              </a:spcAft>
+            </a:pPr>
+            <a:r>
+              <a:rPr sz="1800"/>
+              <a:t>Same three regimes, our version of each, drawn on top of the book's.</a:t>
+            </a:r>
+          </a:p>
+          <a:p>
+            <a:pPr latinLnBrk="0">
+              <a:spcAft>
+                <a:spcPts val="400"/>
+              </a:spcAft>
+            </a:pPr>
+            <a:r>
+              <a:rPr sz="1800" b="1">
+                <a:solidFill>
+                  <a:srgbClr val="2B7A43"/>
+                </a:solidFill>
+              </a:rPr>
+              <a:t>Below threshold we copy the book. Saturated we keep its form but flatten the exponent from 2 to 1. Into triode we replace its parabola with a straight line — that one is ours, and it is the biggest liberty in the model.</a:t>
+            </a:r>
+          </a:p>
+        </p:txBody>
+      </p:sp>
+      <p:pic>
+        <p:nvPicPr>
+          <p:cNvPr id="4" name="Picture 3" descr="ours_vs_book.png"/>
+          <p:cNvPicPr>
+            <a:picLocks noChangeAspect="1"/>
+          </p:cNvPicPr>
+          <p:nvPr/>
+        </p:nvPicPr>
+        <p:blipFill>
+          <a:blip r:embed="rId2"/>
+          <a:stretch>
+            <a:fillRect/>
+          </a:stretch>
+        </p:blipFill>
+        <p:spPr>
+          <a:xfrm>
+            <a:off x="411480" y="2578608"/>
+            <a:ext cx="11384280" cy="3404767"/>
+          </a:xfrm>
+          <a:prstGeom prst="rect">
+            <a:avLst/>
+          </a:prstGeom>
+        </p:spPr>
+      </p:pic>
+    </p:spTree>
+  </p:cSld>
+  <p:clrMapOvr>
+    <a:masterClrMapping/>
+  </p:clrMapOvr>
+</p:sld>
+</file>
+
+<file path=ppt/slides/slide16.xml><?xml version="1.0" encoding="utf-8"?>
+<p:sld xmlns:a="http://schemas.openxmlformats.org/drawingml/2006/main" xmlns:p="http://schemas.openxmlformats.org/presentationml/2006/main" xmlns:r="http://schemas.openxmlformats.org/officeDocument/2006/relationships">
+  <p:cSld>
+    <p:spTree>
+      <p:nvGrpSpPr>
+        <p:cNvPr id="1" name=""/>
+        <p:cNvGrpSpPr/>
+        <p:nvPr/>
+      </p:nvGrpSpPr>
+      <p:grpSpPr/>
+      <p:sp>
+        <p:nvSpPr>
+          <p:cNvPr id="2" name="Title 1"/>
+          <p:cNvSpPr>
+            <a:spLocks noGrp="1"/>
+          </p:cNvSpPr>
+          <p:nvPr>
+            <p:ph type="title"/>
+          </p:nvPr>
+        </p:nvSpPr>
+        <p:spPr/>
+        <p:txBody>
+          <a:bodyPr/>
+          <a:lstStyle/>
+          <a:p>
+            <a:r>
+              <a:t>12 · The law, with where each piece came from</a:t>
+            </a:r>
+          </a:p>
+        </p:txBody>
+      </p:sp>
+      <p:sp>
+        <p:nvSpPr>
+          <p:cNvPr id="3" name="Content Placeholder 2"/>
+          <p:cNvSpPr>
+            <a:spLocks noGrp="1"/>
+          </p:cNvSpPr>
+          <p:nvPr>
+            <p:ph idx="10"/>
+          </p:nvPr>
+        </p:nvSpPr>
+        <p:spPr>
+          <a:xfrm>
+            <a:off x="411480" y="987552"/>
+            <a:ext cx="11384280" cy="1517904"/>
+          </a:xfrm>
+        </p:spPr>
+        <p:txBody>
+          <a:bodyPr/>
+          <a:lstStyle/>
+          <a:p>
+            <a:pPr latinLnBrk="0">
+              <a:spcAft>
+                <a:spcPts val="400"/>
+              </a:spcAft>
+            </a:pPr>
+            <a:r>
+              <a:rPr sz="1800"/>
+              <a:t>Read the colours: green has a source, amber is the source's own form with one thing changed, red has no source at all.</a:t>
+            </a:r>
+          </a:p>
+          <a:p>
+            <a:pPr latinLnBrk="0">
+              <a:spcAft>
+                <a:spcPts val="400"/>
+              </a:spcAft>
+            </a:pPr>
+            <a:r>
+              <a:rPr sz="1800" b="1">
+                <a:solidFill>
+                  <a:srgbClr val="2B7A43"/>
+                </a:solidFill>
+              </a:rPr>
+              <a:t>One more thing carries no source: putting K of these in series. That is a modelling choice, and the next slide is the evidence for it.</a:t>
+            </a:r>
+          </a:p>
+        </p:txBody>
+      </p:sp>
+      <p:pic>
+        <p:nvPicPr>
+          <p:cNvPr id="4" name="Picture 3" descr="law_badged.png"/>
+          <p:cNvPicPr>
+            <a:picLocks noChangeAspect="1"/>
+          </p:cNvPicPr>
+          <p:nvPr/>
+        </p:nvPicPr>
+        <p:blipFill>
+          <a:blip r:embed="rId2"/>
+          <a:stretch>
+            <a:fillRect/>
+          </a:stretch>
+        </p:blipFill>
+        <p:spPr>
+          <a:xfrm>
+            <a:off x="411480" y="2578608"/>
+            <a:ext cx="11384280" cy="3920780"/>
+          </a:xfrm>
+          <a:prstGeom prst="rect">
+            <a:avLst/>
+          </a:prstGeom>
+        </p:spPr>
+      </p:pic>
+    </p:spTree>
+  </p:cSld>
+  <p:clrMapOvr>
+    <a:masterClrMapping/>
+  </p:clrMapOvr>
+</p:sld>
+</file>
+
+<file path=ppt/slides/slide17.xml><?xml version="1.0" encoding="utf-8"?>
+<p:sld xmlns:a="http://schemas.openxmlformats.org/drawingml/2006/main" xmlns:p="http://schemas.openxmlformats.org/presentationml/2006/main" xmlns:r="http://schemas.openxmlformats.org/officeDocument/2006/relationships">
+  <p:cSld>
+    <p:spTree>
+      <p:nvGrpSpPr>
+        <p:cNvPr id="1" name=""/>
+        <p:cNvGrpSpPr/>
+        <p:nvPr/>
+      </p:nvGrpSpPr>
+      <p:grpSpPr/>
+      <p:sp>
+        <p:nvSpPr>
+          <p:cNvPr id="2" name="Title 1"/>
+          <p:cNvSpPr>
+            <a:spLocks noGrp="1"/>
+          </p:cNvSpPr>
+          <p:nvPr>
+            <p:ph type="title"/>
+          </p:nvPr>
+        </p:nvSpPr>
+        <p:spPr/>
+        <p:txBody>
+          <a:bodyPr/>
+          <a:lstStyle/>
+          <a:p>
+            <a:r>
+              <a:t>13 · The four numbers that leaves</a:t>
             </a:r>
           </a:p>
         </p:txBody>
@@ -5565,7 +5923,7 @@
 </p:sld>
 </file>
 
-<file path=ppt/slides/slide16.xml><?xml version="1.0" encoding="utf-8"?>
+<file path=ppt/slides/slide18.xml><?xml version="1.0" encoding="utf-8"?>
 <p:sld xmlns:a="http://schemas.openxmlformats.org/drawingml/2006/main" xmlns:p="http://schemas.openxmlformats.org/presentationml/2006/main" xmlns:r="http://schemas.openxmlformats.org/officeDocument/2006/relationships">
   <p:cSld>
     <p:spTree>
@@ -5591,7 +5949,7 @@
           <a:lstStyle/>
           <a:p>
             <a:r>
-              <a:t>11 · What each of the four actually does</a:t>
+              <a:t>14 · What each of the four actually does</a:t>
             </a:r>
           </a:p>
         </p:txBody>
@@ -5675,7 +6033,7 @@
 </p:sld>
 </file>
 
-<file path=ppt/slides/slide17.xml><?xml version="1.0" encoding="utf-8"?>
+<file path=ppt/slides/slide19.xml><?xml version="1.0" encoding="utf-8"?>
 <p:sld xmlns:a="http://schemas.openxmlformats.org/drawingml/2006/main" xmlns:p="http://schemas.openxmlformats.org/presentationml/2006/main" xmlns:r="http://schemas.openxmlformats.org/officeDocument/2006/relationships">
   <p:cSld>
     <p:spTree>
@@ -5701,7 +6059,7 @@
           <a:lstStyle/>
           <a:p>
             <a:r>
-              <a:t>12 · Why a chain, and not one stage</a:t>
+              <a:t>15 · Why a chain, and not one stage</a:t>
             </a:r>
           </a:p>
         </p:txBody>
@@ -5775,253 +6133,6 @@
           <a:xfrm>
             <a:off x="733152" y="2880360"/>
             <a:ext cx="10740935" cy="3639312"/>
-          </a:xfrm>
-          <a:prstGeom prst="rect">
-            <a:avLst/>
-          </a:prstGeom>
-        </p:spPr>
-      </p:pic>
-    </p:spTree>
-  </p:cSld>
-  <p:clrMapOvr>
-    <a:masterClrMapping/>
-  </p:clrMapOvr>
-</p:sld>
-</file>
-
-<file path=ppt/slides/slide18.xml><?xml version="1.0" encoding="utf-8"?>
-<p:sld xmlns:a="http://schemas.openxmlformats.org/drawingml/2006/main" xmlns:p="http://schemas.openxmlformats.org/presentationml/2006/main" xmlns:r="http://schemas.openxmlformats.org/officeDocument/2006/relationships">
-  <p:cSld>
-    <p:spTree>
-      <p:nvGrpSpPr>
-        <p:cNvPr id="1" name=""/>
-        <p:cNvGrpSpPr/>
-        <p:nvPr/>
-      </p:nvGrpSpPr>
-      <p:grpSpPr/>
-      <p:sp>
-        <p:nvSpPr>
-          <p:cNvPr id="2" name="Title 1"/>
-          <p:cNvSpPr>
-            <a:spLocks noGrp="1"/>
-          </p:cNvSpPr>
-          <p:nvPr>
-            <p:ph type="title"/>
-          </p:nvPr>
-        </p:nvSpPr>
-        <p:spPr/>
-        <p:txBody>
-          <a:bodyPr/>
-          <a:lstStyle/>
-          <a:p>
-            <a:r>
-              <a:t>12 · So: K identical stages, then the file's own map</a:t>
-            </a:r>
-          </a:p>
-        </p:txBody>
-      </p:sp>
-      <p:sp>
-        <p:nvSpPr>
-          <p:cNvPr id="3" name="Content Placeholder 2"/>
-          <p:cNvSpPr>
-            <a:spLocks noGrp="1"/>
-          </p:cNvSpPr>
-          <p:nvPr>
-            <p:ph idx="10"/>
-          </p:nvPr>
-        </p:nvSpPr>
-        <p:spPr>
-          <a:xfrm>
-            <a:off x="411480" y="987552"/>
-            <a:ext cx="11384280" cy="1517904"/>
-          </a:xfrm>
-        </p:spPr>
-        <p:txBody>
-          <a:bodyPr/>
-          <a:lstStyle/>
-          <a:p>
-            <a:pPr latinLnBrk="0">
-              <a:spcAft>
-                <a:spcPts val="400"/>
-              </a:spcAft>
-            </a:pPr>
-            <a:r>
-              <a:rPr sz="1800"/>
-              <a:t>We cannot see how many stages a vendor's part has, so the count K is a parameter. The stages are held </a:t>
-            </a:r>
-            <a:r>
-              <a:rPr sz="1800" b="1"/>
-              <a:t>identical</a:t>
-            </a:r>
-            <a:r>
-              <a:rPr sz="1800"/>
-              <a:t>: a real tapered predriver approximately is, and letting them differ makes the fit degenerate.</a:t>
-            </a:r>
-          </a:p>
-          <a:p>
-            <a:pPr latinLnBrk="0">
-              <a:spcAft>
-                <a:spcPts val="400"/>
-              </a:spcAft>
-            </a:pPr>
-            <a:r>
-              <a:rPr sz="1800" b="1">
-                <a:solidFill>
-                  <a:srgbClr val="2B7A43"/>
-                </a:solidFill>
-              </a:rPr>
-              <a:t>Everything to the right of the gate is the file's own, untouched — the map and the I-V tables. We are only building the left-hand box.</a:t>
-            </a:r>
-          </a:p>
-        </p:txBody>
-      </p:sp>
-      <p:pic>
-        <p:nvPicPr>
-          <p:cNvPr id="4" name="Picture 3" descr="model_blocks.png"/>
-          <p:cNvPicPr>
-            <a:picLocks noChangeAspect="1"/>
-          </p:cNvPicPr>
-          <p:nvPr/>
-        </p:nvPicPr>
-        <p:blipFill>
-          <a:blip r:embed="rId2"/>
-          <a:stretch>
-            <a:fillRect/>
-          </a:stretch>
-        </p:blipFill>
-        <p:spPr>
-          <a:xfrm>
-            <a:off x="411480" y="2578608"/>
-            <a:ext cx="11384280" cy="3096299"/>
-          </a:xfrm>
-          <a:prstGeom prst="rect">
-            <a:avLst/>
-          </a:prstGeom>
-        </p:spPr>
-      </p:pic>
-    </p:spTree>
-  </p:cSld>
-  <p:clrMapOvr>
-    <a:masterClrMapping/>
-  </p:clrMapOvr>
-</p:sld>
-</file>
-
-<file path=ppt/slides/slide19.xml><?xml version="1.0" encoding="utf-8"?>
-<p:sld xmlns:a="http://schemas.openxmlformats.org/drawingml/2006/main" xmlns:p="http://schemas.openxmlformats.org/presentationml/2006/main" xmlns:r="http://schemas.openxmlformats.org/officeDocument/2006/relationships">
-  <p:cSld>
-    <p:spTree>
-      <p:nvGrpSpPr>
-        <p:cNvPr id="1" name=""/>
-        <p:cNvGrpSpPr/>
-        <p:nvPr/>
-      </p:nvGrpSpPr>
-      <p:grpSpPr/>
-      <p:sp>
-        <p:nvSpPr>
-          <p:cNvPr id="2" name="Title 1"/>
-          <p:cNvSpPr>
-            <a:spLocks noGrp="1"/>
-          </p:cNvSpPr>
-          <p:nvPr>
-            <p:ph type="title"/>
-          </p:nvPr>
-        </p:nvSpPr>
-        <p:spPr/>
-        <p:txBody>
-          <a:bodyPr/>
-          <a:lstStyle/>
-          <a:p>
-            <a:r>
-              <a:t>13 · Before the recipe: C_comp is an input, and this file's is wrong</a:t>
-            </a:r>
-          </a:p>
-        </p:txBody>
-      </p:sp>
-      <p:sp>
-        <p:nvSpPr>
-          <p:cNvPr id="3" name="Content Placeholder 2"/>
-          <p:cNvSpPr>
-            <a:spLocks noGrp="1"/>
-          </p:cNvSpPr>
-          <p:nvPr>
-            <p:ph idx="10"/>
-          </p:nvPr>
-        </p:nvSpPr>
-        <p:spPr>
-          <a:xfrm>
-            <a:off x="411480" y="987552"/>
-            <a:ext cx="11384280" cy="2834640"/>
-          </a:xfrm>
-        </p:spPr>
-        <p:txBody>
-          <a:bodyPr/>
-          <a:lstStyle/>
-          <a:p>
-            <a:pPr latinLnBrk="0">
-              <a:spcAft>
-                <a:spcPts val="400"/>
-              </a:spcAft>
-            </a:pPr>
-            <a:r>
-              <a:rPr sz="1700"/>
-              <a:t>C_comp is not something the method derives — it is an input the solve needs, and we assume it arrives with the file. </a:t>
-            </a:r>
-            <a:r>
-              <a:rPr sz="1700" b="1"/>
-              <a:t>When s2ibispy extracts it properly, it drops into this same slot and nothing downstream changes.</a:t>
-            </a:r>
-          </a:p>
-          <a:p>
-            <a:pPr latinLnBrk="0">
-              <a:spcAft>
-                <a:spcPts val="400"/>
-              </a:spcAft>
-            </a:pPr>
-            <a:r>
-              <a:rPr sz="1700"/>
-              <a:t>It still needs a validity check, because this file's declared value fails one. Ku is a fraction of the device's own current, so it cannot exceed 1; ex2's declared 5.0 pF makes the file imply </a:t>
-            </a:r>
-            <a:r>
-              <a:rPr sz="1700" b="1"/>
-              <a:t>Ku = 1.24</a:t>
-            </a:r>
-            <a:r>
-              <a:rPr sz="1700"/>
-              <a:t>, which is impossible.</a:t>
-            </a:r>
-          </a:p>
-          <a:p>
-            <a:pPr latinLnBrk="0">
-              <a:spcAft>
-                <a:spcPts val="400"/>
-              </a:spcAft>
-            </a:pPr>
-            <a:r>
-              <a:rPr sz="1700"/>
-              <a:t>Today's numbers therefore use the value at which Ku just reaches 1 — 2.64 pF here, against 1.70 measured with a probe. 55 % off, and it still works, because the stressed peak is not sharp in C_comp.</a:t>
-            </a:r>
-          </a:p>
-        </p:txBody>
-      </p:sp>
-      <p:pic>
-        <p:nvPicPr>
-          <p:cNvPr id="4" name="Picture 3" descr="ccomp_reject.png"/>
-          <p:cNvPicPr>
-            <a:picLocks noChangeAspect="1"/>
-          </p:cNvPicPr>
-          <p:nvPr/>
-        </p:nvPicPr>
-        <p:blipFill>
-          <a:blip r:embed="rId2"/>
-          <a:stretch>
-            <a:fillRect/>
-          </a:stretch>
-        </p:blipFill>
-        <p:spPr>
-          <a:xfrm>
-            <a:off x="2933551" y="3895344"/>
-            <a:ext cx="6340137" cy="2624328"/>
           </a:xfrm>
           <a:prstGeom prst="rect">
             <a:avLst/>
@@ -6176,7 +6287,254 @@
           <a:lstStyle/>
           <a:p>
             <a:r>
-              <a:t>14 · Recipe step 1 of 4 — fit the four numbers to the file's Ku(t)</a:t>
+              <a:t>15 · So: K identical stages, then the file's own map</a:t>
+            </a:r>
+          </a:p>
+        </p:txBody>
+      </p:sp>
+      <p:sp>
+        <p:nvSpPr>
+          <p:cNvPr id="3" name="Content Placeholder 2"/>
+          <p:cNvSpPr>
+            <a:spLocks noGrp="1"/>
+          </p:cNvSpPr>
+          <p:nvPr>
+            <p:ph idx="10"/>
+          </p:nvPr>
+        </p:nvSpPr>
+        <p:spPr>
+          <a:xfrm>
+            <a:off x="411480" y="987552"/>
+            <a:ext cx="11384280" cy="1517904"/>
+          </a:xfrm>
+        </p:spPr>
+        <p:txBody>
+          <a:bodyPr/>
+          <a:lstStyle/>
+          <a:p>
+            <a:pPr latinLnBrk="0">
+              <a:spcAft>
+                <a:spcPts val="400"/>
+              </a:spcAft>
+            </a:pPr>
+            <a:r>
+              <a:rPr sz="1800"/>
+              <a:t>We cannot see how many stages a vendor's part has, so the count K is a parameter. The stages are held </a:t>
+            </a:r>
+            <a:r>
+              <a:rPr sz="1800" b="1"/>
+              <a:t>identical</a:t>
+            </a:r>
+            <a:r>
+              <a:rPr sz="1800"/>
+              <a:t>: a real tapered predriver approximately is, and letting them differ makes the fit degenerate.</a:t>
+            </a:r>
+          </a:p>
+          <a:p>
+            <a:pPr latinLnBrk="0">
+              <a:spcAft>
+                <a:spcPts val="400"/>
+              </a:spcAft>
+            </a:pPr>
+            <a:r>
+              <a:rPr sz="1800" b="1">
+                <a:solidFill>
+                  <a:srgbClr val="2B7A43"/>
+                </a:solidFill>
+              </a:rPr>
+              <a:t>Everything to the right of the gate is the file's own, untouched — the map and the I-V tables. We are only building the left-hand box.</a:t>
+            </a:r>
+          </a:p>
+        </p:txBody>
+      </p:sp>
+      <p:pic>
+        <p:nvPicPr>
+          <p:cNvPr id="4" name="Picture 3" descr="model_blocks.png"/>
+          <p:cNvPicPr>
+            <a:picLocks noChangeAspect="1"/>
+          </p:cNvPicPr>
+          <p:nvPr/>
+        </p:nvPicPr>
+        <p:blipFill>
+          <a:blip r:embed="rId2"/>
+          <a:stretch>
+            <a:fillRect/>
+          </a:stretch>
+        </p:blipFill>
+        <p:spPr>
+          <a:xfrm>
+            <a:off x="411480" y="2578608"/>
+            <a:ext cx="11384280" cy="3096299"/>
+          </a:xfrm>
+          <a:prstGeom prst="rect">
+            <a:avLst/>
+          </a:prstGeom>
+        </p:spPr>
+      </p:pic>
+    </p:spTree>
+  </p:cSld>
+  <p:clrMapOvr>
+    <a:masterClrMapping/>
+  </p:clrMapOvr>
+</p:sld>
+</file>
+
+<file path=ppt/slides/slide21.xml><?xml version="1.0" encoding="utf-8"?>
+<p:sld xmlns:a="http://schemas.openxmlformats.org/drawingml/2006/main" xmlns:p="http://schemas.openxmlformats.org/presentationml/2006/main" xmlns:r="http://schemas.openxmlformats.org/officeDocument/2006/relationships">
+  <p:cSld>
+    <p:spTree>
+      <p:nvGrpSpPr>
+        <p:cNvPr id="1" name=""/>
+        <p:cNvGrpSpPr/>
+        <p:nvPr/>
+      </p:nvGrpSpPr>
+      <p:grpSpPr/>
+      <p:sp>
+        <p:nvSpPr>
+          <p:cNvPr id="2" name="Title 1"/>
+          <p:cNvSpPr>
+            <a:spLocks noGrp="1"/>
+          </p:cNvSpPr>
+          <p:nvPr>
+            <p:ph type="title"/>
+          </p:nvPr>
+        </p:nvSpPr>
+        <p:spPr/>
+        <p:txBody>
+          <a:bodyPr/>
+          <a:lstStyle/>
+          <a:p>
+            <a:r>
+              <a:t>16 · Before the recipe: C_comp is an input, and this file's is wrong</a:t>
+            </a:r>
+          </a:p>
+        </p:txBody>
+      </p:sp>
+      <p:sp>
+        <p:nvSpPr>
+          <p:cNvPr id="3" name="Content Placeholder 2"/>
+          <p:cNvSpPr>
+            <a:spLocks noGrp="1"/>
+          </p:cNvSpPr>
+          <p:nvPr>
+            <p:ph idx="10"/>
+          </p:nvPr>
+        </p:nvSpPr>
+        <p:spPr>
+          <a:xfrm>
+            <a:off x="411480" y="987552"/>
+            <a:ext cx="11384280" cy="2834640"/>
+          </a:xfrm>
+        </p:spPr>
+        <p:txBody>
+          <a:bodyPr/>
+          <a:lstStyle/>
+          <a:p>
+            <a:pPr latinLnBrk="0">
+              <a:spcAft>
+                <a:spcPts val="400"/>
+              </a:spcAft>
+            </a:pPr>
+            <a:r>
+              <a:rPr sz="1700"/>
+              <a:t>C_comp is not something the method derives — it is an input the solve needs, and we assume it arrives with the file. </a:t>
+            </a:r>
+            <a:r>
+              <a:rPr sz="1700" b="1"/>
+              <a:t>When s2ibispy extracts it properly, it drops into this same slot and nothing downstream changes.</a:t>
+            </a:r>
+          </a:p>
+          <a:p>
+            <a:pPr latinLnBrk="0">
+              <a:spcAft>
+                <a:spcPts val="400"/>
+              </a:spcAft>
+            </a:pPr>
+            <a:r>
+              <a:rPr sz="1700"/>
+              <a:t>It still needs a validity check, because this file's declared value fails one. Ku is a fraction of the device's own current, so it cannot exceed 1; ex2's declared 5.0 pF makes the file imply </a:t>
+            </a:r>
+            <a:r>
+              <a:rPr sz="1700" b="1"/>
+              <a:t>Ku = 1.24</a:t>
+            </a:r>
+            <a:r>
+              <a:rPr sz="1700"/>
+              <a:t>, which is impossible.</a:t>
+            </a:r>
+          </a:p>
+          <a:p>
+            <a:pPr latinLnBrk="0">
+              <a:spcAft>
+                <a:spcPts val="400"/>
+              </a:spcAft>
+            </a:pPr>
+            <a:r>
+              <a:rPr sz="1700"/>
+              <a:t>Today's numbers therefore use the value at which Ku just reaches 1 — 2.64 pF here, against 1.70 measured with a probe. 55 % off, and it still works, because the stressed peak is not sharp in C_comp.</a:t>
+            </a:r>
+          </a:p>
+        </p:txBody>
+      </p:sp>
+      <p:pic>
+        <p:nvPicPr>
+          <p:cNvPr id="4" name="Picture 3" descr="ccomp_reject.png"/>
+          <p:cNvPicPr>
+            <a:picLocks noChangeAspect="1"/>
+          </p:cNvPicPr>
+          <p:nvPr/>
+        </p:nvPicPr>
+        <p:blipFill>
+          <a:blip r:embed="rId2"/>
+          <a:stretch>
+            <a:fillRect/>
+          </a:stretch>
+        </p:blipFill>
+        <p:spPr>
+          <a:xfrm>
+            <a:off x="2933551" y="3895344"/>
+            <a:ext cx="6340137" cy="2624328"/>
+          </a:xfrm>
+          <a:prstGeom prst="rect">
+            <a:avLst/>
+          </a:prstGeom>
+        </p:spPr>
+      </p:pic>
+    </p:spTree>
+  </p:cSld>
+  <p:clrMapOvr>
+    <a:masterClrMapping/>
+  </p:clrMapOvr>
+</p:sld>
+</file>
+
+<file path=ppt/slides/slide22.xml><?xml version="1.0" encoding="utf-8"?>
+<p:sld xmlns:a="http://schemas.openxmlformats.org/drawingml/2006/main" xmlns:p="http://schemas.openxmlformats.org/presentationml/2006/main" xmlns:r="http://schemas.openxmlformats.org/officeDocument/2006/relationships">
+  <p:cSld>
+    <p:spTree>
+      <p:nvGrpSpPr>
+        <p:cNvPr id="1" name=""/>
+        <p:cNvGrpSpPr/>
+        <p:nvPr/>
+      </p:nvGrpSpPr>
+      <p:grpSpPr/>
+      <p:sp>
+        <p:nvSpPr>
+          <p:cNvPr id="2" name="Title 1"/>
+          <p:cNvSpPr>
+            <a:spLocks noGrp="1"/>
+          </p:cNvSpPr>
+          <p:nvPr>
+            <p:ph type="title"/>
+          </p:nvPr>
+        </p:nvSpPr>
+        <p:spPr/>
+        <p:txBody>
+          <a:bodyPr/>
+          <a:lstStyle/>
+          <a:p>
+            <a:r>
+              <a:t>17 · Recipe step 1 of 4 — fit the four numbers to the file's Ku(t)</a:t>
             </a:r>
           </a:p>
         </p:txBody>
@@ -6283,7 +6641,7 @@
 </p:sld>
 </file>
 
-<file path=ppt/slides/slide21.xml><?xml version="1.0" encoding="utf-8"?>
+<file path=ppt/slides/slide23.xml><?xml version="1.0" encoding="utf-8"?>
 <p:sld xmlns:a="http://schemas.openxmlformats.org/drawingml/2006/main" xmlns:p="http://schemas.openxmlformats.org/presentationml/2006/main" xmlns:r="http://schemas.openxmlformats.org/officeDocument/2006/relationships">
   <p:cSld>
     <p:spTree>
@@ -6309,7 +6667,7 @@
           <a:lstStyle/>
           <a:p>
             <a:r>
-              <a:t>15 · Recipe step 2 of 4 — enumerate what the file cannot choose</a:t>
+              <a:t>18 · Recipe step 2 of 4 — enumerate what the file cannot choose</a:t>
             </a:r>
           </a:p>
         </p:txBody>
@@ -6428,7 +6786,7 @@
 </p:sld>
 </file>
 
-<file path=ppt/slides/slide22.xml><?xml version="1.0" encoding="utf-8"?>
+<file path=ppt/slides/slide24.xml><?xml version="1.0" encoding="utf-8"?>
 <p:sld xmlns:a="http://schemas.openxmlformats.org/drawingml/2006/main" xmlns:p="http://schemas.openxmlformats.org/presentationml/2006/main" xmlns:r="http://schemas.openxmlformats.org/officeDocument/2006/relationships">
   <p:cSld>
     <p:spTree>
@@ -6454,7 +6812,7 @@
           <a:lstStyle/>
           <a:p>
             <a:r>
-              <a:t>16 · Recipe step 3 of 4 — the stressed run sets the amplitude</a:t>
+              <a:t>19 · Recipe step 3 of 4 — the stressed run sets the amplitude</a:t>
             </a:r>
           </a:p>
         </p:txBody>
@@ -6554,7 +6912,7 @@
 </p:sld>
 </file>
 
-<file path=ppt/slides/slide23.xml><?xml version="1.0" encoding="utf-8"?>
+<file path=ppt/slides/slide25.xml><?xml version="1.0" encoding="utf-8"?>
 <p:sld xmlns:a="http://schemas.openxmlformats.org/drawingml/2006/main" xmlns:p="http://schemas.openxmlformats.org/presentationml/2006/main" xmlns:r="http://schemas.openxmlformats.org/officeDocument/2006/relationships">
   <p:cSld>
     <p:spTree>
@@ -6580,7 +6938,7 @@
           <a:lstStyle/>
           <a:p>
             <a:r>
-              <a:t>17 · Recipe step 4 of 4 — the same run picks one of the nine</a:t>
+              <a:t>20 · Recipe step 4 of 4 — the same run picks one of the nine</a:t>
             </a:r>
           </a:p>
         </p:txBody>
@@ -6691,7 +7049,7 @@
 </p:sld>
 </file>
 
-<file path=ppt/slides/slide24.xml><?xml version="1.0" encoding="utf-8"?>
+<file path=ppt/slides/slide26.xml><?xml version="1.0" encoding="utf-8"?>
 <p:sld xmlns:a="http://schemas.openxmlformats.org/drawingml/2006/main" xmlns:p="http://schemas.openxmlformats.org/presentationml/2006/main" xmlns:r="http://schemas.openxmlformats.org/officeDocument/2006/relationships">
   <p:cSld>
     <p:spTree>
@@ -6717,7 +7075,7 @@
           <a:lstStyle/>
           <a:p>
             <a:r>
-              <a:t>18 · The recipe, end to end</a:t>
+              <a:t>21 · The recipe, end to end</a:t>
             </a:r>
           </a:p>
         </p:txBody>
@@ -6839,242 +7197,6 @@
 </p:sld>
 </file>
 
-<file path=ppt/slides/slide25.xml><?xml version="1.0" encoding="utf-8"?>
-<p:sld xmlns:a="http://schemas.openxmlformats.org/drawingml/2006/main" xmlns:p="http://schemas.openxmlformats.org/presentationml/2006/main" xmlns:r="http://schemas.openxmlformats.org/officeDocument/2006/relationships">
-  <p:cSld>
-    <p:spTree>
-      <p:nvGrpSpPr>
-        <p:cNvPr id="1" name=""/>
-        <p:cNvGrpSpPr/>
-        <p:nvPr/>
-      </p:nvGrpSpPr>
-      <p:grpSpPr/>
-      <p:sp>
-        <p:nvSpPr>
-          <p:cNvPr id="2" name="Title 1"/>
-          <p:cNvSpPr>
-            <a:spLocks noGrp="1"/>
-          </p:cNvSpPr>
-          <p:nvPr>
-            <p:ph type="title"/>
-          </p:nvPr>
-        </p:nvSpPr>
-        <p:spPr/>
-        <p:txBody>
-          <a:bodyPr/>
-          <a:lstStyle/>
-          <a:p>
-            <a:r>
-              <a:t>Result · ex2</a:t>
-            </a:r>
-          </a:p>
-        </p:txBody>
-      </p:sp>
-      <p:sp>
-        <p:nvSpPr>
-          <p:cNvPr id="3" name="Content Placeholder 2"/>
-          <p:cNvSpPr>
-            <a:spLocks noGrp="1"/>
-          </p:cNvSpPr>
-          <p:nvPr>
-            <p:ph idx="10"/>
-          </p:nvPr>
-        </p:nvSpPr>
-        <p:spPr>
-          <a:xfrm>
-            <a:off x="411480" y="987552"/>
-            <a:ext cx="11384280" cy="1517904"/>
-          </a:xfrm>
-        </p:spPr>
-        <p:txBody>
-          <a:bodyPr/>
-          <a:lstStyle/>
-          <a:p>
-            <a:pPr latinLnBrk="0">
-              <a:spcAft>
-                <a:spcPts val="400"/>
-              </a:spcAft>
-            </a:pPr>
-            <a:r>
-              <a:rPr sz="1800"/>
-              <a:t>Transistor in black, HSPICE native IBIS dotted, track 1 in teal. Only the </a:t>
-            </a:r>
-            <a:r>
-              <a:rPr sz="1800" b="1"/>
-              <a:t>810 ps</a:t>
-            </a:r>
-            <a:r>
-              <a:rPr sz="1800"/>
-              <a:t> rung was measured; the other two are predictions.</a:t>
-            </a:r>
-          </a:p>
-          <a:p>
-            <a:pPr latinLnBrk="0">
-              <a:spcAft>
-                <a:spcPts val="400"/>
-              </a:spcAft>
-            </a:pPr>
-            <a:r>
-              <a:rPr sz="1800" b="1">
-                <a:solidFill>
-                  <a:srgbClr val="2B7A43"/>
-                </a:solidFill>
-              </a:rPr>
-              <a:t>Native IBIS collapses from +71 % to +1 % as the pulse lengthens. Track 1 holds −2, −7, −7 % — flat, and slightly shallow away from the rung it was calibrated on.</a:t>
-            </a:r>
-          </a:p>
-        </p:txBody>
-      </p:sp>
-      <p:pic>
-        <p:nvPicPr>
-          <p:cNvPr id="4" name="Picture 3" descr="result_ex2.png"/>
-          <p:cNvPicPr>
-            <a:picLocks noChangeAspect="1"/>
-          </p:cNvPicPr>
-          <p:nvPr/>
-        </p:nvPicPr>
-        <p:blipFill>
-          <a:blip r:embed="rId2"/>
-          <a:stretch>
-            <a:fillRect/>
-          </a:stretch>
-        </p:blipFill>
-        <p:spPr>
-          <a:xfrm>
-            <a:off x="411480" y="2578608"/>
-            <a:ext cx="11384280" cy="3892601"/>
-          </a:xfrm>
-          <a:prstGeom prst="rect">
-            <a:avLst/>
-          </a:prstGeom>
-        </p:spPr>
-      </p:pic>
-    </p:spTree>
-  </p:cSld>
-  <p:clrMapOvr>
-    <a:masterClrMapping/>
-  </p:clrMapOvr>
-</p:sld>
-</file>
-
-<file path=ppt/slides/slide26.xml><?xml version="1.0" encoding="utf-8"?>
-<p:sld xmlns:a="http://schemas.openxmlformats.org/drawingml/2006/main" xmlns:p="http://schemas.openxmlformats.org/presentationml/2006/main" xmlns:r="http://schemas.openxmlformats.org/officeDocument/2006/relationships">
-  <p:cSld>
-    <p:spTree>
-      <p:nvGrpSpPr>
-        <p:cNvPr id="1" name=""/>
-        <p:cNvGrpSpPr/>
-        <p:nvPr/>
-      </p:nvGrpSpPr>
-      <p:grpSpPr/>
-      <p:sp>
-        <p:nvSpPr>
-          <p:cNvPr id="2" name="Title 1"/>
-          <p:cNvSpPr>
-            <a:spLocks noGrp="1"/>
-          </p:cNvSpPr>
-          <p:nvPr>
-            <p:ph type="title"/>
-          </p:nvPr>
-        </p:nvSpPr>
-        <p:spPr/>
-        <p:txBody>
-          <a:bodyPr/>
-          <a:lstStyle/>
-          <a:p>
-            <a:r>
-              <a:t>Result · inv_chain</a:t>
-            </a:r>
-          </a:p>
-        </p:txBody>
-      </p:sp>
-      <p:sp>
-        <p:nvSpPr>
-          <p:cNvPr id="3" name="Content Placeholder 2"/>
-          <p:cNvSpPr>
-            <a:spLocks noGrp="1"/>
-          </p:cNvSpPr>
-          <p:nvPr>
-            <p:ph idx="10"/>
-          </p:nvPr>
-        </p:nvSpPr>
-        <p:spPr>
-          <a:xfrm>
-            <a:off x="411480" y="987552"/>
-            <a:ext cx="11384280" cy="1517904"/>
-          </a:xfrm>
-        </p:spPr>
-        <p:txBody>
-          <a:bodyPr/>
-          <a:lstStyle/>
-          <a:p>
-            <a:pPr latinLnBrk="0">
-              <a:spcAft>
-                <a:spcPts val="400"/>
-              </a:spcAft>
-            </a:pPr>
-            <a:r>
-              <a:rPr sz="1800"/>
-              <a:t>Transistor in black, HSPICE native IBIS dotted, track 1 in teal. Only the </a:t>
-            </a:r>
-            <a:r>
-              <a:rPr sz="1800" b="1"/>
-              <a:t>104 ps</a:t>
-            </a:r>
-            <a:r>
-              <a:rPr sz="1800"/>
-              <a:t> rung was measured; the other two are predictions.</a:t>
-            </a:r>
-          </a:p>
-          <a:p>
-            <a:pPr latinLnBrk="0">
-              <a:spcAft>
-                <a:spcPts val="400"/>
-              </a:spcAft>
-            </a:pPr>
-            <a:r>
-              <a:rPr sz="1800" b="1">
-                <a:solidFill>
-                  <a:srgbClr val="2B7A43"/>
-                </a:solidFill>
-              </a:rPr>
-              <a:t>Native IBIS runs +87 % at the deepest and +7 % at the mildest. Track 1 holds −4, +5, −1 % across the ladder.</a:t>
-            </a:r>
-          </a:p>
-        </p:txBody>
-      </p:sp>
-      <p:pic>
-        <p:nvPicPr>
-          <p:cNvPr id="4" name="Picture 3" descr="result_inv_chain.png"/>
-          <p:cNvPicPr>
-            <a:picLocks noChangeAspect="1"/>
-          </p:cNvPicPr>
-          <p:nvPr/>
-        </p:nvPicPr>
-        <p:blipFill>
-          <a:blip r:embed="rId2"/>
-          <a:stretch>
-            <a:fillRect/>
-          </a:stretch>
-        </p:blipFill>
-        <p:spPr>
-          <a:xfrm>
-            <a:off x="411480" y="2578608"/>
-            <a:ext cx="11384280" cy="3892601"/>
-          </a:xfrm>
-          <a:prstGeom prst="rect">
-            <a:avLst/>
-          </a:prstGeom>
-        </p:spPr>
-      </p:pic>
-    </p:spTree>
-  </p:cSld>
-  <p:clrMapOvr>
-    <a:masterClrMapping/>
-  </p:clrMapOvr>
-</p:sld>
-</file>
-
 <file path=ppt/slides/slide27.xml><?xml version="1.0" encoding="utf-8"?>
 <p:sld xmlns:a="http://schemas.openxmlformats.org/drawingml/2006/main" xmlns:p="http://schemas.openxmlformats.org/presentationml/2006/main" xmlns:r="http://schemas.openxmlformats.org/officeDocument/2006/relationships">
   <p:cSld>
@@ -7101,7 +7223,7 @@
           <a:lstStyle/>
           <a:p>
             <a:r>
-              <a:t>Result · io_buf</a:t>
+              <a:t>Result · ex2</a:t>
             </a:r>
           </a:p>
         </p:txBody>
@@ -7137,7 +7259,7 @@
             </a:r>
             <a:r>
               <a:rPr sz="1800" b="1"/>
-              <a:t>1505 ps</a:t>
+              <a:t>810 ps</a:t>
             </a:r>
             <a:r>
               <a:rPr sz="1800"/>
@@ -7156,14 +7278,14 @@
                   <a:srgbClr val="2B7A43"/>
                 </a:solidFill>
               </a:rPr>
-              <a:t>io_buf's ladder is shallower — 37 % is as deep as its pulse goes, and native is only −20 % there. Track 1 is +2, +7, +5 %.</a:t>
+              <a:t>Native IBIS collapses from +71 % to +1 % as the pulse lengthens. Track 1 holds −2, −7, −7 % — flat, and slightly shallow away from the rung it was calibrated on.</a:t>
             </a:r>
           </a:p>
         </p:txBody>
       </p:sp>
       <p:pic>
         <p:nvPicPr>
-          <p:cNvPr id="4" name="Picture 3" descr="result_io_buf.png"/>
+          <p:cNvPr id="4" name="Picture 3" descr="result_ex2.png"/>
           <p:cNvPicPr>
             <a:picLocks noChangeAspect="1"/>
           </p:cNvPicPr>
@@ -7219,7 +7341,7 @@
           <a:lstStyle/>
           <a:p>
             <a:r>
-              <a:t>Result · every buffer, worst of its stressed widths</a:t>
+              <a:t>Result · inv_chain</a:t>
             </a:r>
           </a:p>
         </p:txBody>
@@ -7237,7 +7359,7 @@
         <p:spPr>
           <a:xfrm>
             <a:off x="411480" y="987552"/>
-            <a:ext cx="11384280" cy="2231136"/>
+            <a:ext cx="11384280" cy="1517904"/>
           </a:xfrm>
         </p:spPr>
         <p:txBody>
@@ -7250,12 +7372,16 @@
               </a:spcAft>
             </a:pPr>
             <a:r>
-              <a:rPr sz="1600" b="1"/>
-              <a:t>12 of 12 within ±10 % against the transistor; mean 6.9 %.</a:t>
-            </a:r>
-            <a:r>
-              <a:rPr sz="1600"/>
-              <a:t> Native IBIS, where it runs at all, is 20 % to 100 %.</a:t>
+              <a:rPr sz="1800"/>
+              <a:t>Transistor in black, HSPICE native IBIS dotted, track 1 in teal. Only the </a:t>
+            </a:r>
+            <a:r>
+              <a:rPr sz="1800" b="1"/>
+              <a:t>104 ps</a:t>
+            </a:r>
+            <a:r>
+              <a:rPr sz="1800"/>
+              <a:t> rung was measured; the other two are predictions.</a:t>
             </a:r>
           </a:p>
           <a:p>
@@ -7265,42 +7391,19 @@
               </a:spcAft>
             </a:pPr>
             <a:r>
-              <a:rPr sz="1600"/>
-              <a:t>Native does not converge on the five ex2 variants — HSPICE's two-waveform solver dies on their 1 ps files and reports the pulse missing at </a:t>
-            </a:r>
-            <a:r>
-              <a:rPr sz="1600" b="1"/>
-              <a:t>every</a:t>
-            </a:r>
-            <a:r>
-              <a:rPr sz="1600"/>
-              <a:t> depth, the mildest included. Those bars are hatched, not scored.</a:t>
-            </a:r>
-          </a:p>
-          <a:p>
-            <a:pPr latinLnBrk="0">
-              <a:spcAft>
-                <a:spcPts val="400"/>
-              </a:spcAft>
-            </a:pPr>
-            <a:r>
-              <a:rPr sz="1600" b="1">
+              <a:rPr sz="1800" b="1">
                 <a:solidFill>
                   <a:srgbClr val="2B7A43"/>
                 </a:solidFill>
               </a:rPr>
-              <a:t>What it costs:</a:t>
-            </a:r>
-            <a:r>
-              <a:rPr sz="1600"/>
-              <a:t> the full transition is worse than the shipped model on 10 of 12 buffers, and a stressed pulse train is still lost on ex2 and io_buf. We are buying stressed accuracy with full-swing accuracy.</a:t>
+              <a:t>Native IBIS runs +87 % at the deepest and +7 % at the mildest. Track 1 holds −4, +5, −1 % across the ladder.</a:t>
             </a:r>
           </a:p>
         </p:txBody>
       </p:sp>
       <p:pic>
         <p:nvPicPr>
-          <p:cNvPr id="4" name="Picture 3" descr="endtoend_3.png"/>
+          <p:cNvPr id="4" name="Picture 3" descr="result_inv_chain.png"/>
           <p:cNvPicPr>
             <a:picLocks noChangeAspect="1"/>
           </p:cNvPicPr>
@@ -7314,8 +7417,8 @@
         </p:blipFill>
         <p:spPr>
           <a:xfrm>
-            <a:off x="1762501" y="3291840"/>
-            <a:ext cx="8682237" cy="3227832"/>
+            <a:off x="411480" y="2578608"/>
+            <a:ext cx="11384280" cy="3892601"/>
           </a:xfrm>
           <a:prstGeom prst="rect">
             <a:avLst/>
@@ -7356,7 +7459,7 @@
           <a:lstStyle/>
           <a:p>
             <a:r>
-              <a:t>Result · what this does not cover yet</a:t>
+              <a:t>Result · io_buf</a:t>
             </a:r>
           </a:p>
         </p:txBody>
@@ -7374,7 +7477,7 @@
         <p:spPr>
           <a:xfrm>
             <a:off x="411480" y="987552"/>
-            <a:ext cx="11384280" cy="2340864"/>
+            <a:ext cx="11384280" cy="1517904"/>
           </a:xfrm>
         </p:spPr>
         <p:txBody>
@@ -7387,42 +7490,16 @@
               </a:spcAft>
             </a:pPr>
             <a:r>
+              <a:rPr sz="1800"/>
+              <a:t>Transistor in black, HSPICE native IBIS dotted, track 1 in teal. Only the </a:t>
+            </a:r>
+            <a:r>
               <a:rPr sz="1800" b="1"/>
-              <a:t>Direction.</a:t>
+              <a:t>1505 ps</a:t>
             </a:r>
             <a:r>
               <a:rPr sz="1800"/>
-              <a:t> Everything here is a short HIGH pulse. Only io_buf has been run pulling down, where the model is 16–21 points too shallow — its pull-down chain never turns on at all on a short pulse.</a:t>
-            </a:r>
-          </a:p>
-          <a:p>
-            <a:pPr latinLnBrk="0">
-              <a:spcAft>
-                <a:spcPts val="400"/>
-              </a:spcAft>
-            </a:pPr>
-            <a:r>
-              <a:rPr sz="1800" b="1"/>
-              <a:t>Depth.</a:t>
-            </a:r>
-            <a:r>
-              <a:rPr sz="1800"/>
-              <a:t> The ladder samples 50–90 % of the travel. Below 50 % is unsampled.</a:t>
-            </a:r>
-          </a:p>
-          <a:p>
-            <a:pPr latinLnBrk="0">
-              <a:spcAft>
-                <a:spcPts val="400"/>
-              </a:spcAft>
-            </a:pPr>
-            <a:r>
-              <a:rPr sz="1800" b="1"/>
-              <a:t>Trains.</a:t>
-            </a:r>
-            <a:r>
-              <a:rPr sz="1800"/>
-              <a:t> One pulse at a time; a stressed train is still lost on two of three buffers.</a:t>
+              <a:t> rung was measured; the other two are predictions.</a:t>
             </a:r>
           </a:p>
           <a:p>
@@ -7437,18 +7514,14 @@
                   <a:srgbClr val="2B7A43"/>
                 </a:solidFill>
               </a:rPr>
-              <a:t>The recipe has seen the answer key.</a:t>
-            </a:r>
-            <a:r>
-              <a:rPr sz="1800"/>
-              <a:t> Two of the three candidate map shapes were chosen by looking at results on these same twelve buffers. A thirteenth buffer may need a shape the grid does not contain.</a:t>
+              <a:t>io_buf's ladder is shallower — 37 % is as deep as its pulse goes, and native is only −20 % there. Track 1 is +2, +7, +5 %.</a:t>
             </a:r>
           </a:p>
         </p:txBody>
       </p:sp>
       <p:pic>
         <p:nvPicPr>
-          <p:cNvPr id="4" name="Picture 3" descr="coverage.png"/>
+          <p:cNvPr id="4" name="Picture 3" descr="result_io_buf.png"/>
           <p:cNvPicPr>
             <a:picLocks noChangeAspect="1"/>
           </p:cNvPicPr>
@@ -7462,8 +7535,8 @@
         </p:blipFill>
         <p:spPr>
           <a:xfrm>
-            <a:off x="1785954" y="3401568"/>
-            <a:ext cx="8635331" cy="3118104"/>
+            <a:off x="411480" y="2578608"/>
+            <a:ext cx="11384280" cy="3892601"/>
           </a:xfrm>
           <a:prstGeom prst="rect">
             <a:avLst/>
@@ -7618,6 +7691,291 @@
           <a:lstStyle/>
           <a:p>
             <a:r>
+              <a:t>Result · every buffer, worst of its stressed widths</a:t>
+            </a:r>
+          </a:p>
+        </p:txBody>
+      </p:sp>
+      <p:sp>
+        <p:nvSpPr>
+          <p:cNvPr id="3" name="Content Placeholder 2"/>
+          <p:cNvSpPr>
+            <a:spLocks noGrp="1"/>
+          </p:cNvSpPr>
+          <p:nvPr>
+            <p:ph idx="10"/>
+          </p:nvPr>
+        </p:nvSpPr>
+        <p:spPr>
+          <a:xfrm>
+            <a:off x="411480" y="987552"/>
+            <a:ext cx="11384280" cy="2231136"/>
+          </a:xfrm>
+        </p:spPr>
+        <p:txBody>
+          <a:bodyPr/>
+          <a:lstStyle/>
+          <a:p>
+            <a:pPr latinLnBrk="0">
+              <a:spcAft>
+                <a:spcPts val="400"/>
+              </a:spcAft>
+            </a:pPr>
+            <a:r>
+              <a:rPr sz="1600" b="1"/>
+              <a:t>12 of 12 within ±10 % against the transistor; mean 6.9 %.</a:t>
+            </a:r>
+            <a:r>
+              <a:rPr sz="1600"/>
+              <a:t> Native IBIS, where it runs at all, is 20 % to 100 %.</a:t>
+            </a:r>
+          </a:p>
+          <a:p>
+            <a:pPr latinLnBrk="0">
+              <a:spcAft>
+                <a:spcPts val="400"/>
+              </a:spcAft>
+            </a:pPr>
+            <a:r>
+              <a:rPr sz="1600"/>
+              <a:t>Native does not converge on the five ex2 variants — HSPICE's two-waveform solver dies on their 1 ps files and reports the pulse missing at </a:t>
+            </a:r>
+            <a:r>
+              <a:rPr sz="1600" b="1"/>
+              <a:t>every</a:t>
+            </a:r>
+            <a:r>
+              <a:rPr sz="1600"/>
+              <a:t> depth, the mildest included. Those bars are hatched, not scored.</a:t>
+            </a:r>
+          </a:p>
+          <a:p>
+            <a:pPr latinLnBrk="0">
+              <a:spcAft>
+                <a:spcPts val="400"/>
+              </a:spcAft>
+            </a:pPr>
+            <a:r>
+              <a:rPr sz="1600" b="1">
+                <a:solidFill>
+                  <a:srgbClr val="2B7A43"/>
+                </a:solidFill>
+              </a:rPr>
+              <a:t>What it costs:</a:t>
+            </a:r>
+            <a:r>
+              <a:rPr sz="1600"/>
+              <a:t> the full transition is worse than the shipped model on 10 of 12 buffers, and a stressed pulse train is still lost on ex2 and io_buf. We are buying stressed accuracy with full-swing accuracy.</a:t>
+            </a:r>
+          </a:p>
+        </p:txBody>
+      </p:sp>
+      <p:pic>
+        <p:nvPicPr>
+          <p:cNvPr id="4" name="Picture 3" descr="endtoend_3.png"/>
+          <p:cNvPicPr>
+            <a:picLocks noChangeAspect="1"/>
+          </p:cNvPicPr>
+          <p:nvPr/>
+        </p:nvPicPr>
+        <p:blipFill>
+          <a:blip r:embed="rId2"/>
+          <a:stretch>
+            <a:fillRect/>
+          </a:stretch>
+        </p:blipFill>
+        <p:spPr>
+          <a:xfrm>
+            <a:off x="1762501" y="3291840"/>
+            <a:ext cx="8682237" cy="3227832"/>
+          </a:xfrm>
+          <a:prstGeom prst="rect">
+            <a:avLst/>
+          </a:prstGeom>
+        </p:spPr>
+      </p:pic>
+    </p:spTree>
+  </p:cSld>
+  <p:clrMapOvr>
+    <a:masterClrMapping/>
+  </p:clrMapOvr>
+</p:sld>
+</file>
+
+<file path=ppt/slides/slide31.xml><?xml version="1.0" encoding="utf-8"?>
+<p:sld xmlns:a="http://schemas.openxmlformats.org/drawingml/2006/main" xmlns:p="http://schemas.openxmlformats.org/presentationml/2006/main" xmlns:r="http://schemas.openxmlformats.org/officeDocument/2006/relationships">
+  <p:cSld>
+    <p:spTree>
+      <p:nvGrpSpPr>
+        <p:cNvPr id="1" name=""/>
+        <p:cNvGrpSpPr/>
+        <p:nvPr/>
+      </p:nvGrpSpPr>
+      <p:grpSpPr/>
+      <p:sp>
+        <p:nvSpPr>
+          <p:cNvPr id="2" name="Title 1"/>
+          <p:cNvSpPr>
+            <a:spLocks noGrp="1"/>
+          </p:cNvSpPr>
+          <p:nvPr>
+            <p:ph type="title"/>
+          </p:nvPr>
+        </p:nvSpPr>
+        <p:spPr/>
+        <p:txBody>
+          <a:bodyPr/>
+          <a:lstStyle/>
+          <a:p>
+            <a:r>
+              <a:t>Result · what this does not cover yet</a:t>
+            </a:r>
+          </a:p>
+        </p:txBody>
+      </p:sp>
+      <p:sp>
+        <p:nvSpPr>
+          <p:cNvPr id="3" name="Content Placeholder 2"/>
+          <p:cNvSpPr>
+            <a:spLocks noGrp="1"/>
+          </p:cNvSpPr>
+          <p:nvPr>
+            <p:ph idx="10"/>
+          </p:nvPr>
+        </p:nvSpPr>
+        <p:spPr>
+          <a:xfrm>
+            <a:off x="411480" y="987552"/>
+            <a:ext cx="11384280" cy="2340864"/>
+          </a:xfrm>
+        </p:spPr>
+        <p:txBody>
+          <a:bodyPr/>
+          <a:lstStyle/>
+          <a:p>
+            <a:pPr latinLnBrk="0">
+              <a:spcAft>
+                <a:spcPts val="400"/>
+              </a:spcAft>
+            </a:pPr>
+            <a:r>
+              <a:rPr sz="1800" b="1"/>
+              <a:t>Direction.</a:t>
+            </a:r>
+            <a:r>
+              <a:rPr sz="1800"/>
+              <a:t> Everything here is a short HIGH pulse. Only io_buf has been run pulling down, where the model is 16–21 points too shallow — its pull-down chain never turns on at all on a short pulse.</a:t>
+            </a:r>
+          </a:p>
+          <a:p>
+            <a:pPr latinLnBrk="0">
+              <a:spcAft>
+                <a:spcPts val="400"/>
+              </a:spcAft>
+            </a:pPr>
+            <a:r>
+              <a:rPr sz="1800" b="1"/>
+              <a:t>Depth.</a:t>
+            </a:r>
+            <a:r>
+              <a:rPr sz="1800"/>
+              <a:t> The ladder samples 50–90 % of the travel. Below 50 % is unsampled.</a:t>
+            </a:r>
+          </a:p>
+          <a:p>
+            <a:pPr latinLnBrk="0">
+              <a:spcAft>
+                <a:spcPts val="400"/>
+              </a:spcAft>
+            </a:pPr>
+            <a:r>
+              <a:rPr sz="1800" b="1"/>
+              <a:t>Trains.</a:t>
+            </a:r>
+            <a:r>
+              <a:rPr sz="1800"/>
+              <a:t> One pulse at a time; a stressed train is still lost on two of three buffers.</a:t>
+            </a:r>
+          </a:p>
+          <a:p>
+            <a:pPr latinLnBrk="0">
+              <a:spcAft>
+                <a:spcPts val="400"/>
+              </a:spcAft>
+            </a:pPr>
+            <a:r>
+              <a:rPr sz="1800" b="1">
+                <a:solidFill>
+                  <a:srgbClr val="2B7A43"/>
+                </a:solidFill>
+              </a:rPr>
+              <a:t>The recipe has seen the answer key.</a:t>
+            </a:r>
+            <a:r>
+              <a:rPr sz="1800"/>
+              <a:t> Two of the three candidate map shapes were chosen by looking at results on these same twelve buffers. A thirteenth buffer may need a shape the grid does not contain.</a:t>
+            </a:r>
+          </a:p>
+        </p:txBody>
+      </p:sp>
+      <p:pic>
+        <p:nvPicPr>
+          <p:cNvPr id="4" name="Picture 3" descr="coverage.png"/>
+          <p:cNvPicPr>
+            <a:picLocks noChangeAspect="1"/>
+          </p:cNvPicPr>
+          <p:nvPr/>
+        </p:nvPicPr>
+        <p:blipFill>
+          <a:blip r:embed="rId2"/>
+          <a:stretch>
+            <a:fillRect/>
+          </a:stretch>
+        </p:blipFill>
+        <p:spPr>
+          <a:xfrm>
+            <a:off x="1785954" y="3401568"/>
+            <a:ext cx="8635331" cy="3118104"/>
+          </a:xfrm>
+          <a:prstGeom prst="rect">
+            <a:avLst/>
+          </a:prstGeom>
+        </p:spPr>
+      </p:pic>
+    </p:spTree>
+  </p:cSld>
+  <p:clrMapOvr>
+    <a:masterClrMapping/>
+  </p:clrMapOvr>
+</p:sld>
+</file>
+
+<file path=ppt/slides/slide32.xml><?xml version="1.0" encoding="utf-8"?>
+<p:sld xmlns:a="http://schemas.openxmlformats.org/drawingml/2006/main" xmlns:p="http://schemas.openxmlformats.org/presentationml/2006/main" xmlns:r="http://schemas.openxmlformats.org/officeDocument/2006/relationships">
+  <p:cSld>
+    <p:spTree>
+      <p:nvGrpSpPr>
+        <p:cNvPr id="1" name=""/>
+        <p:cNvGrpSpPr/>
+        <p:nvPr/>
+      </p:nvGrpSpPr>
+      <p:grpSpPr/>
+      <p:sp>
+        <p:nvSpPr>
+          <p:cNvPr id="2" name="Title 1"/>
+          <p:cNvSpPr>
+            <a:spLocks noGrp="1"/>
+          </p:cNvSpPr>
+          <p:nvPr>
+            <p:ph type="title"/>
+          </p:nvPr>
+        </p:nvSpPr>
+        <p:spPr/>
+        <p:txBody>
+          <a:bodyPr/>
+          <a:lstStyle/>
+          <a:p>
+            <a:r>
               <a:t>Backup · where Ku(t) comes from</a:t>
             </a:r>
           </a:p>
@@ -7706,7 +8064,7 @@
 </p:sld>
 </file>
 
-<file path=ppt/slides/slide31.xml><?xml version="1.0" encoding="utf-8"?>
+<file path=ppt/slides/slide33.xml><?xml version="1.0" encoding="utf-8"?>
 <p:sld xmlns:a="http://schemas.openxmlformats.org/drawingml/2006/main" xmlns:p="http://schemas.openxmlformats.org/presentationml/2006/main" xmlns:r="http://schemas.openxmlformats.org/officeDocument/2006/relationships">
   <p:cSld>
     <p:spTree>
@@ -7816,7 +8174,7 @@
 </p:sld>
 </file>
 
-<file path=ppt/slides/slide32.xml><?xml version="1.0" encoding="utf-8"?>
+<file path=ppt/slides/slide34.xml><?xml version="1.0" encoding="utf-8"?>
 <p:sld xmlns:a="http://schemas.openxmlformats.org/drawingml/2006/main" xmlns:p="http://schemas.openxmlformats.org/presentationml/2006/main" xmlns:r="http://schemas.openxmlformats.org/officeDocument/2006/relationships">
   <p:cSld>
     <p:spTree>

--- a/results/meeting_deck_2026-09-24/0924_track1_story.pptx
+++ b/results/meeting_deck_2026-09-24/0924_track1_story.pptx
@@ -42,6 +42,7 @@
     <p:sldId id="287" r:id="rId40"/>
     <p:sldId id="288" r:id="rId41"/>
     <p:sldId id="289" r:id="rId42"/>
+    <p:sldId id="290" r:id="rId43"/>
   </p:sldIdLst>
   <p:sldSz cx="12192000" cy="6858000"/>
   <p:notesSz cx="6858000" cy="9144000"/>
@@ -903,7 +904,7 @@
           <a:lstStyle/>
           <a:p>
             <a:r>
-              <a:t>Leventhal &amp; Green, Semiconductor Modeling, section 3.8 printed page 89 (pdf 105): the SPICE Level 1 / Shichman-Hodges equations 3-23 to 3-25. Note the naming trap: a MOSFET's SATURATION region is its constant-current one, the opposite sense to a BJT (the book makes the same point on p.63).</a:t>
+              <a:t>Without this slide the next two are unreadable: they plot 'share of full current' against u and against v, and the viewer has no way to know those are the device's own gate and drain voltages. For the PMOS pulling up, source on VDD: |V_GS| = VDD - v_in and |V_DS| = VDD - v_out.</a:t>
             </a:r>
           </a:p>
         </p:txBody>
@@ -973,7 +974,7 @@
           <a:lstStyle/>
           <a:p>
             <a:r>
-              <a:t>Why p = 1: it is not a claim about the device, it is an admission that the file cannot see p - every value from 1 to 2 fits the full-swing Ku(t) to rms 0.002-0.007. Why the straight line: it keeps the stage law solvable in one expression, and the stressed pulse turns round before the gate is deep into this region on most buffers.</a:t>
+              <a:t>Leventhal &amp; Green, Semiconductor Modeling, section 3.8 printed page 89 (pdf 105): the SPICE Level 1 / Shichman-Hodges equations 3-23 to 3-25. Note the naming trap: a MOSFET's SATURATION region is its constant-current one, the opposite sense to a BJT (the book makes the same point on p.63).</a:t>
             </a:r>
           </a:p>
         </p:txBody>
@@ -1043,7 +1044,7 @@
           <a:lstStyle/>
           <a:p>
             <a:r>
-              <a:t>The honest summary: the backbone and the threshold come from the book, the exponent is ours by necessity, the taper and the chain are ours by choice.</a:t>
+              <a:t>Why p = 1: it is not a claim about the device, it is an admission that the file cannot see p - every value from 1 to 2 fits the full-swing Ku(t) to rms 0.002-0.007. Why the straight line: it keeps the stage law solvable in one expression, and the stressed pulse turns round before the gate is deep into this region on most buffers.</a:t>
             </a:r>
           </a:p>
         </p:txBody>
@@ -1113,7 +1114,7 @@
           <a:lstStyle/>
           <a:p>
             <a:r>
-              <a:t>On inv_chain the file's Vinh is 2.0 V on a 1.8 V part, which is why the converter guards it - the backup slide. p is assumed 1 because it is invisible at full swing: every p from 1 to 2 fits to rms 0.002-0.007.</a:t>
+              <a:t>The honest summary: the backbone and the threshold come from the book, the exponent is ours by necessity, the taper and the chain are ours by choice.</a:t>
             </a:r>
           </a:p>
         </p:txBody>
@@ -1183,7 +1184,7 @@
           <a:lstStyle/>
           <a:p>
             <a:r>
-              <a:t>Simulated with the project's own stage model from the fitted values the 09-17 film exported.</a:t>
+              <a:t>On inv_chain the file's Vinh is 2.0 V on a 1.8 V part, which is why the converter guards it - the backup slide. p is assumed 1 because it is invisible at full swing: every p from 1 to 2 fits to rms 0.002-0.007.</a:t>
             </a:r>
           </a:p>
         </p:txBody>
@@ -1253,7 +1254,7 @@
           <a:lstStyle/>
           <a:p>
             <a:r>
-              <a:t>est_knee fit, ex2 pull-up: K=1 rms 0.0920, K=2 0.0360, K=3 0.0233, best (K=6) 0.0202. The real predriver is a chain too - ex2's schematic showed three inverters - but this is the file saying so on its own.</a:t>
+              <a:t>Simulated with the project's own stage model from the fitted values the 09-17 film exported.</a:t>
             </a:r>
           </a:p>
         </p:txBody>
@@ -1393,7 +1394,7 @@
           <a:lstStyle/>
           <a:p>
             <a:r>
-              <a:t>Degenerate: a free fit splits the delay into one sluggish stage plus one quick one, reproduces the full swing slightly better, and predicts a stressed gate of 0.23 against a measured 0.76.</a:t>
+              <a:t>est_knee fit, ex2 pull-up: K=1 rms 0.0920, K=2 0.0360, K=3 0.0233, best (K=6) 0.0202. The real predriver is a chain too - ex2's schematic showed three inverters - but this is the file saying so on its own.</a:t>
             </a:r>
           </a:p>
         </p:txBody>
@@ -1463,7 +1464,7 @@
           <a:lstStyle/>
           <a:p>
             <a:r>
-              <a:t>C_comp is not a model parameter: it is a number the file's own Ku tables were solved with, so a wrong value inflates the curve everything downstream is fitted to.</a:t>
+              <a:t>Degenerate: a free fit splits the delay into one sluggish stage plus one quick one, reproduces the full swing slightly better, and predicts a stressed gate of 0.23 against a measured 0.76.</a:t>
             </a:r>
           </a:p>
         </p:txBody>
@@ -1533,7 +1534,7 @@
           <a:lstStyle/>
           <a:p>
             <a:r>
-              <a:t>Every trial the optimiser actually took, exported live by the 09-17 film. What it does NOT give us is K, or the map's shape.</a:t>
+              <a:t>C_comp is not a model parameter: it is a number the file's own Ku tables were solved with, so a wrong value inflates the curve everything downstream is fitted to.</a:t>
             </a:r>
           </a:p>
         </p:txBody>
@@ -1603,7 +1604,7 @@
           <a:lstStyle/>
           <a:p>
             <a:r>
-              <a:t>The three shapes are (0.50, 0.70), (0.40, 0.60) and (0.40, 0.90). Note on the right that all three already match the peak - that is the calibration, and it is why the peak cannot be what chooses.</a:t>
+              <a:t>Every trial the optimiser actually took, exported live by the 09-17 film. What it does NOT give us is K, or the map's shape.</a:t>
             </a:r>
           </a:p>
         </p:txBody>
@@ -1673,7 +1674,7 @@
           <a:lstStyle/>
           <a:p>
             <a:r>
-              <a:t>Every iteration the calibration actually wrote, recovered from the netlists it emitted. The vt here is the film's ex2 case; the deck's own K = 3 build lands on 0.632 from a different starting fit.</a:t>
+              <a:t>The three shapes are (0.50, 0.70), (0.40, 0.60) and (0.40, 0.90). Note on the right that all three already match the peak - that is the calibration, and it is why the peak cannot be what chooses.</a:t>
             </a:r>
           </a:p>
         </p:txBody>
@@ -1743,7 +1744,7 @@
           <a:lstStyle/>
           <a:p>
             <a:r>
-              <a:t>Ranking on the peak instead picks a chain that arrives up to 300 ps late with four times the waveform error. The nine waveforms themselves are the backup slide.</a:t>
+              <a:t>Every iteration the calibration actually wrote, recovered from the netlists it emitted. The vt here is the film's ex2 case; the deck's own K = 3 build lands on 0.632 from a different starting fit.</a:t>
             </a:r>
           </a:p>
         </p:txBody>
@@ -1813,7 +1814,7 @@
           <a:lstStyle/>
           <a:p>
             <a:r>
-              <a:t>The same block diagram as the chain slide, with the recipe attached. This is the slide to leave up during questions.</a:t>
+              <a:t>Ranking on the peak instead picks a chain that arrives up to 300 ps late with four times the waveform error. The nine waveforms themselves are the backup slide.</a:t>
             </a:r>
           </a:p>
         </p:txBody>
@@ -1883,7 +1884,7 @@
           <a:lstStyle/>
           <a:p>
             <a:r>
-              <a:t>Native from the delay_cmd waveform set, track 1 from the selector's pick for ex2. The calibration used the deepest rung only, so the milder two are out-of-sample.</a:t>
+              <a:t>The same block diagram as the chain slide, with the recipe attached. This is the slide to leave up during questions.</a:t>
             </a:r>
           </a:p>
         </p:txBody>
@@ -1953,7 +1954,7 @@
           <a:lstStyle/>
           <a:p>
             <a:r>
-              <a:t>Native from the delay_cmd waveform set, track 1 from the selector's pick for inv_chain. The calibration used the deepest rung only, so the milder two are out-of-sample.</a:t>
+              <a:t>Native from the delay_cmd waveform set, track 1 from the selector's pick for ex2. The calibration used the deepest rung only, so the milder two are out-of-sample.</a:t>
             </a:r>
           </a:p>
         </p:txBody>
@@ -2023,7 +2024,7 @@
           <a:lstStyle/>
           <a:p>
             <a:r>
-              <a:t>Native from the delay_cmd waveform set, track 1 from the selector's pick for io_buf. The calibration used the deepest rung only, so the milder two are out-of-sample.</a:t>
+              <a:t>Native from the delay_cmd waveform set, track 1 from the selector's pick for inv_chain. The calibration used the deepest rung only, so the milder two are out-of-sample.</a:t>
             </a:r>
           </a:p>
         </p:txBody>
@@ -2163,7 +2164,7 @@
           <a:lstStyle/>
           <a:p>
             <a:r>
-              <a:t>Native from gate_cascade_prototype_2026-09-09 sweeps, track 1 from selector_from_one_run_2026-09-23. Same five widths per buffer in both. The tr1ps death is documented in docs/native_vt_waveform_modes.md.</a:t>
+              <a:t>Native from the delay_cmd waveform set, track 1 from the selector's pick for io_buf. The calibration used the deepest rung only, so the milder two are out-of-sample.</a:t>
             </a:r>
           </a:p>
         </p:txBody>
@@ -2233,7 +2234,7 @@
           <a:lstStyle/>
           <a:p>
             <a:r>
-              <a:t>Better said than asked. The direction gap is the one that would most change the headline number.</a:t>
+              <a:t>Native from gate_cascade_prototype_2026-09-09 sweeps, track 1 from selector_from_one_run_2026-09-23. Same five widths per buffer in both. The tr1ps death is documented in docs/native_vt_waveform_modes.md.</a:t>
             </a:r>
           </a:p>
         </p:txBody>
@@ -2303,7 +2304,7 @@
           <a:lstStyle/>
           <a:p>
             <a:r>
-              <a:t>Moved out of the main line: this audience knows where Ku comes from.</a:t>
+              <a:t>Better said than asked. The direction gap is the one that would most change the headline number.</a:t>
             </a:r>
           </a:p>
         </p:txBody>
@@ -2373,7 +2374,7 @@
           <a:lstStyle/>
           <a:p>
             <a:r>
-              <a:t>This was the main slide before; the ranking says the same thing more directly.</a:t>
+              <a:t>Moved out of the main line: this audience knows where Ku comes from.</a:t>
             </a:r>
           </a:p>
         </p:txBody>
@@ -2399,6 +2400,76 @@
 </file>
 
 <file path=ppt/notesSlides/notesSlide34.xml><?xml version="1.0" encoding="utf-8"?>
+<p:notes xmlns:a="http://schemas.openxmlformats.org/drawingml/2006/main" xmlns:p="http://schemas.openxmlformats.org/presentationml/2006/main" xmlns:r="http://schemas.openxmlformats.org/officeDocument/2006/relationships">
+  <p:cSld>
+    <p:spTree>
+      <p:nvGrpSpPr>
+        <p:cNvPr id="1" name=""/>
+        <p:cNvGrpSpPr/>
+        <p:nvPr/>
+      </p:nvGrpSpPr>
+      <p:grpSpPr>
+        <a:xfrm>
+          <a:off x="0" y="0"/>
+          <a:ext cx="0" cy="0"/>
+          <a:chOff x="0" y="0"/>
+          <a:chExt cx="0" cy="0"/>
+        </a:xfrm>
+      </p:grpSpPr>
+      <p:sp>
+        <p:nvSpPr>
+          <p:cNvPr id="2" name="Slide Image Placeholder 1"/>
+          <p:cNvSpPr>
+            <a:spLocks noGrp="1"/>
+          </p:cNvSpPr>
+          <p:nvPr>
+            <p:ph type="sldImg" idx="2"/>
+          </p:nvPr>
+        </p:nvSpPr>
+        <p:spPr/>
+      </p:sp>
+      <p:sp>
+        <p:nvSpPr>
+          <p:cNvPr id="3" name="Notes Placeholder 2"/>
+          <p:cNvSpPr>
+            <a:spLocks noGrp="1"/>
+          </p:cNvSpPr>
+          <p:nvPr>
+            <p:ph type="body" idx="3" sz="quarter"/>
+          </p:nvPr>
+        </p:nvSpPr>
+        <p:spPr/>
+        <p:txBody>
+          <a:bodyPr/>
+          <a:lstStyle/>
+          <a:p>
+            <a:r>
+              <a:t>This was the main slide before; the ranking says the same thing more directly.</a:t>
+            </a:r>
+          </a:p>
+        </p:txBody>
+      </p:sp>
+      <p:sp>
+        <p:nvSpPr>
+          <p:cNvPr id="4" name="Slide Number Placeholder 3"/>
+          <p:cNvSpPr>
+            <a:spLocks noGrp="1"/>
+          </p:cNvSpPr>
+          <p:nvPr>
+            <p:ph type="sldNum" idx="5" sz="quarter"/>
+          </p:nvPr>
+        </p:nvSpPr>
+        <p:spPr/>
+      </p:sp>
+    </p:spTree>
+  </p:cSld>
+  <p:clrMapOvr>
+    <a:masterClrMapping/>
+  </p:clrMapOvr>
+</p:notes>
+</file>
+
+<file path=ppt/notesSlides/notesSlide35.xml><?xml version="1.0" encoding="utf-8"?>
 <p:notes xmlns:a="http://schemas.openxmlformats.org/drawingml/2006/main" xmlns:p="http://schemas.openxmlformats.org/presentationml/2006/main" xmlns:r="http://schemas.openxmlformats.org/officeDocument/2006/relationships">
   <p:cSld>
     <p:spTree>
@@ -5378,7 +5449,7 @@
             </a:r>
             <a:r>
               <a:rPr sz="1800"/>
-              <a:t> That ramp is the backbone of the law. The next slide is where it, and the two things that modulate it, come from.</a:t>
+              <a:t> That ramp is the backbone of the law. The next three slides are where it, and the two things that modulate it, come from.</a:t>
             </a:r>
           </a:p>
         </p:txBody>
@@ -5441,7 +5512,165 @@
           <a:lstStyle/>
           <a:p>
             <a:r>
-              <a:t>10 · What one MOSFET actually does</a:t>
+              <a:t>10 · The device's two voltages, in our two variables</a:t>
+            </a:r>
+          </a:p>
+        </p:txBody>
+      </p:sp>
+      <p:sp>
+        <p:nvSpPr>
+          <p:cNvPr id="3" name="Content Placeholder 2"/>
+          <p:cNvSpPr>
+            <a:spLocks noGrp="1"/>
+          </p:cNvSpPr>
+          <p:nvPr>
+            <p:ph idx="10"/>
+          </p:nvPr>
+        </p:nvSpPr>
+        <p:spPr>
+          <a:xfrm>
+            <a:off x="411480" y="987552"/>
+            <a:ext cx="11384280" cy="1517904"/>
+          </a:xfrm>
+        </p:spPr>
+        <p:txBody>
+          <a:bodyPr/>
+          <a:lstStyle/>
+          <a:p>
+            <a:pPr latinLnBrk="0">
+              <a:spcAft>
+                <a:spcPts val="400"/>
+              </a:spcAft>
+            </a:pPr>
+            <a:r>
+              <a:rPr sz="1600"/>
+              <a:t>The law is written in </a:t>
+            </a:r>
+            <a:r>
+              <a:rPr sz="1600" b="1"/>
+              <a:t>u</a:t>
+            </a:r>
+            <a:r>
+              <a:rPr sz="1600"/>
+              <a:t> and </a:t>
+            </a:r>
+            <a:r>
+              <a:rPr sz="1600" b="1"/>
+              <a:t>v</a:t>
+            </a:r>
+            <a:r>
+              <a:rPr sz="1600"/>
+              <a:t>; the physics is written in </a:t>
+            </a:r>
+            <a:r>
+              <a:rPr sz="1600" b="1"/>
+              <a:t>V_GS</a:t>
+            </a:r>
+            <a:r>
+              <a:rPr sz="1600"/>
+              <a:t> and </a:t>
+            </a:r>
+            <a:r>
+              <a:rPr sz="1600" b="1"/>
+              <a:t>V_DS</a:t>
+            </a:r>
+            <a:r>
+              <a:rPr sz="1600"/>
+              <a:t>. Same two quantities, measured down from the rail the device sits on: </a:t>
+            </a:r>
+            <a:r>
+              <a:rPr sz="1600" b="1"/>
+              <a:t>u = |V_GS| / swing</a:t>
+            </a:r>
+            <a:r>
+              <a:rPr sz="1600"/>
+              <a:t> and </a:t>
+            </a:r>
+            <a:r>
+              <a:rPr sz="1600" b="1"/>
+              <a:t>1 − v = |V_DS| / swing</a:t>
+            </a:r>
+            <a:r>
+              <a:rPr sz="1600"/>
+              <a:t>.</a:t>
+            </a:r>
+          </a:p>
+          <a:p>
+            <a:pPr latinLnBrk="0">
+              <a:spcAft>
+                <a:spcPts val="400"/>
+              </a:spcAft>
+            </a:pPr>
+            <a:r>
+              <a:rPr sz="1600" b="1">
+                <a:solidFill>
+                  <a:srgbClr val="2B7A43"/>
+                </a:solidFill>
+              </a:rPr>
+              <a:t>u rises as the stage turns on — though this is an inverter and its input fell to do it. Normalising each stage in the direction that turns it on is the whole reason a chain of inverters reads as non-inverting.</a:t>
+            </a:r>
+          </a:p>
+        </p:txBody>
+      </p:sp>
+      <p:pic>
+        <p:nvPicPr>
+          <p:cNvPr id="4" name="Picture 3" descr="uv_bridge.png"/>
+          <p:cNvPicPr>
+            <a:picLocks noChangeAspect="1"/>
+          </p:cNvPicPr>
+          <p:nvPr/>
+        </p:nvPicPr>
+        <p:blipFill>
+          <a:blip r:embed="rId2"/>
+          <a:stretch>
+            <a:fillRect/>
+          </a:stretch>
+        </p:blipFill>
+        <p:spPr>
+          <a:xfrm>
+            <a:off x="411480" y="2578608"/>
+            <a:ext cx="11384280" cy="3193467"/>
+          </a:xfrm>
+          <a:prstGeom prst="rect">
+            <a:avLst/>
+          </a:prstGeom>
+        </p:spPr>
+      </p:pic>
+    </p:spTree>
+  </p:cSld>
+  <p:clrMapOvr>
+    <a:masterClrMapping/>
+  </p:clrMapOvr>
+</p:sld>
+</file>
+
+<file path=ppt/slides/slide15.xml><?xml version="1.0" encoding="utf-8"?>
+<p:sld xmlns:a="http://schemas.openxmlformats.org/drawingml/2006/main" xmlns:p="http://schemas.openxmlformats.org/presentationml/2006/main" xmlns:r="http://schemas.openxmlformats.org/officeDocument/2006/relationships">
+  <p:cSld>
+    <p:spTree>
+      <p:nvGrpSpPr>
+        <p:cNvPr id="1" name=""/>
+        <p:cNvGrpSpPr/>
+        <p:nvPr/>
+      </p:nvGrpSpPr>
+      <p:grpSpPr/>
+      <p:sp>
+        <p:nvSpPr>
+          <p:cNvPr id="2" name="Title 1"/>
+          <p:cNvSpPr>
+            <a:spLocks noGrp="1"/>
+          </p:cNvSpPr>
+          <p:nvPr>
+            <p:ph type="title"/>
+          </p:nvPr>
+        </p:nvSpPr>
+        <p:spPr/>
+        <p:txBody>
+          <a:bodyPr/>
+          <a:lstStyle/>
+          <a:p>
+            <a:r>
+              <a:t>11 · What one MOSFET actually does</a:t>
             </a:r>
           </a:p>
         </p:txBody>
@@ -5549,7 +5778,7 @@
 </p:sld>
 </file>
 
-<file path=ppt/slides/slide15.xml><?xml version="1.0" encoding="utf-8"?>
+<file path=ppt/slides/slide16.xml><?xml version="1.0" encoding="utf-8"?>
 <p:sld xmlns:a="http://schemas.openxmlformats.org/drawingml/2006/main" xmlns:p="http://schemas.openxmlformats.org/presentationml/2006/main" xmlns:r="http://schemas.openxmlformats.org/officeDocument/2006/relationships">
   <p:cSld>
     <p:spTree>
@@ -5575,7 +5804,7 @@
           <a:lstStyle/>
           <a:p>
             <a:r>
-              <a:t>11 · What we keep of that, and what we replace</a:t>
+              <a:t>12 · What we keep of that, and what we replace</a:t>
             </a:r>
           </a:p>
         </p:txBody>
@@ -5593,7 +5822,7 @@
         <p:spPr>
           <a:xfrm>
             <a:off x="411480" y="987552"/>
-            <a:ext cx="11384280" cy="1517904"/>
+            <a:ext cx="11384280" cy="2231136"/>
           </a:xfrm>
         </p:spPr>
         <p:txBody>
@@ -5608,6 +5837,17 @@
             <a:r>
               <a:rPr sz="1800"/>
               <a:t>Same three regimes, our version of each, drawn on top of the book's.</a:t>
+            </a:r>
+          </a:p>
+          <a:p>
+            <a:pPr latinLnBrk="0">
+              <a:spcAft>
+                <a:spcPts val="400"/>
+              </a:spcAft>
+            </a:pPr>
+            <a:r>
+              <a:rPr sz="1800"/>
+              <a:t>Below threshold we copy the book. Saturated we keep its form but flatten the exponent from 2 to 1. Into triode we replace its parabola with a straight line.</a:t>
             </a:r>
           </a:p>
           <a:p>
@@ -5622,7 +5862,7 @@
                   <a:srgbClr val="2B7A43"/>
                 </a:solidFill>
               </a:rPr>
-              <a:t>Below threshold we copy the book. Saturated we keep its form but flatten the exponent from 2 to 1. Into triode we replace its parabola with a straight line — that one is ours, and it is the biggest liberty in the model.</a:t>
+              <a:t>And one more, which the drawing cannot show: the book's boundary between the two sits at |V_DS| = |V_GS| − |V_th|, which in our variables is 1 − v = u − vt — it moves as the input moves. Ours is the constant x_lin. That, and the straight line, are the two real liberties in the model.</a:t>
             </a:r>
           </a:p>
         </p:txBody>
@@ -5643,8 +5883,8 @@
         </p:blipFill>
         <p:spPr>
           <a:xfrm>
-            <a:off x="411480" y="2578608"/>
-            <a:ext cx="11384280" cy="3404767"/>
+            <a:off x="707283" y="3291840"/>
+            <a:ext cx="10792673" cy="3227832"/>
           </a:xfrm>
           <a:prstGeom prst="rect">
             <a:avLst/>
@@ -5659,7 +5899,7 @@
 </p:sld>
 </file>
 
-<file path=ppt/slides/slide16.xml><?xml version="1.0" encoding="utf-8"?>
+<file path=ppt/slides/slide17.xml><?xml version="1.0" encoding="utf-8"?>
 <p:sld xmlns:a="http://schemas.openxmlformats.org/drawingml/2006/main" xmlns:p="http://schemas.openxmlformats.org/presentationml/2006/main" xmlns:r="http://schemas.openxmlformats.org/officeDocument/2006/relationships">
   <p:cSld>
     <p:spTree>
@@ -5685,7 +5925,7 @@
           <a:lstStyle/>
           <a:p>
             <a:r>
-              <a:t>12 · The law, with where each piece came from</a:t>
+              <a:t>13 · The law, with where each piece came from</a:t>
             </a:r>
           </a:p>
         </p:txBody>
@@ -5769,7 +6009,7 @@
 </p:sld>
 </file>
 
-<file path=ppt/slides/slide17.xml><?xml version="1.0" encoding="utf-8"?>
+<file path=ppt/slides/slide18.xml><?xml version="1.0" encoding="utf-8"?>
 <p:sld xmlns:a="http://schemas.openxmlformats.org/drawingml/2006/main" xmlns:p="http://schemas.openxmlformats.org/presentationml/2006/main" xmlns:r="http://schemas.openxmlformats.org/officeDocument/2006/relationships">
   <p:cSld>
     <p:spTree>
@@ -5795,7 +6035,7 @@
           <a:lstStyle/>
           <a:p>
             <a:r>
-              <a:t>13 · The four numbers that leaves</a:t>
+              <a:t>14 · The four numbers that leaves</a:t>
             </a:r>
           </a:p>
         </p:txBody>
@@ -5923,7 +6163,7 @@
 </p:sld>
 </file>
 
-<file path=ppt/slides/slide18.xml><?xml version="1.0" encoding="utf-8"?>
+<file path=ppt/slides/slide19.xml><?xml version="1.0" encoding="utf-8"?>
 <p:sld xmlns:a="http://schemas.openxmlformats.org/drawingml/2006/main" xmlns:p="http://schemas.openxmlformats.org/presentationml/2006/main" xmlns:r="http://schemas.openxmlformats.org/officeDocument/2006/relationships">
   <p:cSld>
     <p:spTree>
@@ -5949,7 +6189,7 @@
           <a:lstStyle/>
           <a:p>
             <a:r>
-              <a:t>14 · What each of the four actually does</a:t>
+              <a:t>15 · What each of the four actually does</a:t>
             </a:r>
           </a:p>
         </p:txBody>
@@ -6019,120 +6259,6 @@
           <a:xfrm>
             <a:off x="1567646" y="2578608"/>
             <a:ext cx="9071947" cy="3941064"/>
-          </a:xfrm>
-          <a:prstGeom prst="rect">
-            <a:avLst/>
-          </a:prstGeom>
-        </p:spPr>
-      </p:pic>
-    </p:spTree>
-  </p:cSld>
-  <p:clrMapOvr>
-    <a:masterClrMapping/>
-  </p:clrMapOvr>
-</p:sld>
-</file>
-
-<file path=ppt/slides/slide19.xml><?xml version="1.0" encoding="utf-8"?>
-<p:sld xmlns:a="http://schemas.openxmlformats.org/drawingml/2006/main" xmlns:p="http://schemas.openxmlformats.org/presentationml/2006/main" xmlns:r="http://schemas.openxmlformats.org/officeDocument/2006/relationships">
-  <p:cSld>
-    <p:spTree>
-      <p:nvGrpSpPr>
-        <p:cNvPr id="1" name=""/>
-        <p:cNvGrpSpPr/>
-        <p:nvPr/>
-      </p:nvGrpSpPr>
-      <p:grpSpPr/>
-      <p:sp>
-        <p:nvSpPr>
-          <p:cNvPr id="2" name="Title 1"/>
-          <p:cNvSpPr>
-            <a:spLocks noGrp="1"/>
-          </p:cNvSpPr>
-          <p:nvPr>
-            <p:ph type="title"/>
-          </p:nvPr>
-        </p:nvSpPr>
-        <p:spPr/>
-        <p:txBody>
-          <a:bodyPr/>
-          <a:lstStyle/>
-          <a:p>
-            <a:r>
-              <a:t>15 · Why a chain, and not one stage</a:t>
-            </a:r>
-          </a:p>
-        </p:txBody>
-      </p:sp>
-      <p:sp>
-        <p:nvSpPr>
-          <p:cNvPr id="3" name="Content Placeholder 2"/>
-          <p:cNvSpPr>
-            <a:spLocks noGrp="1"/>
-          </p:cNvSpPr>
-          <p:nvPr>
-            <p:ph idx="10"/>
-          </p:nvPr>
-        </p:nvSpPr>
-        <p:spPr>
-          <a:xfrm>
-            <a:off x="411480" y="987552"/>
-            <a:ext cx="11384280" cy="1819656"/>
-          </a:xfrm>
-        </p:spPr>
-        <p:txBody>
-          <a:bodyPr/>
-          <a:lstStyle/>
-          <a:p>
-            <a:pPr latinLnBrk="0">
-              <a:spcAft>
-                <a:spcPts val="400"/>
-              </a:spcAft>
-            </a:pPr>
-            <a:r>
-              <a:rPr sz="1800"/>
-              <a:t>Fit one stage as well as it can be fitted and it still misses the file's own Ku(t) by 4.6× the best error. One stage is one ramp: it starts the instant the input does, where the real Ku(t) waits, and then bends over too early.</a:t>
-            </a:r>
-          </a:p>
-          <a:p>
-            <a:pPr latinLnBrk="0">
-              <a:spcAft>
-                <a:spcPts val="400"/>
-              </a:spcAft>
-            </a:pPr>
-            <a:r>
-              <a:rPr sz="1800" b="1">
-                <a:solidFill>
-                  <a:srgbClr val="2B7A43"/>
-                </a:solidFill>
-              </a:rPr>
-              <a:t>The file itself rules out a single stage — no stressed data needed to see it.</a:t>
-            </a:r>
-            <a:r>
-              <a:rPr sz="1800"/>
-              <a:t> Three stages is where the error settles.</a:t>
-            </a:r>
-          </a:p>
-        </p:txBody>
-      </p:sp>
-      <p:pic>
-        <p:nvPicPr>
-          <p:cNvPr id="4" name="Picture 3" descr="why_chain.png"/>
-          <p:cNvPicPr>
-            <a:picLocks noChangeAspect="1"/>
-          </p:cNvPicPr>
-          <p:nvPr/>
-        </p:nvPicPr>
-        <p:blipFill>
-          <a:blip r:embed="rId2"/>
-          <a:stretch>
-            <a:fillRect/>
-          </a:stretch>
-        </p:blipFill>
-        <p:spPr>
-          <a:xfrm>
-            <a:off x="733152" y="2880360"/>
-            <a:ext cx="10740935" cy="3639312"/>
           </a:xfrm>
           <a:prstGeom prst="rect">
             <a:avLst/>
@@ -6287,7 +6413,121 @@
           <a:lstStyle/>
           <a:p>
             <a:r>
-              <a:t>15 · So: K identical stages, then the file's own map</a:t>
+              <a:t>16 · Why a chain, and not one stage</a:t>
+            </a:r>
+          </a:p>
+        </p:txBody>
+      </p:sp>
+      <p:sp>
+        <p:nvSpPr>
+          <p:cNvPr id="3" name="Content Placeholder 2"/>
+          <p:cNvSpPr>
+            <a:spLocks noGrp="1"/>
+          </p:cNvSpPr>
+          <p:nvPr>
+            <p:ph idx="10"/>
+          </p:nvPr>
+        </p:nvSpPr>
+        <p:spPr>
+          <a:xfrm>
+            <a:off x="411480" y="987552"/>
+            <a:ext cx="11384280" cy="1819656"/>
+          </a:xfrm>
+        </p:spPr>
+        <p:txBody>
+          <a:bodyPr/>
+          <a:lstStyle/>
+          <a:p>
+            <a:pPr latinLnBrk="0">
+              <a:spcAft>
+                <a:spcPts val="400"/>
+              </a:spcAft>
+            </a:pPr>
+            <a:r>
+              <a:rPr sz="1800"/>
+              <a:t>Fit one stage as well as it can be fitted and it still misses the file's own Ku(t) by 4.6× the best error. One stage is one ramp: it starts the instant the input does, where the real Ku(t) waits, and then bends over too early.</a:t>
+            </a:r>
+          </a:p>
+          <a:p>
+            <a:pPr latinLnBrk="0">
+              <a:spcAft>
+                <a:spcPts val="400"/>
+              </a:spcAft>
+            </a:pPr>
+            <a:r>
+              <a:rPr sz="1800" b="1">
+                <a:solidFill>
+                  <a:srgbClr val="2B7A43"/>
+                </a:solidFill>
+              </a:rPr>
+              <a:t>The file itself rules out a single stage — no stressed data needed to see it.</a:t>
+            </a:r>
+            <a:r>
+              <a:rPr sz="1800"/>
+              <a:t> Three stages is where the error settles.</a:t>
+            </a:r>
+          </a:p>
+        </p:txBody>
+      </p:sp>
+      <p:pic>
+        <p:nvPicPr>
+          <p:cNvPr id="4" name="Picture 3" descr="why_chain.png"/>
+          <p:cNvPicPr>
+            <a:picLocks noChangeAspect="1"/>
+          </p:cNvPicPr>
+          <p:nvPr/>
+        </p:nvPicPr>
+        <p:blipFill>
+          <a:blip r:embed="rId2"/>
+          <a:stretch>
+            <a:fillRect/>
+          </a:stretch>
+        </p:blipFill>
+        <p:spPr>
+          <a:xfrm>
+            <a:off x="733152" y="2880360"/>
+            <a:ext cx="10740935" cy="3639312"/>
+          </a:xfrm>
+          <a:prstGeom prst="rect">
+            <a:avLst/>
+          </a:prstGeom>
+        </p:spPr>
+      </p:pic>
+    </p:spTree>
+  </p:cSld>
+  <p:clrMapOvr>
+    <a:masterClrMapping/>
+  </p:clrMapOvr>
+</p:sld>
+</file>
+
+<file path=ppt/slides/slide21.xml><?xml version="1.0" encoding="utf-8"?>
+<p:sld xmlns:a="http://schemas.openxmlformats.org/drawingml/2006/main" xmlns:p="http://schemas.openxmlformats.org/presentationml/2006/main" xmlns:r="http://schemas.openxmlformats.org/officeDocument/2006/relationships">
+  <p:cSld>
+    <p:spTree>
+      <p:nvGrpSpPr>
+        <p:cNvPr id="1" name=""/>
+        <p:cNvGrpSpPr/>
+        <p:nvPr/>
+      </p:nvGrpSpPr>
+      <p:grpSpPr/>
+      <p:sp>
+        <p:nvSpPr>
+          <p:cNvPr id="2" name="Title 1"/>
+          <p:cNvSpPr>
+            <a:spLocks noGrp="1"/>
+          </p:cNvSpPr>
+          <p:nvPr>
+            <p:ph type="title"/>
+          </p:nvPr>
+        </p:nvSpPr>
+        <p:spPr/>
+        <p:txBody>
+          <a:bodyPr/>
+          <a:lstStyle/>
+          <a:p>
+            <a:r>
+              <a:t>16 · So: K identical stages, then the file's own map</a:t>
             </a:r>
           </a:p>
         </p:txBody>
@@ -6379,7 +6619,7 @@
 </p:sld>
 </file>
 
-<file path=ppt/slides/slide21.xml><?xml version="1.0" encoding="utf-8"?>
+<file path=ppt/slides/slide22.xml><?xml version="1.0" encoding="utf-8"?>
 <p:sld xmlns:a="http://schemas.openxmlformats.org/drawingml/2006/main" xmlns:p="http://schemas.openxmlformats.org/presentationml/2006/main" xmlns:r="http://schemas.openxmlformats.org/officeDocument/2006/relationships">
   <p:cSld>
     <p:spTree>
@@ -6405,7 +6645,7 @@
           <a:lstStyle/>
           <a:p>
             <a:r>
-              <a:t>16 · Before the recipe: C_comp is an input, and this file's is wrong</a:t>
+              <a:t>17 · Before the recipe: C_comp is an input, and this file's is wrong</a:t>
             </a:r>
           </a:p>
         </p:txBody>
@@ -6508,7 +6748,7 @@
 </p:sld>
 </file>
 
-<file path=ppt/slides/slide22.xml><?xml version="1.0" encoding="utf-8"?>
+<file path=ppt/slides/slide23.xml><?xml version="1.0" encoding="utf-8"?>
 <p:sld xmlns:a="http://schemas.openxmlformats.org/drawingml/2006/main" xmlns:p="http://schemas.openxmlformats.org/presentationml/2006/main" xmlns:r="http://schemas.openxmlformats.org/officeDocument/2006/relationships">
   <p:cSld>
     <p:spTree>
@@ -6534,7 +6774,7 @@
           <a:lstStyle/>
           <a:p>
             <a:r>
-              <a:t>17 · Recipe step 1 of 4 — fit the four numbers to the file's Ku(t)</a:t>
+              <a:t>18 · Recipe step 1 of 4 — fit the four numbers to the file's Ku(t)</a:t>
             </a:r>
           </a:p>
         </p:txBody>
@@ -6641,7 +6881,7 @@
 </p:sld>
 </file>
 
-<file path=ppt/slides/slide23.xml><?xml version="1.0" encoding="utf-8"?>
+<file path=ppt/slides/slide24.xml><?xml version="1.0" encoding="utf-8"?>
 <p:sld xmlns:a="http://schemas.openxmlformats.org/drawingml/2006/main" xmlns:p="http://schemas.openxmlformats.org/presentationml/2006/main" xmlns:r="http://schemas.openxmlformats.org/officeDocument/2006/relationships">
   <p:cSld>
     <p:spTree>
@@ -6667,7 +6907,7 @@
           <a:lstStyle/>
           <a:p>
             <a:r>
-              <a:t>18 · Recipe step 2 of 4 — enumerate what the file cannot choose</a:t>
+              <a:t>19 · Recipe step 2 of 4 — enumerate what the file cannot choose</a:t>
             </a:r>
           </a:p>
         </p:txBody>
@@ -6786,7 +7026,7 @@
 </p:sld>
 </file>
 
-<file path=ppt/slides/slide24.xml><?xml version="1.0" encoding="utf-8"?>
+<file path=ppt/slides/slide25.xml><?xml version="1.0" encoding="utf-8"?>
 <p:sld xmlns:a="http://schemas.openxmlformats.org/drawingml/2006/main" xmlns:p="http://schemas.openxmlformats.org/presentationml/2006/main" xmlns:r="http://schemas.openxmlformats.org/officeDocument/2006/relationships">
   <p:cSld>
     <p:spTree>
@@ -6812,7 +7052,7 @@
           <a:lstStyle/>
           <a:p>
             <a:r>
-              <a:t>19 · Recipe step 3 of 4 — the stressed run sets the amplitude</a:t>
+              <a:t>20 · Recipe step 3 of 4 — the stressed run sets the amplitude</a:t>
             </a:r>
           </a:p>
         </p:txBody>
@@ -6912,7 +7152,7 @@
 </p:sld>
 </file>
 
-<file path=ppt/slides/slide25.xml><?xml version="1.0" encoding="utf-8"?>
+<file path=ppt/slides/slide26.xml><?xml version="1.0" encoding="utf-8"?>
 <p:sld xmlns:a="http://schemas.openxmlformats.org/drawingml/2006/main" xmlns:p="http://schemas.openxmlformats.org/presentationml/2006/main" xmlns:r="http://schemas.openxmlformats.org/officeDocument/2006/relationships">
   <p:cSld>
     <p:spTree>
@@ -6938,7 +7178,7 @@
           <a:lstStyle/>
           <a:p>
             <a:r>
-              <a:t>20 · Recipe step 4 of 4 — the same run picks one of the nine</a:t>
+              <a:t>21 · Recipe step 4 of 4 — the same run picks one of the nine</a:t>
             </a:r>
           </a:p>
         </p:txBody>
@@ -7049,7 +7289,7 @@
 </p:sld>
 </file>
 
-<file path=ppt/slides/slide26.xml><?xml version="1.0" encoding="utf-8"?>
+<file path=ppt/slides/slide27.xml><?xml version="1.0" encoding="utf-8"?>
 <p:sld xmlns:a="http://schemas.openxmlformats.org/drawingml/2006/main" xmlns:p="http://schemas.openxmlformats.org/presentationml/2006/main" xmlns:r="http://schemas.openxmlformats.org/officeDocument/2006/relationships">
   <p:cSld>
     <p:spTree>
@@ -7075,7 +7315,7 @@
           <a:lstStyle/>
           <a:p>
             <a:r>
-              <a:t>21 · The recipe, end to end</a:t>
+              <a:t>22 · The recipe, end to end</a:t>
             </a:r>
           </a:p>
         </p:txBody>
@@ -7197,124 +7437,6 @@
 </p:sld>
 </file>
 
-<file path=ppt/slides/slide27.xml><?xml version="1.0" encoding="utf-8"?>
-<p:sld xmlns:a="http://schemas.openxmlformats.org/drawingml/2006/main" xmlns:p="http://schemas.openxmlformats.org/presentationml/2006/main" xmlns:r="http://schemas.openxmlformats.org/officeDocument/2006/relationships">
-  <p:cSld>
-    <p:spTree>
-      <p:nvGrpSpPr>
-        <p:cNvPr id="1" name=""/>
-        <p:cNvGrpSpPr/>
-        <p:nvPr/>
-      </p:nvGrpSpPr>
-      <p:grpSpPr/>
-      <p:sp>
-        <p:nvSpPr>
-          <p:cNvPr id="2" name="Title 1"/>
-          <p:cNvSpPr>
-            <a:spLocks noGrp="1"/>
-          </p:cNvSpPr>
-          <p:nvPr>
-            <p:ph type="title"/>
-          </p:nvPr>
-        </p:nvSpPr>
-        <p:spPr/>
-        <p:txBody>
-          <a:bodyPr/>
-          <a:lstStyle/>
-          <a:p>
-            <a:r>
-              <a:t>Result · ex2</a:t>
-            </a:r>
-          </a:p>
-        </p:txBody>
-      </p:sp>
-      <p:sp>
-        <p:nvSpPr>
-          <p:cNvPr id="3" name="Content Placeholder 2"/>
-          <p:cNvSpPr>
-            <a:spLocks noGrp="1"/>
-          </p:cNvSpPr>
-          <p:nvPr>
-            <p:ph idx="10"/>
-          </p:nvPr>
-        </p:nvSpPr>
-        <p:spPr>
-          <a:xfrm>
-            <a:off x="411480" y="987552"/>
-            <a:ext cx="11384280" cy="1517904"/>
-          </a:xfrm>
-        </p:spPr>
-        <p:txBody>
-          <a:bodyPr/>
-          <a:lstStyle/>
-          <a:p>
-            <a:pPr latinLnBrk="0">
-              <a:spcAft>
-                <a:spcPts val="400"/>
-              </a:spcAft>
-            </a:pPr>
-            <a:r>
-              <a:rPr sz="1800"/>
-              <a:t>Transistor in black, HSPICE native IBIS dotted, track 1 in teal. Only the </a:t>
-            </a:r>
-            <a:r>
-              <a:rPr sz="1800" b="1"/>
-              <a:t>810 ps</a:t>
-            </a:r>
-            <a:r>
-              <a:rPr sz="1800"/>
-              <a:t> rung was measured; the other two are predictions.</a:t>
-            </a:r>
-          </a:p>
-          <a:p>
-            <a:pPr latinLnBrk="0">
-              <a:spcAft>
-                <a:spcPts val="400"/>
-              </a:spcAft>
-            </a:pPr>
-            <a:r>
-              <a:rPr sz="1800" b="1">
-                <a:solidFill>
-                  <a:srgbClr val="2B7A43"/>
-                </a:solidFill>
-              </a:rPr>
-              <a:t>Native IBIS collapses from +71 % to +1 % as the pulse lengthens. Track 1 holds −2, −7, −7 % — flat, and slightly shallow away from the rung it was calibrated on.</a:t>
-            </a:r>
-          </a:p>
-        </p:txBody>
-      </p:sp>
-      <p:pic>
-        <p:nvPicPr>
-          <p:cNvPr id="4" name="Picture 3" descr="result_ex2.png"/>
-          <p:cNvPicPr>
-            <a:picLocks noChangeAspect="1"/>
-          </p:cNvPicPr>
-          <p:nvPr/>
-        </p:nvPicPr>
-        <p:blipFill>
-          <a:blip r:embed="rId2"/>
-          <a:stretch>
-            <a:fillRect/>
-          </a:stretch>
-        </p:blipFill>
-        <p:spPr>
-          <a:xfrm>
-            <a:off x="411480" y="2578608"/>
-            <a:ext cx="11384280" cy="3892601"/>
-          </a:xfrm>
-          <a:prstGeom prst="rect">
-            <a:avLst/>
-          </a:prstGeom>
-        </p:spPr>
-      </p:pic>
-    </p:spTree>
-  </p:cSld>
-  <p:clrMapOvr>
-    <a:masterClrMapping/>
-  </p:clrMapOvr>
-</p:sld>
-</file>
-
 <file path=ppt/slides/slide28.xml><?xml version="1.0" encoding="utf-8"?>
 <p:sld xmlns:a="http://schemas.openxmlformats.org/drawingml/2006/main" xmlns:p="http://schemas.openxmlformats.org/presentationml/2006/main" xmlns:r="http://schemas.openxmlformats.org/officeDocument/2006/relationships">
   <p:cSld>
@@ -7341,7 +7463,7 @@
           <a:lstStyle/>
           <a:p>
             <a:r>
-              <a:t>Result · inv_chain</a:t>
+              <a:t>Result · ex2</a:t>
             </a:r>
           </a:p>
         </p:txBody>
@@ -7377,7 +7499,7 @@
             </a:r>
             <a:r>
               <a:rPr sz="1800" b="1"/>
-              <a:t>104 ps</a:t>
+              <a:t>810 ps</a:t>
             </a:r>
             <a:r>
               <a:rPr sz="1800"/>
@@ -7396,14 +7518,14 @@
                   <a:srgbClr val="2B7A43"/>
                 </a:solidFill>
               </a:rPr>
-              <a:t>Native IBIS runs +87 % at the deepest and +7 % at the mildest. Track 1 holds −4, +5, −1 % across the ladder.</a:t>
+              <a:t>Native IBIS collapses from +71 % to +1 % as the pulse lengthens. Track 1 holds −2, −7, −7 % — flat, and slightly shallow away from the rung it was calibrated on.</a:t>
             </a:r>
           </a:p>
         </p:txBody>
       </p:sp>
       <p:pic>
         <p:nvPicPr>
-          <p:cNvPr id="4" name="Picture 3" descr="result_inv_chain.png"/>
+          <p:cNvPr id="4" name="Picture 3" descr="result_ex2.png"/>
           <p:cNvPicPr>
             <a:picLocks noChangeAspect="1"/>
           </p:cNvPicPr>
@@ -7459,7 +7581,7 @@
           <a:lstStyle/>
           <a:p>
             <a:r>
-              <a:t>Result · io_buf</a:t>
+              <a:t>Result · inv_chain</a:t>
             </a:r>
           </a:p>
         </p:txBody>
@@ -7495,7 +7617,7 @@
             </a:r>
             <a:r>
               <a:rPr sz="1800" b="1"/>
-              <a:t>1505 ps</a:t>
+              <a:t>104 ps</a:t>
             </a:r>
             <a:r>
               <a:rPr sz="1800"/>
@@ -7514,14 +7636,14 @@
                   <a:srgbClr val="2B7A43"/>
                 </a:solidFill>
               </a:rPr>
-              <a:t>io_buf's ladder is shallower — 37 % is as deep as its pulse goes, and native is only −20 % there. Track 1 is +2, +7, +5 %.</a:t>
+              <a:t>Native IBIS runs +87 % at the deepest and +7 % at the mildest. Track 1 holds −4, +5, −1 % across the ladder.</a:t>
             </a:r>
           </a:p>
         </p:txBody>
       </p:sp>
       <p:pic>
         <p:nvPicPr>
-          <p:cNvPr id="4" name="Picture 3" descr="result_io_buf.png"/>
+          <p:cNvPr id="4" name="Picture 3" descr="result_inv_chain.png"/>
           <p:cNvPicPr>
             <a:picLocks noChangeAspect="1"/>
           </p:cNvPicPr>
@@ -7691,6 +7813,124 @@
           <a:lstStyle/>
           <a:p>
             <a:r>
+              <a:t>Result · io_buf</a:t>
+            </a:r>
+          </a:p>
+        </p:txBody>
+      </p:sp>
+      <p:sp>
+        <p:nvSpPr>
+          <p:cNvPr id="3" name="Content Placeholder 2"/>
+          <p:cNvSpPr>
+            <a:spLocks noGrp="1"/>
+          </p:cNvSpPr>
+          <p:nvPr>
+            <p:ph idx="10"/>
+          </p:nvPr>
+        </p:nvSpPr>
+        <p:spPr>
+          <a:xfrm>
+            <a:off x="411480" y="987552"/>
+            <a:ext cx="11384280" cy="1517904"/>
+          </a:xfrm>
+        </p:spPr>
+        <p:txBody>
+          <a:bodyPr/>
+          <a:lstStyle/>
+          <a:p>
+            <a:pPr latinLnBrk="0">
+              <a:spcAft>
+                <a:spcPts val="400"/>
+              </a:spcAft>
+            </a:pPr>
+            <a:r>
+              <a:rPr sz="1800"/>
+              <a:t>Transistor in black, HSPICE native IBIS dotted, track 1 in teal. Only the </a:t>
+            </a:r>
+            <a:r>
+              <a:rPr sz="1800" b="1"/>
+              <a:t>1505 ps</a:t>
+            </a:r>
+            <a:r>
+              <a:rPr sz="1800"/>
+              <a:t> rung was measured; the other two are predictions.</a:t>
+            </a:r>
+          </a:p>
+          <a:p>
+            <a:pPr latinLnBrk="0">
+              <a:spcAft>
+                <a:spcPts val="400"/>
+              </a:spcAft>
+            </a:pPr>
+            <a:r>
+              <a:rPr sz="1800" b="1">
+                <a:solidFill>
+                  <a:srgbClr val="2B7A43"/>
+                </a:solidFill>
+              </a:rPr>
+              <a:t>io_buf's ladder is shallower — 37 % is as deep as its pulse goes, and native is only −20 % there. Track 1 is +2, +7, +5 %.</a:t>
+            </a:r>
+          </a:p>
+        </p:txBody>
+      </p:sp>
+      <p:pic>
+        <p:nvPicPr>
+          <p:cNvPr id="4" name="Picture 3" descr="result_io_buf.png"/>
+          <p:cNvPicPr>
+            <a:picLocks noChangeAspect="1"/>
+          </p:cNvPicPr>
+          <p:nvPr/>
+        </p:nvPicPr>
+        <p:blipFill>
+          <a:blip r:embed="rId2"/>
+          <a:stretch>
+            <a:fillRect/>
+          </a:stretch>
+        </p:blipFill>
+        <p:spPr>
+          <a:xfrm>
+            <a:off x="411480" y="2578608"/>
+            <a:ext cx="11384280" cy="3892601"/>
+          </a:xfrm>
+          <a:prstGeom prst="rect">
+            <a:avLst/>
+          </a:prstGeom>
+        </p:spPr>
+      </p:pic>
+    </p:spTree>
+  </p:cSld>
+  <p:clrMapOvr>
+    <a:masterClrMapping/>
+  </p:clrMapOvr>
+</p:sld>
+</file>
+
+<file path=ppt/slides/slide31.xml><?xml version="1.0" encoding="utf-8"?>
+<p:sld xmlns:a="http://schemas.openxmlformats.org/drawingml/2006/main" xmlns:p="http://schemas.openxmlformats.org/presentationml/2006/main" xmlns:r="http://schemas.openxmlformats.org/officeDocument/2006/relationships">
+  <p:cSld>
+    <p:spTree>
+      <p:nvGrpSpPr>
+        <p:cNvPr id="1" name=""/>
+        <p:cNvGrpSpPr/>
+        <p:nvPr/>
+      </p:nvGrpSpPr>
+      <p:grpSpPr/>
+      <p:sp>
+        <p:nvSpPr>
+          <p:cNvPr id="2" name="Title 1"/>
+          <p:cNvSpPr>
+            <a:spLocks noGrp="1"/>
+          </p:cNvSpPr>
+          <p:nvPr>
+            <p:ph type="title"/>
+          </p:nvPr>
+        </p:nvSpPr>
+        <p:spPr/>
+        <p:txBody>
+          <a:bodyPr/>
+          <a:lstStyle/>
+          <a:p>
+            <a:r>
               <a:t>Result · every buffer, worst of its stressed widths</a:t>
             </a:r>
           </a:p>
@@ -7802,7 +8042,7 @@
 </p:sld>
 </file>
 
-<file path=ppt/slides/slide31.xml><?xml version="1.0" encoding="utf-8"?>
+<file path=ppt/slides/slide32.xml><?xml version="1.0" encoding="utf-8"?>
 <p:sld xmlns:a="http://schemas.openxmlformats.org/drawingml/2006/main" xmlns:p="http://schemas.openxmlformats.org/presentationml/2006/main" xmlns:r="http://schemas.openxmlformats.org/officeDocument/2006/relationships">
   <p:cSld>
     <p:spTree>
@@ -7950,7 +8190,7 @@
 </p:sld>
 </file>
 
-<file path=ppt/slides/slide32.xml><?xml version="1.0" encoding="utf-8"?>
+<file path=ppt/slides/slide33.xml><?xml version="1.0" encoding="utf-8"?>
 <p:sld xmlns:a="http://schemas.openxmlformats.org/drawingml/2006/main" xmlns:p="http://schemas.openxmlformats.org/presentationml/2006/main" xmlns:r="http://schemas.openxmlformats.org/officeDocument/2006/relationships">
   <p:cSld>
     <p:spTree>
@@ -8064,7 +8304,7 @@
 </p:sld>
 </file>
 
-<file path=ppt/slides/slide33.xml><?xml version="1.0" encoding="utf-8"?>
+<file path=ppt/slides/slide34.xml><?xml version="1.0" encoding="utf-8"?>
 <p:sld xmlns:a="http://schemas.openxmlformats.org/drawingml/2006/main" xmlns:p="http://schemas.openxmlformats.org/presentationml/2006/main" xmlns:r="http://schemas.openxmlformats.org/officeDocument/2006/relationships">
   <p:cSld>
     <p:spTree>
@@ -8174,7 +8414,7 @@
 </p:sld>
 </file>
 
-<file path=ppt/slides/slide34.xml><?xml version="1.0" encoding="utf-8"?>
+<file path=ppt/slides/slide35.xml><?xml version="1.0" encoding="utf-8"?>
 <p:sld xmlns:a="http://schemas.openxmlformats.org/drawingml/2006/main" xmlns:p="http://schemas.openxmlformats.org/presentationml/2006/main" xmlns:r="http://schemas.openxmlformats.org/officeDocument/2006/relationships">
   <p:cSld>
     <p:spTree>
